--- a/TIM Pluo/Slide_Pluo.pptx
+++ b/TIM Pluo/Slide_Pluo.pptx
@@ -9,14 +9,14 @@
   </p:notesMasterIdLst>
   <p:sldIdLst>
     <p:sldId id="256" r:id="rId2"/>
-    <p:sldId id="268" r:id="rId3"/>
-    <p:sldId id="266" r:id="rId4"/>
-    <p:sldId id="258" r:id="rId5"/>
-    <p:sldId id="269" r:id="rId6"/>
-    <p:sldId id="265" r:id="rId7"/>
-    <p:sldId id="259" r:id="rId8"/>
-    <p:sldId id="260" r:id="rId9"/>
-    <p:sldId id="261" r:id="rId10"/>
+    <p:sldId id="266" r:id="rId3"/>
+    <p:sldId id="258" r:id="rId4"/>
+    <p:sldId id="269" r:id="rId5"/>
+    <p:sldId id="261" r:id="rId6"/>
+    <p:sldId id="260" r:id="rId7"/>
+    <p:sldId id="273" r:id="rId8"/>
+    <p:sldId id="259" r:id="rId9"/>
+    <p:sldId id="272" r:id="rId10"/>
     <p:sldId id="262" r:id="rId11"/>
     <p:sldId id="263" r:id="rId12"/>
     <p:sldId id="270" r:id="rId13"/>
@@ -209,7 +209,7 @@
           <a:p>
             <a:fld id="{9B5082A6-11C5-4584-B4A7-5F6CB8C8BF42}" type="datetimeFigureOut">
               <a:rPr lang="es-AR" smtClean="0"/>
-              <a:t>19/2/2026</a:t>
+              <a:t>24/2/2026</a:t>
             </a:fld>
             <a:endParaRPr lang="es-AR"/>
           </a:p>
@@ -485,7 +485,7 @@
         <p:cNvPr id="1" name="">
           <a:extLst>
             <a:ext uri="{FF2B5EF4-FFF2-40B4-BE49-F238E27FC236}">
-              <a16:creationId xmlns:a16="http://schemas.microsoft.com/office/drawing/2014/main" id="{18B4715F-FF60-9461-BCF3-B7FE676DA6E0}"/>
+              <a16:creationId xmlns:a16="http://schemas.microsoft.com/office/drawing/2014/main" id="{9D6BAE0E-C3E6-9E68-147C-600D72805C95}"/>
             </a:ext>
           </a:extLst>
         </p:cNvPr>
@@ -505,7 +505,7 @@
           <p:cNvPr id="2" name="Espace réservé de l'image des diapositives 1">
             <a:extLst>
               <a:ext uri="{FF2B5EF4-FFF2-40B4-BE49-F238E27FC236}">
-                <a16:creationId xmlns:a16="http://schemas.microsoft.com/office/drawing/2014/main" id="{C9B6AAE3-50D5-580C-FE9B-9CAC18EBACED}"/>
+                <a16:creationId xmlns:a16="http://schemas.microsoft.com/office/drawing/2014/main" id="{C4AB8FF4-C5F2-0EC6-59AC-043232F1F777}"/>
               </a:ext>
             </a:extLst>
           </p:cNvPr>
@@ -523,7 +523,7 @@
           <p:cNvPr id="3" name="Espace réservé des notes 2">
             <a:extLst>
               <a:ext uri="{FF2B5EF4-FFF2-40B4-BE49-F238E27FC236}">
-                <a16:creationId xmlns:a16="http://schemas.microsoft.com/office/drawing/2014/main" id="{4DC2026F-9D1A-2B95-C25F-37E4FD9B52D9}"/>
+                <a16:creationId xmlns:a16="http://schemas.microsoft.com/office/drawing/2014/main" id="{45D8528F-6B16-9E1A-EC9D-DFD91ED7B88C}"/>
               </a:ext>
             </a:extLst>
           </p:cNvPr>
@@ -558,143 +558,9 @@
             </a:pPr>
             <a:r>
               <a:rPr lang="fr-FR" dirty="0"/>
-              <a:t>Secteur d’activité: la création et  l’aménagement </a:t>
-            </a:r>
-            <a:r>
-              <a:rPr lang="fr-FR" dirty="0" err="1"/>
-              <a:t>despace</a:t>
-            </a:r>
-            <a:r>
-              <a:rPr lang="fr-FR" dirty="0"/>
-              <a:t> </a:t>
-            </a:r>
-          </a:p>
-          <a:p>
-            <a:r>
-              <a:rPr lang="fr-FR" dirty="0"/>
-              <a:t> les stands de présentation de salon, la rénovation de pharmacie, musé </a:t>
-            </a:r>
-            <a:r>
-              <a:rPr lang="fr-FR" dirty="0" err="1"/>
-              <a:t>ect</a:t>
-            </a:r>
-            <a:r>
-              <a:rPr lang="fr-FR" dirty="0"/>
-              <a:t> …</a:t>
-            </a:r>
-          </a:p>
-          <a:p>
-            <a:r>
-              <a:rPr lang="fr-FR" dirty="0"/>
-              <a:t>Besoin spécifique  pour l’assistance de devis, expliqué le contexte </a:t>
-            </a:r>
-            <a:endParaRPr lang="es-AR" dirty="0"/>
-          </a:p>
-        </p:txBody>
-      </p:sp>
-      <p:sp>
-        <p:nvSpPr>
-          <p:cNvPr id="4" name="Espace réservé du numéro de diapositive 3">
-            <a:extLst>
-              <a:ext uri="{FF2B5EF4-FFF2-40B4-BE49-F238E27FC236}">
-                <a16:creationId xmlns:a16="http://schemas.microsoft.com/office/drawing/2014/main" id="{21B345B8-DBD4-ECE5-FE3D-EE1CCE03B7BE}"/>
-              </a:ext>
-            </a:extLst>
-          </p:cNvPr>
-          <p:cNvSpPr>
-            <a:spLocks noGrp="1"/>
-          </p:cNvSpPr>
-          <p:nvPr>
-            <p:ph type="sldNum" sz="quarter" idx="5"/>
-          </p:nvPr>
-        </p:nvSpPr>
-        <p:spPr/>
-        <p:txBody>
-          <a:bodyPr/>
-          <a:lstStyle/>
-          <a:p>
-            <a:fld id="{CED0BE1B-9CB8-454F-BD68-366FF85AEE84}" type="slidenum">
-              <a:rPr lang="es-AR" smtClean="0"/>
-              <a:t>2</a:t>
-            </a:fld>
-            <a:endParaRPr lang="es-AR"/>
-          </a:p>
-        </p:txBody>
-      </p:sp>
-    </p:spTree>
-    <p:extLst>
-      <p:ext uri="{BB962C8B-B14F-4D97-AF65-F5344CB8AC3E}">
-        <p14:creationId xmlns:p14="http://schemas.microsoft.com/office/powerpoint/2010/main" val="2187762408"/>
-      </p:ext>
-    </p:extLst>
-  </p:cSld>
-  <p:clrMapOvr>
-    <a:masterClrMapping/>
-  </p:clrMapOvr>
-</p:notes>
-</file>
-
-<file path=ppt/notesSlides/notesSlide2.xml><?xml version="1.0" encoding="utf-8"?>
-<p:notes xmlns:a="http://schemas.openxmlformats.org/drawingml/2006/main" xmlns:r="http://schemas.openxmlformats.org/officeDocument/2006/relationships" xmlns:p="http://schemas.openxmlformats.org/presentationml/2006/main">
-  <p:cSld>
-    <p:spTree>
-      <p:nvGrpSpPr>
-        <p:cNvPr id="1" name="">
-          <a:extLst>
-            <a:ext uri="{FF2B5EF4-FFF2-40B4-BE49-F238E27FC236}">
-              <a16:creationId xmlns:a16="http://schemas.microsoft.com/office/drawing/2014/main" id="{9D6BAE0E-C3E6-9E68-147C-600D72805C95}"/>
-            </a:ext>
-          </a:extLst>
-        </p:cNvPr>
-        <p:cNvGrpSpPr/>
-        <p:nvPr/>
-      </p:nvGrpSpPr>
-      <p:grpSpPr>
-        <a:xfrm>
-          <a:off x="0" y="0"/>
-          <a:ext cx="0" cy="0"/>
-          <a:chOff x="0" y="0"/>
-          <a:chExt cx="0" cy="0"/>
-        </a:xfrm>
-      </p:grpSpPr>
-      <p:sp>
-        <p:nvSpPr>
-          <p:cNvPr id="2" name="Espace réservé de l'image des diapositives 1">
-            <a:extLst>
-              <a:ext uri="{FF2B5EF4-FFF2-40B4-BE49-F238E27FC236}">
-                <a16:creationId xmlns:a16="http://schemas.microsoft.com/office/drawing/2014/main" id="{C4AB8FF4-C5F2-0EC6-59AC-043232F1F777}"/>
-              </a:ext>
-            </a:extLst>
-          </p:cNvPr>
-          <p:cNvSpPr>
-            <a:spLocks noGrp="1" noRot="1" noChangeAspect="1"/>
-          </p:cNvSpPr>
-          <p:nvPr>
-            <p:ph type="sldImg"/>
-          </p:nvPr>
-        </p:nvSpPr>
-        <p:spPr/>
-      </p:sp>
-      <p:sp>
-        <p:nvSpPr>
-          <p:cNvPr id="3" name="Espace réservé des notes 2">
-            <a:extLst>
-              <a:ext uri="{FF2B5EF4-FFF2-40B4-BE49-F238E27FC236}">
-                <a16:creationId xmlns:a16="http://schemas.microsoft.com/office/drawing/2014/main" id="{45D8528F-6B16-9E1A-EC9D-DFD91ED7B88C}"/>
-              </a:ext>
-            </a:extLst>
-          </p:cNvPr>
-          <p:cNvSpPr>
-            <a:spLocks noGrp="1"/>
-          </p:cNvSpPr>
-          <p:nvPr>
-            <p:ph type="body" idx="1"/>
-          </p:nvPr>
-        </p:nvSpPr>
-        <p:spPr/>
-        <p:txBody>
-          <a:bodyPr/>
-          <a:lstStyle/>
+              <a:t>Accompagner la transition vers le numérique les PME</a:t>
+            </a:r>
+          </a:p>
           <a:p>
             <a:pPr marL="0" marR="0" lvl="0" indent="0" algn="l" defTabSz="914400" rtl="0" eaLnBrk="1" fontAlgn="auto" latinLnBrk="0" hangingPunct="1">
               <a:lnSpc>
@@ -715,97 +581,9 @@
             </a:pPr>
             <a:r>
               <a:rPr lang="fr-FR" dirty="0"/>
-              <a:t>Accompagner la transition vers le numérique les PME</a:t>
-            </a:r>
-            <a:endParaRPr lang="es-AR" dirty="0"/>
-          </a:p>
-        </p:txBody>
-      </p:sp>
-      <p:sp>
-        <p:nvSpPr>
-          <p:cNvPr id="4" name="Espace réservé du numéro de diapositive 3">
-            <a:extLst>
-              <a:ext uri="{FF2B5EF4-FFF2-40B4-BE49-F238E27FC236}">
-                <a16:creationId xmlns:a16="http://schemas.microsoft.com/office/drawing/2014/main" id="{3A350515-4FF4-7722-5024-1D98EC8011EE}"/>
-              </a:ext>
-            </a:extLst>
-          </p:cNvPr>
-          <p:cNvSpPr>
-            <a:spLocks noGrp="1"/>
-          </p:cNvSpPr>
-          <p:nvPr>
-            <p:ph type="sldNum" sz="quarter" idx="5"/>
-          </p:nvPr>
-        </p:nvSpPr>
-        <p:spPr/>
-        <p:txBody>
-          <a:bodyPr/>
-          <a:lstStyle/>
-          <a:p>
-            <a:fld id="{CED0BE1B-9CB8-454F-BD68-366FF85AEE84}" type="slidenum">
-              <a:rPr lang="es-AR" smtClean="0"/>
-              <a:t>3</a:t>
-            </a:fld>
-            <a:endParaRPr lang="es-AR"/>
-          </a:p>
-        </p:txBody>
-      </p:sp>
-    </p:spTree>
-    <p:extLst>
-      <p:ext uri="{BB962C8B-B14F-4D97-AF65-F5344CB8AC3E}">
-        <p14:creationId xmlns:p14="http://schemas.microsoft.com/office/powerpoint/2010/main" val="3317397852"/>
-      </p:ext>
-    </p:extLst>
-  </p:cSld>
-  <p:clrMapOvr>
-    <a:masterClrMapping/>
-  </p:clrMapOvr>
-</p:notes>
-</file>
-
-<file path=ppt/notesSlides/notesSlide3.xml><?xml version="1.0" encoding="utf-8"?>
-<p:notes xmlns:a="http://schemas.openxmlformats.org/drawingml/2006/main" xmlns:r="http://schemas.openxmlformats.org/officeDocument/2006/relationships" xmlns:p="http://schemas.openxmlformats.org/presentationml/2006/main">
-  <p:cSld>
-    <p:spTree>
-      <p:nvGrpSpPr>
-        <p:cNvPr id="1" name=""/>
-        <p:cNvGrpSpPr/>
-        <p:nvPr/>
-      </p:nvGrpSpPr>
-      <p:grpSpPr>
-        <a:xfrm>
-          <a:off x="0" y="0"/>
-          <a:ext cx="0" cy="0"/>
-          <a:chOff x="0" y="0"/>
-          <a:chExt cx="0" cy="0"/>
-        </a:xfrm>
-      </p:grpSpPr>
-      <p:sp>
-        <p:nvSpPr>
-          <p:cNvPr id="2" name="Espace réservé de l'image des diapositives 1"/>
-          <p:cNvSpPr>
-            <a:spLocks noGrp="1" noRot="1" noChangeAspect="1"/>
-          </p:cNvSpPr>
-          <p:nvPr>
-            <p:ph type="sldImg"/>
-          </p:nvPr>
-        </p:nvSpPr>
-        <p:spPr/>
-      </p:sp>
-      <p:sp>
-        <p:nvSpPr>
-          <p:cNvPr id="3" name="Espace réservé des notes 2"/>
-          <p:cNvSpPr>
-            <a:spLocks noGrp="1"/>
-          </p:cNvSpPr>
-          <p:nvPr>
-            <p:ph type="body" idx="1"/>
-          </p:nvPr>
-        </p:nvSpPr>
-        <p:spPr/>
-        <p:txBody>
-          <a:bodyPr/>
-          <a:lstStyle/>
+              <a:t>2/3 jours </a:t>
+            </a:r>
+          </a:p>
           <a:p>
             <a:pPr marL="0" marR="0" lvl="0" indent="0" algn="l" defTabSz="914400" rtl="0" eaLnBrk="1" fontAlgn="auto" latinLnBrk="0" hangingPunct="1">
               <a:lnSpc>
@@ -826,7 +604,145 @@
             </a:pPr>
             <a:r>
               <a:rPr lang="fr-FR" dirty="0"/>
-              <a:t>Secteur d’activité: la création et  l’aménagement </a:t>
+              <a:t>Statues étudiant</a:t>
+            </a:r>
+          </a:p>
+          <a:p>
+            <a:pPr marL="0" marR="0" lvl="0" indent="0" algn="l" defTabSz="914400" rtl="0" eaLnBrk="1" fontAlgn="auto" latinLnBrk="0" hangingPunct="1">
+              <a:lnSpc>
+                <a:spcPct val="100000"/>
+              </a:lnSpc>
+              <a:spcBef>
+                <a:spcPts val="0"/>
+              </a:spcBef>
+              <a:spcAft>
+                <a:spcPts val="0"/>
+              </a:spcAft>
+              <a:buClrTx/>
+              <a:buSzTx/>
+              <a:buFontTx/>
+              <a:buNone/>
+              <a:tabLst/>
+              <a:defRPr/>
+            </a:pPr>
+            <a:endParaRPr lang="es-AR" dirty="0"/>
+          </a:p>
+        </p:txBody>
+      </p:sp>
+      <p:sp>
+        <p:nvSpPr>
+          <p:cNvPr id="4" name="Espace réservé du numéro de diapositive 3">
+            <a:extLst>
+              <a:ext uri="{FF2B5EF4-FFF2-40B4-BE49-F238E27FC236}">
+                <a16:creationId xmlns:a16="http://schemas.microsoft.com/office/drawing/2014/main" id="{3A350515-4FF4-7722-5024-1D98EC8011EE}"/>
+              </a:ext>
+            </a:extLst>
+          </p:cNvPr>
+          <p:cNvSpPr>
+            <a:spLocks noGrp="1"/>
+          </p:cNvSpPr>
+          <p:nvPr>
+            <p:ph type="sldNum" sz="quarter" idx="5"/>
+          </p:nvPr>
+        </p:nvSpPr>
+        <p:spPr/>
+        <p:txBody>
+          <a:bodyPr/>
+          <a:lstStyle/>
+          <a:p>
+            <a:fld id="{CED0BE1B-9CB8-454F-BD68-366FF85AEE84}" type="slidenum">
+              <a:rPr lang="es-AR" smtClean="0"/>
+              <a:t>2</a:t>
+            </a:fld>
+            <a:endParaRPr lang="es-AR"/>
+          </a:p>
+        </p:txBody>
+      </p:sp>
+    </p:spTree>
+    <p:extLst>
+      <p:ext uri="{BB962C8B-B14F-4D97-AF65-F5344CB8AC3E}">
+        <p14:creationId xmlns:p14="http://schemas.microsoft.com/office/powerpoint/2010/main" val="3317397852"/>
+      </p:ext>
+    </p:extLst>
+  </p:cSld>
+  <p:clrMapOvr>
+    <a:masterClrMapping/>
+  </p:clrMapOvr>
+</p:notes>
+</file>
+
+<file path=ppt/notesSlides/notesSlide2.xml><?xml version="1.0" encoding="utf-8"?>
+<p:notes xmlns:a="http://schemas.openxmlformats.org/drawingml/2006/main" xmlns:r="http://schemas.openxmlformats.org/officeDocument/2006/relationships" xmlns:p="http://schemas.openxmlformats.org/presentationml/2006/main">
+  <p:cSld>
+    <p:spTree>
+      <p:nvGrpSpPr>
+        <p:cNvPr id="1" name=""/>
+        <p:cNvGrpSpPr/>
+        <p:nvPr/>
+      </p:nvGrpSpPr>
+      <p:grpSpPr>
+        <a:xfrm>
+          <a:off x="0" y="0"/>
+          <a:ext cx="0" cy="0"/>
+          <a:chOff x="0" y="0"/>
+          <a:chExt cx="0" cy="0"/>
+        </a:xfrm>
+      </p:grpSpPr>
+      <p:sp>
+        <p:nvSpPr>
+          <p:cNvPr id="2" name="Espace réservé de l'image des diapositives 1"/>
+          <p:cNvSpPr>
+            <a:spLocks noGrp="1" noRot="1" noChangeAspect="1"/>
+          </p:cNvSpPr>
+          <p:nvPr>
+            <p:ph type="sldImg"/>
+          </p:nvPr>
+        </p:nvSpPr>
+        <p:spPr/>
+      </p:sp>
+      <p:sp>
+        <p:nvSpPr>
+          <p:cNvPr id="3" name="Espace réservé des notes 2"/>
+          <p:cNvSpPr>
+            <a:spLocks noGrp="1"/>
+          </p:cNvSpPr>
+          <p:nvPr>
+            <p:ph type="body" idx="1"/>
+          </p:nvPr>
+        </p:nvSpPr>
+        <p:spPr/>
+        <p:txBody>
+          <a:bodyPr/>
+          <a:lstStyle/>
+          <a:p>
+            <a:pPr marL="0" marR="0" lvl="0" indent="0" algn="l" defTabSz="914400" rtl="0" eaLnBrk="1" fontAlgn="auto" latinLnBrk="0" hangingPunct="1">
+              <a:lnSpc>
+                <a:spcPct val="100000"/>
+              </a:lnSpc>
+              <a:spcBef>
+                <a:spcPts val="0"/>
+              </a:spcBef>
+              <a:spcAft>
+                <a:spcPts val="0"/>
+              </a:spcAft>
+              <a:buClrTx/>
+              <a:buSzTx/>
+              <a:buFontTx/>
+              <a:buNone/>
+              <a:tabLst/>
+              <a:defRPr/>
+            </a:pPr>
+            <a:r>
+              <a:rPr lang="fr-FR" dirty="0"/>
+              <a:t>Le Secteur d’activité </a:t>
+            </a:r>
+            <a:r>
+              <a:rPr lang="fr-FR" dirty="0" err="1"/>
+              <a:t>princuipalement</a:t>
+            </a:r>
+            <a:r>
+              <a:rPr lang="fr-FR" dirty="0"/>
+              <a:t>  la création et  l’aménagement </a:t>
             </a:r>
             <a:r>
               <a:rPr lang="fr-FR" dirty="0" err="1"/>
@@ -877,7 +793,7 @@
           <a:p>
             <a:fld id="{CED0BE1B-9CB8-454F-BD68-366FF85AEE84}" type="slidenum">
               <a:rPr lang="es-AR" smtClean="0"/>
-              <a:t>4</a:t>
+              <a:t>3</a:t>
             </a:fld>
             <a:endParaRPr lang="es-AR"/>
           </a:p>
@@ -896,7 +812,7 @@
 </p:notes>
 </file>
 
-<file path=ppt/notesSlides/notesSlide4.xml><?xml version="1.0" encoding="utf-8"?>
+<file path=ppt/notesSlides/notesSlide3.xml><?xml version="1.0" encoding="utf-8"?>
 <p:notes xmlns:a="http://schemas.openxmlformats.org/drawingml/2006/main" xmlns:r="http://schemas.openxmlformats.org/officeDocument/2006/relationships" xmlns:p="http://schemas.openxmlformats.org/presentationml/2006/main">
   <p:cSld>
     <p:spTree>
@@ -976,50 +892,188 @@
               <a:defRPr/>
             </a:pPr>
             <a:r>
+              <a:rPr lang="es-AR" dirty="0" err="1"/>
+              <a:t>Fichier</a:t>
+            </a:r>
+            <a:r>
+              <a:rPr lang="es-AR" dirty="0"/>
+              <a:t> Exel qui </a:t>
+            </a:r>
+            <a:r>
+              <a:rPr lang="es-AR" dirty="0" err="1"/>
+              <a:t>est</a:t>
+            </a:r>
+            <a:r>
+              <a:rPr lang="es-AR" dirty="0"/>
+              <a:t>  la base de </a:t>
+            </a:r>
+            <a:r>
+              <a:rPr lang="es-AR" dirty="0" err="1"/>
+              <a:t>leurs</a:t>
+            </a:r>
+            <a:r>
+              <a:rPr lang="es-AR" dirty="0"/>
+              <a:t> </a:t>
+            </a:r>
+            <a:r>
+              <a:rPr lang="es-AR" dirty="0" err="1"/>
+              <a:t>devis</a:t>
+            </a:r>
+            <a:r>
+              <a:rPr lang="es-AR" dirty="0"/>
+              <a:t> </a:t>
+            </a:r>
+          </a:p>
+          <a:p>
+            <a:pPr marL="0" marR="0" lvl="0" indent="0" algn="l" defTabSz="914400" rtl="0" eaLnBrk="1" fontAlgn="auto" latinLnBrk="0" hangingPunct="1">
+              <a:lnSpc>
+                <a:spcPct val="100000"/>
+              </a:lnSpc>
+              <a:spcBef>
+                <a:spcPts val="0"/>
+              </a:spcBef>
+              <a:spcAft>
+                <a:spcPts val="0"/>
+              </a:spcAft>
+              <a:buClrTx/>
+              <a:buSzTx/>
+              <a:buFontTx/>
+              <a:buNone/>
+              <a:tabLst/>
+              <a:defRPr/>
+            </a:pPr>
+            <a:r>
+              <a:rPr lang="es-AR" dirty="0" err="1"/>
+              <a:t>Étroitement</a:t>
+            </a:r>
+            <a:r>
+              <a:rPr lang="es-AR" dirty="0"/>
+              <a:t> </a:t>
+            </a:r>
+            <a:r>
+              <a:rPr lang="es-AR" dirty="0" err="1"/>
+              <a:t>lier</a:t>
+            </a:r>
+            <a:r>
+              <a:rPr lang="es-AR" dirty="0"/>
+              <a:t> à  ODOO</a:t>
+            </a:r>
+          </a:p>
+        </p:txBody>
+      </p:sp>
+      <p:sp>
+        <p:nvSpPr>
+          <p:cNvPr id="4" name="Espace réservé du numéro de diapositive 3">
+            <a:extLst>
+              <a:ext uri="{FF2B5EF4-FFF2-40B4-BE49-F238E27FC236}">
+                <a16:creationId xmlns:a16="http://schemas.microsoft.com/office/drawing/2014/main" id="{5F7BA35C-9DA5-93F3-6C1B-1FA1F85B48F8}"/>
+              </a:ext>
+            </a:extLst>
+          </p:cNvPr>
+          <p:cNvSpPr>
+            <a:spLocks noGrp="1"/>
+          </p:cNvSpPr>
+          <p:nvPr>
+            <p:ph type="sldNum" sz="quarter" idx="5"/>
+          </p:nvPr>
+        </p:nvSpPr>
+        <p:spPr/>
+        <p:txBody>
+          <a:bodyPr/>
+          <a:lstStyle/>
+          <a:p>
+            <a:fld id="{CED0BE1B-9CB8-454F-BD68-366FF85AEE84}" type="slidenum">
+              <a:rPr lang="es-AR" smtClean="0"/>
+              <a:t>4</a:t>
+            </a:fld>
+            <a:endParaRPr lang="es-AR"/>
+          </a:p>
+        </p:txBody>
+      </p:sp>
+    </p:spTree>
+    <p:extLst>
+      <p:ext uri="{BB962C8B-B14F-4D97-AF65-F5344CB8AC3E}">
+        <p14:creationId xmlns:p14="http://schemas.microsoft.com/office/powerpoint/2010/main" val="3610777524"/>
+      </p:ext>
+    </p:extLst>
+  </p:cSld>
+  <p:clrMapOvr>
+    <a:masterClrMapping/>
+  </p:clrMapOvr>
+</p:notes>
+</file>
+
+<file path=ppt/notesSlides/notesSlide4.xml><?xml version="1.0" encoding="utf-8"?>
+<p:notes xmlns:a="http://schemas.openxmlformats.org/drawingml/2006/main" xmlns:r="http://schemas.openxmlformats.org/officeDocument/2006/relationships" xmlns:p="http://schemas.openxmlformats.org/presentationml/2006/main">
+  <p:cSld>
+    <p:spTree>
+      <p:nvGrpSpPr>
+        <p:cNvPr id="1" name=""/>
+        <p:cNvGrpSpPr/>
+        <p:nvPr/>
+      </p:nvGrpSpPr>
+      <p:grpSpPr>
+        <a:xfrm>
+          <a:off x="0" y="0"/>
+          <a:ext cx="0" cy="0"/>
+          <a:chOff x="0" y="0"/>
+          <a:chExt cx="0" cy="0"/>
+        </a:xfrm>
+      </p:grpSpPr>
+      <p:sp>
+        <p:nvSpPr>
+          <p:cNvPr id="2" name="Espace réservé de l'image des diapositives 1"/>
+          <p:cNvSpPr>
+            <a:spLocks noGrp="1" noRot="1" noChangeAspect="1"/>
+          </p:cNvSpPr>
+          <p:nvPr>
+            <p:ph type="sldImg"/>
+          </p:nvPr>
+        </p:nvSpPr>
+        <p:spPr/>
+      </p:sp>
+      <p:sp>
+        <p:nvSpPr>
+          <p:cNvPr id="3" name="Espace réservé des notes 2"/>
+          <p:cNvSpPr>
+            <a:spLocks noGrp="1"/>
+          </p:cNvSpPr>
+          <p:nvPr>
+            <p:ph type="body" idx="1"/>
+          </p:nvPr>
+        </p:nvSpPr>
+        <p:spPr/>
+        <p:txBody>
+          <a:bodyPr/>
+          <a:lstStyle/>
+          <a:p>
+            <a:r>
               <a:rPr lang="fr-FR" dirty="0"/>
-              <a:t>Secteur d’activité: la création et  l’aménagement </a:t>
+              <a:t>Gratuit </a:t>
+            </a:r>
+          </a:p>
+          <a:p>
+            <a:r>
+              <a:rPr lang="fr-FR" dirty="0"/>
+              <a:t>restriction journalière</a:t>
+            </a:r>
+          </a:p>
+          <a:p>
+            <a:r>
+              <a:rPr lang="fr-FR" dirty="0"/>
+              <a:t>mais première impulsion cadre </a:t>
             </a:r>
             <a:r>
               <a:rPr lang="fr-FR" dirty="0" err="1"/>
-              <a:t>despace</a:t>
-            </a:r>
-            <a:r>
-              <a:rPr lang="fr-FR" dirty="0"/>
-              <a:t> </a:t>
-            </a:r>
-          </a:p>
-          <a:p>
-            <a:r>
-              <a:rPr lang="fr-FR" dirty="0"/>
-              <a:t> les stands de présentation de salon, la rénovation de pharmacie, musé </a:t>
-            </a:r>
-            <a:r>
-              <a:rPr lang="fr-FR" dirty="0" err="1"/>
-              <a:t>ect</a:t>
-            </a:r>
-            <a:r>
-              <a:rPr lang="fr-FR" dirty="0"/>
-              <a:t> …</a:t>
-            </a:r>
-          </a:p>
-          <a:p>
-            <a:r>
-              <a:rPr lang="fr-FR" dirty="0"/>
-              <a:t>Besoin spécifique  pour l’assistance de devis, expliqué le contexte </a:t>
-            </a:r>
-            <a:endParaRPr lang="es-AR" dirty="0"/>
-          </a:p>
-        </p:txBody>
-      </p:sp>
-      <p:sp>
-        <p:nvSpPr>
-          <p:cNvPr id="4" name="Espace réservé du numéro de diapositive 3">
-            <a:extLst>
-              <a:ext uri="{FF2B5EF4-FFF2-40B4-BE49-F238E27FC236}">
-                <a16:creationId xmlns:a16="http://schemas.microsoft.com/office/drawing/2014/main" id="{5F7BA35C-9DA5-93F3-6C1B-1FA1F85B48F8}"/>
-              </a:ext>
-            </a:extLst>
-          </p:cNvPr>
+              <a:t>Walhub</a:t>
+            </a:r>
+            <a:endParaRPr lang="fr-FR" dirty="0"/>
+          </a:p>
+        </p:txBody>
+      </p:sp>
+      <p:sp>
+        <p:nvSpPr>
+          <p:cNvPr id="4" name="Espace réservé du numéro de diapositive 3"/>
           <p:cNvSpPr>
             <a:spLocks noGrp="1"/>
           </p:cNvSpPr>
@@ -1043,7 +1097,556 @@
     </p:spTree>
     <p:extLst>
       <p:ext uri="{BB962C8B-B14F-4D97-AF65-F5344CB8AC3E}">
-        <p14:creationId xmlns:p14="http://schemas.microsoft.com/office/powerpoint/2010/main" val="3610777524"/>
+        <p14:creationId xmlns:p14="http://schemas.microsoft.com/office/powerpoint/2010/main" val="740786588"/>
+      </p:ext>
+    </p:extLst>
+  </p:cSld>
+  <p:clrMapOvr>
+    <a:masterClrMapping/>
+  </p:clrMapOvr>
+</p:notes>
+</file>
+
+<file path=ppt/notesSlides/notesSlide5.xml><?xml version="1.0" encoding="utf-8"?>
+<p:notes xmlns:a="http://schemas.openxmlformats.org/drawingml/2006/main" xmlns:r="http://schemas.openxmlformats.org/officeDocument/2006/relationships" xmlns:p="http://schemas.openxmlformats.org/presentationml/2006/main">
+  <p:cSld>
+    <p:spTree>
+      <p:nvGrpSpPr>
+        <p:cNvPr id="1" name=""/>
+        <p:cNvGrpSpPr/>
+        <p:nvPr/>
+      </p:nvGrpSpPr>
+      <p:grpSpPr>
+        <a:xfrm>
+          <a:off x="0" y="0"/>
+          <a:ext cx="0" cy="0"/>
+          <a:chOff x="0" y="0"/>
+          <a:chExt cx="0" cy="0"/>
+        </a:xfrm>
+      </p:grpSpPr>
+      <p:sp>
+        <p:nvSpPr>
+          <p:cNvPr id="2" name="Espace réservé de l'image des diapositives 1"/>
+          <p:cNvSpPr>
+            <a:spLocks noGrp="1" noRot="1" noChangeAspect="1"/>
+          </p:cNvSpPr>
+          <p:nvPr>
+            <p:ph type="sldImg"/>
+          </p:nvPr>
+        </p:nvSpPr>
+        <p:spPr/>
+      </p:sp>
+      <p:sp>
+        <p:nvSpPr>
+          <p:cNvPr id="3" name="Espace réservé des notes 2"/>
+          <p:cNvSpPr>
+            <a:spLocks noGrp="1"/>
+          </p:cNvSpPr>
+          <p:nvPr>
+            <p:ph type="body" idx="1"/>
+          </p:nvPr>
+        </p:nvSpPr>
+        <p:spPr/>
+        <p:txBody>
+          <a:bodyPr/>
+          <a:lstStyle/>
+          <a:p>
+            <a:endParaRPr lang="fr-FR" dirty="0"/>
+          </a:p>
+        </p:txBody>
+      </p:sp>
+      <p:sp>
+        <p:nvSpPr>
+          <p:cNvPr id="4" name="Espace réservé du numéro de diapositive 3"/>
+          <p:cNvSpPr>
+            <a:spLocks noGrp="1"/>
+          </p:cNvSpPr>
+          <p:nvPr>
+            <p:ph type="sldNum" sz="quarter" idx="5"/>
+          </p:nvPr>
+        </p:nvSpPr>
+        <p:spPr/>
+        <p:txBody>
+          <a:bodyPr/>
+          <a:lstStyle/>
+          <a:p>
+            <a:fld id="{CED0BE1B-9CB8-454F-BD68-366FF85AEE84}" type="slidenum">
+              <a:rPr lang="es-AR" smtClean="0"/>
+              <a:t>6</a:t>
+            </a:fld>
+            <a:endParaRPr lang="es-AR"/>
+          </a:p>
+        </p:txBody>
+      </p:sp>
+    </p:spTree>
+    <p:extLst>
+      <p:ext uri="{BB962C8B-B14F-4D97-AF65-F5344CB8AC3E}">
+        <p14:creationId xmlns:p14="http://schemas.microsoft.com/office/powerpoint/2010/main" val="2285810663"/>
+      </p:ext>
+    </p:extLst>
+  </p:cSld>
+  <p:clrMapOvr>
+    <a:masterClrMapping/>
+  </p:clrMapOvr>
+</p:notes>
+</file>
+
+<file path=ppt/notesSlides/notesSlide6.xml><?xml version="1.0" encoding="utf-8"?>
+<p:notes xmlns:a="http://schemas.openxmlformats.org/drawingml/2006/main" xmlns:r="http://schemas.openxmlformats.org/officeDocument/2006/relationships" xmlns:p="http://schemas.openxmlformats.org/presentationml/2006/main">
+  <p:cSld>
+    <p:spTree>
+      <p:nvGrpSpPr>
+        <p:cNvPr id="1" name="">
+          <a:extLst>
+            <a:ext uri="{FF2B5EF4-FFF2-40B4-BE49-F238E27FC236}">
+              <a16:creationId xmlns:a16="http://schemas.microsoft.com/office/drawing/2014/main" id="{C15740F1-4164-781E-1209-A2D75EE997E9}"/>
+            </a:ext>
+          </a:extLst>
+        </p:cNvPr>
+        <p:cNvGrpSpPr/>
+        <p:nvPr/>
+      </p:nvGrpSpPr>
+      <p:grpSpPr>
+        <a:xfrm>
+          <a:off x="0" y="0"/>
+          <a:ext cx="0" cy="0"/>
+          <a:chOff x="0" y="0"/>
+          <a:chExt cx="0" cy="0"/>
+        </a:xfrm>
+      </p:grpSpPr>
+      <p:sp>
+        <p:nvSpPr>
+          <p:cNvPr id="2" name="Espace réservé de l'image des diapositives 1">
+            <a:extLst>
+              <a:ext uri="{FF2B5EF4-FFF2-40B4-BE49-F238E27FC236}">
+                <a16:creationId xmlns:a16="http://schemas.microsoft.com/office/drawing/2014/main" id="{C18EE7B5-2BA3-6B6D-7FF2-F89F7FDB618D}"/>
+              </a:ext>
+            </a:extLst>
+          </p:cNvPr>
+          <p:cNvSpPr>
+            <a:spLocks noGrp="1" noRot="1" noChangeAspect="1"/>
+          </p:cNvSpPr>
+          <p:nvPr>
+            <p:ph type="sldImg"/>
+          </p:nvPr>
+        </p:nvSpPr>
+        <p:spPr/>
+      </p:sp>
+      <p:sp>
+        <p:nvSpPr>
+          <p:cNvPr id="3" name="Espace réservé des notes 2">
+            <a:extLst>
+              <a:ext uri="{FF2B5EF4-FFF2-40B4-BE49-F238E27FC236}">
+                <a16:creationId xmlns:a16="http://schemas.microsoft.com/office/drawing/2014/main" id="{FFA29F9A-770A-4DDE-7BC2-6B2090D79224}"/>
+              </a:ext>
+            </a:extLst>
+          </p:cNvPr>
+          <p:cNvSpPr>
+            <a:spLocks noGrp="1"/>
+          </p:cNvSpPr>
+          <p:nvPr>
+            <p:ph type="body" idx="1"/>
+          </p:nvPr>
+        </p:nvSpPr>
+        <p:spPr/>
+        <p:txBody>
+          <a:bodyPr/>
+          <a:lstStyle/>
+          <a:p>
+            <a:r>
+              <a:rPr lang="fr-FR" dirty="0"/>
+              <a:t>Liste des mat </a:t>
+            </a:r>
+          </a:p>
+          <a:p>
+            <a:r>
+              <a:rPr lang="fr-FR" dirty="0"/>
+              <a:t>Liste des main d’oeuvr²e et le coup horaire </a:t>
+            </a:r>
+          </a:p>
+        </p:txBody>
+      </p:sp>
+      <p:sp>
+        <p:nvSpPr>
+          <p:cNvPr id="4" name="Espace réservé du numéro de diapositive 3">
+            <a:extLst>
+              <a:ext uri="{FF2B5EF4-FFF2-40B4-BE49-F238E27FC236}">
+                <a16:creationId xmlns:a16="http://schemas.microsoft.com/office/drawing/2014/main" id="{F0B7832E-C455-EAF3-989C-3A14A8154965}"/>
+              </a:ext>
+            </a:extLst>
+          </p:cNvPr>
+          <p:cNvSpPr>
+            <a:spLocks noGrp="1"/>
+          </p:cNvSpPr>
+          <p:nvPr>
+            <p:ph type="sldNum" sz="quarter" idx="5"/>
+          </p:nvPr>
+        </p:nvSpPr>
+        <p:spPr/>
+        <p:txBody>
+          <a:bodyPr/>
+          <a:lstStyle/>
+          <a:p>
+            <a:fld id="{CED0BE1B-9CB8-454F-BD68-366FF85AEE84}" type="slidenum">
+              <a:rPr lang="es-AR" smtClean="0"/>
+              <a:t>7</a:t>
+            </a:fld>
+            <a:endParaRPr lang="es-AR"/>
+          </a:p>
+        </p:txBody>
+      </p:sp>
+    </p:spTree>
+    <p:extLst>
+      <p:ext uri="{BB962C8B-B14F-4D97-AF65-F5344CB8AC3E}">
+        <p14:creationId xmlns:p14="http://schemas.microsoft.com/office/powerpoint/2010/main" val="822254583"/>
+      </p:ext>
+    </p:extLst>
+  </p:cSld>
+  <p:clrMapOvr>
+    <a:masterClrMapping/>
+  </p:clrMapOvr>
+</p:notes>
+</file>
+
+<file path=ppt/notesSlides/notesSlide7.xml><?xml version="1.0" encoding="utf-8"?>
+<p:notes xmlns:a="http://schemas.openxmlformats.org/drawingml/2006/main" xmlns:r="http://schemas.openxmlformats.org/officeDocument/2006/relationships" xmlns:p="http://schemas.openxmlformats.org/presentationml/2006/main">
+  <p:cSld>
+    <p:spTree>
+      <p:nvGrpSpPr>
+        <p:cNvPr id="1" name=""/>
+        <p:cNvGrpSpPr/>
+        <p:nvPr/>
+      </p:nvGrpSpPr>
+      <p:grpSpPr>
+        <a:xfrm>
+          <a:off x="0" y="0"/>
+          <a:ext cx="0" cy="0"/>
+          <a:chOff x="0" y="0"/>
+          <a:chExt cx="0" cy="0"/>
+        </a:xfrm>
+      </p:grpSpPr>
+      <p:sp>
+        <p:nvSpPr>
+          <p:cNvPr id="2" name="Espace réservé de l'image des diapositives 1"/>
+          <p:cNvSpPr>
+            <a:spLocks noGrp="1" noRot="1" noChangeAspect="1"/>
+          </p:cNvSpPr>
+          <p:nvPr>
+            <p:ph type="sldImg"/>
+          </p:nvPr>
+        </p:nvSpPr>
+        <p:spPr/>
+      </p:sp>
+      <p:sp>
+        <p:nvSpPr>
+          <p:cNvPr id="3" name="Espace réservé des notes 2"/>
+          <p:cNvSpPr>
+            <a:spLocks noGrp="1"/>
+          </p:cNvSpPr>
+          <p:nvPr>
+            <p:ph type="body" idx="1"/>
+          </p:nvPr>
+        </p:nvSpPr>
+        <p:spPr/>
+        <p:txBody>
+          <a:bodyPr/>
+          <a:lstStyle/>
+          <a:p>
+            <a:r>
+              <a:rPr lang="fr-FR" dirty="0"/>
+              <a:t>Echelle 1/1</a:t>
+            </a:r>
+          </a:p>
+          <a:p>
+            <a:r>
+              <a:rPr lang="fr-FR" dirty="0"/>
+              <a:t>ou  une mesure </a:t>
+            </a:r>
+          </a:p>
+        </p:txBody>
+      </p:sp>
+      <p:sp>
+        <p:nvSpPr>
+          <p:cNvPr id="4" name="Espace réservé du numéro de diapositive 3"/>
+          <p:cNvSpPr>
+            <a:spLocks noGrp="1"/>
+          </p:cNvSpPr>
+          <p:nvPr>
+            <p:ph type="sldNum" sz="quarter" idx="5"/>
+          </p:nvPr>
+        </p:nvSpPr>
+        <p:spPr/>
+        <p:txBody>
+          <a:bodyPr/>
+          <a:lstStyle/>
+          <a:p>
+            <a:fld id="{CED0BE1B-9CB8-454F-BD68-366FF85AEE84}" type="slidenum">
+              <a:rPr lang="es-AR" smtClean="0"/>
+              <a:t>8</a:t>
+            </a:fld>
+            <a:endParaRPr lang="es-AR"/>
+          </a:p>
+        </p:txBody>
+      </p:sp>
+    </p:spTree>
+    <p:extLst>
+      <p:ext uri="{BB962C8B-B14F-4D97-AF65-F5344CB8AC3E}">
+        <p14:creationId xmlns:p14="http://schemas.microsoft.com/office/powerpoint/2010/main" val="2728888653"/>
+      </p:ext>
+    </p:extLst>
+  </p:cSld>
+  <p:clrMapOvr>
+    <a:masterClrMapping/>
+  </p:clrMapOvr>
+</p:notes>
+</file>
+
+<file path=ppt/notesSlides/notesSlide8.xml><?xml version="1.0" encoding="utf-8"?>
+<p:notes xmlns:a="http://schemas.openxmlformats.org/drawingml/2006/main" xmlns:r="http://schemas.openxmlformats.org/officeDocument/2006/relationships" xmlns:p="http://schemas.openxmlformats.org/presentationml/2006/main">
+  <p:cSld>
+    <p:spTree>
+      <p:nvGrpSpPr>
+        <p:cNvPr id="1" name=""/>
+        <p:cNvGrpSpPr/>
+        <p:nvPr/>
+      </p:nvGrpSpPr>
+      <p:grpSpPr>
+        <a:xfrm>
+          <a:off x="0" y="0"/>
+          <a:ext cx="0" cy="0"/>
+          <a:chOff x="0" y="0"/>
+          <a:chExt cx="0" cy="0"/>
+        </a:xfrm>
+      </p:grpSpPr>
+      <p:sp>
+        <p:nvSpPr>
+          <p:cNvPr id="2" name="Espace réservé de l'image des diapositives 1"/>
+          <p:cNvSpPr>
+            <a:spLocks noGrp="1" noRot="1" noChangeAspect="1"/>
+          </p:cNvSpPr>
+          <p:nvPr>
+            <p:ph type="sldImg"/>
+          </p:nvPr>
+        </p:nvSpPr>
+        <p:spPr/>
+      </p:sp>
+      <p:sp>
+        <p:nvSpPr>
+          <p:cNvPr id="3" name="Espace réservé des notes 2"/>
+          <p:cNvSpPr>
+            <a:spLocks noGrp="1"/>
+          </p:cNvSpPr>
+          <p:nvPr>
+            <p:ph type="body" idx="1"/>
+          </p:nvPr>
+        </p:nvSpPr>
+        <p:spPr/>
+        <p:txBody>
+          <a:bodyPr/>
+          <a:lstStyle/>
+          <a:p>
+            <a:r>
+              <a:rPr lang="fr-FR" dirty="0"/>
+              <a:t>Se spécialisé </a:t>
+            </a:r>
+          </a:p>
+          <a:p>
+            <a:endParaRPr lang="fr-FR" dirty="0"/>
+          </a:p>
+          <a:p>
+            <a:r>
+              <a:rPr lang="fr-FR" dirty="0"/>
+              <a:t>Une suite de taches :</a:t>
+            </a:r>
+          </a:p>
+          <a:p>
+            <a:r>
+              <a:rPr lang="fr-FR" dirty="0"/>
+              <a:t> complexité + longueurs</a:t>
+            </a:r>
+          </a:p>
+          <a:p>
+            <a:r>
+              <a:rPr lang="fr-FR" dirty="0"/>
+              <a:t>	</a:t>
+            </a:r>
+          </a:p>
+          <a:p>
+            <a:r>
+              <a:rPr lang="fr-FR" dirty="0"/>
+              <a:t>Quant mat </a:t>
+            </a:r>
+          </a:p>
+          <a:p>
+            <a:r>
+              <a:rPr lang="fr-FR" dirty="0"/>
+              <a:t>Quant main œuvres </a:t>
+            </a:r>
+          </a:p>
+          <a:p>
+            <a:r>
+              <a:rPr lang="fr-FR" dirty="0"/>
+              <a:t>Calcul</a:t>
+            </a:r>
+          </a:p>
+          <a:p>
+            <a:r>
+              <a:rPr lang="fr-FR" dirty="0"/>
+              <a:t>J’ai  mis en place Processus </a:t>
+            </a:r>
+            <a:r>
+              <a:rPr lang="fr-FR" dirty="0" err="1"/>
+              <a:t>iteratifs</a:t>
+            </a:r>
+            <a:endParaRPr lang="fr-FR" dirty="0"/>
+          </a:p>
+          <a:p>
+            <a:r>
+              <a:rPr lang="fr-FR" dirty="0"/>
+              <a:t>Avec une </a:t>
+            </a:r>
+            <a:r>
+              <a:rPr lang="fr-FR" dirty="0" err="1"/>
+              <a:t>mopyenne</a:t>
+            </a:r>
+            <a:r>
+              <a:rPr lang="fr-FR" dirty="0"/>
+              <a:t> écart type </a:t>
+            </a:r>
+          </a:p>
+          <a:p>
+            <a:r>
+              <a:rPr lang="fr-FR" dirty="0"/>
+              <a:t>Le modèle </a:t>
+            </a:r>
+            <a:r>
+              <a:rPr lang="fr-FR" dirty="0" err="1"/>
+              <a:t>haliciné</a:t>
+            </a:r>
+            <a:r>
+              <a:rPr lang="fr-FR" dirty="0"/>
+              <a:t> </a:t>
+            </a:r>
+          </a:p>
+          <a:p>
+            <a:endParaRPr lang="fr-FR" dirty="0"/>
+          </a:p>
+        </p:txBody>
+      </p:sp>
+      <p:sp>
+        <p:nvSpPr>
+          <p:cNvPr id="4" name="Espace réservé du numéro de diapositive 3"/>
+          <p:cNvSpPr>
+            <a:spLocks noGrp="1"/>
+          </p:cNvSpPr>
+          <p:nvPr>
+            <p:ph type="sldNum" sz="quarter" idx="5"/>
+          </p:nvPr>
+        </p:nvSpPr>
+        <p:spPr/>
+        <p:txBody>
+          <a:bodyPr/>
+          <a:lstStyle/>
+          <a:p>
+            <a:fld id="{CED0BE1B-9CB8-454F-BD68-366FF85AEE84}" type="slidenum">
+              <a:rPr lang="es-AR" smtClean="0"/>
+              <a:t>9</a:t>
+            </a:fld>
+            <a:endParaRPr lang="es-AR"/>
+          </a:p>
+        </p:txBody>
+      </p:sp>
+    </p:spTree>
+    <p:extLst>
+      <p:ext uri="{BB962C8B-B14F-4D97-AF65-F5344CB8AC3E}">
+        <p14:creationId xmlns:p14="http://schemas.microsoft.com/office/powerpoint/2010/main" val="3185270882"/>
+      </p:ext>
+    </p:extLst>
+  </p:cSld>
+  <p:clrMapOvr>
+    <a:masterClrMapping/>
+  </p:clrMapOvr>
+</p:notes>
+</file>
+
+<file path=ppt/notesSlides/notesSlide9.xml><?xml version="1.0" encoding="utf-8"?>
+<p:notes xmlns:a="http://schemas.openxmlformats.org/drawingml/2006/main" xmlns:r="http://schemas.openxmlformats.org/officeDocument/2006/relationships" xmlns:p="http://schemas.openxmlformats.org/presentationml/2006/main">
+  <p:cSld>
+    <p:spTree>
+      <p:nvGrpSpPr>
+        <p:cNvPr id="1" name=""/>
+        <p:cNvGrpSpPr/>
+        <p:nvPr/>
+      </p:nvGrpSpPr>
+      <p:grpSpPr>
+        <a:xfrm>
+          <a:off x="0" y="0"/>
+          <a:ext cx="0" cy="0"/>
+          <a:chOff x="0" y="0"/>
+          <a:chExt cx="0" cy="0"/>
+        </a:xfrm>
+      </p:grpSpPr>
+      <p:sp>
+        <p:nvSpPr>
+          <p:cNvPr id="2" name="Espace réservé de l'image des diapositives 1"/>
+          <p:cNvSpPr>
+            <a:spLocks noGrp="1" noRot="1" noChangeAspect="1"/>
+          </p:cNvSpPr>
+          <p:nvPr>
+            <p:ph type="sldImg"/>
+          </p:nvPr>
+        </p:nvSpPr>
+        <p:spPr/>
+      </p:sp>
+      <p:sp>
+        <p:nvSpPr>
+          <p:cNvPr id="3" name="Espace réservé des notes 2"/>
+          <p:cNvSpPr>
+            <a:spLocks noGrp="1"/>
+          </p:cNvSpPr>
+          <p:nvPr>
+            <p:ph type="body" idx="1"/>
+          </p:nvPr>
+        </p:nvSpPr>
+        <p:spPr/>
+        <p:txBody>
+          <a:bodyPr/>
+          <a:lstStyle/>
+          <a:p>
+            <a:r>
+              <a:rPr lang="fr-FR" dirty="0"/>
+              <a:t> 1 requête prend entre 40 et 70 sec</a:t>
+            </a:r>
+          </a:p>
+        </p:txBody>
+      </p:sp>
+      <p:sp>
+        <p:nvSpPr>
+          <p:cNvPr id="4" name="Espace réservé du numéro de diapositive 3"/>
+          <p:cNvSpPr>
+            <a:spLocks noGrp="1"/>
+          </p:cNvSpPr>
+          <p:nvPr>
+            <p:ph type="sldNum" sz="quarter" idx="5"/>
+          </p:nvPr>
+        </p:nvSpPr>
+        <p:spPr/>
+        <p:txBody>
+          <a:bodyPr/>
+          <a:lstStyle/>
+          <a:p>
+            <a:fld id="{CED0BE1B-9CB8-454F-BD68-366FF85AEE84}" type="slidenum">
+              <a:rPr lang="es-AR" smtClean="0"/>
+              <a:t>10</a:t>
+            </a:fld>
+            <a:endParaRPr lang="es-AR"/>
+          </a:p>
+        </p:txBody>
+      </p:sp>
+    </p:spTree>
+    <p:extLst>
+      <p:ext uri="{BB962C8B-B14F-4D97-AF65-F5344CB8AC3E}">
+        <p14:creationId xmlns:p14="http://schemas.microsoft.com/office/powerpoint/2010/main" val="1304009981"/>
       </p:ext>
     </p:extLst>
   </p:cSld>
@@ -1202,7 +1805,7 @@
           <a:p>
             <a:fld id="{AFF98120-A03B-421F-8E42-0D275B84E880}" type="datetimeFigureOut">
               <a:rPr lang="es-AR" smtClean="0"/>
-              <a:t>19/2/2026</a:t>
+              <a:t>24/2/2026</a:t>
             </a:fld>
             <a:endParaRPr lang="es-AR"/>
           </a:p>
@@ -1402,7 +2005,7 @@
           <a:p>
             <a:fld id="{AFF98120-A03B-421F-8E42-0D275B84E880}" type="datetimeFigureOut">
               <a:rPr lang="es-AR" smtClean="0"/>
-              <a:t>19/2/2026</a:t>
+              <a:t>24/2/2026</a:t>
             </a:fld>
             <a:endParaRPr lang="es-AR"/>
           </a:p>
@@ -1612,7 +2215,7 @@
           <a:p>
             <a:fld id="{AFF98120-A03B-421F-8E42-0D275B84E880}" type="datetimeFigureOut">
               <a:rPr lang="es-AR" smtClean="0"/>
-              <a:t>19/2/2026</a:t>
+              <a:t>24/2/2026</a:t>
             </a:fld>
             <a:endParaRPr lang="es-AR"/>
           </a:p>
@@ -1812,7 +2415,7 @@
           <a:p>
             <a:fld id="{AFF98120-A03B-421F-8E42-0D275B84E880}" type="datetimeFigureOut">
               <a:rPr lang="es-AR" smtClean="0"/>
-              <a:t>19/2/2026</a:t>
+              <a:t>24/2/2026</a:t>
             </a:fld>
             <a:endParaRPr lang="es-AR"/>
           </a:p>
@@ -2088,7 +2691,7 @@
           <a:p>
             <a:fld id="{AFF98120-A03B-421F-8E42-0D275B84E880}" type="datetimeFigureOut">
               <a:rPr lang="es-AR" smtClean="0"/>
-              <a:t>19/2/2026</a:t>
+              <a:t>24/2/2026</a:t>
             </a:fld>
             <a:endParaRPr lang="es-AR"/>
           </a:p>
@@ -2356,7 +2959,7 @@
           <a:p>
             <a:fld id="{AFF98120-A03B-421F-8E42-0D275B84E880}" type="datetimeFigureOut">
               <a:rPr lang="es-AR" smtClean="0"/>
-              <a:t>19/2/2026</a:t>
+              <a:t>24/2/2026</a:t>
             </a:fld>
             <a:endParaRPr lang="es-AR"/>
           </a:p>
@@ -2771,7 +3374,7 @@
           <a:p>
             <a:fld id="{AFF98120-A03B-421F-8E42-0D275B84E880}" type="datetimeFigureOut">
               <a:rPr lang="es-AR" smtClean="0"/>
-              <a:t>19/2/2026</a:t>
+              <a:t>24/2/2026</a:t>
             </a:fld>
             <a:endParaRPr lang="es-AR"/>
           </a:p>
@@ -2913,7 +3516,7 @@
           <a:p>
             <a:fld id="{AFF98120-A03B-421F-8E42-0D275B84E880}" type="datetimeFigureOut">
               <a:rPr lang="es-AR" smtClean="0"/>
-              <a:t>19/2/2026</a:t>
+              <a:t>24/2/2026</a:t>
             </a:fld>
             <a:endParaRPr lang="es-AR"/>
           </a:p>
@@ -3026,7 +3629,7 @@
           <a:p>
             <a:fld id="{AFF98120-A03B-421F-8E42-0D275B84E880}" type="datetimeFigureOut">
               <a:rPr lang="es-AR" smtClean="0"/>
-              <a:t>19/2/2026</a:t>
+              <a:t>24/2/2026</a:t>
             </a:fld>
             <a:endParaRPr lang="es-AR"/>
           </a:p>
@@ -3339,7 +3942,7 @@
           <a:p>
             <a:fld id="{AFF98120-A03B-421F-8E42-0D275B84E880}" type="datetimeFigureOut">
               <a:rPr lang="es-AR" smtClean="0"/>
-              <a:t>19/2/2026</a:t>
+              <a:t>24/2/2026</a:t>
             </a:fld>
             <a:endParaRPr lang="es-AR"/>
           </a:p>
@@ -3628,7 +4231,7 @@
           <a:p>
             <a:fld id="{AFF98120-A03B-421F-8E42-0D275B84E880}" type="datetimeFigureOut">
               <a:rPr lang="es-AR" smtClean="0"/>
-              <a:t>19/2/2026</a:t>
+              <a:t>24/2/2026</a:t>
             </a:fld>
             <a:endParaRPr lang="es-AR"/>
           </a:p>
@@ -3871,7 +4474,7 @@
           <a:p>
             <a:fld id="{AFF98120-A03B-421F-8E42-0D275B84E880}" type="datetimeFigureOut">
               <a:rPr lang="es-AR" smtClean="0"/>
-              <a:t>19/2/2026</a:t>
+              <a:t>24/2/2026</a:t>
             </a:fld>
             <a:endParaRPr lang="es-AR"/>
           </a:p>
@@ -5172,7 +5775,7 @@
             <a:pPr lvl="1"/>
             <a:r>
               <a:rPr lang="fr-FR" sz="2000" dirty="0"/>
-              <a:t>Avec un abonnement, le temps de traitement peut être 2 à 3 fois plus rapide.</a:t>
+              <a:t>Avec un abonnement, le temps de traitement peut être de 2 à 3 minutes.</a:t>
             </a:r>
           </a:p>
         </p:txBody>
@@ -5747,7 +6350,13 @@
           <a:p>
             <a:r>
               <a:rPr lang="fr-FR" sz="2000" dirty="0"/>
-              <a:t>Possibilité d’élargir l’estimation à plusieurs pièces en même temps.</a:t>
+              <a:t>Entraîner un LLM spécialement pour cette tâche.</a:t>
+            </a:r>
+          </a:p>
+          <a:p>
+            <a:r>
+              <a:rPr lang="fr-FR" sz="2000" dirty="0"/>
+              <a:t>Entraîner un agent pour obtenir les prix réels des matériaux.</a:t>
             </a:r>
           </a:p>
           <a:p>
@@ -6334,29 +6943,27 @@
           <a:p>
             <a:r>
               <a:rPr lang="fr-FR" dirty="0"/>
-              <a:t>Le poids des fichier STL </a:t>
-            </a:r>
-            <a:endParaRPr lang="es-AR" dirty="0"/>
-          </a:p>
-          <a:p>
+              <a:t>Le nombre de </a:t>
+            </a:r>
+            <a:r>
+              <a:rPr lang="fr-FR" dirty="0" err="1"/>
+              <a:t>tokens</a:t>
+            </a:r>
             <a:r>
               <a:rPr lang="fr-FR" dirty="0"/>
-              <a:t>Le cout possible</a:t>
-            </a:r>
-            <a:endParaRPr lang="es-AR" dirty="0"/>
+              <a:t> des fichiers STL.</a:t>
+            </a:r>
           </a:p>
           <a:p>
             <a:r>
               <a:rPr lang="fr-FR" dirty="0"/>
-              <a:t>La complexité des </a:t>
-            </a:r>
-            <a:r>
-              <a:rPr lang="fr-FR" dirty="0" err="1"/>
-              <a:t>piéces</a:t>
-            </a:r>
+              <a:t>Le coût potentiel d’un LLM plus performant.</a:t>
+            </a:r>
+          </a:p>
+          <a:p>
             <a:r>
               <a:rPr lang="fr-FR" dirty="0"/>
-              <a:t>/ la disposition du STL </a:t>
+              <a:t>La complexité des meubles.</a:t>
             </a:r>
             <a:endParaRPr lang="es-AR" dirty="0"/>
           </a:p>
@@ -6462,487 +7069,6 @@
 </file>
 
 <file path=ppt/slides/slide2.xml><?xml version="1.0" encoding="utf-8"?>
-<p:sld xmlns:a="http://schemas.openxmlformats.org/drawingml/2006/main" xmlns:r="http://schemas.openxmlformats.org/officeDocument/2006/relationships" xmlns:p="http://schemas.openxmlformats.org/presentationml/2006/main">
-  <p:cSld>
-    <p:bg>
-      <p:bgPr>
-        <a:solidFill>
-          <a:schemeClr val="bg1"/>
-        </a:solidFill>
-        <a:effectLst/>
-      </p:bgPr>
-    </p:bg>
-    <p:spTree>
-      <p:nvGrpSpPr>
-        <p:cNvPr id="1" name="">
-          <a:extLst>
-            <a:ext uri="{FF2B5EF4-FFF2-40B4-BE49-F238E27FC236}">
-              <a16:creationId xmlns:a16="http://schemas.microsoft.com/office/drawing/2014/main" id="{34D20D74-5BF3-81BF-2F5B-A051DFC176CC}"/>
-            </a:ext>
-          </a:extLst>
-        </p:cNvPr>
-        <p:cNvGrpSpPr/>
-        <p:nvPr/>
-      </p:nvGrpSpPr>
-      <p:grpSpPr>
-        <a:xfrm>
-          <a:off x="0" y="0"/>
-          <a:ext cx="0" cy="0"/>
-          <a:chOff x="0" y="0"/>
-          <a:chExt cx="0" cy="0"/>
-        </a:xfrm>
-      </p:grpSpPr>
-      <p:sp useBgFill="1">
-        <p:nvSpPr>
-          <p:cNvPr id="27" name="Rectangle 26">
-            <a:extLst>
-              <a:ext uri="{FF2B5EF4-FFF2-40B4-BE49-F238E27FC236}">
-                <a16:creationId xmlns:a16="http://schemas.microsoft.com/office/drawing/2014/main" id="{80311793-6E8B-7363-CD3D-2FEABF5F66DA}"/>
-              </a:ext>
-              <a:ext uri="{C183D7F6-B498-43B3-948B-1728B52AA6E4}">
-                <adec:decorative xmlns:adec="http://schemas.microsoft.com/office/drawing/2017/decorative" val="1"/>
-              </a:ext>
-            </a:extLst>
-          </p:cNvPr>
-          <p:cNvSpPr>
-            <a:spLocks noGrp="1" noRot="1" noChangeAspect="1" noMove="1" noResize="1" noEditPoints="1" noAdjustHandles="1" noChangeArrowheads="1" noChangeShapeType="1" noTextEdit="1"/>
-          </p:cNvSpPr>
-          <p:nvPr>
-            <p:extLst>
-              <p:ext uri="{386F3935-93C4-4BCD-93E2-E3B085C9AB24}">
-                <p16:designElem xmlns:p16="http://schemas.microsoft.com/office/powerpoint/2015/main" val="1"/>
-              </p:ext>
-            </p:extLst>
-          </p:nvPr>
-        </p:nvSpPr>
-        <p:spPr>
-          <a:xfrm>
-            <a:off x="0" y="0"/>
-            <a:ext cx="12191999" cy="6857365"/>
-          </a:xfrm>
-          <a:prstGeom prst="rect">
-            <a:avLst/>
-          </a:prstGeom>
-          <a:ln>
-            <a:noFill/>
-          </a:ln>
-        </p:spPr>
-        <p:style>
-          <a:lnRef idx="2">
-            <a:schemeClr val="accent1">
-              <a:shade val="50000"/>
-            </a:schemeClr>
-          </a:lnRef>
-          <a:fillRef idx="1">
-            <a:schemeClr val="accent1"/>
-          </a:fillRef>
-          <a:effectRef idx="0">
-            <a:schemeClr val="accent1"/>
-          </a:effectRef>
-          <a:fontRef idx="minor">
-            <a:schemeClr val="lt1"/>
-          </a:fontRef>
-        </p:style>
-        <p:txBody>
-          <a:bodyPr rtlCol="0" anchor="ctr"/>
-          <a:lstStyle/>
-          <a:p>
-            <a:pPr algn="ctr"/>
-            <a:endParaRPr lang="en-US"/>
-          </a:p>
-        </p:txBody>
-      </p:sp>
-      <p:sp>
-        <p:nvSpPr>
-          <p:cNvPr id="2" name="Titre 1">
-            <a:extLst>
-              <a:ext uri="{FF2B5EF4-FFF2-40B4-BE49-F238E27FC236}">
-                <a16:creationId xmlns:a16="http://schemas.microsoft.com/office/drawing/2014/main" id="{09CE600A-3794-6742-87AE-40BA190D1F75}"/>
-              </a:ext>
-            </a:extLst>
-          </p:cNvPr>
-          <p:cNvSpPr>
-            <a:spLocks noGrp="1"/>
-          </p:cNvSpPr>
-          <p:nvPr>
-            <p:ph type="title"/>
-          </p:nvPr>
-        </p:nvSpPr>
-        <p:spPr>
-          <a:xfrm>
-            <a:off x="793662" y="386930"/>
-            <a:ext cx="10066122" cy="1298448"/>
-          </a:xfrm>
-        </p:spPr>
-        <p:txBody>
-          <a:bodyPr anchor="b">
-            <a:normAutofit/>
-          </a:bodyPr>
-          <a:lstStyle/>
-          <a:p>
-            <a:r>
-              <a:rPr lang="fr-FR" sz="3400" b="1" dirty="0"/>
-              <a:t>Sommaire: </a:t>
-            </a:r>
-            <a:endParaRPr lang="es-AR" sz="3400" dirty="0"/>
-          </a:p>
-        </p:txBody>
-      </p:sp>
-      <p:sp>
-        <p:nvSpPr>
-          <p:cNvPr id="29" name="Rectangle 28">
-            <a:extLst>
-              <a:ext uri="{FF2B5EF4-FFF2-40B4-BE49-F238E27FC236}">
-                <a16:creationId xmlns:a16="http://schemas.microsoft.com/office/drawing/2014/main" id="{22D81E96-3B72-5294-ECD3-695A358066DD}"/>
-              </a:ext>
-              <a:ext uri="{C183D7F6-B498-43B3-948B-1728B52AA6E4}">
-                <adec:decorative xmlns:adec="http://schemas.microsoft.com/office/drawing/2017/decorative" val="1"/>
-              </a:ext>
-            </a:extLst>
-          </p:cNvPr>
-          <p:cNvSpPr>
-            <a:spLocks noGrp="1" noRot="1" noChangeAspect="1" noMove="1" noResize="1" noEditPoints="1" noAdjustHandles="1" noChangeArrowheads="1" noChangeShapeType="1" noTextEdit="1"/>
-          </p:cNvSpPr>
-          <p:nvPr>
-            <p:extLst>
-              <p:ext uri="{386F3935-93C4-4BCD-93E2-E3B085C9AB24}">
-                <p16:designElem xmlns:p16="http://schemas.microsoft.com/office/powerpoint/2015/main" val="1"/>
-              </p:ext>
-            </p:extLst>
-          </p:nvPr>
-        </p:nvSpPr>
-        <p:spPr>
-          <a:xfrm flipH="1" flipV="1">
-            <a:off x="-2" y="1998845"/>
-            <a:ext cx="11454595" cy="781699"/>
-          </a:xfrm>
-          <a:prstGeom prst="rect">
-            <a:avLst/>
-          </a:prstGeom>
-          <a:solidFill>
-            <a:schemeClr val="accent4"/>
-          </a:solidFill>
-          <a:ln>
-            <a:noFill/>
-          </a:ln>
-        </p:spPr>
-        <p:style>
-          <a:lnRef idx="2">
-            <a:schemeClr val="accent1">
-              <a:shade val="50000"/>
-            </a:schemeClr>
-          </a:lnRef>
-          <a:fillRef idx="1">
-            <a:schemeClr val="accent1"/>
-          </a:fillRef>
-          <a:effectRef idx="0">
-            <a:schemeClr val="accent1"/>
-          </a:effectRef>
-          <a:fontRef idx="minor">
-            <a:schemeClr val="lt1"/>
-          </a:fontRef>
-        </p:style>
-        <p:txBody>
-          <a:bodyPr rtlCol="0" anchor="ctr"/>
-          <a:lstStyle/>
-          <a:p>
-            <a:pPr algn="ctr"/>
-            <a:endParaRPr lang="en-US"/>
-          </a:p>
-        </p:txBody>
-      </p:sp>
-      <p:sp>
-        <p:nvSpPr>
-          <p:cNvPr id="31" name="Rectangle 30">
-            <a:extLst>
-              <a:ext uri="{FF2B5EF4-FFF2-40B4-BE49-F238E27FC236}">
-                <a16:creationId xmlns:a16="http://schemas.microsoft.com/office/drawing/2014/main" id="{CD660551-039A-69AA-42E6-CAF485E77DB2}"/>
-              </a:ext>
-              <a:ext uri="{C183D7F6-B498-43B3-948B-1728B52AA6E4}">
-                <adec:decorative xmlns:adec="http://schemas.microsoft.com/office/drawing/2017/decorative" val="1"/>
-              </a:ext>
-            </a:extLst>
-          </p:cNvPr>
-          <p:cNvSpPr>
-            <a:spLocks noGrp="1" noRot="1" noChangeAspect="1" noMove="1" noResize="1" noEditPoints="1" noAdjustHandles="1" noChangeArrowheads="1" noChangeShapeType="1" noTextEdit="1"/>
-          </p:cNvSpPr>
-          <p:nvPr>
-            <p:extLst>
-              <p:ext uri="{386F3935-93C4-4BCD-93E2-E3B085C9AB24}">
-                <p16:designElem xmlns:p16="http://schemas.microsoft.com/office/powerpoint/2015/main" val="1"/>
-              </p:ext>
-            </p:extLst>
-          </p:nvPr>
-        </p:nvSpPr>
-        <p:spPr>
-          <a:xfrm>
-            <a:off x="0" y="2203079"/>
-            <a:ext cx="11383362" cy="4267991"/>
-          </a:xfrm>
-          <a:prstGeom prst="rect">
-            <a:avLst/>
-          </a:prstGeom>
-          <a:solidFill>
-            <a:schemeClr val="bg1"/>
-          </a:solidFill>
-          <a:ln>
-            <a:noFill/>
-          </a:ln>
-          <a:effectLst>
-            <a:outerShdw blurRad="139700" dist="127000" dir="5400000" algn="t" rotWithShape="0">
-              <a:prstClr val="black">
-                <a:alpha val="15000"/>
-              </a:prstClr>
-            </a:outerShdw>
-          </a:effectLst>
-        </p:spPr>
-        <p:style>
-          <a:lnRef idx="2">
-            <a:schemeClr val="accent1">
-              <a:shade val="50000"/>
-            </a:schemeClr>
-          </a:lnRef>
-          <a:fillRef idx="1">
-            <a:schemeClr val="accent1"/>
-          </a:fillRef>
-          <a:effectRef idx="0">
-            <a:schemeClr val="accent1"/>
-          </a:effectRef>
-          <a:fontRef idx="minor">
-            <a:schemeClr val="lt1"/>
-          </a:fontRef>
-        </p:style>
-        <p:txBody>
-          <a:bodyPr rtlCol="0" anchor="ctr"/>
-          <a:lstStyle/>
-          <a:p>
-            <a:pPr algn="ctr"/>
-            <a:endParaRPr lang="en-US"/>
-          </a:p>
-        </p:txBody>
-      </p:sp>
-      <p:sp>
-        <p:nvSpPr>
-          <p:cNvPr id="3" name="Espace réservé du contenu 2">
-            <a:extLst>
-              <a:ext uri="{FF2B5EF4-FFF2-40B4-BE49-F238E27FC236}">
-                <a16:creationId xmlns:a16="http://schemas.microsoft.com/office/drawing/2014/main" id="{4BC0AC4C-3A56-6449-8827-31C606B705E6}"/>
-              </a:ext>
-            </a:extLst>
-          </p:cNvPr>
-          <p:cNvSpPr>
-            <a:spLocks noGrp="1"/>
-          </p:cNvSpPr>
-          <p:nvPr>
-            <p:ph idx="1"/>
-          </p:nvPr>
-        </p:nvSpPr>
-        <p:spPr>
-          <a:xfrm>
-            <a:off x="793660" y="2599509"/>
-            <a:ext cx="9872941" cy="3639450"/>
-          </a:xfrm>
-        </p:spPr>
-        <p:txBody>
-          <a:bodyPr anchor="ctr">
-            <a:normAutofit/>
-          </a:bodyPr>
-          <a:lstStyle/>
-          <a:p>
-            <a:r>
-              <a:rPr lang="es-AR" b="1" dirty="0" err="1"/>
-              <a:t>Contexte</a:t>
-            </a:r>
-            <a:endParaRPr lang="es-AR" b="1" dirty="0"/>
-          </a:p>
-          <a:p>
-            <a:r>
-              <a:rPr lang="es-AR" b="1" dirty="0" err="1"/>
-              <a:t>Pluo</a:t>
-            </a:r>
-            <a:endParaRPr lang="es-AR" dirty="0"/>
-          </a:p>
-          <a:p>
-            <a:r>
-              <a:rPr lang="es-AR" b="1" dirty="0"/>
-              <a:t>Besoin </a:t>
-            </a:r>
-            <a:r>
-              <a:rPr lang="es-AR" b="1" dirty="0" err="1"/>
-              <a:t>client</a:t>
-            </a:r>
-            <a:r>
-              <a:rPr lang="es-AR" b="1" dirty="0"/>
-              <a:t> et </a:t>
-            </a:r>
-            <a:r>
-              <a:rPr lang="es-AR" b="1" dirty="0" err="1"/>
-              <a:t>données</a:t>
-            </a:r>
-            <a:r>
-              <a:rPr lang="es-AR" b="1" dirty="0"/>
-              <a:t> disponibles</a:t>
-            </a:r>
-            <a:endParaRPr lang="es-AR" dirty="0"/>
-          </a:p>
-          <a:p>
-            <a:r>
-              <a:rPr lang="es-AR" b="1" dirty="0" err="1"/>
-              <a:t>Travaux</a:t>
-            </a:r>
-            <a:r>
-              <a:rPr lang="es-AR" b="1" dirty="0"/>
-              <a:t> </a:t>
-            </a:r>
-            <a:r>
-              <a:rPr lang="es-AR" b="1" dirty="0" err="1"/>
-              <a:t>réalisés</a:t>
-            </a:r>
-            <a:endParaRPr lang="es-AR" dirty="0"/>
-          </a:p>
-          <a:p>
-            <a:r>
-              <a:rPr lang="es-AR" b="1" dirty="0" err="1"/>
-              <a:t>Défis</a:t>
-            </a:r>
-            <a:endParaRPr lang="es-AR" dirty="0"/>
-          </a:p>
-          <a:p>
-            <a:endParaRPr lang="fr-FR" sz="2000" dirty="0"/>
-          </a:p>
-        </p:txBody>
-      </p:sp>
-      <p:sp>
-        <p:nvSpPr>
-          <p:cNvPr id="33" name="Rectangle 32">
-            <a:extLst>
-              <a:ext uri="{FF2B5EF4-FFF2-40B4-BE49-F238E27FC236}">
-                <a16:creationId xmlns:a16="http://schemas.microsoft.com/office/drawing/2014/main" id="{A0AD7333-DE7D-8CE8-0B40-5AE4222B0144}"/>
-              </a:ext>
-              <a:ext uri="{C183D7F6-B498-43B3-948B-1728B52AA6E4}">
-                <adec:decorative xmlns:adec="http://schemas.microsoft.com/office/drawing/2017/decorative" val="1"/>
-              </a:ext>
-            </a:extLst>
-          </p:cNvPr>
-          <p:cNvSpPr>
-            <a:spLocks noGrp="1" noRot="1" noChangeAspect="1" noMove="1" noResize="1" noEditPoints="1" noAdjustHandles="1" noChangeArrowheads="1" noChangeShapeType="1" noTextEdit="1"/>
-          </p:cNvSpPr>
-          <p:nvPr>
-            <p:extLst>
-              <p:ext uri="{386F3935-93C4-4BCD-93E2-E3B085C9AB24}">
-                <p16:designElem xmlns:p16="http://schemas.microsoft.com/office/powerpoint/2015/main" val="1"/>
-              </p:ext>
-            </p:extLst>
-          </p:nvPr>
-        </p:nvSpPr>
-        <p:spPr>
-          <a:xfrm rot="5400000">
-            <a:off x="11228040" y="2313027"/>
-            <a:ext cx="781700" cy="152382"/>
-          </a:xfrm>
-          <a:prstGeom prst="rect">
-            <a:avLst/>
-          </a:prstGeom>
-          <a:solidFill>
-            <a:schemeClr val="accent4"/>
-          </a:solidFill>
-          <a:ln>
-            <a:noFill/>
-          </a:ln>
-        </p:spPr>
-        <p:style>
-          <a:lnRef idx="2">
-            <a:schemeClr val="accent1">
-              <a:shade val="50000"/>
-            </a:schemeClr>
-          </a:lnRef>
-          <a:fillRef idx="1">
-            <a:schemeClr val="accent1"/>
-          </a:fillRef>
-          <a:effectRef idx="0">
-            <a:schemeClr val="accent1"/>
-          </a:effectRef>
-          <a:fontRef idx="minor">
-            <a:schemeClr val="lt1"/>
-          </a:fontRef>
-        </p:style>
-        <p:txBody>
-          <a:bodyPr rtlCol="0" anchor="ctr"/>
-          <a:lstStyle/>
-          <a:p>
-            <a:pPr algn="ctr"/>
-            <a:endParaRPr lang="en-US"/>
-          </a:p>
-        </p:txBody>
-      </p:sp>
-      <p:sp>
-        <p:nvSpPr>
-          <p:cNvPr id="6" name="Rectangle 5">
-            <a:extLst>
-              <a:ext uri="{FF2B5EF4-FFF2-40B4-BE49-F238E27FC236}">
-                <a16:creationId xmlns:a16="http://schemas.microsoft.com/office/drawing/2014/main" id="{AA3B2C77-8DB2-F8EA-117C-F41E0C7C7841}"/>
-              </a:ext>
-            </a:extLst>
-          </p:cNvPr>
-          <p:cNvSpPr/>
-          <p:nvPr/>
-        </p:nvSpPr>
-        <p:spPr>
-          <a:xfrm>
-            <a:off x="9953248" y="5852049"/>
-            <a:ext cx="977153" cy="304800"/>
-          </a:xfrm>
-          <a:prstGeom prst="rect">
-            <a:avLst/>
-          </a:prstGeom>
-          <a:solidFill>
-            <a:schemeClr val="bg1"/>
-          </a:solidFill>
-          <a:ln>
-            <a:solidFill>
-              <a:schemeClr val="bg1"/>
-            </a:solidFill>
-          </a:ln>
-        </p:spPr>
-        <p:style>
-          <a:lnRef idx="2">
-            <a:schemeClr val="accent1">
-              <a:shade val="15000"/>
-            </a:schemeClr>
-          </a:lnRef>
-          <a:fillRef idx="1">
-            <a:schemeClr val="accent1"/>
-          </a:fillRef>
-          <a:effectRef idx="0">
-            <a:schemeClr val="accent1"/>
-          </a:effectRef>
-          <a:fontRef idx="minor">
-            <a:schemeClr val="lt1"/>
-          </a:fontRef>
-        </p:style>
-        <p:txBody>
-          <a:bodyPr rtlCol="0" anchor="ctr"/>
-          <a:lstStyle/>
-          <a:p>
-            <a:pPr algn="ctr"/>
-            <a:endParaRPr lang="es-AR"/>
-          </a:p>
-        </p:txBody>
-      </p:sp>
-    </p:spTree>
-    <p:extLst>
-      <p:ext uri="{BB962C8B-B14F-4D97-AF65-F5344CB8AC3E}">
-        <p14:creationId xmlns:p14="http://schemas.microsoft.com/office/powerpoint/2010/main" val="892663182"/>
-      </p:ext>
-    </p:extLst>
-  </p:cSld>
-  <p:clrMapOvr>
-    <a:masterClrMapping/>
-  </p:clrMapOvr>
-</p:sld>
-</file>
-
-<file path=ppt/slides/slide3.xml><?xml version="1.0" encoding="utf-8"?>
 <p:sld xmlns:a="http://schemas.openxmlformats.org/drawingml/2006/main" xmlns:r="http://schemas.openxmlformats.org/officeDocument/2006/relationships" xmlns:p="http://schemas.openxmlformats.org/presentationml/2006/main">
   <p:cSld>
     <p:bg>
@@ -8577,7 +8703,7 @@
 </p:sld>
 </file>
 
-<file path=ppt/slides/slide4.xml><?xml version="1.0" encoding="utf-8"?>
+<file path=ppt/slides/slide3.xml><?xml version="1.0" encoding="utf-8"?>
 <p:sld xmlns:a="http://schemas.openxmlformats.org/drawingml/2006/main" xmlns:r="http://schemas.openxmlformats.org/officeDocument/2006/relationships" xmlns:p="http://schemas.openxmlformats.org/presentationml/2006/main">
   <p:cSld>
     <p:bg>
@@ -8604,10 +8730,10 @@
       </p:grpSpPr>
       <p:sp useBgFill="1">
         <p:nvSpPr>
-          <p:cNvPr id="38" name="Rectangle 37">
-            <a:extLst>
-              <a:ext uri="{FF2B5EF4-FFF2-40B4-BE49-F238E27FC236}">
-                <a16:creationId xmlns:a16="http://schemas.microsoft.com/office/drawing/2014/main" id="{F13C74B1-5B17-4795-BED0-7140497B445A}"/>
+          <p:cNvPr id="45" name="Rectangle 44">
+            <a:extLst>
+              <a:ext uri="{FF2B5EF4-FFF2-40B4-BE49-F238E27FC236}">
+                <a16:creationId xmlns:a16="http://schemas.microsoft.com/office/drawing/2014/main" id="{201CC55D-ED54-4C5C-95E6-10947BD1103B}"/>
               </a:ext>
               <a:ext uri="{C183D7F6-B498-43B3-948B-1728B52AA6E4}">
                 <adec:decorative xmlns:adec="http://schemas.microsoft.com/office/drawing/2017/decorative" val="1"/>
@@ -8628,7 +8754,7 @@
         <p:spPr>
           <a:xfrm>
             <a:off x="0" y="0"/>
-            <a:ext cx="12188952" cy="6858000"/>
+            <a:ext cx="12191999" cy="6857365"/>
           </a:xfrm>
           <a:prstGeom prst="rect">
             <a:avLst/>
@@ -8680,43 +8806,39 @@
         </p:nvSpPr>
         <p:spPr>
           <a:xfrm>
-            <a:off x="640080" y="325369"/>
-            <a:ext cx="4368602" cy="1956841"/>
+            <a:off x="589560" y="856180"/>
+            <a:ext cx="4560584" cy="1128068"/>
           </a:xfrm>
         </p:spPr>
         <p:txBody>
-          <a:bodyPr anchor="b">
+          <a:bodyPr anchor="ctr">
             <a:normAutofit/>
           </a:bodyPr>
           <a:lstStyle/>
           <a:p>
             <a:r>
-              <a:rPr lang="fr-FR" sz="5400" b="1" dirty="0" err="1"/>
-              <a:t>Pluo</a:t>
-            </a:r>
-            <a:r>
-              <a:rPr lang="fr-FR" sz="5400" b="1" dirty="0"/>
-              <a:t>: </a:t>
-            </a:r>
-            <a:endParaRPr lang="es-AR" sz="5400" dirty="0"/>
-          </a:p>
-        </p:txBody>
-      </p:sp>
-      <p:sp>
-        <p:nvSpPr>
-          <p:cNvPr id="40" name="sketchy line">
-            <a:extLst>
-              <a:ext uri="{FF2B5EF4-FFF2-40B4-BE49-F238E27FC236}">
-                <a16:creationId xmlns:a16="http://schemas.microsoft.com/office/drawing/2014/main" id="{D4974D33-8DC5-464E-8C6D-BE58F0669C17}"/>
+              <a:rPr lang="fr-FR" sz="4000" b="1"/>
+              <a:t>Pluo: </a:t>
+            </a:r>
+            <a:endParaRPr lang="es-AR" sz="4000"/>
+          </a:p>
+        </p:txBody>
+      </p:sp>
+      <p:grpSp>
+        <p:nvGrpSpPr>
+          <p:cNvPr id="47" name="Group 46">
+            <a:extLst>
+              <a:ext uri="{FF2B5EF4-FFF2-40B4-BE49-F238E27FC236}">
+                <a16:creationId xmlns:a16="http://schemas.microsoft.com/office/drawing/2014/main" id="{1DE889C7-FAD6-4397-98E2-05D503484459}"/>
               </a:ext>
               <a:ext uri="{C183D7F6-B498-43B3-948B-1728B52AA6E4}">
                 <adec:decorative xmlns:adec="http://schemas.microsoft.com/office/drawing/2017/decorative" val="1"/>
               </a:ext>
             </a:extLst>
           </p:cNvPr>
-          <p:cNvSpPr>
-            <a:spLocks noGrp="1" noRot="1" noChangeAspect="1" noMove="1" noResize="1" noEditPoints="1" noAdjustHandles="1" noChangeArrowheads="1" noChangeShapeType="1" noTextEdit="1"/>
-          </p:cNvSpPr>
+          <p:cNvGrpSpPr>
+            <a:grpSpLocks noGrp="1" noUngrp="1" noRot="1" noChangeAspect="1" noMove="1" noResize="1"/>
+          </p:cNvGrpSpPr>
           <p:nvPr>
             <p:extLst>
               <p:ext uri="{386F3935-93C4-4BCD-93E2-E3B085C9AB24}">
@@ -8724,240 +8846,174 @@
               </p:ext>
             </p:extLst>
           </p:nvPr>
+        </p:nvGrpSpPr>
+        <p:grpSpPr>
+          <a:xfrm>
+            <a:off x="0" y="1083484"/>
+            <a:ext cx="355196" cy="673460"/>
+            <a:chOff x="0" y="823811"/>
+            <a:chExt cx="355196" cy="673460"/>
+          </a:xfrm>
+        </p:grpSpPr>
+        <p:sp>
+          <p:nvSpPr>
+            <p:cNvPr id="48" name="Rectangle 47">
+              <a:extLst>
+                <a:ext uri="{FF2B5EF4-FFF2-40B4-BE49-F238E27FC236}">
+                  <a16:creationId xmlns:a16="http://schemas.microsoft.com/office/drawing/2014/main" id="{F399A70F-F8CD-4992-9EF5-6CF15472E73F}"/>
+                </a:ext>
+                <a:ext uri="{C183D7F6-B498-43B3-948B-1728B52AA6E4}">
+                  <adec:decorative xmlns:adec="http://schemas.microsoft.com/office/drawing/2017/decorative" val="1"/>
+                </a:ext>
+              </a:extLst>
+            </p:cNvPr>
+            <p:cNvSpPr/>
+            <p:nvPr>
+              <p:extLst>
+                <p:ext uri="{386F3935-93C4-4BCD-93E2-E3B085C9AB24}">
+                  <p16:designElem xmlns:p16="http://schemas.microsoft.com/office/powerpoint/2015/main" val="1"/>
+                </p:ext>
+              </p:extLst>
+            </p:nvPr>
+          </p:nvSpPr>
+          <p:spPr>
+            <a:xfrm>
+              <a:off x="0" y="823811"/>
+              <a:ext cx="87363" cy="673460"/>
+            </a:xfrm>
+            <a:prstGeom prst="rect">
+              <a:avLst/>
+            </a:prstGeom>
+            <a:solidFill>
+              <a:schemeClr val="accent4"/>
+            </a:solidFill>
+            <a:ln>
+              <a:noFill/>
+            </a:ln>
+          </p:spPr>
+          <p:style>
+            <a:lnRef idx="2">
+              <a:schemeClr val="accent1">
+                <a:shade val="50000"/>
+              </a:schemeClr>
+            </a:lnRef>
+            <a:fillRef idx="1">
+              <a:schemeClr val="accent1"/>
+            </a:fillRef>
+            <a:effectRef idx="0">
+              <a:schemeClr val="accent1"/>
+            </a:effectRef>
+            <a:fontRef idx="minor">
+              <a:schemeClr val="lt1"/>
+            </a:fontRef>
+          </p:style>
+          <p:txBody>
+            <a:bodyPr rtlCol="0" anchor="ctr"/>
+            <a:lstStyle/>
+            <a:p>
+              <a:pPr algn="ctr"/>
+              <a:endParaRPr lang="en-US"/>
+            </a:p>
+          </p:txBody>
+        </p:sp>
+        <p:sp>
+          <p:nvSpPr>
+            <p:cNvPr id="49" name="Rectangle 48">
+              <a:extLst>
+                <a:ext uri="{FF2B5EF4-FFF2-40B4-BE49-F238E27FC236}">
+                  <a16:creationId xmlns:a16="http://schemas.microsoft.com/office/drawing/2014/main" id="{48F4FEDC-6D80-458C-A665-075D9B9500FD}"/>
+                </a:ext>
+                <a:ext uri="{C183D7F6-B498-43B3-948B-1728B52AA6E4}">
+                  <adec:decorative xmlns:adec="http://schemas.microsoft.com/office/drawing/2017/decorative" val="1"/>
+                </a:ext>
+              </a:extLst>
+            </p:cNvPr>
+            <p:cNvSpPr/>
+            <p:nvPr>
+              <p:extLst>
+                <p:ext uri="{386F3935-93C4-4BCD-93E2-E3B085C9AB24}">
+                  <p16:designElem xmlns:p16="http://schemas.microsoft.com/office/powerpoint/2015/main" val="1"/>
+                </p:ext>
+              </p:extLst>
+            </p:nvPr>
+          </p:nvSpPr>
+          <p:spPr>
+            <a:xfrm>
+              <a:off x="159341" y="823811"/>
+              <a:ext cx="195855" cy="673460"/>
+            </a:xfrm>
+            <a:prstGeom prst="rect">
+              <a:avLst/>
+            </a:prstGeom>
+            <a:solidFill>
+              <a:schemeClr val="accent4"/>
+            </a:solidFill>
+            <a:ln>
+              <a:noFill/>
+            </a:ln>
+          </p:spPr>
+          <p:style>
+            <a:lnRef idx="2">
+              <a:schemeClr val="accent1">
+                <a:shade val="50000"/>
+              </a:schemeClr>
+            </a:lnRef>
+            <a:fillRef idx="1">
+              <a:schemeClr val="accent1"/>
+            </a:fillRef>
+            <a:effectRef idx="0">
+              <a:schemeClr val="accent1"/>
+            </a:effectRef>
+            <a:fontRef idx="minor">
+              <a:schemeClr val="lt1"/>
+            </a:fontRef>
+          </p:style>
+          <p:txBody>
+            <a:bodyPr rtlCol="0" anchor="ctr"/>
+            <a:lstStyle/>
+            <a:p>
+              <a:pPr algn="ctr"/>
+              <a:endParaRPr lang="en-US"/>
+            </a:p>
+          </p:txBody>
+        </p:sp>
+      </p:grpSp>
+      <p:sp>
+        <p:nvSpPr>
+          <p:cNvPr id="51" name="Rectangle 50">
+            <a:extLst>
+              <a:ext uri="{FF2B5EF4-FFF2-40B4-BE49-F238E27FC236}">
+                <a16:creationId xmlns:a16="http://schemas.microsoft.com/office/drawing/2014/main" id="{3873B707-463F-40B0-8227-E8CC6C67EB25}"/>
+              </a:ext>
+              <a:ext uri="{C183D7F6-B498-43B3-948B-1728B52AA6E4}">
+                <adec:decorative xmlns:adec="http://schemas.microsoft.com/office/drawing/2017/decorative" val="1"/>
+              </a:ext>
+            </a:extLst>
+          </p:cNvPr>
+          <p:cNvSpPr>
+            <a:spLocks noGrp="1" noRot="1" noChangeAspect="1" noMove="1" noResize="1" noEditPoints="1" noAdjustHandles="1" noChangeArrowheads="1" noChangeShapeType="1" noTextEdit="1"/>
+          </p:cNvSpPr>
+          <p:nvPr>
+            <p:extLst>
+              <p:ext uri="{386F3935-93C4-4BCD-93E2-E3B085C9AB24}">
+                <p16:designElem xmlns:p16="http://schemas.microsoft.com/office/powerpoint/2015/main" val="1"/>
+              </p:ext>
+            </p:extLst>
+          </p:nvPr>
         </p:nvSpPr>
         <p:spPr>
-          <a:xfrm>
-            <a:off x="640080" y="2586994"/>
-            <a:ext cx="3474720" cy="18288"/>
+          <a:xfrm flipH="1">
+            <a:off x="665085" y="2090569"/>
+            <a:ext cx="4297680" cy="27432"/>
           </a:xfrm>
-          <a:custGeom>
+          <a:prstGeom prst="rect">
             <a:avLst/>
-            <a:gdLst>
-              <a:gd name="csX0" fmla="*/ 0 w 3474720"/>
-              <a:gd name="csY0" fmla="*/ 0 h 18288"/>
-              <a:gd name="csX1" fmla="*/ 694944 w 3474720"/>
-              <a:gd name="csY1" fmla="*/ 0 h 18288"/>
-              <a:gd name="csX2" fmla="*/ 1355141 w 3474720"/>
-              <a:gd name="csY2" fmla="*/ 0 h 18288"/>
-              <a:gd name="csX3" fmla="*/ 2015338 w 3474720"/>
-              <a:gd name="csY3" fmla="*/ 0 h 18288"/>
-              <a:gd name="csX4" fmla="*/ 2779776 w 3474720"/>
-              <a:gd name="csY4" fmla="*/ 0 h 18288"/>
-              <a:gd name="csX5" fmla="*/ 3474720 w 3474720"/>
-              <a:gd name="csY5" fmla="*/ 0 h 18288"/>
-              <a:gd name="csX6" fmla="*/ 3474720 w 3474720"/>
-              <a:gd name="csY6" fmla="*/ 18288 h 18288"/>
-              <a:gd name="csX7" fmla="*/ 2779776 w 3474720"/>
-              <a:gd name="csY7" fmla="*/ 18288 h 18288"/>
-              <a:gd name="csX8" fmla="*/ 2189074 w 3474720"/>
-              <a:gd name="csY8" fmla="*/ 18288 h 18288"/>
-              <a:gd name="csX9" fmla="*/ 1528877 w 3474720"/>
-              <a:gd name="csY9" fmla="*/ 18288 h 18288"/>
-              <a:gd name="csX10" fmla="*/ 868680 w 3474720"/>
-              <a:gd name="csY10" fmla="*/ 18288 h 18288"/>
-              <a:gd name="csX11" fmla="*/ 0 w 3474720"/>
-              <a:gd name="csY11" fmla="*/ 18288 h 18288"/>
-              <a:gd name="csX12" fmla="*/ 0 w 3474720"/>
-              <a:gd name="csY12" fmla="*/ 0 h 18288"/>
-            </a:gdLst>
-            <a:ahLst/>
-            <a:cxnLst>
-              <a:cxn ang="0">
-                <a:pos x="csX0" y="csY0"/>
-              </a:cxn>
-              <a:cxn ang="0">
-                <a:pos x="csX1" y="csY1"/>
-              </a:cxn>
-              <a:cxn ang="0">
-                <a:pos x="csX2" y="csY2"/>
-              </a:cxn>
-              <a:cxn ang="0">
-                <a:pos x="csX3" y="csY3"/>
-              </a:cxn>
-              <a:cxn ang="0">
-                <a:pos x="csX4" y="csY4"/>
-              </a:cxn>
-              <a:cxn ang="0">
-                <a:pos x="csX5" y="csY5"/>
-              </a:cxn>
-              <a:cxn ang="0">
-                <a:pos x="csX6" y="csY6"/>
-              </a:cxn>
-              <a:cxn ang="0">
-                <a:pos x="csX7" y="csY7"/>
-              </a:cxn>
-              <a:cxn ang="0">
-                <a:pos x="csX8" y="csY8"/>
-              </a:cxn>
-              <a:cxn ang="0">
-                <a:pos x="csX9" y="csY9"/>
-              </a:cxn>
-              <a:cxn ang="0">
-                <a:pos x="csX10" y="csY10"/>
-              </a:cxn>
-              <a:cxn ang="0">
-                <a:pos x="csX11" y="csY11"/>
-              </a:cxn>
-              <a:cxn ang="0">
-                <a:pos x="csX12" y="csY12"/>
-              </a:cxn>
-            </a:cxnLst>
-            <a:rect l="l" t="t" r="r" b="b"/>
-            <a:pathLst>
-              <a:path w="3474720" h="18288" fill="none" extrusionOk="0">
-                <a:moveTo>
-                  <a:pt x="0" y="0"/>
-                </a:moveTo>
-                <a:cubicBezTo>
-                  <a:pt x="224454" y="-14544"/>
-                  <a:pt x="495407" y="26540"/>
-                  <a:pt x="694944" y="0"/>
-                </a:cubicBezTo>
-                <a:cubicBezTo>
-                  <a:pt x="894481" y="-26540"/>
-                  <a:pt x="1130063" y="24713"/>
-                  <a:pt x="1355141" y="0"/>
-                </a:cubicBezTo>
-                <a:cubicBezTo>
-                  <a:pt x="1580219" y="-24713"/>
-                  <a:pt x="1820099" y="26695"/>
-                  <a:pt x="2015338" y="0"/>
-                </a:cubicBezTo>
-                <a:cubicBezTo>
-                  <a:pt x="2210577" y="-26695"/>
-                  <a:pt x="2402045" y="165"/>
-                  <a:pt x="2779776" y="0"/>
-                </a:cubicBezTo>
-                <a:cubicBezTo>
-                  <a:pt x="3157507" y="-165"/>
-                  <a:pt x="3286859" y="-15571"/>
-                  <a:pt x="3474720" y="0"/>
-                </a:cubicBezTo>
-                <a:cubicBezTo>
-                  <a:pt x="3474286" y="7551"/>
-                  <a:pt x="3474253" y="9822"/>
-                  <a:pt x="3474720" y="18288"/>
-                </a:cubicBezTo>
-                <a:cubicBezTo>
-                  <a:pt x="3233904" y="29845"/>
-                  <a:pt x="2945134" y="-5256"/>
-                  <a:pt x="2779776" y="18288"/>
-                </a:cubicBezTo>
-                <a:cubicBezTo>
-                  <a:pt x="2614418" y="41832"/>
-                  <a:pt x="2339768" y="22709"/>
-                  <a:pt x="2189074" y="18288"/>
-                </a:cubicBezTo>
-                <a:cubicBezTo>
-                  <a:pt x="2038380" y="13867"/>
-                  <a:pt x="1817434" y="-4947"/>
-                  <a:pt x="1528877" y="18288"/>
-                </a:cubicBezTo>
-                <a:cubicBezTo>
-                  <a:pt x="1240320" y="41523"/>
-                  <a:pt x="1042447" y="37198"/>
-                  <a:pt x="868680" y="18288"/>
-                </a:cubicBezTo>
-                <a:cubicBezTo>
-                  <a:pt x="694913" y="-622"/>
-                  <a:pt x="233232" y="44909"/>
-                  <a:pt x="0" y="18288"/>
-                </a:cubicBezTo>
-                <a:cubicBezTo>
-                  <a:pt x="60" y="11696"/>
-                  <a:pt x="66" y="3758"/>
-                  <a:pt x="0" y="0"/>
-                </a:cubicBezTo>
-                <a:close/>
-              </a:path>
-              <a:path w="3474720" h="18288" stroke="0" extrusionOk="0">
-                <a:moveTo>
-                  <a:pt x="0" y="0"/>
-                </a:moveTo>
-                <a:cubicBezTo>
-                  <a:pt x="202328" y="-14716"/>
-                  <a:pt x="332722" y="-11499"/>
-                  <a:pt x="625450" y="0"/>
-                </a:cubicBezTo>
-                <a:cubicBezTo>
-                  <a:pt x="918178" y="11499"/>
-                  <a:pt x="1096688" y="5123"/>
-                  <a:pt x="1389888" y="0"/>
-                </a:cubicBezTo>
-                <a:cubicBezTo>
-                  <a:pt x="1683088" y="-5123"/>
-                  <a:pt x="1835981" y="-14038"/>
-                  <a:pt x="1980590" y="0"/>
-                </a:cubicBezTo>
-                <a:cubicBezTo>
-                  <a:pt x="2125199" y="14038"/>
-                  <a:pt x="2396099" y="-7203"/>
-                  <a:pt x="2571293" y="0"/>
-                </a:cubicBezTo>
-                <a:cubicBezTo>
-                  <a:pt x="2746487" y="7203"/>
-                  <a:pt x="3041609" y="-12036"/>
-                  <a:pt x="3474720" y="0"/>
-                </a:cubicBezTo>
-                <a:cubicBezTo>
-                  <a:pt x="3474638" y="4406"/>
-                  <a:pt x="3474631" y="9982"/>
-                  <a:pt x="3474720" y="18288"/>
-                </a:cubicBezTo>
-                <a:cubicBezTo>
-                  <a:pt x="3324873" y="21876"/>
-                  <a:pt x="3136771" y="12587"/>
-                  <a:pt x="2814523" y="18288"/>
-                </a:cubicBezTo>
-                <a:cubicBezTo>
-                  <a:pt x="2492275" y="23989"/>
-                  <a:pt x="2294402" y="47111"/>
-                  <a:pt x="2154326" y="18288"/>
-                </a:cubicBezTo>
-                <a:cubicBezTo>
-                  <a:pt x="2014250" y="-10535"/>
-                  <a:pt x="1820317" y="33903"/>
-                  <a:pt x="1494130" y="18288"/>
-                </a:cubicBezTo>
-                <a:cubicBezTo>
-                  <a:pt x="1167943" y="2673"/>
-                  <a:pt x="948432" y="14868"/>
-                  <a:pt x="729691" y="18288"/>
-                </a:cubicBezTo>
-                <a:cubicBezTo>
-                  <a:pt x="510950" y="21708"/>
-                  <a:pt x="264032" y="24354"/>
-                  <a:pt x="0" y="18288"/>
-                </a:cubicBezTo>
-                <a:cubicBezTo>
-                  <a:pt x="189" y="14288"/>
-                  <a:pt x="-703" y="3747"/>
-                  <a:pt x="0" y="0"/>
-                </a:cubicBezTo>
-                <a:close/>
-              </a:path>
-            </a:pathLst>
-          </a:custGeom>
+          </a:prstGeom>
           <a:solidFill>
-            <a:schemeClr val="accent2"/>
+            <a:schemeClr val="accent4"/>
           </a:solidFill>
-          <a:ln w="44450" cap="rnd">
-            <a:solidFill>
-              <a:schemeClr val="accent2"/>
-            </a:solidFill>
-            <a:round/>
-            <a:extLst>
-              <a:ext uri="{C807C97D-BFC1-408E-A445-0C87EB9F89A2}">
-                <ask:lineSketchStyleProps xmlns:ask="http://schemas.microsoft.com/office/drawing/2018/sketchyshapes" sd="2863741219">
-                  <a:prstGeom prst="rect">
-                    <a:avLst/>
-                  </a:prstGeom>
-                  <ask:type>
-                    <ask:lineSketchFreehand/>
-                  </ask:type>
-                </ask:lineSketchStyleProps>
-              </a:ext>
-            </a:extLst>
+          <a:ln>
+            <a:noFill/>
           </a:ln>
         </p:spPr>
         <p:style>
@@ -9003,35 +9059,159 @@
         </p:nvSpPr>
         <p:spPr>
           <a:xfrm>
-            <a:off x="640080" y="2872899"/>
-            <a:ext cx="4243589" cy="3320668"/>
+            <a:off x="590719" y="2330505"/>
+            <a:ext cx="4559425" cy="3979585"/>
           </a:xfrm>
         </p:spPr>
         <p:txBody>
-          <a:bodyPr>
+          <a:bodyPr anchor="ctr">
             <a:normAutofit/>
           </a:bodyPr>
           <a:lstStyle/>
           <a:p>
             <a:r>
-              <a:rPr lang="es-AR" sz="2200" dirty="0" err="1"/>
-              <a:t>Secteur</a:t>
-            </a:r>
-            <a:r>
-              <a:rPr lang="es-AR" sz="2200" dirty="0"/>
-              <a:t> </a:t>
-            </a:r>
-            <a:r>
-              <a:rPr lang="es-AR" sz="2200" dirty="0" err="1"/>
-              <a:t>d’activité</a:t>
-            </a:r>
-            <a:endParaRPr lang="es-AR" sz="2200" dirty="0"/>
-          </a:p>
-          <a:p>
-            <a:r>
-              <a:rPr lang="fr-FR" sz="2200" dirty="0"/>
+              <a:rPr lang="es-AR" sz="2000"/>
+              <a:t>Secteur d’activité</a:t>
+            </a:r>
+          </a:p>
+          <a:p>
+            <a:r>
+              <a:rPr lang="fr-FR" sz="2000"/>
               <a:t>Leurs besoins</a:t>
             </a:r>
+          </a:p>
+        </p:txBody>
+      </p:sp>
+      <p:sp>
+        <p:nvSpPr>
+          <p:cNvPr id="53" name="Rectangle 52">
+            <a:extLst>
+              <a:ext uri="{FF2B5EF4-FFF2-40B4-BE49-F238E27FC236}">
+                <a16:creationId xmlns:a16="http://schemas.microsoft.com/office/drawing/2014/main" id="{C13237C8-E62C-4F0D-A318-BD6FB6C2D138}"/>
+              </a:ext>
+              <a:ext uri="{C183D7F6-B498-43B3-948B-1728B52AA6E4}">
+                <adec:decorative xmlns:adec="http://schemas.microsoft.com/office/drawing/2017/decorative" val="1"/>
+              </a:ext>
+            </a:extLst>
+          </p:cNvPr>
+          <p:cNvSpPr>
+            <a:spLocks noGrp="1" noRot="1" noChangeAspect="1" noMove="1" noResize="1" noEditPoints="1" noAdjustHandles="1" noChangeArrowheads="1" noChangeShapeType="1" noTextEdit="1"/>
+          </p:cNvSpPr>
+          <p:nvPr>
+            <p:extLst>
+              <p:ext uri="{386F3935-93C4-4BCD-93E2-E3B085C9AB24}">
+                <p16:designElem xmlns:p16="http://schemas.microsoft.com/office/powerpoint/2015/main" val="1"/>
+              </p:ext>
+            </p:extLst>
+          </p:nvPr>
+        </p:nvSpPr>
+        <p:spPr>
+          <a:xfrm flipH="1">
+            <a:off x="10697670" y="0"/>
+            <a:ext cx="1494330" cy="6858000"/>
+          </a:xfrm>
+          <a:prstGeom prst="rect">
+            <a:avLst/>
+          </a:prstGeom>
+          <a:solidFill>
+            <a:schemeClr val="accent4"/>
+          </a:solidFill>
+          <a:ln>
+            <a:noFill/>
+          </a:ln>
+        </p:spPr>
+        <p:style>
+          <a:lnRef idx="2">
+            <a:schemeClr val="accent1">
+              <a:shade val="50000"/>
+            </a:schemeClr>
+          </a:lnRef>
+          <a:fillRef idx="1">
+            <a:schemeClr val="accent1"/>
+          </a:fillRef>
+          <a:effectRef idx="0">
+            <a:schemeClr val="accent1"/>
+          </a:effectRef>
+          <a:fontRef idx="minor">
+            <a:schemeClr val="lt1"/>
+          </a:fontRef>
+        </p:style>
+        <p:txBody>
+          <a:bodyPr rtlCol="0" anchor="ctr"/>
+          <a:lstStyle/>
+          <a:p>
+            <a:pPr algn="ctr"/>
+            <a:endParaRPr lang="en-US"/>
+          </a:p>
+        </p:txBody>
+      </p:sp>
+      <p:sp>
+        <p:nvSpPr>
+          <p:cNvPr id="55" name="Rectangle 54">
+            <a:extLst>
+              <a:ext uri="{FF2B5EF4-FFF2-40B4-BE49-F238E27FC236}">
+                <a16:creationId xmlns:a16="http://schemas.microsoft.com/office/drawing/2014/main" id="{19C9EAEA-39D0-4B0E-A0EB-51E7B26740B1}"/>
+              </a:ext>
+              <a:ext uri="{C183D7F6-B498-43B3-948B-1728B52AA6E4}">
+                <adec:decorative xmlns:adec="http://schemas.microsoft.com/office/drawing/2017/decorative" val="1"/>
+              </a:ext>
+            </a:extLst>
+          </p:cNvPr>
+          <p:cNvSpPr>
+            <a:spLocks noGrp="1" noRot="1" noChangeAspect="1" noMove="1" noResize="1" noEditPoints="1" noAdjustHandles="1" noChangeArrowheads="1" noChangeShapeType="1" noTextEdit="1"/>
+          </p:cNvSpPr>
+          <p:nvPr>
+            <p:extLst>
+              <p:ext uri="{386F3935-93C4-4BCD-93E2-E3B085C9AB24}">
+                <p16:designElem xmlns:p16="http://schemas.microsoft.com/office/powerpoint/2015/main" val="1"/>
+              </p:ext>
+            </p:extLst>
+          </p:nvPr>
+        </p:nvSpPr>
+        <p:spPr>
+          <a:xfrm>
+            <a:off x="5685810" y="513853"/>
+            <a:ext cx="6009366" cy="5834577"/>
+          </a:xfrm>
+          <a:prstGeom prst="rect">
+            <a:avLst/>
+          </a:prstGeom>
+          <a:solidFill>
+            <a:schemeClr val="bg1"/>
+          </a:solidFill>
+          <a:ln>
+            <a:noFill/>
+          </a:ln>
+          <a:effectLst>
+            <a:outerShdw blurRad="139700" dist="127000" dir="5400000" algn="t" rotWithShape="0">
+              <a:prstClr val="black">
+                <a:alpha val="15000"/>
+              </a:prstClr>
+            </a:outerShdw>
+          </a:effectLst>
+        </p:spPr>
+        <p:style>
+          <a:lnRef idx="2">
+            <a:schemeClr val="accent1">
+              <a:shade val="50000"/>
+            </a:schemeClr>
+          </a:lnRef>
+          <a:fillRef idx="1">
+            <a:schemeClr val="accent1"/>
+          </a:fillRef>
+          <a:effectRef idx="0">
+            <a:schemeClr val="accent1"/>
+          </a:effectRef>
+          <a:fontRef idx="minor">
+            <a:schemeClr val="lt1"/>
+          </a:fontRef>
+        </p:style>
+        <p:txBody>
+          <a:bodyPr rtlCol="0" anchor="ctr"/>
+          <a:lstStyle/>
+          <a:p>
+            <a:pPr algn="ctr"/>
+            <a:endParaRPr lang="en-US"/>
           </a:p>
         </p:txBody>
       </p:sp>
@@ -9057,131 +9237,19 @@
               </a:ext>
             </a:extLst>
           </a:blip>
-          <a:srcRect l="16803" r="16496"/>
+          <a:srcRect l="15853" r="15547" b="1"/>
           <a:stretch>
             <a:fillRect/>
           </a:stretch>
         </p:blipFill>
         <p:spPr>
           <a:xfrm>
-            <a:off x="5311702" y="10"/>
-            <a:ext cx="6878775" cy="6857990"/>
+            <a:off x="5977788" y="799352"/>
+            <a:ext cx="5425410" cy="5259296"/>
           </a:xfrm>
-          <a:custGeom>
+          <a:prstGeom prst="rect">
             <a:avLst/>
-            <a:gdLst/>
-            <a:ahLst/>
-            <a:cxnLst/>
-            <a:rect l="l" t="t" r="r" b="b"/>
-            <a:pathLst>
-              <a:path w="6878775" h="6858000">
-                <a:moveTo>
-                  <a:pt x="1102973" y="0"/>
-                </a:moveTo>
-                <a:lnTo>
-                  <a:pt x="1160688" y="0"/>
-                </a:lnTo>
-                <a:lnTo>
-                  <a:pt x="983189" y="331786"/>
-                </a:lnTo>
-                <a:cubicBezTo>
-                  <a:pt x="914866" y="469145"/>
-                  <a:pt x="850355" y="608712"/>
-                  <a:pt x="789261" y="750263"/>
-                </a:cubicBezTo>
-                <a:cubicBezTo>
-                  <a:pt x="774307" y="784928"/>
-                  <a:pt x="759992" y="819849"/>
-                  <a:pt x="745295" y="854514"/>
-                </a:cubicBezTo>
-                <a:cubicBezTo>
-                  <a:pt x="756682" y="845393"/>
-                  <a:pt x="765489" y="833492"/>
-                  <a:pt x="770857" y="819975"/>
-                </a:cubicBezTo>
-                <a:cubicBezTo>
-                  <a:pt x="879943" y="589569"/>
-                  <a:pt x="999605" y="365513"/>
-                  <a:pt x="1131329" y="148742"/>
-                </a:cubicBezTo>
-                <a:lnTo>
-                  <a:pt x="1227589" y="0"/>
-                </a:lnTo>
-                <a:lnTo>
-                  <a:pt x="6878775" y="0"/>
-                </a:lnTo>
-                <a:lnTo>
-                  <a:pt x="6878775" y="6858000"/>
-                </a:lnTo>
-                <a:lnTo>
-                  <a:pt x="713521" y="6858000"/>
-                </a:lnTo>
-                <a:lnTo>
-                  <a:pt x="625642" y="6670527"/>
-                </a:lnTo>
-                <a:cubicBezTo>
-                  <a:pt x="507232" y="6398531"/>
-                  <a:pt x="403083" y="6118381"/>
-                  <a:pt x="312785" y="5830359"/>
-                </a:cubicBezTo>
-                <a:cubicBezTo>
-                  <a:pt x="278149" y="5719759"/>
-                  <a:pt x="248879" y="5607635"/>
-                  <a:pt x="212198" y="5480401"/>
-                </a:cubicBezTo>
-                <a:cubicBezTo>
-                  <a:pt x="212208" y="5491601"/>
-                  <a:pt x="212803" y="5502788"/>
-                  <a:pt x="213988" y="5513923"/>
-                </a:cubicBezTo>
-                <a:cubicBezTo>
-                  <a:pt x="264089" y="5723695"/>
-                  <a:pt x="307290" y="5935370"/>
-                  <a:pt x="365826" y="6142729"/>
-                </a:cubicBezTo>
-                <a:cubicBezTo>
-                  <a:pt x="433152" y="6380817"/>
-                  <a:pt x="510068" y="6614016"/>
-                  <a:pt x="597975" y="6841549"/>
-                </a:cubicBezTo>
-                <a:lnTo>
-                  <a:pt x="604824" y="6858000"/>
-                </a:lnTo>
-                <a:lnTo>
-                  <a:pt x="552056" y="6858000"/>
-                </a:lnTo>
-                <a:lnTo>
-                  <a:pt x="539576" y="6828295"/>
-                </a:lnTo>
-                <a:cubicBezTo>
-                  <a:pt x="380597" y="6414594"/>
-                  <a:pt x="260223" y="5988893"/>
-                  <a:pt x="171555" y="5552906"/>
-                </a:cubicBezTo>
-                <a:cubicBezTo>
-                  <a:pt x="91163" y="5157998"/>
-                  <a:pt x="43746" y="4758899"/>
-                  <a:pt x="12305" y="4357388"/>
-                </a:cubicBezTo>
-                <a:cubicBezTo>
-                  <a:pt x="-14281" y="4013908"/>
-                  <a:pt x="4507" y="3672965"/>
-                  <a:pt x="46684" y="3331516"/>
-                </a:cubicBezTo>
-                <a:cubicBezTo>
-                  <a:pt x="127203" y="2664286"/>
-                  <a:pt x="277819" y="2007265"/>
-                  <a:pt x="496065" y="1371196"/>
-                </a:cubicBezTo>
-                <a:cubicBezTo>
-                  <a:pt x="636273" y="966066"/>
-                  <a:pt x="800445" y="573253"/>
-                  <a:pt x="995723" y="196614"/>
-                </a:cubicBezTo>
-                <a:close/>
-              </a:path>
-            </a:pathLst>
-          </a:custGeom>
+          </a:prstGeom>
         </p:spPr>
       </p:pic>
     </p:spTree>
@@ -9197,7 +9265,7 @@
 </p:sld>
 </file>
 
-<file path=ppt/slides/slide5.xml><?xml version="1.0" encoding="utf-8"?>
+<file path=ppt/slides/slide4.xml><?xml version="1.0" encoding="utf-8"?>
 <p:sld xmlns:a="http://schemas.openxmlformats.org/drawingml/2006/main" xmlns:r="http://schemas.openxmlformats.org/officeDocument/2006/relationships" xmlns:p="http://schemas.openxmlformats.org/presentationml/2006/main">
   <p:cSld>
     <p:bg>
@@ -9230,10 +9298,10 @@
       </p:grpSpPr>
       <p:sp useBgFill="1">
         <p:nvSpPr>
-          <p:cNvPr id="27" name="Rectangle 26">
-            <a:extLst>
-              <a:ext uri="{FF2B5EF4-FFF2-40B4-BE49-F238E27FC236}">
-                <a16:creationId xmlns:a16="http://schemas.microsoft.com/office/drawing/2014/main" id="{9E25D8C7-A5E1-D7D5-D32A-8597369F3228}"/>
+          <p:cNvPr id="38" name="Rectangle 37">
+            <a:extLst>
+              <a:ext uri="{FF2B5EF4-FFF2-40B4-BE49-F238E27FC236}">
+                <a16:creationId xmlns:a16="http://schemas.microsoft.com/office/drawing/2014/main" id="{058A14AF-9FB5-4CC7-BA35-E8E85D3EDF0E}"/>
               </a:ext>
               <a:ext uri="{C183D7F6-B498-43B3-948B-1728B52AA6E4}">
                 <adec:decorative xmlns:adec="http://schemas.microsoft.com/office/drawing/2017/decorative" val="1"/>
@@ -9317,19 +9385,19 @@
           <a:lstStyle/>
           <a:p>
             <a:r>
-              <a:rPr lang="fr-FR" sz="3400" b="1" dirty="0"/>
+              <a:rPr lang="fr-FR" sz="4800" b="1"/>
               <a:t>Types de données à  dispositions</a:t>
             </a:r>
-            <a:endParaRPr lang="es-AR" sz="3400" dirty="0"/>
-          </a:p>
-        </p:txBody>
-      </p:sp>
-      <p:sp>
-        <p:nvSpPr>
-          <p:cNvPr id="29" name="Rectangle 28">
-            <a:extLst>
-              <a:ext uri="{FF2B5EF4-FFF2-40B4-BE49-F238E27FC236}">
-                <a16:creationId xmlns:a16="http://schemas.microsoft.com/office/drawing/2014/main" id="{12AD0C5F-4032-F87B-AFA9-8AED8C41F78E}"/>
+            <a:endParaRPr lang="es-AR" sz="4800"/>
+          </a:p>
+        </p:txBody>
+      </p:sp>
+      <p:sp>
+        <p:nvSpPr>
+          <p:cNvPr id="40" name="Rectangle 39">
+            <a:extLst>
+              <a:ext uri="{FF2B5EF4-FFF2-40B4-BE49-F238E27FC236}">
+                <a16:creationId xmlns:a16="http://schemas.microsoft.com/office/drawing/2014/main" id="{3A9A4357-BD1D-4622-A4FE-766E6AB8DE84}"/>
               </a:ext>
               <a:ext uri="{C183D7F6-B498-43B3-948B-1728B52AA6E4}">
                 <adec:decorative xmlns:adec="http://schemas.microsoft.com/office/drawing/2017/decorative" val="1"/>
@@ -9389,10 +9457,10 @@
       </p:sp>
       <p:sp>
         <p:nvSpPr>
-          <p:cNvPr id="31" name="Rectangle 30">
-            <a:extLst>
-              <a:ext uri="{FF2B5EF4-FFF2-40B4-BE49-F238E27FC236}">
-                <a16:creationId xmlns:a16="http://schemas.microsoft.com/office/drawing/2014/main" id="{4930E113-4D84-460A-38C1-851116178DE6}"/>
+          <p:cNvPr id="42" name="Rectangle 41">
+            <a:extLst>
+              <a:ext uri="{FF2B5EF4-FFF2-40B4-BE49-F238E27FC236}">
+                <a16:creationId xmlns:a16="http://schemas.microsoft.com/office/drawing/2014/main" id="{E659831F-0D9A-4C63-9EBB-8435B85A440F}"/>
               </a:ext>
               <a:ext uri="{C183D7F6-B498-43B3-948B-1728B52AA6E4}">
                 <adec:decorative xmlns:adec="http://schemas.microsoft.com/office/drawing/2017/decorative" val="1"/>
@@ -9491,20 +9559,6 @@
             </a:r>
           </a:p>
           <a:p>
-            <a:pPr lvl="1"/>
-            <a:r>
-              <a:rPr lang="fr-FR" sz="1600" dirty="0"/>
-              <a:t>Listes et  quantité de matériaux prévisionnelle </a:t>
-            </a:r>
-          </a:p>
-          <a:p>
-            <a:pPr lvl="1"/>
-            <a:r>
-              <a:rPr lang="fr-FR" sz="1600" dirty="0"/>
-              <a:t>Estimations du nombre d’heurs de main d’œuvres </a:t>
-            </a:r>
-          </a:p>
-          <a:p>
             <a:r>
               <a:rPr lang="fr-FR" sz="2000" dirty="0"/>
               <a:t>Un fichier </a:t>
@@ -9515,34 +9569,14 @@
             </a:r>
             <a:endParaRPr lang="fr-FR" sz="2000" dirty="0"/>
           </a:p>
-          <a:p>
-            <a:pPr lvl="1"/>
-            <a:r>
-              <a:rPr lang="fr-FR" sz="1600" dirty="0"/>
-              <a:t>Image 3D</a:t>
-            </a:r>
-          </a:p>
-          <a:p>
-            <a:pPr lvl="1"/>
-            <a:r>
-              <a:rPr lang="fr-FR" sz="1600" dirty="0"/>
-              <a:t>Fichiers Vectorisé </a:t>
-            </a:r>
-          </a:p>
-          <a:p>
-            <a:pPr marL="0" indent="0">
-              <a:buNone/>
-            </a:pPr>
-            <a:endParaRPr lang="fr-FR" sz="2000" dirty="0"/>
-          </a:p>
-        </p:txBody>
-      </p:sp>
-      <p:sp>
-        <p:nvSpPr>
-          <p:cNvPr id="33" name="Rectangle 32">
-            <a:extLst>
-              <a:ext uri="{FF2B5EF4-FFF2-40B4-BE49-F238E27FC236}">
-                <a16:creationId xmlns:a16="http://schemas.microsoft.com/office/drawing/2014/main" id="{C0150497-486E-1342-8ACD-96C5E9462B48}"/>
+        </p:txBody>
+      </p:sp>
+      <p:sp>
+        <p:nvSpPr>
+          <p:cNvPr id="44" name="Rectangle 43">
+            <a:extLst>
+              <a:ext uri="{FF2B5EF4-FFF2-40B4-BE49-F238E27FC236}">
+                <a16:creationId xmlns:a16="http://schemas.microsoft.com/office/drawing/2014/main" id="{E6995CE5-F890-4ABA-82A2-26507CE8D2A3}"/>
               </a:ext>
               <a:ext uri="{C183D7F6-B498-43B3-948B-1728B52AA6E4}">
                 <adec:decorative xmlns:adec="http://schemas.microsoft.com/office/drawing/2017/decorative" val="1"/>
@@ -9667,7 +9701,7 @@
 </p:sld>
 </file>
 
-<file path=ppt/slides/slide6.xml><?xml version="1.0" encoding="utf-8"?>
+<file path=ppt/slides/slide5.xml><?xml version="1.0" encoding="utf-8"?>
 <p:sld xmlns:a="http://schemas.openxmlformats.org/drawingml/2006/main" xmlns:r="http://schemas.openxmlformats.org/officeDocument/2006/relationships" xmlns:p="http://schemas.openxmlformats.org/presentationml/2006/main">
   <p:cSld>
     <p:bg>
@@ -9680,13 +9714,7 @@
     </p:bg>
     <p:spTree>
       <p:nvGrpSpPr>
-        <p:cNvPr id="1" name="">
-          <a:extLst>
-            <a:ext uri="{FF2B5EF4-FFF2-40B4-BE49-F238E27FC236}">
-              <a16:creationId xmlns:a16="http://schemas.microsoft.com/office/drawing/2014/main" id="{4C70D074-227B-6486-F50D-E36918CECC07}"/>
-            </a:ext>
-          </a:extLst>
-        </p:cNvPr>
+        <p:cNvPr id="1" name=""/>
         <p:cNvGrpSpPr/>
         <p:nvPr/>
       </p:nvGrpSpPr>
@@ -9700,10 +9728,10 @@
       </p:grpSpPr>
       <p:sp useBgFill="1">
         <p:nvSpPr>
-          <p:cNvPr id="27" name="Rectangle 26">
-            <a:extLst>
-              <a:ext uri="{FF2B5EF4-FFF2-40B4-BE49-F238E27FC236}">
-                <a16:creationId xmlns:a16="http://schemas.microsoft.com/office/drawing/2014/main" id="{3D38820B-B6D1-E9BA-4E9A-2F7E4B930703}"/>
+          <p:cNvPr id="35" name="Rectangle 34">
+            <a:extLst>
+              <a:ext uri="{FF2B5EF4-FFF2-40B4-BE49-F238E27FC236}">
+                <a16:creationId xmlns:a16="http://schemas.microsoft.com/office/drawing/2014/main" id="{FFB60E8C-7224-44A4-87A0-46A1711DD2ED}"/>
               </a:ext>
               <a:ext uri="{C183D7F6-B498-43B3-948B-1728B52AA6E4}">
                 <adec:decorative xmlns:adec="http://schemas.microsoft.com/office/drawing/2017/decorative" val="1"/>
@@ -9763,7 +9791,7 @@
           <p:cNvPr id="2" name="Titre 1">
             <a:extLst>
               <a:ext uri="{FF2B5EF4-FFF2-40B4-BE49-F238E27FC236}">
-                <a16:creationId xmlns:a16="http://schemas.microsoft.com/office/drawing/2014/main" id="{C2ED3A8B-7AD6-AD16-249B-BACAEB2F099A}"/>
+                <a16:creationId xmlns:a16="http://schemas.microsoft.com/office/drawing/2014/main" id="{E1E92D83-42A4-0D83-4B6B-105F6E5598AD}"/>
               </a:ext>
             </a:extLst>
           </p:cNvPr>
@@ -9776,8 +9804,8 @@
         </p:nvSpPr>
         <p:spPr>
           <a:xfrm>
-            <a:off x="793662" y="386930"/>
-            <a:ext cx="10066122" cy="1298448"/>
+            <a:off x="795528" y="386930"/>
+            <a:ext cx="10141799" cy="1300554"/>
           </a:xfrm>
         </p:spPr>
         <p:txBody>
@@ -9787,26 +9815,19 @@
           <a:lstStyle/>
           <a:p>
             <a:r>
-              <a:rPr lang="fr-FR" sz="3400" b="1" dirty="0"/>
-              <a:t>Objectif: </a:t>
-            </a:r>
-            <a:br>
-              <a:rPr lang="fr-FR" sz="3400" b="1" dirty="0"/>
-            </a:br>
-            <a:r>
-              <a:rPr lang="fr-FR" sz="3400" dirty="0"/>
-              <a:t>Automatiser une première estimation de prix à partir :</a:t>
-            </a:r>
-            <a:endParaRPr lang="es-AR" sz="3400" dirty="0"/>
-          </a:p>
-        </p:txBody>
-      </p:sp>
-      <p:sp>
-        <p:nvSpPr>
-          <p:cNvPr id="29" name="Rectangle 28">
-            <a:extLst>
-              <a:ext uri="{FF2B5EF4-FFF2-40B4-BE49-F238E27FC236}">
-                <a16:creationId xmlns:a16="http://schemas.microsoft.com/office/drawing/2014/main" id="{762E16AE-F38D-D717-6480-AF8B4F7D32BD}"/>
+              <a:rPr lang="fr-FR" sz="4800" dirty="0"/>
+              <a:t>Estimation par LLM</a:t>
+            </a:r>
+            <a:endParaRPr lang="es-AR" sz="4800" dirty="0"/>
+          </a:p>
+        </p:txBody>
+      </p:sp>
+      <p:sp>
+        <p:nvSpPr>
+          <p:cNvPr id="37" name="Rectangle 36">
+            <a:extLst>
+              <a:ext uri="{FF2B5EF4-FFF2-40B4-BE49-F238E27FC236}">
+                <a16:creationId xmlns:a16="http://schemas.microsoft.com/office/drawing/2014/main" id="{5DA32751-37A2-45C0-BE94-63D375E27003}"/>
               </a:ext>
               <a:ext uri="{C183D7F6-B498-43B3-948B-1728B52AA6E4}">
                 <adec:decorative xmlns:adec="http://schemas.microsoft.com/office/drawing/2017/decorative" val="1"/>
@@ -9866,10 +9887,10 @@
       </p:sp>
       <p:sp>
         <p:nvSpPr>
-          <p:cNvPr id="31" name="Rectangle 30">
-            <a:extLst>
-              <a:ext uri="{FF2B5EF4-FFF2-40B4-BE49-F238E27FC236}">
-                <a16:creationId xmlns:a16="http://schemas.microsoft.com/office/drawing/2014/main" id="{CEE873F9-D6AA-D3B0-B725-57C2332CADA9}"/>
+          <p:cNvPr id="39" name="Rectangle 38">
+            <a:extLst>
+              <a:ext uri="{FF2B5EF4-FFF2-40B4-BE49-F238E27FC236}">
+                <a16:creationId xmlns:a16="http://schemas.microsoft.com/office/drawing/2014/main" id="{E659831F-0D9A-4C63-9EBB-8435B85A440F}"/>
               </a:ext>
               <a:ext uri="{C183D7F6-B498-43B3-948B-1728B52AA6E4}">
                 <adec:decorative xmlns:adec="http://schemas.microsoft.com/office/drawing/2017/decorative" val="1"/>
@@ -9934,65 +9955,12 @@
           </a:p>
         </p:txBody>
       </p:sp>
-      <p:sp>
-        <p:nvSpPr>
-          <p:cNvPr id="3" name="Espace réservé du contenu 2">
-            <a:extLst>
-              <a:ext uri="{FF2B5EF4-FFF2-40B4-BE49-F238E27FC236}">
-                <a16:creationId xmlns:a16="http://schemas.microsoft.com/office/drawing/2014/main" id="{0584564A-77EF-7106-0F3C-A83FFA0B85A3}"/>
-              </a:ext>
-            </a:extLst>
-          </p:cNvPr>
-          <p:cNvSpPr>
-            <a:spLocks noGrp="1"/>
-          </p:cNvSpPr>
-          <p:nvPr>
-            <p:ph idx="1"/>
-          </p:nvPr>
-        </p:nvSpPr>
-        <p:spPr>
-          <a:xfrm>
-            <a:off x="793661" y="2599509"/>
-            <a:ext cx="4530898" cy="3639450"/>
-          </a:xfrm>
-        </p:spPr>
-        <p:txBody>
-          <a:bodyPr anchor="ctr">
-            <a:normAutofit/>
-          </a:bodyPr>
-          <a:lstStyle/>
-          <a:p>
-            <a:r>
-              <a:rPr lang="fr-FR" sz="2000" dirty="0"/>
-              <a:t>du modèle 3D </a:t>
-            </a:r>
-            <a:r>
-              <a:rPr lang="fr-FR" sz="2000"/>
-              <a:t>Vectorworks</a:t>
-            </a:r>
-            <a:endParaRPr lang="fr-FR" sz="2000" dirty="0"/>
-          </a:p>
-          <a:p>
-            <a:r>
-              <a:rPr lang="fr-FR" sz="2000" dirty="0"/>
-              <a:t>d’une image du meuble</a:t>
-            </a:r>
-          </a:p>
-          <a:p>
-            <a:r>
-              <a:rPr lang="fr-FR" sz="2000" dirty="0"/>
-              <a:t>des matériaux utilisés</a:t>
-            </a:r>
-            <a:endParaRPr lang="es-AR" sz="2000" dirty="0"/>
-          </a:p>
-        </p:txBody>
-      </p:sp>
       <p:pic>
         <p:nvPicPr>
-          <p:cNvPr id="7" name="Image 6" descr="Une image contenant texte, capture d’écran, Police&#10;&#10;Le contenu généré par l’IA peut être incorrect.">
-            <a:extLst>
-              <a:ext uri="{FF2B5EF4-FFF2-40B4-BE49-F238E27FC236}">
-                <a16:creationId xmlns:a16="http://schemas.microsoft.com/office/drawing/2014/main" id="{A91825A0-4B89-DC2E-E33F-6D9929C5B83D}"/>
+          <p:cNvPr id="5" name="Image 4" descr="Une image contenant Graphique, logo, graphisme, Police&#10;&#10;Le contenu généré par l’IA peut être incorrect.">
+            <a:extLst>
+              <a:ext uri="{FF2B5EF4-FFF2-40B4-BE49-F238E27FC236}">
+                <a16:creationId xmlns:a16="http://schemas.microsoft.com/office/drawing/2014/main" id="{6E739D2C-9F2D-81DF-AC90-D807A2518431}"/>
               </a:ext>
             </a:extLst>
           </p:cNvPr>
@@ -10002,7 +9970,7 @@
           <p:nvPr/>
         </p:nvPicPr>
         <p:blipFill>
-          <a:blip r:embed="rId2">
+          <a:blip r:embed="rId3">
             <a:extLst>
               <a:ext uri="{28A0092B-C50C-407E-A947-70E740481C1C}">
                 <a14:useLocalDpi xmlns:a14="http://schemas.microsoft.com/office/drawing/2010/main" val="0"/>
@@ -10015,8 +9983,8 @@
         </p:blipFill>
         <p:spPr>
           <a:xfrm>
-            <a:off x="5911532" y="2525904"/>
-            <a:ext cx="5150277" cy="3630945"/>
+            <a:off x="5866427" y="2888559"/>
+            <a:ext cx="5150277" cy="2897030"/>
           </a:xfrm>
           <a:prstGeom prst="rect">
             <a:avLst/>
@@ -10025,10 +9993,68 @@
       </p:pic>
       <p:sp>
         <p:nvSpPr>
-          <p:cNvPr id="33" name="Rectangle 32">
-            <a:extLst>
-              <a:ext uri="{FF2B5EF4-FFF2-40B4-BE49-F238E27FC236}">
-                <a16:creationId xmlns:a16="http://schemas.microsoft.com/office/drawing/2014/main" id="{749751A6-48D8-07C8-4A81-CEE6C8880BB4}"/>
+          <p:cNvPr id="9" name="Espace réservé du contenu 2">
+            <a:extLst>
+              <a:ext uri="{FF2B5EF4-FFF2-40B4-BE49-F238E27FC236}">
+                <a16:creationId xmlns:a16="http://schemas.microsoft.com/office/drawing/2014/main" id="{AD9495C3-24A6-984B-723E-E2C14A37017C}"/>
+              </a:ext>
+            </a:extLst>
+          </p:cNvPr>
+          <p:cNvSpPr>
+            <a:spLocks noGrp="1"/>
+          </p:cNvSpPr>
+          <p:nvPr>
+            <p:ph idx="1"/>
+          </p:nvPr>
+        </p:nvSpPr>
+        <p:spPr>
+          <a:xfrm>
+            <a:off x="476934" y="2389218"/>
+            <a:ext cx="4530898" cy="3639450"/>
+          </a:xfrm>
+        </p:spPr>
+        <p:txBody>
+          <a:bodyPr anchor="ctr">
+            <a:normAutofit/>
+          </a:bodyPr>
+          <a:lstStyle/>
+          <a:p>
+            <a:endParaRPr lang="es-AR" sz="2000" dirty="0"/>
+          </a:p>
+          <a:p>
+            <a:r>
+              <a:rPr lang="es-AR" sz="2000" dirty="0" err="1"/>
+              <a:t>Multimodale</a:t>
+            </a:r>
+            <a:endParaRPr lang="es-AR" sz="2000" dirty="0"/>
+          </a:p>
+          <a:p>
+            <a:r>
+              <a:rPr lang="es-AR" sz="2000" dirty="0" err="1"/>
+              <a:t>Raisonnement</a:t>
+            </a:r>
+            <a:endParaRPr lang="es-AR" sz="2000" dirty="0"/>
+          </a:p>
+          <a:p>
+            <a:r>
+              <a:rPr lang="fr-FR" sz="2000" dirty="0"/>
+              <a:t>Gemini 2.5 flash</a:t>
+            </a:r>
+          </a:p>
+          <a:p>
+            <a:pPr marL="0" indent="0">
+              <a:buNone/>
+            </a:pPr>
+            <a:endParaRPr lang="es-AR" sz="2000" dirty="0"/>
+          </a:p>
+        </p:txBody>
+      </p:sp>
+      <p:sp>
+        <p:nvSpPr>
+          <p:cNvPr id="41" name="Rectangle 40">
+            <a:extLst>
+              <a:ext uri="{FF2B5EF4-FFF2-40B4-BE49-F238E27FC236}">
+                <a16:creationId xmlns:a16="http://schemas.microsoft.com/office/drawing/2014/main" id="{5A55FBCD-CD42-40F5-8A1B-3203F9CAEEAA}"/>
               </a:ext>
               <a:ext uri="{C183D7F6-B498-43B3-948B-1728B52AA6E4}">
                 <adec:decorative xmlns:adec="http://schemas.microsoft.com/office/drawing/2017/decorative" val="1"/>
@@ -10086,64 +10112,10 @@
           </a:p>
         </p:txBody>
       </p:sp>
-      <p:sp>
-        <p:nvSpPr>
-          <p:cNvPr id="6" name="Rectangle 5">
-            <a:extLst>
-              <a:ext uri="{FF2B5EF4-FFF2-40B4-BE49-F238E27FC236}">
-                <a16:creationId xmlns:a16="http://schemas.microsoft.com/office/drawing/2014/main" id="{8CF89D92-98C0-F33E-7251-26F1E303709B}"/>
-              </a:ext>
-            </a:extLst>
-          </p:cNvPr>
-          <p:cNvSpPr/>
-          <p:nvPr/>
-        </p:nvSpPr>
-        <p:spPr>
-          <a:xfrm>
-            <a:off x="9953248" y="5852049"/>
-            <a:ext cx="977153" cy="304800"/>
-          </a:xfrm>
-          <a:prstGeom prst="rect">
-            <a:avLst/>
-          </a:prstGeom>
-          <a:solidFill>
-            <a:schemeClr val="bg1"/>
-          </a:solidFill>
-          <a:ln>
-            <a:solidFill>
-              <a:schemeClr val="bg1"/>
-            </a:solidFill>
-          </a:ln>
-        </p:spPr>
-        <p:style>
-          <a:lnRef idx="2">
-            <a:schemeClr val="accent1">
-              <a:shade val="15000"/>
-            </a:schemeClr>
-          </a:lnRef>
-          <a:fillRef idx="1">
-            <a:schemeClr val="accent1"/>
-          </a:fillRef>
-          <a:effectRef idx="0">
-            <a:schemeClr val="accent1"/>
-          </a:effectRef>
-          <a:fontRef idx="minor">
-            <a:schemeClr val="lt1"/>
-          </a:fontRef>
-        </p:style>
-        <p:txBody>
-          <a:bodyPr rtlCol="0" anchor="ctr"/>
-          <a:lstStyle/>
-          <a:p>
-            <a:pPr algn="ctr"/>
-            <a:endParaRPr lang="es-AR"/>
-          </a:p>
-        </p:txBody>
-      </p:sp>
     </p:spTree>
     <p:extLst>
       <p:ext uri="{BB962C8B-B14F-4D97-AF65-F5344CB8AC3E}">
-        <p14:creationId xmlns:p14="http://schemas.microsoft.com/office/powerpoint/2010/main" val="3092009471"/>
+        <p14:creationId xmlns:p14="http://schemas.microsoft.com/office/powerpoint/2010/main" val="480561951"/>
       </p:ext>
     </p:extLst>
   </p:cSld>
@@ -10153,7 +10125,7 @@
 </p:sld>
 </file>
 
-<file path=ppt/slides/slide7.xml><?xml version="1.0" encoding="utf-8"?>
+<file path=ppt/slides/slide6.xml><?xml version="1.0" encoding="utf-8"?>
 <p:sld xmlns:a="http://schemas.openxmlformats.org/drawingml/2006/main" xmlns:r="http://schemas.openxmlformats.org/officeDocument/2006/relationships" xmlns:p="http://schemas.openxmlformats.org/presentationml/2006/main">
   <p:cSld>
     <p:bg>
@@ -10180,10 +10152,10 @@
       </p:grpSpPr>
       <p:sp useBgFill="1">
         <p:nvSpPr>
-          <p:cNvPr id="21" name="Rectangle 20">
-            <a:extLst>
-              <a:ext uri="{FF2B5EF4-FFF2-40B4-BE49-F238E27FC236}">
-                <a16:creationId xmlns:a16="http://schemas.microsoft.com/office/drawing/2014/main" id="{058A14AF-9FB5-4CC7-BA35-E8E85D3EDF0E}"/>
+          <p:cNvPr id="77" name="Rectangle 76">
+            <a:extLst>
+              <a:ext uri="{FF2B5EF4-FFF2-40B4-BE49-F238E27FC236}">
+                <a16:creationId xmlns:a16="http://schemas.microsoft.com/office/drawing/2014/main" id="{BA79A7CF-01AF-4178-9369-94E0C90EB046}"/>
               </a:ext>
               <a:ext uri="{C183D7F6-B498-43B3-948B-1728B52AA6E4}">
                 <adec:decorative xmlns:adec="http://schemas.microsoft.com/office/drawing/2017/decorative" val="1"/>
@@ -10243,6 +10215,753 @@
           <p:cNvPr id="2" name="Titre 1">
             <a:extLst>
               <a:ext uri="{FF2B5EF4-FFF2-40B4-BE49-F238E27FC236}">
+                <a16:creationId xmlns:a16="http://schemas.microsoft.com/office/drawing/2014/main" id="{150DEDDE-9DED-37E1-9349-816BE7196BFE}"/>
+              </a:ext>
+            </a:extLst>
+          </p:cNvPr>
+          <p:cNvSpPr>
+            <a:spLocks noGrp="1"/>
+          </p:cNvSpPr>
+          <p:nvPr>
+            <p:ph type="title"/>
+          </p:nvPr>
+        </p:nvSpPr>
+        <p:spPr>
+          <a:xfrm>
+            <a:off x="9267909" y="2023110"/>
+            <a:ext cx="2469624" cy="2846070"/>
+          </a:xfrm>
+        </p:spPr>
+        <p:txBody>
+          <a:bodyPr vert="horz" lIns="91440" tIns="45720" rIns="91440" bIns="45720" rtlCol="0" anchor="ctr">
+            <a:normAutofit/>
+          </a:bodyPr>
+          <a:lstStyle/>
+          <a:p>
+            <a:r>
+              <a:rPr lang="en-US" sz="3700" kern="1200" dirty="0">
+                <a:solidFill>
+                  <a:schemeClr val="tx1"/>
+                </a:solidFill>
+                <a:latin typeface="+mj-lt"/>
+                <a:ea typeface="+mj-ea"/>
+                <a:cs typeface="+mj-cs"/>
+              </a:rPr>
+              <a:t>Image</a:t>
+            </a:r>
+          </a:p>
+        </p:txBody>
+      </p:sp>
+      <p:sp>
+        <p:nvSpPr>
+          <p:cNvPr id="79" name="Rectangle 78">
+            <a:extLst>
+              <a:ext uri="{FF2B5EF4-FFF2-40B4-BE49-F238E27FC236}">
+                <a16:creationId xmlns:a16="http://schemas.microsoft.com/office/drawing/2014/main" id="{99413ED5-9ED4-4772-BCE4-2BCAE6B12E35}"/>
+              </a:ext>
+              <a:ext uri="{C183D7F6-B498-43B3-948B-1728B52AA6E4}">
+                <adec:decorative xmlns:adec="http://schemas.microsoft.com/office/drawing/2017/decorative" val="1"/>
+              </a:ext>
+            </a:extLst>
+          </p:cNvPr>
+          <p:cNvSpPr>
+            <a:spLocks noGrp="1" noRot="1" noChangeAspect="1" noMove="1" noResize="1" noEditPoints="1" noAdjustHandles="1" noChangeArrowheads="1" noChangeShapeType="1" noTextEdit="1"/>
+          </p:cNvSpPr>
+          <p:nvPr>
+            <p:extLst>
+              <p:ext uri="{386F3935-93C4-4BCD-93E2-E3B085C9AB24}">
+                <p16:designElem xmlns:p16="http://schemas.microsoft.com/office/powerpoint/2015/main" val="1"/>
+              </p:ext>
+            </p:extLst>
+          </p:nvPr>
+        </p:nvSpPr>
+        <p:spPr>
+          <a:xfrm rot="16200000">
+            <a:off x="3433973" y="-827233"/>
+            <a:ext cx="1715478" cy="8583421"/>
+          </a:xfrm>
+          <a:prstGeom prst="rect">
+            <a:avLst/>
+          </a:prstGeom>
+          <a:solidFill>
+            <a:schemeClr val="accent4"/>
+          </a:solidFill>
+          <a:ln>
+            <a:noFill/>
+          </a:ln>
+        </p:spPr>
+        <p:style>
+          <a:lnRef idx="2">
+            <a:schemeClr val="accent1">
+              <a:shade val="50000"/>
+            </a:schemeClr>
+          </a:lnRef>
+          <a:fillRef idx="1">
+            <a:schemeClr val="accent1"/>
+          </a:fillRef>
+          <a:effectRef idx="0">
+            <a:schemeClr val="accent1"/>
+          </a:effectRef>
+          <a:fontRef idx="minor">
+            <a:schemeClr val="lt1"/>
+          </a:fontRef>
+        </p:style>
+        <p:txBody>
+          <a:bodyPr rtlCol="0" anchor="ctr"/>
+          <a:lstStyle/>
+          <a:p>
+            <a:pPr algn="ctr"/>
+            <a:endParaRPr lang="en-US" dirty="0"/>
+          </a:p>
+        </p:txBody>
+      </p:sp>
+      <p:sp>
+        <p:nvSpPr>
+          <p:cNvPr id="81" name="Rectangle 80">
+            <a:extLst>
+              <a:ext uri="{FF2B5EF4-FFF2-40B4-BE49-F238E27FC236}">
+                <a16:creationId xmlns:a16="http://schemas.microsoft.com/office/drawing/2014/main" id="{04357C93-F0CB-4A1C-8F77-4E9063789819}"/>
+              </a:ext>
+              <a:ext uri="{C183D7F6-B498-43B3-948B-1728B52AA6E4}">
+                <adec:decorative xmlns:adec="http://schemas.microsoft.com/office/drawing/2017/decorative" val="1"/>
+              </a:ext>
+            </a:extLst>
+          </p:cNvPr>
+          <p:cNvSpPr>
+            <a:spLocks noGrp="1" noRot="1" noChangeAspect="1" noMove="1" noResize="1" noEditPoints="1" noAdjustHandles="1" noChangeArrowheads="1" noChangeShapeType="1" noTextEdit="1"/>
+          </p:cNvSpPr>
+          <p:nvPr>
+            <p:extLst>
+              <p:ext uri="{386F3935-93C4-4BCD-93E2-E3B085C9AB24}">
+                <p16:designElem xmlns:p16="http://schemas.microsoft.com/office/powerpoint/2015/main" val="1"/>
+              </p:ext>
+            </p:extLst>
+          </p:nvPr>
+        </p:nvSpPr>
+        <p:spPr>
+          <a:xfrm>
+            <a:off x="302085" y="664308"/>
+            <a:ext cx="8082632" cy="5600340"/>
+          </a:xfrm>
+          <a:prstGeom prst="rect">
+            <a:avLst/>
+          </a:prstGeom>
+          <a:solidFill>
+            <a:schemeClr val="bg1"/>
+          </a:solidFill>
+          <a:ln>
+            <a:noFill/>
+          </a:ln>
+          <a:effectLst>
+            <a:outerShdw blurRad="139700" dist="127000" dir="5400000" algn="t" rotWithShape="0">
+              <a:prstClr val="black">
+                <a:alpha val="15000"/>
+              </a:prstClr>
+            </a:outerShdw>
+          </a:effectLst>
+        </p:spPr>
+        <p:style>
+          <a:lnRef idx="2">
+            <a:schemeClr val="accent1">
+              <a:shade val="50000"/>
+            </a:schemeClr>
+          </a:lnRef>
+          <a:fillRef idx="1">
+            <a:schemeClr val="accent1"/>
+          </a:fillRef>
+          <a:effectRef idx="0">
+            <a:schemeClr val="accent1"/>
+          </a:effectRef>
+          <a:fontRef idx="minor">
+            <a:schemeClr val="lt1"/>
+          </a:fontRef>
+        </p:style>
+        <p:txBody>
+          <a:bodyPr rtlCol="0" anchor="ctr"/>
+          <a:lstStyle/>
+          <a:p>
+            <a:pPr algn="ctr"/>
+            <a:endParaRPr lang="en-US"/>
+          </a:p>
+        </p:txBody>
+      </p:sp>
+      <p:pic>
+        <p:nvPicPr>
+          <p:cNvPr id="4" name="Image 3" descr="Une image contenant conception&#10;&#10;Le contenu généré par l’IA peut être incorrect.">
+            <a:extLst>
+              <a:ext uri="{FF2B5EF4-FFF2-40B4-BE49-F238E27FC236}">
+                <a16:creationId xmlns:a16="http://schemas.microsoft.com/office/drawing/2014/main" id="{0503F361-82B5-C173-30EF-20D95B1C5EB2}"/>
+              </a:ext>
+            </a:extLst>
+          </p:cNvPr>
+          <p:cNvPicPr>
+            <a:picLocks noChangeAspect="1"/>
+          </p:cNvPicPr>
+          <p:nvPr/>
+        </p:nvPicPr>
+        <p:blipFill>
+          <a:blip r:embed="rId3">
+            <a:extLst>
+              <a:ext uri="{28A0092B-C50C-407E-A947-70E740481C1C}">
+                <a14:useLocalDpi xmlns:a14="http://schemas.microsoft.com/office/drawing/2010/main" val="0"/>
+              </a:ext>
+            </a:extLst>
+          </a:blip>
+          <a:srcRect l="8845" r="10693" b="2"/>
+          <a:stretch>
+            <a:fillRect/>
+          </a:stretch>
+        </p:blipFill>
+        <p:spPr>
+          <a:xfrm>
+            <a:off x="1661128" y="858525"/>
+            <a:ext cx="5376523" cy="5211906"/>
+          </a:xfrm>
+          <a:prstGeom prst="rect">
+            <a:avLst/>
+          </a:prstGeom>
+        </p:spPr>
+      </p:pic>
+      <p:sp>
+        <p:nvSpPr>
+          <p:cNvPr id="83" name="Rectangle 82">
+            <a:extLst>
+              <a:ext uri="{FF2B5EF4-FFF2-40B4-BE49-F238E27FC236}">
+                <a16:creationId xmlns:a16="http://schemas.microsoft.com/office/drawing/2014/main" id="{90F533E9-6690-41A8-A372-4C6C622D028D}"/>
+              </a:ext>
+              <a:ext uri="{C183D7F6-B498-43B3-948B-1728B52AA6E4}">
+                <adec:decorative xmlns:adec="http://schemas.microsoft.com/office/drawing/2017/decorative" val="1"/>
+              </a:ext>
+            </a:extLst>
+          </p:cNvPr>
+          <p:cNvSpPr>
+            <a:spLocks noGrp="1" noRot="1" noChangeAspect="1" noMove="1" noResize="1" noEditPoints="1" noAdjustHandles="1" noChangeArrowheads="1" noChangeShapeType="1" noTextEdit="1"/>
+          </p:cNvSpPr>
+          <p:nvPr>
+            <p:extLst>
+              <p:ext uri="{386F3935-93C4-4BCD-93E2-E3B085C9AB24}">
+                <p16:designElem xmlns:p16="http://schemas.microsoft.com/office/powerpoint/2015/main" val="1"/>
+              </p:ext>
+            </p:extLst>
+          </p:nvPr>
+        </p:nvSpPr>
+        <p:spPr>
+          <a:xfrm rot="5400000">
+            <a:off x="7950447" y="3392097"/>
+            <a:ext cx="1719072" cy="152382"/>
+          </a:xfrm>
+          <a:prstGeom prst="rect">
+            <a:avLst/>
+          </a:prstGeom>
+          <a:solidFill>
+            <a:schemeClr val="accent4"/>
+          </a:solidFill>
+          <a:ln>
+            <a:noFill/>
+          </a:ln>
+        </p:spPr>
+        <p:style>
+          <a:lnRef idx="2">
+            <a:schemeClr val="accent1">
+              <a:shade val="50000"/>
+            </a:schemeClr>
+          </a:lnRef>
+          <a:fillRef idx="1">
+            <a:schemeClr val="accent1"/>
+          </a:fillRef>
+          <a:effectRef idx="0">
+            <a:schemeClr val="accent1"/>
+          </a:effectRef>
+          <a:fontRef idx="minor">
+            <a:schemeClr val="lt1"/>
+          </a:fontRef>
+        </p:style>
+        <p:txBody>
+          <a:bodyPr rtlCol="0" anchor="ctr"/>
+          <a:lstStyle/>
+          <a:p>
+            <a:pPr algn="ctr"/>
+            <a:endParaRPr lang="en-US"/>
+          </a:p>
+        </p:txBody>
+      </p:sp>
+    </p:spTree>
+    <p:extLst>
+      <p:ext uri="{BB962C8B-B14F-4D97-AF65-F5344CB8AC3E}">
+        <p14:creationId xmlns:p14="http://schemas.microsoft.com/office/powerpoint/2010/main" val="1042848818"/>
+      </p:ext>
+    </p:extLst>
+  </p:cSld>
+  <p:clrMapOvr>
+    <a:masterClrMapping/>
+  </p:clrMapOvr>
+</p:sld>
+</file>
+
+<file path=ppt/slides/slide7.xml><?xml version="1.0" encoding="utf-8"?>
+<p:sld xmlns:a="http://schemas.openxmlformats.org/drawingml/2006/main" xmlns:r="http://schemas.openxmlformats.org/officeDocument/2006/relationships" xmlns:p="http://schemas.openxmlformats.org/presentationml/2006/main">
+  <p:cSld>
+    <p:bg>
+      <p:bgPr>
+        <a:solidFill>
+          <a:schemeClr val="bg1"/>
+        </a:solidFill>
+        <a:effectLst/>
+      </p:bgPr>
+    </p:bg>
+    <p:spTree>
+      <p:nvGrpSpPr>
+        <p:cNvPr id="1" name="">
+          <a:extLst>
+            <a:ext uri="{FF2B5EF4-FFF2-40B4-BE49-F238E27FC236}">
+              <a16:creationId xmlns:a16="http://schemas.microsoft.com/office/drawing/2014/main" id="{A43B5995-0A83-E8B1-3BB0-EE31CD2EB6D6}"/>
+            </a:ext>
+          </a:extLst>
+        </p:cNvPr>
+        <p:cNvGrpSpPr/>
+        <p:nvPr/>
+      </p:nvGrpSpPr>
+      <p:grpSpPr>
+        <a:xfrm>
+          <a:off x="0" y="0"/>
+          <a:ext cx="0" cy="0"/>
+          <a:chOff x="0" y="0"/>
+          <a:chExt cx="0" cy="0"/>
+        </a:xfrm>
+      </p:grpSpPr>
+      <p:sp useBgFill="1">
+        <p:nvSpPr>
+          <p:cNvPr id="56" name="Rectangle 55">
+            <a:extLst>
+              <a:ext uri="{FF2B5EF4-FFF2-40B4-BE49-F238E27FC236}">
+                <a16:creationId xmlns:a16="http://schemas.microsoft.com/office/drawing/2014/main" id="{BA79A7CF-01AF-4178-9369-94E0C90EB046}"/>
+              </a:ext>
+              <a:ext uri="{C183D7F6-B498-43B3-948B-1728B52AA6E4}">
+                <adec:decorative xmlns:adec="http://schemas.microsoft.com/office/drawing/2017/decorative" val="1"/>
+              </a:ext>
+            </a:extLst>
+          </p:cNvPr>
+          <p:cNvSpPr>
+            <a:spLocks noGrp="1" noRot="1" noChangeAspect="1" noMove="1" noResize="1" noEditPoints="1" noAdjustHandles="1" noChangeArrowheads="1" noChangeShapeType="1" noTextEdit="1"/>
+          </p:cNvSpPr>
+          <p:nvPr>
+            <p:extLst>
+              <p:ext uri="{386F3935-93C4-4BCD-93E2-E3B085C9AB24}">
+                <p16:designElem xmlns:p16="http://schemas.microsoft.com/office/powerpoint/2015/main" val="1"/>
+              </p:ext>
+            </p:extLst>
+          </p:nvPr>
+        </p:nvSpPr>
+        <p:spPr>
+          <a:xfrm>
+            <a:off x="0" y="0"/>
+            <a:ext cx="12191999" cy="6857365"/>
+          </a:xfrm>
+          <a:prstGeom prst="rect">
+            <a:avLst/>
+          </a:prstGeom>
+          <a:ln>
+            <a:noFill/>
+          </a:ln>
+        </p:spPr>
+        <p:style>
+          <a:lnRef idx="2">
+            <a:schemeClr val="accent1">
+              <a:shade val="50000"/>
+            </a:schemeClr>
+          </a:lnRef>
+          <a:fillRef idx="1">
+            <a:schemeClr val="accent1"/>
+          </a:fillRef>
+          <a:effectRef idx="0">
+            <a:schemeClr val="accent1"/>
+          </a:effectRef>
+          <a:fontRef idx="minor">
+            <a:schemeClr val="lt1"/>
+          </a:fontRef>
+        </p:style>
+        <p:txBody>
+          <a:bodyPr rtlCol="0" anchor="ctr"/>
+          <a:lstStyle/>
+          <a:p>
+            <a:pPr algn="ctr"/>
+            <a:endParaRPr lang="en-US"/>
+          </a:p>
+        </p:txBody>
+      </p:sp>
+      <p:sp>
+        <p:nvSpPr>
+          <p:cNvPr id="2" name="Titre 1">
+            <a:extLst>
+              <a:ext uri="{FF2B5EF4-FFF2-40B4-BE49-F238E27FC236}">
+                <a16:creationId xmlns:a16="http://schemas.microsoft.com/office/drawing/2014/main" id="{A6937134-3E9A-C21D-A688-C86CD8F8EB31}"/>
+              </a:ext>
+            </a:extLst>
+          </p:cNvPr>
+          <p:cNvSpPr>
+            <a:spLocks noGrp="1"/>
+          </p:cNvSpPr>
+          <p:nvPr>
+            <p:ph type="title"/>
+          </p:nvPr>
+        </p:nvSpPr>
+        <p:spPr>
+          <a:xfrm>
+            <a:off x="9267909" y="2023110"/>
+            <a:ext cx="2469624" cy="2846070"/>
+          </a:xfrm>
+        </p:spPr>
+        <p:txBody>
+          <a:bodyPr vert="horz" lIns="91440" tIns="45720" rIns="91440" bIns="45720" rtlCol="0" anchor="ctr">
+            <a:normAutofit/>
+          </a:bodyPr>
+          <a:lstStyle/>
+          <a:p>
+            <a:r>
+              <a:rPr lang="fr-FR" sz="4000" dirty="0"/>
+              <a:t>Données textuelles</a:t>
+            </a:r>
+            <a:endParaRPr lang="en-US" sz="3700" kern="1200" dirty="0">
+              <a:solidFill>
+                <a:schemeClr val="tx1"/>
+              </a:solidFill>
+              <a:latin typeface="+mj-lt"/>
+              <a:ea typeface="+mj-ea"/>
+              <a:cs typeface="+mj-cs"/>
+            </a:endParaRPr>
+          </a:p>
+        </p:txBody>
+      </p:sp>
+      <p:sp>
+        <p:nvSpPr>
+          <p:cNvPr id="58" name="Rectangle 57">
+            <a:extLst>
+              <a:ext uri="{FF2B5EF4-FFF2-40B4-BE49-F238E27FC236}">
+                <a16:creationId xmlns:a16="http://schemas.microsoft.com/office/drawing/2014/main" id="{99413ED5-9ED4-4772-BCE4-2BCAE6B12E35}"/>
+              </a:ext>
+              <a:ext uri="{C183D7F6-B498-43B3-948B-1728B52AA6E4}">
+                <adec:decorative xmlns:adec="http://schemas.microsoft.com/office/drawing/2017/decorative" val="1"/>
+              </a:ext>
+            </a:extLst>
+          </p:cNvPr>
+          <p:cNvSpPr>
+            <a:spLocks noGrp="1" noRot="1" noChangeAspect="1" noMove="1" noResize="1" noEditPoints="1" noAdjustHandles="1" noChangeArrowheads="1" noChangeShapeType="1" noTextEdit="1"/>
+          </p:cNvSpPr>
+          <p:nvPr>
+            <p:extLst>
+              <p:ext uri="{386F3935-93C4-4BCD-93E2-E3B085C9AB24}">
+                <p16:designElem xmlns:p16="http://schemas.microsoft.com/office/powerpoint/2015/main" val="1"/>
+              </p:ext>
+            </p:extLst>
+          </p:nvPr>
+        </p:nvSpPr>
+        <p:spPr>
+          <a:xfrm rot="16200000">
+            <a:off x="3433973" y="-827233"/>
+            <a:ext cx="1715478" cy="8583421"/>
+          </a:xfrm>
+          <a:prstGeom prst="rect">
+            <a:avLst/>
+          </a:prstGeom>
+          <a:solidFill>
+            <a:schemeClr val="accent4"/>
+          </a:solidFill>
+          <a:ln>
+            <a:noFill/>
+          </a:ln>
+        </p:spPr>
+        <p:style>
+          <a:lnRef idx="2">
+            <a:schemeClr val="accent1">
+              <a:shade val="50000"/>
+            </a:schemeClr>
+          </a:lnRef>
+          <a:fillRef idx="1">
+            <a:schemeClr val="accent1"/>
+          </a:fillRef>
+          <a:effectRef idx="0">
+            <a:schemeClr val="accent1"/>
+          </a:effectRef>
+          <a:fontRef idx="minor">
+            <a:schemeClr val="lt1"/>
+          </a:fontRef>
+        </p:style>
+        <p:txBody>
+          <a:bodyPr rtlCol="0" anchor="ctr"/>
+          <a:lstStyle/>
+          <a:p>
+            <a:pPr algn="ctr"/>
+            <a:endParaRPr lang="en-US" dirty="0"/>
+          </a:p>
+        </p:txBody>
+      </p:sp>
+      <p:sp>
+        <p:nvSpPr>
+          <p:cNvPr id="60" name="Rectangle 59">
+            <a:extLst>
+              <a:ext uri="{FF2B5EF4-FFF2-40B4-BE49-F238E27FC236}">
+                <a16:creationId xmlns:a16="http://schemas.microsoft.com/office/drawing/2014/main" id="{04357C93-F0CB-4A1C-8F77-4E9063789819}"/>
+              </a:ext>
+              <a:ext uri="{C183D7F6-B498-43B3-948B-1728B52AA6E4}">
+                <adec:decorative xmlns:adec="http://schemas.microsoft.com/office/drawing/2017/decorative" val="1"/>
+              </a:ext>
+            </a:extLst>
+          </p:cNvPr>
+          <p:cNvSpPr>
+            <a:spLocks noGrp="1" noRot="1" noChangeAspect="1" noMove="1" noResize="1" noEditPoints="1" noAdjustHandles="1" noChangeArrowheads="1" noChangeShapeType="1" noTextEdit="1"/>
+          </p:cNvSpPr>
+          <p:nvPr>
+            <p:extLst>
+              <p:ext uri="{386F3935-93C4-4BCD-93E2-E3B085C9AB24}">
+                <p16:designElem xmlns:p16="http://schemas.microsoft.com/office/powerpoint/2015/main" val="1"/>
+              </p:ext>
+            </p:extLst>
+          </p:nvPr>
+        </p:nvSpPr>
+        <p:spPr>
+          <a:xfrm>
+            <a:off x="302085" y="664308"/>
+            <a:ext cx="8082632" cy="5600340"/>
+          </a:xfrm>
+          <a:prstGeom prst="rect">
+            <a:avLst/>
+          </a:prstGeom>
+          <a:solidFill>
+            <a:schemeClr val="bg1"/>
+          </a:solidFill>
+          <a:ln>
+            <a:noFill/>
+          </a:ln>
+          <a:effectLst>
+            <a:outerShdw blurRad="139700" dist="127000" dir="5400000" algn="t" rotWithShape="0">
+              <a:prstClr val="black">
+                <a:alpha val="15000"/>
+              </a:prstClr>
+            </a:outerShdw>
+          </a:effectLst>
+        </p:spPr>
+        <p:style>
+          <a:lnRef idx="2">
+            <a:schemeClr val="accent1">
+              <a:shade val="50000"/>
+            </a:schemeClr>
+          </a:lnRef>
+          <a:fillRef idx="1">
+            <a:schemeClr val="accent1"/>
+          </a:fillRef>
+          <a:effectRef idx="0">
+            <a:schemeClr val="accent1"/>
+          </a:effectRef>
+          <a:fontRef idx="minor">
+            <a:schemeClr val="lt1"/>
+          </a:fontRef>
+        </p:style>
+        <p:txBody>
+          <a:bodyPr rtlCol="0" anchor="ctr"/>
+          <a:lstStyle/>
+          <a:p>
+            <a:pPr algn="ctr"/>
+            <a:endParaRPr lang="en-US"/>
+          </a:p>
+        </p:txBody>
+      </p:sp>
+      <p:pic>
+        <p:nvPicPr>
+          <p:cNvPr id="4" name="Image 3" descr="Une image contenant texte, capture d’écran, ligne, Police&#10;&#10;Le contenu généré par l’IA peut être incorrect.">
+            <a:extLst>
+              <a:ext uri="{FF2B5EF4-FFF2-40B4-BE49-F238E27FC236}">
+                <a16:creationId xmlns:a16="http://schemas.microsoft.com/office/drawing/2014/main" id="{8B3A4F61-5054-F2B5-B08B-B2EC44F9F014}"/>
+              </a:ext>
+            </a:extLst>
+          </p:cNvPr>
+          <p:cNvPicPr>
+            <a:picLocks noChangeAspect="1"/>
+          </p:cNvPicPr>
+          <p:nvPr/>
+        </p:nvPicPr>
+        <p:blipFill>
+          <a:blip r:embed="rId3"/>
+          <a:srcRect r="48987" b="1"/>
+          <a:stretch>
+            <a:fillRect/>
+          </a:stretch>
+        </p:blipFill>
+        <p:spPr>
+          <a:xfrm>
+            <a:off x="545238" y="1227334"/>
+            <a:ext cx="7608304" cy="4474288"/>
+          </a:xfrm>
+          <a:prstGeom prst="rect">
+            <a:avLst/>
+          </a:prstGeom>
+        </p:spPr>
+      </p:pic>
+      <p:sp>
+        <p:nvSpPr>
+          <p:cNvPr id="62" name="Rectangle 61">
+            <a:extLst>
+              <a:ext uri="{FF2B5EF4-FFF2-40B4-BE49-F238E27FC236}">
+                <a16:creationId xmlns:a16="http://schemas.microsoft.com/office/drawing/2014/main" id="{90F533E9-6690-41A8-A372-4C6C622D028D}"/>
+              </a:ext>
+              <a:ext uri="{C183D7F6-B498-43B3-948B-1728B52AA6E4}">
+                <adec:decorative xmlns:adec="http://schemas.microsoft.com/office/drawing/2017/decorative" val="1"/>
+              </a:ext>
+            </a:extLst>
+          </p:cNvPr>
+          <p:cNvSpPr>
+            <a:spLocks noGrp="1" noRot="1" noChangeAspect="1" noMove="1" noResize="1" noEditPoints="1" noAdjustHandles="1" noChangeArrowheads="1" noChangeShapeType="1" noTextEdit="1"/>
+          </p:cNvSpPr>
+          <p:nvPr>
+            <p:extLst>
+              <p:ext uri="{386F3935-93C4-4BCD-93E2-E3B085C9AB24}">
+                <p16:designElem xmlns:p16="http://schemas.microsoft.com/office/powerpoint/2015/main" val="1"/>
+              </p:ext>
+            </p:extLst>
+          </p:nvPr>
+        </p:nvSpPr>
+        <p:spPr>
+          <a:xfrm rot="5400000">
+            <a:off x="7950447" y="3392097"/>
+            <a:ext cx="1719072" cy="152382"/>
+          </a:xfrm>
+          <a:prstGeom prst="rect">
+            <a:avLst/>
+          </a:prstGeom>
+          <a:solidFill>
+            <a:schemeClr val="accent4"/>
+          </a:solidFill>
+          <a:ln>
+            <a:noFill/>
+          </a:ln>
+        </p:spPr>
+        <p:style>
+          <a:lnRef idx="2">
+            <a:schemeClr val="accent1">
+              <a:shade val="50000"/>
+            </a:schemeClr>
+          </a:lnRef>
+          <a:fillRef idx="1">
+            <a:schemeClr val="accent1"/>
+          </a:fillRef>
+          <a:effectRef idx="0">
+            <a:schemeClr val="accent1"/>
+          </a:effectRef>
+          <a:fontRef idx="minor">
+            <a:schemeClr val="lt1"/>
+          </a:fontRef>
+        </p:style>
+        <p:txBody>
+          <a:bodyPr rtlCol="0" anchor="ctr"/>
+          <a:lstStyle/>
+          <a:p>
+            <a:pPr algn="ctr"/>
+            <a:endParaRPr lang="en-US"/>
+          </a:p>
+        </p:txBody>
+      </p:sp>
+    </p:spTree>
+    <p:extLst>
+      <p:ext uri="{BB962C8B-B14F-4D97-AF65-F5344CB8AC3E}">
+        <p14:creationId xmlns:p14="http://schemas.microsoft.com/office/powerpoint/2010/main" val="1424057555"/>
+      </p:ext>
+    </p:extLst>
+  </p:cSld>
+  <p:clrMapOvr>
+    <a:masterClrMapping/>
+  </p:clrMapOvr>
+</p:sld>
+</file>
+
+<file path=ppt/slides/slide8.xml><?xml version="1.0" encoding="utf-8"?>
+<p:sld xmlns:a="http://schemas.openxmlformats.org/drawingml/2006/main" xmlns:r="http://schemas.openxmlformats.org/officeDocument/2006/relationships" xmlns:p="http://schemas.openxmlformats.org/presentationml/2006/main">
+  <p:cSld>
+    <p:bg>
+      <p:bgPr>
+        <a:solidFill>
+          <a:schemeClr val="bg1"/>
+        </a:solidFill>
+        <a:effectLst/>
+      </p:bgPr>
+    </p:bg>
+    <p:spTree>
+      <p:nvGrpSpPr>
+        <p:cNvPr id="1" name=""/>
+        <p:cNvGrpSpPr/>
+        <p:nvPr/>
+      </p:nvGrpSpPr>
+      <p:grpSpPr>
+        <a:xfrm>
+          <a:off x="0" y="0"/>
+          <a:ext cx="0" cy="0"/>
+          <a:chOff x="0" y="0"/>
+          <a:chExt cx="0" cy="0"/>
+        </a:xfrm>
+      </p:grpSpPr>
+      <p:sp useBgFill="1">
+        <p:nvSpPr>
+          <p:cNvPr id="45" name="Rectangle 44">
+            <a:extLst>
+              <a:ext uri="{FF2B5EF4-FFF2-40B4-BE49-F238E27FC236}">
+                <a16:creationId xmlns:a16="http://schemas.microsoft.com/office/drawing/2014/main" id="{058A14AF-9FB5-4CC7-BA35-E8E85D3EDF0E}"/>
+              </a:ext>
+              <a:ext uri="{C183D7F6-B498-43B3-948B-1728B52AA6E4}">
+                <adec:decorative xmlns:adec="http://schemas.microsoft.com/office/drawing/2017/decorative" val="1"/>
+              </a:ext>
+            </a:extLst>
+          </p:cNvPr>
+          <p:cNvSpPr>
+            <a:spLocks noGrp="1" noRot="1" noChangeAspect="1" noMove="1" noResize="1" noEditPoints="1" noAdjustHandles="1" noChangeArrowheads="1" noChangeShapeType="1" noTextEdit="1"/>
+          </p:cNvSpPr>
+          <p:nvPr>
+            <p:extLst>
+              <p:ext uri="{386F3935-93C4-4BCD-93E2-E3B085C9AB24}">
+                <p16:designElem xmlns:p16="http://schemas.microsoft.com/office/powerpoint/2015/main" val="1"/>
+              </p:ext>
+            </p:extLst>
+          </p:nvPr>
+        </p:nvSpPr>
+        <p:spPr>
+          <a:xfrm>
+            <a:off x="0" y="0"/>
+            <a:ext cx="12191999" cy="6857365"/>
+          </a:xfrm>
+          <a:prstGeom prst="rect">
+            <a:avLst/>
+          </a:prstGeom>
+          <a:ln>
+            <a:noFill/>
+          </a:ln>
+        </p:spPr>
+        <p:style>
+          <a:lnRef idx="2">
+            <a:schemeClr val="accent1">
+              <a:shade val="50000"/>
+            </a:schemeClr>
+          </a:lnRef>
+          <a:fillRef idx="1">
+            <a:schemeClr val="accent1"/>
+          </a:fillRef>
+          <a:effectRef idx="0">
+            <a:schemeClr val="accent1"/>
+          </a:effectRef>
+          <a:fontRef idx="minor">
+            <a:schemeClr val="lt1"/>
+          </a:fontRef>
+        </p:style>
+        <p:txBody>
+          <a:bodyPr rtlCol="0" anchor="ctr"/>
+          <a:lstStyle/>
+          <a:p>
+            <a:pPr algn="ctr"/>
+            <a:endParaRPr lang="en-US"/>
+          </a:p>
+        </p:txBody>
+      </p:sp>
+      <p:sp>
+        <p:nvSpPr>
+          <p:cNvPr id="2" name="Titre 1">
+            <a:extLst>
+              <a:ext uri="{FF2B5EF4-FFF2-40B4-BE49-F238E27FC236}">
                 <a16:creationId xmlns:a16="http://schemas.microsoft.com/office/drawing/2014/main" id="{F29C2CF4-9C9E-0AE0-07D4-821DC591368E}"/>
               </a:ext>
             </a:extLst>
@@ -10267,16 +10986,16 @@
           <a:lstStyle/>
           <a:p>
             <a:r>
-              <a:rPr lang="fr-FR" b="1" dirty="0"/>
-              <a:t>Étape 1 : Export du fichier STL</a:t>
-            </a:r>
-            <a:endParaRPr lang="es-AR" dirty="0"/>
-          </a:p>
-        </p:txBody>
-      </p:sp>
-      <p:sp>
-        <p:nvSpPr>
-          <p:cNvPr id="23" name="Rectangle 22">
+              <a:rPr lang="fr-FR" sz="4800"/>
+              <a:t>Fichier STL</a:t>
+            </a:r>
+            <a:endParaRPr lang="es-AR" sz="4800"/>
+          </a:p>
+        </p:txBody>
+      </p:sp>
+      <p:sp>
+        <p:nvSpPr>
+          <p:cNvPr id="47" name="Rectangle 46">
             <a:extLst>
               <a:ext uri="{FF2B5EF4-FFF2-40B4-BE49-F238E27FC236}">
                 <a16:creationId xmlns:a16="http://schemas.microsoft.com/office/drawing/2014/main" id="{3A9A4357-BD1D-4622-A4FE-766E6AB8DE84}"/>
@@ -10339,7 +11058,7 @@
       </p:sp>
       <p:sp>
         <p:nvSpPr>
-          <p:cNvPr id="25" name="Rectangle 24">
+          <p:cNvPr id="49" name="Rectangle 48">
             <a:extLst>
               <a:ext uri="{FF2B5EF4-FFF2-40B4-BE49-F238E27FC236}">
                 <a16:creationId xmlns:a16="http://schemas.microsoft.com/office/drawing/2014/main" id="{E659831F-0D9A-4C63-9EBB-8435B85A440F}"/>
@@ -10471,10 +11190,10 @@
       </p:sp>
       <p:pic>
         <p:nvPicPr>
-          <p:cNvPr id="6" name="Image 5" descr="Une image contenant conception&#10;&#10;Le contenu généré par l’IA peut être incorrect.">
-            <a:extLst>
-              <a:ext uri="{FF2B5EF4-FFF2-40B4-BE49-F238E27FC236}">
-                <a16:creationId xmlns:a16="http://schemas.microsoft.com/office/drawing/2014/main" id="{0CB160FC-9243-5698-05E9-163B01D68445}"/>
+          <p:cNvPr id="8" name="Image 7" descr="Une image contenant croquis, dessin, art, conception&#10;&#10;Le contenu généré par l’IA peut être incorrect.">
+            <a:extLst>
+              <a:ext uri="{FF2B5EF4-FFF2-40B4-BE49-F238E27FC236}">
+                <a16:creationId xmlns:a16="http://schemas.microsoft.com/office/drawing/2014/main" id="{9D4BEC2C-210C-AEE0-0963-510742BDB24C}"/>
               </a:ext>
             </a:extLst>
           </p:cNvPr>
@@ -10484,21 +11203,15 @@
           <p:nvPr/>
         </p:nvPicPr>
         <p:blipFill>
-          <a:blip r:embed="rId2">
-            <a:extLst>
-              <a:ext uri="{28A0092B-C50C-407E-A947-70E740481C1C}">
-                <a14:useLocalDpi xmlns:a14="http://schemas.microsoft.com/office/drawing/2010/main" val="0"/>
-              </a:ext>
-            </a:extLst>
-          </a:blip>
+          <a:blip r:embed="rId3"/>
           <a:stretch>
             <a:fillRect/>
           </a:stretch>
         </p:blipFill>
         <p:spPr>
           <a:xfrm>
-            <a:off x="6105745" y="2484255"/>
-            <a:ext cx="4761851" cy="3714244"/>
+            <a:off x="5911532" y="2970116"/>
+            <a:ext cx="5150277" cy="2742522"/>
           </a:xfrm>
           <a:prstGeom prst="rect">
             <a:avLst/>
@@ -10507,7 +11220,7 @@
       </p:pic>
       <p:sp>
         <p:nvSpPr>
-          <p:cNvPr id="27" name="Rectangle 26">
+          <p:cNvPr id="51" name="Rectangle 50">
             <a:extLst>
               <a:ext uri="{FF2B5EF4-FFF2-40B4-BE49-F238E27FC236}">
                 <a16:creationId xmlns:a16="http://schemas.microsoft.com/office/drawing/2014/main" id="{E6995CE5-F890-4ABA-82A2-26507CE8D2A3}"/>
@@ -10581,7 +11294,7 @@
 </p:sld>
 </file>
 
-<file path=ppt/slides/slide8.xml><?xml version="1.0" encoding="utf-8"?>
+<file path=ppt/slides/slide9.xml><?xml version="1.0" encoding="utf-8"?>
 <p:sld xmlns:a="http://schemas.openxmlformats.org/drawingml/2006/main" xmlns:r="http://schemas.openxmlformats.org/officeDocument/2006/relationships" xmlns:p="http://schemas.openxmlformats.org/presentationml/2006/main">
   <p:cSld>
     <p:bg>
@@ -10594,7 +11307,13 @@
     </p:bg>
     <p:spTree>
       <p:nvGrpSpPr>
-        <p:cNvPr id="1" name=""/>
+        <p:cNvPr id="1" name="">
+          <a:extLst>
+            <a:ext uri="{FF2B5EF4-FFF2-40B4-BE49-F238E27FC236}">
+              <a16:creationId xmlns:a16="http://schemas.microsoft.com/office/drawing/2014/main" id="{3DB78C39-F60A-997F-F0B9-7A19DE849337}"/>
+            </a:ext>
+          </a:extLst>
+        </p:cNvPr>
         <p:cNvGrpSpPr/>
         <p:nvPr/>
       </p:nvGrpSpPr>
@@ -10608,10 +11327,10 @@
       </p:grpSpPr>
       <p:sp useBgFill="1">
         <p:nvSpPr>
-          <p:cNvPr id="25" name="Rectangle 24">
-            <a:extLst>
-              <a:ext uri="{FF2B5EF4-FFF2-40B4-BE49-F238E27FC236}">
-                <a16:creationId xmlns:a16="http://schemas.microsoft.com/office/drawing/2014/main" id="{EF4CB1B7-AF26-4C13-8E7D-0489A31E4B7F}"/>
+          <p:cNvPr id="84" name="Rectangle 83">
+            <a:extLst>
+              <a:ext uri="{FF2B5EF4-FFF2-40B4-BE49-F238E27FC236}">
+                <a16:creationId xmlns:a16="http://schemas.microsoft.com/office/drawing/2014/main" id="{8B9AA7C6-5E5A-498E-A6DF-A943376E09BC}"/>
               </a:ext>
               <a:ext uri="{C183D7F6-B498-43B3-948B-1728B52AA6E4}">
                 <adec:decorative xmlns:adec="http://schemas.microsoft.com/office/drawing/2017/decorative" val="1"/>
@@ -10668,10 +11387,10 @@
       </p:sp>
       <p:grpSp>
         <p:nvGrpSpPr>
-          <p:cNvPr id="27" name="Group 26">
-            <a:extLst>
-              <a:ext uri="{FF2B5EF4-FFF2-40B4-BE49-F238E27FC236}">
-                <a16:creationId xmlns:a16="http://schemas.microsoft.com/office/drawing/2014/main" id="{19A6B5CE-CB1D-48EE-8B43-E952235C8371}"/>
+          <p:cNvPr id="85" name="Group 76">
+            <a:extLst>
+              <a:ext uri="{FF2B5EF4-FFF2-40B4-BE49-F238E27FC236}">
+                <a16:creationId xmlns:a16="http://schemas.microsoft.com/office/drawing/2014/main" id="{83EAB11A-76F7-48F4-9B4F-5BFDF4BF9670}"/>
               </a:ext>
               <a:ext uri="{C183D7F6-B498-43B3-948B-1728B52AA6E4}">
                 <adec:decorative xmlns:adec="http://schemas.microsoft.com/office/drawing/2017/decorative" val="1"/>
@@ -10690,22 +11409,19 @@
           </p:nvPr>
         </p:nvGrpSpPr>
         <p:grpSpPr>
-          <a:xfrm rot="5400000">
-            <a:off x="-2340441" y="2666183"/>
-            <a:ext cx="5860051" cy="527712"/>
-            <a:chOff x="6081624" y="1998368"/>
-            <a:chExt cx="5613457" cy="782175"/>
+          <a:xfrm>
+            <a:off x="74300" y="2385102"/>
+            <a:ext cx="574091" cy="2087796"/>
+            <a:chOff x="209668" y="2857422"/>
+            <a:chExt cx="463662" cy="2087796"/>
           </a:xfrm>
-          <a:solidFill>
-            <a:schemeClr val="accent4"/>
-          </a:solidFill>
         </p:grpSpPr>
         <p:sp>
           <p:nvSpPr>
-            <p:cNvPr id="28" name="Rectangle 27">
+            <p:cNvPr id="86" name="Rectangle 85">
               <a:extLst>
                 <a:ext uri="{FF2B5EF4-FFF2-40B4-BE49-F238E27FC236}">
-                  <a16:creationId xmlns:a16="http://schemas.microsoft.com/office/drawing/2014/main" id="{E3F3EAA5-4E15-400B-BBA3-82B3F49A2178}"/>
+                  <a16:creationId xmlns:a16="http://schemas.microsoft.com/office/drawing/2014/main" id="{74D4C416-D5F4-4F6F-A6F1-87A21CD4FCAF}"/>
                 </a:ext>
                 <a:ext uri="{C183D7F6-B498-43B3-948B-1728B52AA6E4}">
                   <adec:decorative xmlns:adec="http://schemas.microsoft.com/office/drawing/2017/decorative" val="1"/>
@@ -10722,14 +11438,16 @@
             </p:nvPr>
           </p:nvSpPr>
           <p:spPr>
-            <a:xfrm rot="5400000">
-              <a:off x="11228040" y="2313027"/>
-              <a:ext cx="781700" cy="152382"/>
+            <a:xfrm flipH="1" flipV="1">
+              <a:off x="423947" y="2857422"/>
+              <a:ext cx="249383" cy="2087795"/>
             </a:xfrm>
             <a:prstGeom prst="rect">
               <a:avLst/>
             </a:prstGeom>
-            <a:grpFill/>
+            <a:solidFill>
+              <a:schemeClr val="accent4"/>
+            </a:solidFill>
             <a:ln>
               <a:noFill/>
             </a:ln>
@@ -10759,19 +11477,21 @@
             </a:p>
           </p:txBody>
         </p:sp>
-        <p:sp>
-          <p:nvSpPr>
-            <p:cNvPr id="29" name="Rectangle 28">
+        <p:cxnSp>
+          <p:nvCxnSpPr>
+            <p:cNvPr id="79" name="Straight Connector 78">
               <a:extLst>
                 <a:ext uri="{FF2B5EF4-FFF2-40B4-BE49-F238E27FC236}">
-                  <a16:creationId xmlns:a16="http://schemas.microsoft.com/office/drawing/2014/main" id="{72BA2E40-BE9B-4C54-9CDD-40EE804CCE64}"/>
+                  <a16:creationId xmlns:a16="http://schemas.microsoft.com/office/drawing/2014/main" id="{C6AC1C30-21C6-4BF6-93EE-B211D7A85011}"/>
                 </a:ext>
                 <a:ext uri="{C183D7F6-B498-43B3-948B-1728B52AA6E4}">
                   <adec:decorative xmlns:adec="http://schemas.microsoft.com/office/drawing/2017/decorative" val="1"/>
                 </a:ext>
               </a:extLst>
             </p:cNvPr>
-            <p:cNvSpPr/>
+            <p:cNvCxnSpPr>
+              <a:cxnSpLocks/>
+            </p:cNvCxnSpPr>
             <p:nvPr>
               <p:extLst>
                 <p:ext uri="{386F3935-93C4-4BCD-93E2-E3B085C9AB24}">
@@ -10779,52 +11499,43 @@
                 </p:ext>
               </p:extLst>
             </p:nvPr>
-          </p:nvSpPr>
+          </p:nvCxnSpPr>
           <p:spPr>
-            <a:xfrm flipH="1" flipV="1">
-              <a:off x="6081624" y="1998844"/>
-              <a:ext cx="5372968" cy="781699"/>
+            <a:xfrm flipH="1">
+              <a:off x="209668" y="2857423"/>
+              <a:ext cx="1" cy="2087795"/>
             </a:xfrm>
-            <a:prstGeom prst="rect">
+            <a:prstGeom prst="line">
               <a:avLst/>
             </a:prstGeom>
-            <a:grpFill/>
-            <a:ln>
-              <a:noFill/>
+            <a:ln w="177800">
+              <a:solidFill>
+                <a:schemeClr val="accent4"/>
+              </a:solidFill>
             </a:ln>
           </p:spPr>
           <p:style>
-            <a:lnRef idx="2">
-              <a:schemeClr val="accent1">
-                <a:shade val="50000"/>
-              </a:schemeClr>
+            <a:lnRef idx="1">
+              <a:schemeClr val="accent1"/>
             </a:lnRef>
-            <a:fillRef idx="1">
+            <a:fillRef idx="0">
               <a:schemeClr val="accent1"/>
             </a:fillRef>
             <a:effectRef idx="0">
               <a:schemeClr val="accent1"/>
             </a:effectRef>
             <a:fontRef idx="minor">
-              <a:schemeClr val="lt1"/>
+              <a:schemeClr val="tx1"/>
             </a:fontRef>
           </p:style>
-          <p:txBody>
-            <a:bodyPr rtlCol="0" anchor="ctr"/>
-            <a:lstStyle/>
-            <a:p>
-              <a:pPr algn="ctr"/>
-              <a:endParaRPr lang="en-US"/>
-            </a:p>
-          </p:txBody>
-        </p:sp>
+        </p:cxnSp>
       </p:grpSp>
       <p:sp>
         <p:nvSpPr>
-          <p:cNvPr id="31" name="Rectangle 30">
-            <a:extLst>
-              <a:ext uri="{FF2B5EF4-FFF2-40B4-BE49-F238E27FC236}">
-                <a16:creationId xmlns:a16="http://schemas.microsoft.com/office/drawing/2014/main" id="{0DA909B4-15FF-46A6-8A7F-7AEF977FE9ED}"/>
+          <p:cNvPr id="87" name="Rectangle 86">
+            <a:extLst>
+              <a:ext uri="{FF2B5EF4-FFF2-40B4-BE49-F238E27FC236}">
+                <a16:creationId xmlns:a16="http://schemas.microsoft.com/office/drawing/2014/main" id="{81E140AE-0ABF-47C8-BF32-7D2F0CF2BA44}"/>
               </a:ext>
               <a:ext uri="{C183D7F6-B498-43B3-948B-1728B52AA6E4}">
                 <adec:decorative xmlns:adec="http://schemas.microsoft.com/office/drawing/2017/decorative" val="1"/>
@@ -10843,9 +11554,72 @@
           </p:nvPr>
         </p:nvSpPr>
         <p:spPr>
+          <a:xfrm flipH="1">
+            <a:off x="10697670" y="0"/>
+            <a:ext cx="1494330" cy="6858000"/>
+          </a:xfrm>
+          <a:prstGeom prst="rect">
+            <a:avLst/>
+          </a:prstGeom>
+          <a:solidFill>
+            <a:schemeClr val="accent4"/>
+          </a:solidFill>
+          <a:ln>
+            <a:noFill/>
+          </a:ln>
+        </p:spPr>
+        <p:style>
+          <a:lnRef idx="2">
+            <a:schemeClr val="accent1">
+              <a:shade val="50000"/>
+            </a:schemeClr>
+          </a:lnRef>
+          <a:fillRef idx="1">
+            <a:schemeClr val="accent1"/>
+          </a:fillRef>
+          <a:effectRef idx="0">
+            <a:schemeClr val="accent1"/>
+          </a:effectRef>
+          <a:fontRef idx="minor">
+            <a:schemeClr val="lt1"/>
+          </a:fontRef>
+        </p:style>
+        <p:txBody>
+          <a:bodyPr rtlCol="0" anchor="ctr"/>
+          <a:lstStyle/>
+          <a:p>
+            <a:pPr algn="ctr"/>
+            <a:endParaRPr lang="en-US"/>
+          </a:p>
+        </p:txBody>
+      </p:sp>
+      <p:sp>
+        <p:nvSpPr>
+          <p:cNvPr id="83" name="Rectangle 82">
+            <a:extLst>
+              <a:ext uri="{FF2B5EF4-FFF2-40B4-BE49-F238E27FC236}">
+                <a16:creationId xmlns:a16="http://schemas.microsoft.com/office/drawing/2014/main" id="{CBC4F608-B4B8-48C3-9572-C0F061B1CD99}"/>
+              </a:ext>
+              <a:ext uri="{C183D7F6-B498-43B3-948B-1728B52AA6E4}">
+                <adec:decorative xmlns:adec="http://schemas.microsoft.com/office/drawing/2017/decorative" val="1"/>
+              </a:ext>
+            </a:extLst>
+          </p:cNvPr>
+          <p:cNvSpPr>
+            <a:spLocks noGrp="1" noRot="1" noChangeAspect="1" noMove="1" noResize="1" noEditPoints="1" noAdjustHandles="1" noChangeArrowheads="1" noChangeShapeType="1" noTextEdit="1"/>
+          </p:cNvSpPr>
+          <p:nvPr>
+            <p:extLst>
+              <p:ext uri="{386F3935-93C4-4BCD-93E2-E3B085C9AB24}">
+                <p16:designElem xmlns:p16="http://schemas.microsoft.com/office/powerpoint/2015/main" val="1"/>
+              </p:ext>
+            </p:extLst>
+          </p:nvPr>
+        </p:nvSpPr>
+        <p:spPr>
           <a:xfrm>
-            <a:off x="579528" y="517897"/>
-            <a:ext cx="11111729" cy="5857966"/>
+            <a:off x="579528" y="631767"/>
+            <a:ext cx="11111729" cy="5752404"/>
           </a:xfrm>
           <a:prstGeom prst="rect">
             <a:avLst/>
@@ -10894,7 +11668,7 @@
           <p:cNvPr id="2" name="Titre 1">
             <a:extLst>
               <a:ext uri="{FF2B5EF4-FFF2-40B4-BE49-F238E27FC236}">
-                <a16:creationId xmlns:a16="http://schemas.microsoft.com/office/drawing/2014/main" id="{150DEDDE-9DED-37E1-9349-816BE7196BFE}"/>
+                <a16:creationId xmlns:a16="http://schemas.microsoft.com/office/drawing/2014/main" id="{BCB07747-4D69-5ABF-258D-80F805A4DDB8}"/>
               </a:ext>
             </a:extLst>
           </p:cNvPr>
@@ -10907,107 +11681,8 @@
         </p:nvSpPr>
         <p:spPr>
           <a:xfrm>
-            <a:off x="1057025" y="922644"/>
-            <a:ext cx="5040285" cy="1169585"/>
-          </a:xfrm>
-        </p:spPr>
-        <p:txBody>
-          <a:bodyPr anchor="b">
-            <a:normAutofit/>
-          </a:bodyPr>
-          <a:lstStyle/>
-          <a:p>
-            <a:r>
-              <a:rPr lang="fr-FR" sz="3700" dirty="0"/>
-              <a:t>Étape 2 : Image et matériaux</a:t>
-            </a:r>
-            <a:endParaRPr lang="es-AR" sz="3700" dirty="0"/>
-          </a:p>
-        </p:txBody>
-      </p:sp>
-      <p:sp>
-        <p:nvSpPr>
-          <p:cNvPr id="33" name="Rectangle 32">
-            <a:extLst>
-              <a:ext uri="{FF2B5EF4-FFF2-40B4-BE49-F238E27FC236}">
-                <a16:creationId xmlns:a16="http://schemas.microsoft.com/office/drawing/2014/main" id="{1382A32C-5B0C-4B1C-A074-76C6DBCC9F87}"/>
-              </a:ext>
-              <a:ext uri="{C183D7F6-B498-43B3-948B-1728B52AA6E4}">
-                <adec:decorative xmlns:adec="http://schemas.microsoft.com/office/drawing/2017/decorative" val="1"/>
-              </a:ext>
-            </a:extLst>
-          </p:cNvPr>
-          <p:cNvSpPr>
-            <a:spLocks noGrp="1" noRot="1" noChangeAspect="1" noMove="1" noResize="1" noEditPoints="1" noAdjustHandles="1" noChangeArrowheads="1" noChangeShapeType="1" noTextEdit="1"/>
-          </p:cNvSpPr>
-          <p:nvPr>
-            <p:extLst>
-              <p:ext uri="{386F3935-93C4-4BCD-93E2-E3B085C9AB24}">
-                <p16:designElem xmlns:p16="http://schemas.microsoft.com/office/powerpoint/2015/main" val="1"/>
-              </p:ext>
-            </p:extLst>
-          </p:nvPr>
-        </p:nvSpPr>
-        <p:spPr>
-          <a:xfrm flipH="1">
-            <a:off x="1055714" y="2263365"/>
-            <a:ext cx="4937760" cy="27432"/>
-          </a:xfrm>
-          <a:prstGeom prst="rect">
-            <a:avLst/>
-          </a:prstGeom>
-          <a:solidFill>
-            <a:schemeClr val="accent4"/>
-          </a:solidFill>
-          <a:ln>
-            <a:noFill/>
-          </a:ln>
-        </p:spPr>
-        <p:style>
-          <a:lnRef idx="2">
-            <a:schemeClr val="accent1">
-              <a:shade val="50000"/>
-            </a:schemeClr>
-          </a:lnRef>
-          <a:fillRef idx="1">
-            <a:schemeClr val="accent1"/>
-          </a:fillRef>
-          <a:effectRef idx="0">
-            <a:schemeClr val="accent1"/>
-          </a:effectRef>
-          <a:fontRef idx="minor">
-            <a:schemeClr val="lt1"/>
-          </a:fontRef>
-        </p:style>
-        <p:txBody>
-          <a:bodyPr rtlCol="0" anchor="ctr"/>
-          <a:lstStyle/>
-          <a:p>
-            <a:pPr algn="ctr"/>
-            <a:endParaRPr lang="en-US"/>
-          </a:p>
-        </p:txBody>
-      </p:sp>
-      <p:sp>
-        <p:nvSpPr>
-          <p:cNvPr id="3" name="Espace réservé du contenu 2">
-            <a:extLst>
-              <a:ext uri="{FF2B5EF4-FFF2-40B4-BE49-F238E27FC236}">
-                <a16:creationId xmlns:a16="http://schemas.microsoft.com/office/drawing/2014/main" id="{26958871-EB92-F369-0E59-87289DFA9E50}"/>
-              </a:ext>
-            </a:extLst>
-          </p:cNvPr>
-          <p:cNvSpPr>
-            <a:spLocks noGrp="1"/>
-          </p:cNvSpPr>
-          <p:nvPr>
-            <p:ph idx="1"/>
-          </p:nvPr>
-        </p:nvSpPr>
-        <p:spPr>
-          <a:xfrm>
-            <a:off x="1055715" y="2508105"/>
-            <a:ext cx="5040285" cy="3632493"/>
+            <a:off x="1153618" y="1239927"/>
+            <a:ext cx="4008586" cy="4680583"/>
           </a:xfrm>
         </p:spPr>
         <p:txBody>
@@ -11017,541 +11692,263 @@
           <a:lstStyle/>
           <a:p>
             <a:r>
-              <a:rPr lang="es-AR" sz="2000" dirty="0" err="1"/>
-              <a:t>Image</a:t>
-            </a:r>
-            <a:r>
-              <a:rPr lang="es-AR" sz="2000" dirty="0"/>
-              <a:t> du </a:t>
-            </a:r>
-            <a:r>
-              <a:rPr lang="es-AR" sz="2000" dirty="0" err="1"/>
-              <a:t>meuble</a:t>
-            </a:r>
-            <a:endParaRPr lang="es-AR" sz="2000" dirty="0"/>
-          </a:p>
-          <a:p>
-            <a:r>
-              <a:rPr lang="es-AR" sz="2000" dirty="0" err="1"/>
-              <a:t>Matériaux</a:t>
-            </a:r>
-            <a:r>
-              <a:rPr lang="es-AR" sz="2000" dirty="0"/>
-              <a:t> </a:t>
-            </a:r>
-            <a:r>
-              <a:rPr lang="es-AR" sz="2000" dirty="0" err="1"/>
-              <a:t>utilisés</a:t>
-            </a:r>
-            <a:endParaRPr lang="es-AR" sz="2000" dirty="0"/>
-          </a:p>
-          <a:p>
-            <a:endParaRPr lang="es-AR" sz="2000" dirty="0"/>
-          </a:p>
-        </p:txBody>
-      </p:sp>
-      <p:pic>
-        <p:nvPicPr>
-          <p:cNvPr id="7" name="Image 6" descr="Une image contenant croquis, dessin, conception, illustration&#10;&#10;Le contenu généré par l’IA peut être incorrect.">
-            <a:extLst>
-              <a:ext uri="{FF2B5EF4-FFF2-40B4-BE49-F238E27FC236}">
-                <a16:creationId xmlns:a16="http://schemas.microsoft.com/office/drawing/2014/main" id="{584F66D5-C527-E88B-88E6-659C53639B2C}"/>
-              </a:ext>
-            </a:extLst>
-          </p:cNvPr>
-          <p:cNvPicPr>
-            <a:picLocks noChangeAspect="1"/>
-          </p:cNvPicPr>
-          <p:nvPr/>
-        </p:nvPicPr>
-        <p:blipFill>
-          <a:blip r:embed="rId2">
-            <a:extLst>
-              <a:ext uri="{28A0092B-C50C-407E-A947-70E740481C1C}">
-                <a14:useLocalDpi xmlns:a14="http://schemas.microsoft.com/office/drawing/2010/main" val="0"/>
-              </a:ext>
-            </a:extLst>
-          </a:blip>
-          <a:srcRect r="2" b="13519"/>
-          <a:stretch>
-            <a:fillRect/>
-          </a:stretch>
-        </p:blipFill>
+              <a:rPr lang="fr-FR" sz="5200" dirty="0"/>
+              <a:t>Prompt</a:t>
+            </a:r>
+            <a:endParaRPr lang="es-AR" sz="5200" dirty="0"/>
+          </a:p>
+        </p:txBody>
+      </p:sp>
+      <p:sp>
+        <p:nvSpPr>
+          <p:cNvPr id="3" name="Espace réservé du contenu 2">
+            <a:extLst>
+              <a:ext uri="{FF2B5EF4-FFF2-40B4-BE49-F238E27FC236}">
+                <a16:creationId xmlns:a16="http://schemas.microsoft.com/office/drawing/2014/main" id="{E715C691-8D23-2BBB-9895-63EAE85A5079}"/>
+              </a:ext>
+            </a:extLst>
+          </p:cNvPr>
+          <p:cNvSpPr>
+            <a:spLocks noGrp="1"/>
+          </p:cNvSpPr>
+          <p:nvPr>
+            <p:ph idx="1"/>
+          </p:nvPr>
+        </p:nvSpPr>
         <p:spPr>
           <a:xfrm>
-            <a:off x="6946667" y="774285"/>
-            <a:ext cx="4389120" cy="2581173"/>
+            <a:off x="6291923" y="1239927"/>
+            <a:ext cx="4971824" cy="4680583"/>
           </a:xfrm>
-          <a:prstGeom prst="rect">
-            <a:avLst/>
-          </a:prstGeom>
         </p:spPr>
-      </p:pic>
-      <p:pic>
-        <p:nvPicPr>
-          <p:cNvPr id="5" name="Image 4" descr="Une image contenant texte, capture d’écran, ligne, Police&#10;&#10;Le contenu généré par l’IA peut être incorrect.">
-            <a:extLst>
-              <a:ext uri="{FF2B5EF4-FFF2-40B4-BE49-F238E27FC236}">
-                <a16:creationId xmlns:a16="http://schemas.microsoft.com/office/drawing/2014/main" id="{3C81529A-0816-2472-EF7D-553410821491}"/>
-              </a:ext>
-            </a:extLst>
-          </p:cNvPr>
-          <p:cNvPicPr>
-            <a:picLocks noChangeAspect="1"/>
-          </p:cNvPicPr>
-          <p:nvPr/>
-        </p:nvPicPr>
-        <p:blipFill>
-          <a:blip r:embed="rId3"/>
-          <a:srcRect r="48987" b="1"/>
-          <a:stretch>
-            <a:fillRect/>
-          </a:stretch>
-        </p:blipFill>
-        <p:spPr>
-          <a:xfrm>
-            <a:off x="6946667" y="3575074"/>
-            <a:ext cx="4389120" cy="2581173"/>
-          </a:xfrm>
-          <a:prstGeom prst="rect">
-            <a:avLst/>
-          </a:prstGeom>
-        </p:spPr>
-      </p:pic>
+        <p:txBody>
+          <a:bodyPr anchor="ctr">
+            <a:normAutofit/>
+          </a:bodyPr>
+          <a:lstStyle/>
+          <a:p>
+            <a:pPr marL="0" indent="0">
+              <a:buNone/>
+            </a:pPr>
+            <a:r>
+              <a:rPr lang="fr-FR" sz="1000" dirty="0"/>
+              <a:t>Tu es un expert en devis pour une entreprise spécialisée dans la fabrication de meubles sur mesure.</a:t>
+            </a:r>
+            <a:br>
+              <a:rPr lang="fr-FR" sz="1000" dirty="0"/>
+            </a:br>
+            <a:r>
+              <a:rPr lang="fr-FR" sz="1000" dirty="0"/>
+              <a:t>Tu vas analyser trois types d'entrée : une image du meuble, un fichier STL du meuble, et la liste des matériaux nécessaires à la fabrication du meuble.</a:t>
+            </a:r>
+            <a:br>
+              <a:rPr lang="fr-FR" sz="1000" dirty="0"/>
+            </a:br>
+            <a:br>
+              <a:rPr lang="fr-FR" sz="1000" dirty="0"/>
+            </a:br>
+            <a:r>
+              <a:rPr lang="fr-FR" sz="1000" dirty="0"/>
+              <a:t>Ta tâche consiste à :</a:t>
+            </a:r>
+            <a:br>
+              <a:rPr lang="fr-FR" sz="1000" dirty="0"/>
+            </a:br>
+            <a:r>
+              <a:rPr lang="fr-FR" sz="1000" dirty="0"/>
+              <a:t>1. Évaluer la complexité du meuble en s’appuyant sur les documents fournis. Dans le STL, la longueur du meuble est de 484 cm ; je te laisse en déduire le reste des cotes.</a:t>
+            </a:r>
+            <a:br>
+              <a:rPr lang="fr-FR" sz="1000" dirty="0"/>
+            </a:br>
+            <a:r>
+              <a:rPr lang="fr-FR" sz="1000" dirty="0"/>
+              <a:t>2. Estimer la quantité nécessaire pour chacun des matériaux suivants :</a:t>
+            </a:r>
+            <a:br>
+              <a:rPr lang="fr-FR" sz="1000" dirty="0"/>
+            </a:br>
+            <a:r>
+              <a:rPr lang="fr-FR" sz="1000" dirty="0"/>
+              <a:t>- Tube 30 mm x 30 mm</a:t>
+            </a:r>
+            <a:br>
+              <a:rPr lang="fr-FR" sz="1000" dirty="0"/>
+            </a:br>
+            <a:r>
+              <a:rPr lang="fr-FR" sz="1000" dirty="0"/>
+              <a:t>- SOFTWOOD 18 mm (244 cm x 122 cm)</a:t>
+            </a:r>
+            <a:br>
+              <a:rPr lang="fr-FR" sz="1000" dirty="0"/>
+            </a:br>
+            <a:r>
+              <a:rPr lang="fr-FR" sz="1000" dirty="0"/>
+              <a:t>- MDF 18 mm (305 cm x 122 cm)</a:t>
+            </a:r>
+            <a:br>
+              <a:rPr lang="fr-FR" sz="1000" dirty="0"/>
+            </a:br>
+            <a:r>
+              <a:rPr lang="fr-FR" sz="1000" dirty="0"/>
+              <a:t>- MDF 9 mm (305 cm x 122 cm)</a:t>
+            </a:r>
+            <a:br>
+              <a:rPr lang="fr-FR" sz="1000" dirty="0"/>
+            </a:br>
+            <a:r>
+              <a:rPr lang="fr-FR" sz="1000" dirty="0"/>
+              <a:t>- STRAT EGGER W1000 ST9 BLANC (305 cm x 130 cm)</a:t>
+            </a:r>
+            <a:br>
+              <a:rPr lang="fr-FR" sz="1000" dirty="0"/>
+            </a:br>
+            <a:r>
+              <a:rPr lang="fr-FR" sz="1000" dirty="0"/>
+              <a:t>3. Estimer le temps de main-d'œuvre requis par type :</a:t>
+            </a:r>
+            <a:br>
+              <a:rPr lang="fr-FR" sz="1000" dirty="0"/>
+            </a:br>
+            <a:r>
+              <a:rPr lang="fr-FR" sz="1000" dirty="0"/>
+              <a:t>- M.O. menuiserie</a:t>
+            </a:r>
+            <a:br>
+              <a:rPr lang="fr-FR" sz="1000" dirty="0"/>
+            </a:br>
+            <a:r>
+              <a:rPr lang="fr-FR" sz="1000" dirty="0"/>
+              <a:t>- M.O. CNC</a:t>
+            </a:r>
+            <a:br>
+              <a:rPr lang="fr-FR" sz="1000" dirty="0"/>
+            </a:br>
+            <a:r>
+              <a:rPr lang="fr-FR" sz="1000" dirty="0"/>
+              <a:t>- M.O. scie</a:t>
+            </a:r>
+            <a:br>
+              <a:rPr lang="fr-FR" sz="1000" dirty="0"/>
+            </a:br>
+            <a:r>
+              <a:rPr lang="fr-FR" sz="1000" dirty="0"/>
+              <a:t>4. Calculer le prix total du projet, en prenant en compte :</a:t>
+            </a:r>
+            <a:br>
+              <a:rPr lang="fr-FR" sz="1000" dirty="0"/>
+            </a:br>
+            <a:r>
+              <a:rPr lang="fr-FR" sz="1000" dirty="0"/>
+              <a:t>- Le coût des matériaux utilisés</a:t>
+            </a:r>
+            <a:br>
+              <a:rPr lang="fr-FR" sz="1000" dirty="0"/>
+            </a:br>
+            <a:r>
+              <a:rPr lang="fr-FR" sz="1000" dirty="0"/>
+              <a:t>- Le coût horaire de la main-d'œuvre, selon les tarifs suivants :</a:t>
+            </a:r>
+            <a:br>
+              <a:rPr lang="fr-FR" sz="1000" dirty="0"/>
+            </a:br>
+            <a:r>
+              <a:rPr lang="fr-FR" sz="1000" dirty="0"/>
+              <a:t>- M.O. menuiserie : 35,31 € / h</a:t>
+            </a:r>
+            <a:br>
+              <a:rPr lang="fr-FR" sz="1000" dirty="0"/>
+            </a:br>
+            <a:r>
+              <a:rPr lang="fr-FR" sz="1000" dirty="0"/>
+              <a:t>- M.O. CNC : 40,58 € / h</a:t>
+            </a:r>
+            <a:br>
+              <a:rPr lang="fr-FR" sz="1000" dirty="0"/>
+            </a:br>
+            <a:r>
+              <a:rPr lang="fr-FR" sz="1000" dirty="0"/>
+              <a:t>- M.O. scie : 40,58 € / h</a:t>
+            </a:r>
+            <a:br>
+              <a:rPr lang="fr-FR" sz="1000" dirty="0"/>
+            </a:br>
+            <a:br>
+              <a:rPr lang="fr-FR" sz="1000" dirty="0"/>
+            </a:br>
+            <a:r>
+              <a:rPr lang="fr-FR" sz="1000" dirty="0"/>
+              <a:t>Ne me détaille pas les calculs. Donne uniquement le résultat final au format JSON suivant, sans aucun texte autour :</a:t>
+            </a:r>
+            <a:br>
+              <a:rPr lang="fr-FR" sz="1000" dirty="0"/>
+            </a:br>
+            <a:br>
+              <a:rPr lang="fr-FR" sz="1000" dirty="0"/>
+            </a:br>
+            <a:r>
+              <a:rPr lang="fr-FR" sz="1000" dirty="0"/>
+              <a:t>{</a:t>
+            </a:r>
+            <a:br>
+              <a:rPr lang="fr-FR" sz="1000" dirty="0"/>
+            </a:br>
+            <a:r>
+              <a:rPr lang="fr-FR" sz="1000" dirty="0"/>
+              <a:t>"</a:t>
+            </a:r>
+            <a:r>
+              <a:rPr lang="fr-FR" sz="1000" dirty="0" err="1"/>
+              <a:t>prix_final</a:t>
+            </a:r>
+            <a:r>
+              <a:rPr lang="fr-FR" sz="1000" dirty="0"/>
+              <a:t>": 0.00,</a:t>
+            </a:r>
+            <a:br>
+              <a:rPr lang="fr-FR" sz="1000" dirty="0"/>
+            </a:br>
+            <a:r>
+              <a:rPr lang="fr-FR" sz="1000" dirty="0"/>
+              <a:t>"</a:t>
+            </a:r>
+            <a:r>
+              <a:rPr lang="fr-FR" sz="1000" dirty="0" err="1"/>
+              <a:t>prix_material</a:t>
+            </a:r>
+            <a:r>
+              <a:rPr lang="fr-FR" sz="1000" dirty="0"/>
+              <a:t>": 0.00,</a:t>
+            </a:r>
+            <a:br>
+              <a:rPr lang="fr-FR" sz="1000" dirty="0"/>
+            </a:br>
+            <a:r>
+              <a:rPr lang="fr-FR" sz="1000" dirty="0"/>
+              <a:t>"</a:t>
+            </a:r>
+            <a:r>
+              <a:rPr lang="fr-FR" sz="1000" dirty="0" err="1"/>
+              <a:t>prix_manoeuvre</a:t>
+            </a:r>
+            <a:r>
+              <a:rPr lang="fr-FR" sz="1000" dirty="0"/>
+              <a:t>": 0.00</a:t>
+            </a:r>
+            <a:br>
+              <a:rPr lang="fr-FR" sz="1000" dirty="0"/>
+            </a:br>
+            <a:r>
+              <a:rPr lang="fr-FR" sz="1000" dirty="0"/>
+              <a:t>}</a:t>
+            </a:r>
+          </a:p>
+        </p:txBody>
+      </p:sp>
     </p:spTree>
     <p:extLst>
       <p:ext uri="{BB962C8B-B14F-4D97-AF65-F5344CB8AC3E}">
-        <p14:creationId xmlns:p14="http://schemas.microsoft.com/office/powerpoint/2010/main" val="1042848818"/>
-      </p:ext>
-    </p:extLst>
-  </p:cSld>
-  <p:clrMapOvr>
-    <a:masterClrMapping/>
-  </p:clrMapOvr>
-</p:sld>
-</file>
-
-<file path=ppt/slides/slide9.xml><?xml version="1.0" encoding="utf-8"?>
-<p:sld xmlns:a="http://schemas.openxmlformats.org/drawingml/2006/main" xmlns:r="http://schemas.openxmlformats.org/officeDocument/2006/relationships" xmlns:p="http://schemas.openxmlformats.org/presentationml/2006/main">
-  <p:cSld>
-    <p:bg>
-      <p:bgPr>
-        <a:solidFill>
-          <a:schemeClr val="bg1"/>
-        </a:solidFill>
-        <a:effectLst/>
-      </p:bgPr>
-    </p:bg>
-    <p:spTree>
-      <p:nvGrpSpPr>
-        <p:cNvPr id="1" name=""/>
-        <p:cNvGrpSpPr/>
-        <p:nvPr/>
-      </p:nvGrpSpPr>
-      <p:grpSpPr>
-        <a:xfrm>
-          <a:off x="0" y="0"/>
-          <a:ext cx="0" cy="0"/>
-          <a:chOff x="0" y="0"/>
-          <a:chExt cx="0" cy="0"/>
-        </a:xfrm>
-      </p:grpSpPr>
-      <p:sp useBgFill="1">
-        <p:nvSpPr>
-          <p:cNvPr id="24" name="Rectangle 23">
-            <a:extLst>
-              <a:ext uri="{FF2B5EF4-FFF2-40B4-BE49-F238E27FC236}">
-                <a16:creationId xmlns:a16="http://schemas.microsoft.com/office/drawing/2014/main" id="{058A14AF-9FB5-4CC7-BA35-E8E85D3EDF0E}"/>
-              </a:ext>
-              <a:ext uri="{C183D7F6-B498-43B3-948B-1728B52AA6E4}">
-                <adec:decorative xmlns:adec="http://schemas.microsoft.com/office/drawing/2017/decorative" val="1"/>
-              </a:ext>
-            </a:extLst>
-          </p:cNvPr>
-          <p:cNvSpPr>
-            <a:spLocks noGrp="1" noRot="1" noChangeAspect="1" noMove="1" noResize="1" noEditPoints="1" noAdjustHandles="1" noChangeArrowheads="1" noChangeShapeType="1" noTextEdit="1"/>
-          </p:cNvSpPr>
-          <p:nvPr>
-            <p:extLst>
-              <p:ext uri="{386F3935-93C4-4BCD-93E2-E3B085C9AB24}">
-                <p16:designElem xmlns:p16="http://schemas.microsoft.com/office/powerpoint/2015/main" val="1"/>
-              </p:ext>
-            </p:extLst>
-          </p:nvPr>
-        </p:nvSpPr>
-        <p:spPr>
-          <a:xfrm>
-            <a:off x="0" y="0"/>
-            <a:ext cx="12191999" cy="6857365"/>
-          </a:xfrm>
-          <a:prstGeom prst="rect">
-            <a:avLst/>
-          </a:prstGeom>
-          <a:ln>
-            <a:noFill/>
-          </a:ln>
-        </p:spPr>
-        <p:style>
-          <a:lnRef idx="2">
-            <a:schemeClr val="accent1">
-              <a:shade val="50000"/>
-            </a:schemeClr>
-          </a:lnRef>
-          <a:fillRef idx="1">
-            <a:schemeClr val="accent1"/>
-          </a:fillRef>
-          <a:effectRef idx="0">
-            <a:schemeClr val="accent1"/>
-          </a:effectRef>
-          <a:fontRef idx="minor">
-            <a:schemeClr val="lt1"/>
-          </a:fontRef>
-        </p:style>
-        <p:txBody>
-          <a:bodyPr rtlCol="0" anchor="ctr"/>
-          <a:lstStyle/>
-          <a:p>
-            <a:pPr algn="ctr"/>
-            <a:endParaRPr lang="en-US"/>
-          </a:p>
-        </p:txBody>
-      </p:sp>
-      <p:sp>
-        <p:nvSpPr>
-          <p:cNvPr id="2" name="Titre 1">
-            <a:extLst>
-              <a:ext uri="{FF2B5EF4-FFF2-40B4-BE49-F238E27FC236}">
-                <a16:creationId xmlns:a16="http://schemas.microsoft.com/office/drawing/2014/main" id="{E1E92D83-42A4-0D83-4B6B-105F6E5598AD}"/>
-              </a:ext>
-            </a:extLst>
-          </p:cNvPr>
-          <p:cNvSpPr>
-            <a:spLocks noGrp="1"/>
-          </p:cNvSpPr>
-          <p:nvPr>
-            <p:ph type="title"/>
-          </p:nvPr>
-        </p:nvSpPr>
-        <p:spPr>
-          <a:xfrm>
-            <a:off x="793662" y="386930"/>
-            <a:ext cx="10066122" cy="1298448"/>
-          </a:xfrm>
-        </p:spPr>
-        <p:txBody>
-          <a:bodyPr anchor="b">
-            <a:normAutofit/>
-          </a:bodyPr>
-          <a:lstStyle/>
-          <a:p>
-            <a:r>
-              <a:rPr lang="fr-FR" sz="4800"/>
-              <a:t>Étape 3 : Estimation par le LLM Gemini</a:t>
-            </a:r>
-            <a:endParaRPr lang="es-AR" sz="4800"/>
-          </a:p>
-        </p:txBody>
-      </p:sp>
-      <p:sp>
-        <p:nvSpPr>
-          <p:cNvPr id="26" name="Rectangle 25">
-            <a:extLst>
-              <a:ext uri="{FF2B5EF4-FFF2-40B4-BE49-F238E27FC236}">
-                <a16:creationId xmlns:a16="http://schemas.microsoft.com/office/drawing/2014/main" id="{3A9A4357-BD1D-4622-A4FE-766E6AB8DE84}"/>
-              </a:ext>
-              <a:ext uri="{C183D7F6-B498-43B3-948B-1728B52AA6E4}">
-                <adec:decorative xmlns:adec="http://schemas.microsoft.com/office/drawing/2017/decorative" val="1"/>
-              </a:ext>
-            </a:extLst>
-          </p:cNvPr>
-          <p:cNvSpPr>
-            <a:spLocks noGrp="1" noRot="1" noChangeAspect="1" noMove="1" noResize="1" noEditPoints="1" noAdjustHandles="1" noChangeArrowheads="1" noChangeShapeType="1" noTextEdit="1"/>
-          </p:cNvSpPr>
-          <p:nvPr>
-            <p:extLst>
-              <p:ext uri="{386F3935-93C4-4BCD-93E2-E3B085C9AB24}">
-                <p16:designElem xmlns:p16="http://schemas.microsoft.com/office/powerpoint/2015/main" val="1"/>
-              </p:ext>
-            </p:extLst>
-          </p:nvPr>
-        </p:nvSpPr>
-        <p:spPr>
-          <a:xfrm flipH="1" flipV="1">
-            <a:off x="-2" y="1998845"/>
-            <a:ext cx="11454595" cy="781699"/>
-          </a:xfrm>
-          <a:prstGeom prst="rect">
-            <a:avLst/>
-          </a:prstGeom>
-          <a:solidFill>
-            <a:schemeClr val="accent4"/>
-          </a:solidFill>
-          <a:ln>
-            <a:noFill/>
-          </a:ln>
-        </p:spPr>
-        <p:style>
-          <a:lnRef idx="2">
-            <a:schemeClr val="accent1">
-              <a:shade val="50000"/>
-            </a:schemeClr>
-          </a:lnRef>
-          <a:fillRef idx="1">
-            <a:schemeClr val="accent1"/>
-          </a:fillRef>
-          <a:effectRef idx="0">
-            <a:schemeClr val="accent1"/>
-          </a:effectRef>
-          <a:fontRef idx="minor">
-            <a:schemeClr val="lt1"/>
-          </a:fontRef>
-        </p:style>
-        <p:txBody>
-          <a:bodyPr rtlCol="0" anchor="ctr"/>
-          <a:lstStyle/>
-          <a:p>
-            <a:pPr algn="ctr"/>
-            <a:endParaRPr lang="en-US"/>
-          </a:p>
-        </p:txBody>
-      </p:sp>
-      <p:sp>
-        <p:nvSpPr>
-          <p:cNvPr id="28" name="Rectangle 27">
-            <a:extLst>
-              <a:ext uri="{FF2B5EF4-FFF2-40B4-BE49-F238E27FC236}">
-                <a16:creationId xmlns:a16="http://schemas.microsoft.com/office/drawing/2014/main" id="{E659831F-0D9A-4C63-9EBB-8435B85A440F}"/>
-              </a:ext>
-              <a:ext uri="{C183D7F6-B498-43B3-948B-1728B52AA6E4}">
-                <adec:decorative xmlns:adec="http://schemas.microsoft.com/office/drawing/2017/decorative" val="1"/>
-              </a:ext>
-            </a:extLst>
-          </p:cNvPr>
-          <p:cNvSpPr>
-            <a:spLocks noGrp="1" noRot="1" noChangeAspect="1" noMove="1" noResize="1" noEditPoints="1" noAdjustHandles="1" noChangeArrowheads="1" noChangeShapeType="1" noTextEdit="1"/>
-          </p:cNvSpPr>
-          <p:nvPr>
-            <p:extLst>
-              <p:ext uri="{386F3935-93C4-4BCD-93E2-E3B085C9AB24}">
-                <p16:designElem xmlns:p16="http://schemas.microsoft.com/office/powerpoint/2015/main" val="1"/>
-              </p:ext>
-            </p:extLst>
-          </p:nvPr>
-        </p:nvSpPr>
-        <p:spPr>
-          <a:xfrm>
-            <a:off x="0" y="2203079"/>
-            <a:ext cx="11383362" cy="4267991"/>
-          </a:xfrm>
-          <a:prstGeom prst="rect">
-            <a:avLst/>
-          </a:prstGeom>
-          <a:solidFill>
-            <a:schemeClr val="bg1"/>
-          </a:solidFill>
-          <a:ln>
-            <a:noFill/>
-          </a:ln>
-          <a:effectLst>
-            <a:outerShdw blurRad="139700" dist="127000" dir="5400000" algn="t" rotWithShape="0">
-              <a:prstClr val="black">
-                <a:alpha val="15000"/>
-              </a:prstClr>
-            </a:outerShdw>
-          </a:effectLst>
-        </p:spPr>
-        <p:style>
-          <a:lnRef idx="2">
-            <a:schemeClr val="accent1">
-              <a:shade val="50000"/>
-            </a:schemeClr>
-          </a:lnRef>
-          <a:fillRef idx="1">
-            <a:schemeClr val="accent1"/>
-          </a:fillRef>
-          <a:effectRef idx="0">
-            <a:schemeClr val="accent1"/>
-          </a:effectRef>
-          <a:fontRef idx="minor">
-            <a:schemeClr val="lt1"/>
-          </a:fontRef>
-        </p:style>
-        <p:txBody>
-          <a:bodyPr rtlCol="0" anchor="ctr"/>
-          <a:lstStyle/>
-          <a:p>
-            <a:pPr algn="ctr"/>
-            <a:endParaRPr lang="en-US"/>
-          </a:p>
-        </p:txBody>
-      </p:sp>
-      <p:sp>
-        <p:nvSpPr>
-          <p:cNvPr id="3" name="Espace réservé du contenu 2">
-            <a:extLst>
-              <a:ext uri="{FF2B5EF4-FFF2-40B4-BE49-F238E27FC236}">
-                <a16:creationId xmlns:a16="http://schemas.microsoft.com/office/drawing/2014/main" id="{BE46C37E-D4FF-D8EF-AD88-8A2E9AD3688E}"/>
-              </a:ext>
-            </a:extLst>
-          </p:cNvPr>
-          <p:cNvSpPr>
-            <a:spLocks noGrp="1"/>
-          </p:cNvSpPr>
-          <p:nvPr>
-            <p:ph idx="1"/>
-          </p:nvPr>
-        </p:nvSpPr>
-        <p:spPr>
-          <a:xfrm>
-            <a:off x="793661" y="2599509"/>
-            <a:ext cx="4530898" cy="3639450"/>
-          </a:xfrm>
-        </p:spPr>
-        <p:txBody>
-          <a:bodyPr anchor="ctr">
-            <a:normAutofit/>
-          </a:bodyPr>
-          <a:lstStyle/>
-          <a:p>
-            <a:r>
-              <a:rPr lang="fr-FR" sz="2000" b="1" dirty="0"/>
-              <a:t>Entrées fournies à Gemini</a:t>
-            </a:r>
-            <a:endParaRPr lang="fr-FR" sz="2000" dirty="0"/>
-          </a:p>
-          <a:p>
-            <a:pPr lvl="1"/>
-            <a:r>
-              <a:rPr lang="fr-FR" sz="2000" dirty="0"/>
-              <a:t>Fichier STL de la pièce</a:t>
-            </a:r>
-          </a:p>
-          <a:p>
-            <a:pPr lvl="1"/>
-            <a:r>
-              <a:rPr lang="fr-FR" sz="2000" dirty="0"/>
-              <a:t>Image du meuble</a:t>
-            </a:r>
-          </a:p>
-          <a:p>
-            <a:pPr lvl="1"/>
-            <a:r>
-              <a:rPr lang="fr-FR" sz="2000" dirty="0"/>
-              <a:t>Liste des matériaux </a:t>
-            </a:r>
-          </a:p>
-          <a:p>
-            <a:pPr lvl="1"/>
-            <a:r>
-              <a:rPr lang="fr-FR" sz="2000" dirty="0"/>
-              <a:t>Prompt pour cadrer la demande </a:t>
-            </a:r>
-          </a:p>
-        </p:txBody>
-      </p:sp>
-      <p:pic>
-        <p:nvPicPr>
-          <p:cNvPr id="5" name="Image 4" descr="Une image contenant Graphique, logo, graphisme, Police&#10;&#10;Le contenu généré par l’IA peut être incorrect.">
-            <a:extLst>
-              <a:ext uri="{FF2B5EF4-FFF2-40B4-BE49-F238E27FC236}">
-                <a16:creationId xmlns:a16="http://schemas.microsoft.com/office/drawing/2014/main" id="{6E739D2C-9F2D-81DF-AC90-D807A2518431}"/>
-              </a:ext>
-            </a:extLst>
-          </p:cNvPr>
-          <p:cNvPicPr>
-            <a:picLocks noChangeAspect="1"/>
-          </p:cNvPicPr>
-          <p:nvPr/>
-        </p:nvPicPr>
-        <p:blipFill>
-          <a:blip r:embed="rId2">
-            <a:extLst>
-              <a:ext uri="{28A0092B-C50C-407E-A947-70E740481C1C}">
-                <a14:useLocalDpi xmlns:a14="http://schemas.microsoft.com/office/drawing/2010/main" val="0"/>
-              </a:ext>
-            </a:extLst>
-          </a:blip>
-          <a:stretch>
-            <a:fillRect/>
-          </a:stretch>
-        </p:blipFill>
-        <p:spPr>
-          <a:xfrm>
-            <a:off x="5911532" y="2892862"/>
-            <a:ext cx="5150277" cy="2897030"/>
-          </a:xfrm>
-          <a:prstGeom prst="rect">
-            <a:avLst/>
-          </a:prstGeom>
-        </p:spPr>
-      </p:pic>
-      <p:sp>
-        <p:nvSpPr>
-          <p:cNvPr id="30" name="Rectangle 29">
-            <a:extLst>
-              <a:ext uri="{FF2B5EF4-FFF2-40B4-BE49-F238E27FC236}">
-                <a16:creationId xmlns:a16="http://schemas.microsoft.com/office/drawing/2014/main" id="{E6995CE5-F890-4ABA-82A2-26507CE8D2A3}"/>
-              </a:ext>
-              <a:ext uri="{C183D7F6-B498-43B3-948B-1728B52AA6E4}">
-                <adec:decorative xmlns:adec="http://schemas.microsoft.com/office/drawing/2017/decorative" val="1"/>
-              </a:ext>
-            </a:extLst>
-          </p:cNvPr>
-          <p:cNvSpPr>
-            <a:spLocks noGrp="1" noRot="1" noChangeAspect="1" noMove="1" noResize="1" noEditPoints="1" noAdjustHandles="1" noChangeArrowheads="1" noChangeShapeType="1" noTextEdit="1"/>
-          </p:cNvSpPr>
-          <p:nvPr>
-            <p:extLst>
-              <p:ext uri="{386F3935-93C4-4BCD-93E2-E3B085C9AB24}">
-                <p16:designElem xmlns:p16="http://schemas.microsoft.com/office/powerpoint/2015/main" val="1"/>
-              </p:ext>
-            </p:extLst>
-          </p:nvPr>
-        </p:nvSpPr>
-        <p:spPr>
-          <a:xfrm rot="5400000">
-            <a:off x="11228040" y="2313027"/>
-            <a:ext cx="781700" cy="152382"/>
-          </a:xfrm>
-          <a:prstGeom prst="rect">
-            <a:avLst/>
-          </a:prstGeom>
-          <a:solidFill>
-            <a:schemeClr val="accent4"/>
-          </a:solidFill>
-          <a:ln>
-            <a:noFill/>
-          </a:ln>
-        </p:spPr>
-        <p:style>
-          <a:lnRef idx="2">
-            <a:schemeClr val="accent1">
-              <a:shade val="50000"/>
-            </a:schemeClr>
-          </a:lnRef>
-          <a:fillRef idx="1">
-            <a:schemeClr val="accent1"/>
-          </a:fillRef>
-          <a:effectRef idx="0">
-            <a:schemeClr val="accent1"/>
-          </a:effectRef>
-          <a:fontRef idx="minor">
-            <a:schemeClr val="lt1"/>
-          </a:fontRef>
-        </p:style>
-        <p:txBody>
-          <a:bodyPr rtlCol="0" anchor="ctr"/>
-          <a:lstStyle/>
-          <a:p>
-            <a:pPr algn="ctr"/>
-            <a:endParaRPr lang="en-US"/>
-          </a:p>
-        </p:txBody>
-      </p:sp>
-    </p:spTree>
-    <p:extLst>
-      <p:ext uri="{BB962C8B-B14F-4D97-AF65-F5344CB8AC3E}">
-        <p14:creationId xmlns:p14="http://schemas.microsoft.com/office/powerpoint/2010/main" val="480561951"/>
+        <p14:creationId xmlns:p14="http://schemas.microsoft.com/office/powerpoint/2010/main" val="325488366"/>
       </p:ext>
     </p:extLst>
   </p:cSld>

--- a/TIM Pluo/Slide_Pluo.pptx
+++ b/TIM Pluo/Slide_Pluo.pptx
@@ -5,22 +5,23 @@
     <p:sldMasterId id="2147483648" r:id="rId1"/>
   </p:sldMasterIdLst>
   <p:notesMasterIdLst>
-    <p:notesMasterId r:id="rId15"/>
+    <p:notesMasterId r:id="rId16"/>
   </p:notesMasterIdLst>
   <p:sldIdLst>
     <p:sldId id="256" r:id="rId2"/>
-    <p:sldId id="266" r:id="rId3"/>
-    <p:sldId id="258" r:id="rId4"/>
-    <p:sldId id="269" r:id="rId5"/>
-    <p:sldId id="261" r:id="rId6"/>
-    <p:sldId id="260" r:id="rId7"/>
-    <p:sldId id="273" r:id="rId8"/>
-    <p:sldId id="259" r:id="rId9"/>
-    <p:sldId id="272" r:id="rId10"/>
-    <p:sldId id="262" r:id="rId11"/>
-    <p:sldId id="263" r:id="rId12"/>
-    <p:sldId id="270" r:id="rId13"/>
-    <p:sldId id="271" r:id="rId14"/>
+    <p:sldId id="269" r:id="rId3"/>
+    <p:sldId id="274" r:id="rId4"/>
+    <p:sldId id="276" r:id="rId5"/>
+    <p:sldId id="258" r:id="rId6"/>
+    <p:sldId id="275" r:id="rId7"/>
+    <p:sldId id="261" r:id="rId8"/>
+    <p:sldId id="260" r:id="rId9"/>
+    <p:sldId id="273" r:id="rId10"/>
+    <p:sldId id="259" r:id="rId11"/>
+    <p:sldId id="272" r:id="rId12"/>
+    <p:sldId id="262" r:id="rId13"/>
+    <p:sldId id="263" r:id="rId14"/>
+    <p:sldId id="270" r:id="rId15"/>
   </p:sldIdLst>
   <p:sldSz cx="12192000" cy="6858000"/>
   <p:notesSz cx="6858000" cy="9144000"/>
@@ -482,13 +483,7 @@
   <p:cSld>
     <p:spTree>
       <p:nvGrpSpPr>
-        <p:cNvPr id="1" name="">
-          <a:extLst>
-            <a:ext uri="{FF2B5EF4-FFF2-40B4-BE49-F238E27FC236}">
-              <a16:creationId xmlns:a16="http://schemas.microsoft.com/office/drawing/2014/main" id="{9D6BAE0E-C3E6-9E68-147C-600D72805C95}"/>
-            </a:ext>
-          </a:extLst>
-        </p:cNvPr>
+        <p:cNvPr id="1" name=""/>
         <p:cNvGrpSpPr/>
         <p:nvPr/>
       </p:nvGrpSpPr>
@@ -502,13 +497,7 @@
       </p:grpSpPr>
       <p:sp>
         <p:nvSpPr>
-          <p:cNvPr id="2" name="Espace réservé de l'image des diapositives 1">
-            <a:extLst>
-              <a:ext uri="{FF2B5EF4-FFF2-40B4-BE49-F238E27FC236}">
-                <a16:creationId xmlns:a16="http://schemas.microsoft.com/office/drawing/2014/main" id="{C4AB8FF4-C5F2-0EC6-59AC-043232F1F777}"/>
-              </a:ext>
-            </a:extLst>
-          </p:cNvPr>
+          <p:cNvPr id="2" name="Espace réservé de l'image des diapositives 1"/>
           <p:cNvSpPr>
             <a:spLocks noGrp="1" noRot="1" noChangeAspect="1"/>
           </p:cNvSpPr>
@@ -520,13 +509,7 @@
       </p:sp>
       <p:sp>
         <p:nvSpPr>
-          <p:cNvPr id="3" name="Espace réservé des notes 2">
-            <a:extLst>
-              <a:ext uri="{FF2B5EF4-FFF2-40B4-BE49-F238E27FC236}">
-                <a16:creationId xmlns:a16="http://schemas.microsoft.com/office/drawing/2014/main" id="{45D8528F-6B16-9E1A-EC9D-DFD91ED7B88C}"/>
-              </a:ext>
-            </a:extLst>
-          </p:cNvPr>
+          <p:cNvPr id="3" name="Espace réservé des notes 2"/>
           <p:cNvSpPr>
             <a:spLocks noGrp="1"/>
           </p:cNvSpPr>
@@ -539,105 +522,13 @@
           <a:bodyPr/>
           <a:lstStyle/>
           <a:p>
-            <a:pPr marL="0" marR="0" lvl="0" indent="0" algn="l" defTabSz="914400" rtl="0" eaLnBrk="1" fontAlgn="auto" latinLnBrk="0" hangingPunct="1">
-              <a:lnSpc>
-                <a:spcPct val="100000"/>
-              </a:lnSpc>
-              <a:spcBef>
-                <a:spcPts val="0"/>
-              </a:spcBef>
-              <a:spcAft>
-                <a:spcPts val="0"/>
-              </a:spcAft>
-              <a:buClrTx/>
-              <a:buSzTx/>
-              <a:buFontTx/>
-              <a:buNone/>
-              <a:tabLst/>
-              <a:defRPr/>
-            </a:pPr>
-            <a:r>
-              <a:rPr lang="fr-FR" dirty="0"/>
-              <a:t>Accompagner la transition vers le numérique les PME</a:t>
-            </a:r>
-          </a:p>
-          <a:p>
-            <a:pPr marL="0" marR="0" lvl="0" indent="0" algn="l" defTabSz="914400" rtl="0" eaLnBrk="1" fontAlgn="auto" latinLnBrk="0" hangingPunct="1">
-              <a:lnSpc>
-                <a:spcPct val="100000"/>
-              </a:lnSpc>
-              <a:spcBef>
-                <a:spcPts val="0"/>
-              </a:spcBef>
-              <a:spcAft>
-                <a:spcPts val="0"/>
-              </a:spcAft>
-              <a:buClrTx/>
-              <a:buSzTx/>
-              <a:buFontTx/>
-              <a:buNone/>
-              <a:tabLst/>
-              <a:defRPr/>
-            </a:pPr>
-            <a:r>
-              <a:rPr lang="fr-FR" dirty="0"/>
-              <a:t>2/3 jours </a:t>
-            </a:r>
-          </a:p>
-          <a:p>
-            <a:pPr marL="0" marR="0" lvl="0" indent="0" algn="l" defTabSz="914400" rtl="0" eaLnBrk="1" fontAlgn="auto" latinLnBrk="0" hangingPunct="1">
-              <a:lnSpc>
-                <a:spcPct val="100000"/>
-              </a:lnSpc>
-              <a:spcBef>
-                <a:spcPts val="0"/>
-              </a:spcBef>
-              <a:spcAft>
-                <a:spcPts val="0"/>
-              </a:spcAft>
-              <a:buClrTx/>
-              <a:buSzTx/>
-              <a:buFontTx/>
-              <a:buNone/>
-              <a:tabLst/>
-              <a:defRPr/>
-            </a:pPr>
-            <a:r>
-              <a:rPr lang="fr-FR" dirty="0"/>
-              <a:t>Statues étudiant</a:t>
-            </a:r>
-          </a:p>
-          <a:p>
-            <a:pPr marL="0" marR="0" lvl="0" indent="0" algn="l" defTabSz="914400" rtl="0" eaLnBrk="1" fontAlgn="auto" latinLnBrk="0" hangingPunct="1">
-              <a:lnSpc>
-                <a:spcPct val="100000"/>
-              </a:lnSpc>
-              <a:spcBef>
-                <a:spcPts val="0"/>
-              </a:spcBef>
-              <a:spcAft>
-                <a:spcPts val="0"/>
-              </a:spcAft>
-              <a:buClrTx/>
-              <a:buSzTx/>
-              <a:buFontTx/>
-              <a:buNone/>
-              <a:tabLst/>
-              <a:defRPr/>
-            </a:pPr>
             <a:endParaRPr lang="es-AR" dirty="0"/>
           </a:p>
         </p:txBody>
       </p:sp>
       <p:sp>
         <p:nvSpPr>
-          <p:cNvPr id="4" name="Espace réservé du numéro de diapositive 3">
-            <a:extLst>
-              <a:ext uri="{FF2B5EF4-FFF2-40B4-BE49-F238E27FC236}">
-                <a16:creationId xmlns:a16="http://schemas.microsoft.com/office/drawing/2014/main" id="{3A350515-4FF4-7722-5024-1D98EC8011EE}"/>
-              </a:ext>
-            </a:extLst>
-          </p:cNvPr>
+          <p:cNvPr id="4" name="Espace réservé du numéro de diapositive 3"/>
           <p:cNvSpPr>
             <a:spLocks noGrp="1"/>
           </p:cNvSpPr>
@@ -652,7 +543,7 @@
           <a:p>
             <a:fld id="{CED0BE1B-9CB8-454F-BD68-366FF85AEE84}" type="slidenum">
               <a:rPr lang="es-AR" smtClean="0"/>
-              <a:t>2</a:t>
+              <a:t>1</a:t>
             </a:fld>
             <a:endParaRPr lang="es-AR"/>
           </a:p>
@@ -661,7 +552,7 @@
     </p:spTree>
     <p:extLst>
       <p:ext uri="{BB962C8B-B14F-4D97-AF65-F5344CB8AC3E}">
-        <p14:creationId xmlns:p14="http://schemas.microsoft.com/office/powerpoint/2010/main" val="3317397852"/>
+        <p14:creationId xmlns:p14="http://schemas.microsoft.com/office/powerpoint/2010/main" val="4156569450"/>
       </p:ext>
     </p:extLst>
   </p:cSld>
@@ -671,7 +562,7 @@
 </p:notes>
 </file>
 
-<file path=ppt/notesSlides/notesSlide2.xml><?xml version="1.0" encoding="utf-8"?>
+<file path=ppt/notesSlides/notesSlide10.xml><?xml version="1.0" encoding="utf-8"?>
 <p:notes xmlns:a="http://schemas.openxmlformats.org/drawingml/2006/main" xmlns:r="http://schemas.openxmlformats.org/officeDocument/2006/relationships" xmlns:p="http://schemas.openxmlformats.org/presentationml/2006/main">
   <p:cSld>
     <p:spTree>
@@ -715,64 +606,16 @@
           <a:bodyPr/>
           <a:lstStyle/>
           <a:p>
-            <a:pPr marL="0" marR="0" lvl="0" indent="0" algn="l" defTabSz="914400" rtl="0" eaLnBrk="1" fontAlgn="auto" latinLnBrk="0" hangingPunct="1">
-              <a:lnSpc>
-                <a:spcPct val="100000"/>
-              </a:lnSpc>
-              <a:spcBef>
-                <a:spcPts val="0"/>
-              </a:spcBef>
-              <a:spcAft>
-                <a:spcPts val="0"/>
-              </a:spcAft>
-              <a:buClrTx/>
-              <a:buSzTx/>
-              <a:buFontTx/>
-              <a:buNone/>
-              <a:tabLst/>
-              <a:defRPr/>
-            </a:pPr>
             <a:r>
               <a:rPr lang="fr-FR" dirty="0"/>
-              <a:t>Le Secteur d’activité </a:t>
-            </a:r>
-            <a:r>
-              <a:rPr lang="fr-FR" dirty="0" err="1"/>
-              <a:t>princuipalement</a:t>
-            </a:r>
+              <a:t>Echelle 1/1</a:t>
+            </a:r>
+          </a:p>
+          <a:p>
             <a:r>
               <a:rPr lang="fr-FR" dirty="0"/>
-              <a:t>  la création et  l’aménagement </a:t>
-            </a:r>
-            <a:r>
-              <a:rPr lang="fr-FR" dirty="0" err="1"/>
-              <a:t>despace</a:t>
-            </a:r>
-            <a:r>
-              <a:rPr lang="fr-FR" dirty="0"/>
-              <a:t> </a:t>
-            </a:r>
-          </a:p>
-          <a:p>
-            <a:r>
-              <a:rPr lang="fr-FR" dirty="0"/>
-              <a:t> les stands de présentation de salon, la rénovation de pharmacie, musé </a:t>
-            </a:r>
-            <a:r>
-              <a:rPr lang="fr-FR" dirty="0" err="1"/>
-              <a:t>ect</a:t>
-            </a:r>
-            <a:r>
-              <a:rPr lang="fr-FR" dirty="0"/>
-              <a:t> …</a:t>
-            </a:r>
-          </a:p>
-          <a:p>
-            <a:r>
-              <a:rPr lang="fr-FR" dirty="0"/>
-              <a:t>Besoin spécifique  pour l’assistance de devis, expliqué le contexte </a:t>
-            </a:r>
-            <a:endParaRPr lang="es-AR" dirty="0"/>
+              <a:t>ou  une mesure </a:t>
+            </a:r>
           </a:p>
         </p:txBody>
       </p:sp>
@@ -793,7 +636,7 @@
           <a:p>
             <a:fld id="{CED0BE1B-9CB8-454F-BD68-366FF85AEE84}" type="slidenum">
               <a:rPr lang="es-AR" smtClean="0"/>
-              <a:t>3</a:t>
+              <a:t>10</a:t>
             </a:fld>
             <a:endParaRPr lang="es-AR"/>
           </a:p>
@@ -802,7 +645,7 @@
     </p:spTree>
     <p:extLst>
       <p:ext uri="{BB962C8B-B14F-4D97-AF65-F5344CB8AC3E}">
-        <p14:creationId xmlns:p14="http://schemas.microsoft.com/office/powerpoint/2010/main" val="263777780"/>
+        <p14:creationId xmlns:p14="http://schemas.microsoft.com/office/powerpoint/2010/main" val="2728888653"/>
       </p:ext>
     </p:extLst>
   </p:cSld>
@@ -812,7 +655,430 @@
 </p:notes>
 </file>
 
-<file path=ppt/notesSlides/notesSlide3.xml><?xml version="1.0" encoding="utf-8"?>
+<file path=ppt/notesSlides/notesSlide11.xml><?xml version="1.0" encoding="utf-8"?>
+<p:notes xmlns:a="http://schemas.openxmlformats.org/drawingml/2006/main" xmlns:r="http://schemas.openxmlformats.org/officeDocument/2006/relationships" xmlns:p="http://schemas.openxmlformats.org/presentationml/2006/main">
+  <p:cSld>
+    <p:spTree>
+      <p:nvGrpSpPr>
+        <p:cNvPr id="1" name=""/>
+        <p:cNvGrpSpPr/>
+        <p:nvPr/>
+      </p:nvGrpSpPr>
+      <p:grpSpPr>
+        <a:xfrm>
+          <a:off x="0" y="0"/>
+          <a:ext cx="0" cy="0"/>
+          <a:chOff x="0" y="0"/>
+          <a:chExt cx="0" cy="0"/>
+        </a:xfrm>
+      </p:grpSpPr>
+      <p:sp>
+        <p:nvSpPr>
+          <p:cNvPr id="2" name="Espace réservé de l'image des diapositives 1"/>
+          <p:cNvSpPr>
+            <a:spLocks noGrp="1" noRot="1" noChangeAspect="1"/>
+          </p:cNvSpPr>
+          <p:nvPr>
+            <p:ph type="sldImg"/>
+          </p:nvPr>
+        </p:nvSpPr>
+        <p:spPr/>
+      </p:sp>
+      <p:sp>
+        <p:nvSpPr>
+          <p:cNvPr id="3" name="Espace réservé des notes 2"/>
+          <p:cNvSpPr>
+            <a:spLocks noGrp="1"/>
+          </p:cNvSpPr>
+          <p:nvPr>
+            <p:ph type="body" idx="1"/>
+          </p:nvPr>
+        </p:nvSpPr>
+        <p:spPr/>
+        <p:txBody>
+          <a:bodyPr/>
+          <a:lstStyle/>
+          <a:p>
+            <a:r>
+              <a:rPr lang="fr-FR" dirty="0"/>
+              <a:t>Se spécialisé </a:t>
+            </a:r>
+          </a:p>
+          <a:p>
+            <a:endParaRPr lang="fr-FR" dirty="0"/>
+          </a:p>
+          <a:p>
+            <a:r>
+              <a:rPr lang="fr-FR" dirty="0"/>
+              <a:t>Une suite de taches :</a:t>
+            </a:r>
+          </a:p>
+          <a:p>
+            <a:r>
+              <a:rPr lang="fr-FR" dirty="0"/>
+              <a:t> complexité + longueurs</a:t>
+            </a:r>
+          </a:p>
+          <a:p>
+            <a:r>
+              <a:rPr lang="fr-FR" dirty="0"/>
+              <a:t>	</a:t>
+            </a:r>
+          </a:p>
+          <a:p>
+            <a:r>
+              <a:rPr lang="fr-FR" dirty="0"/>
+              <a:t>Quant mat </a:t>
+            </a:r>
+          </a:p>
+          <a:p>
+            <a:r>
+              <a:rPr lang="fr-FR" dirty="0"/>
+              <a:t>Quant main œuvres </a:t>
+            </a:r>
+          </a:p>
+          <a:p>
+            <a:r>
+              <a:rPr lang="fr-FR" dirty="0"/>
+              <a:t>Calcul</a:t>
+            </a:r>
+          </a:p>
+          <a:p>
+            <a:r>
+              <a:rPr lang="fr-FR" dirty="0"/>
+              <a:t>J’ai  mis en place Processus </a:t>
+            </a:r>
+            <a:r>
+              <a:rPr lang="fr-FR" dirty="0" err="1"/>
+              <a:t>iteratifs</a:t>
+            </a:r>
+            <a:endParaRPr lang="fr-FR" dirty="0"/>
+          </a:p>
+          <a:p>
+            <a:r>
+              <a:rPr lang="fr-FR" dirty="0"/>
+              <a:t>Avec une </a:t>
+            </a:r>
+            <a:r>
+              <a:rPr lang="fr-FR" dirty="0" err="1"/>
+              <a:t>mopyenne</a:t>
+            </a:r>
+            <a:r>
+              <a:rPr lang="fr-FR" dirty="0"/>
+              <a:t> écart type </a:t>
+            </a:r>
+          </a:p>
+          <a:p>
+            <a:r>
+              <a:rPr lang="fr-FR" dirty="0"/>
+              <a:t>Le modèle </a:t>
+            </a:r>
+            <a:r>
+              <a:rPr lang="fr-FR" dirty="0" err="1"/>
+              <a:t>haliciné</a:t>
+            </a:r>
+            <a:r>
+              <a:rPr lang="fr-FR" dirty="0"/>
+              <a:t> </a:t>
+            </a:r>
+          </a:p>
+          <a:p>
+            <a:endParaRPr lang="fr-FR" dirty="0"/>
+          </a:p>
+        </p:txBody>
+      </p:sp>
+      <p:sp>
+        <p:nvSpPr>
+          <p:cNvPr id="4" name="Espace réservé du numéro de diapositive 3"/>
+          <p:cNvSpPr>
+            <a:spLocks noGrp="1"/>
+          </p:cNvSpPr>
+          <p:nvPr>
+            <p:ph type="sldNum" sz="quarter" idx="5"/>
+          </p:nvPr>
+        </p:nvSpPr>
+        <p:spPr/>
+        <p:txBody>
+          <a:bodyPr/>
+          <a:lstStyle/>
+          <a:p>
+            <a:fld id="{CED0BE1B-9CB8-454F-BD68-366FF85AEE84}" type="slidenum">
+              <a:rPr lang="es-AR" smtClean="0"/>
+              <a:t>11</a:t>
+            </a:fld>
+            <a:endParaRPr lang="es-AR"/>
+          </a:p>
+        </p:txBody>
+      </p:sp>
+    </p:spTree>
+    <p:extLst>
+      <p:ext uri="{BB962C8B-B14F-4D97-AF65-F5344CB8AC3E}">
+        <p14:creationId xmlns:p14="http://schemas.microsoft.com/office/powerpoint/2010/main" val="3185270882"/>
+      </p:ext>
+    </p:extLst>
+  </p:cSld>
+  <p:clrMapOvr>
+    <a:masterClrMapping/>
+  </p:clrMapOvr>
+</p:notes>
+</file>
+
+<file path=ppt/notesSlides/notesSlide12.xml><?xml version="1.0" encoding="utf-8"?>
+<p:notes xmlns:a="http://schemas.openxmlformats.org/drawingml/2006/main" xmlns:r="http://schemas.openxmlformats.org/officeDocument/2006/relationships" xmlns:p="http://schemas.openxmlformats.org/presentationml/2006/main">
+  <p:cSld>
+    <p:spTree>
+      <p:nvGrpSpPr>
+        <p:cNvPr id="1" name=""/>
+        <p:cNvGrpSpPr/>
+        <p:nvPr/>
+      </p:nvGrpSpPr>
+      <p:grpSpPr>
+        <a:xfrm>
+          <a:off x="0" y="0"/>
+          <a:ext cx="0" cy="0"/>
+          <a:chOff x="0" y="0"/>
+          <a:chExt cx="0" cy="0"/>
+        </a:xfrm>
+      </p:grpSpPr>
+      <p:sp>
+        <p:nvSpPr>
+          <p:cNvPr id="2" name="Espace réservé de l'image des diapositives 1"/>
+          <p:cNvSpPr>
+            <a:spLocks noGrp="1" noRot="1" noChangeAspect="1"/>
+          </p:cNvSpPr>
+          <p:nvPr>
+            <p:ph type="sldImg"/>
+          </p:nvPr>
+        </p:nvSpPr>
+        <p:spPr/>
+      </p:sp>
+      <p:sp>
+        <p:nvSpPr>
+          <p:cNvPr id="3" name="Espace réservé des notes 2"/>
+          <p:cNvSpPr>
+            <a:spLocks noGrp="1"/>
+          </p:cNvSpPr>
+          <p:nvPr>
+            <p:ph type="body" idx="1"/>
+          </p:nvPr>
+        </p:nvSpPr>
+        <p:spPr/>
+        <p:txBody>
+          <a:bodyPr/>
+          <a:lstStyle/>
+          <a:p>
+            <a:r>
+              <a:rPr lang="fr-FR" dirty="0"/>
+              <a:t> 1 requête prend entre 40 et 70 sec</a:t>
+            </a:r>
+          </a:p>
+        </p:txBody>
+      </p:sp>
+      <p:sp>
+        <p:nvSpPr>
+          <p:cNvPr id="4" name="Espace réservé du numéro de diapositive 3"/>
+          <p:cNvSpPr>
+            <a:spLocks noGrp="1"/>
+          </p:cNvSpPr>
+          <p:nvPr>
+            <p:ph type="sldNum" sz="quarter" idx="5"/>
+          </p:nvPr>
+        </p:nvSpPr>
+        <p:spPr/>
+        <p:txBody>
+          <a:bodyPr/>
+          <a:lstStyle/>
+          <a:p>
+            <a:fld id="{CED0BE1B-9CB8-454F-BD68-366FF85AEE84}" type="slidenum">
+              <a:rPr lang="es-AR" smtClean="0"/>
+              <a:t>12</a:t>
+            </a:fld>
+            <a:endParaRPr lang="es-AR"/>
+          </a:p>
+        </p:txBody>
+      </p:sp>
+    </p:spTree>
+    <p:extLst>
+      <p:ext uri="{BB962C8B-B14F-4D97-AF65-F5344CB8AC3E}">
+        <p14:creationId xmlns:p14="http://schemas.microsoft.com/office/powerpoint/2010/main" val="1304009981"/>
+      </p:ext>
+    </p:extLst>
+  </p:cSld>
+  <p:clrMapOvr>
+    <a:masterClrMapping/>
+  </p:clrMapOvr>
+</p:notes>
+</file>
+
+<file path=ppt/notesSlides/notesSlide13.xml><?xml version="1.0" encoding="utf-8"?>
+<p:notes xmlns:a="http://schemas.openxmlformats.org/drawingml/2006/main" xmlns:r="http://schemas.openxmlformats.org/officeDocument/2006/relationships" xmlns:p="http://schemas.openxmlformats.org/presentationml/2006/main">
+  <p:cSld>
+    <p:spTree>
+      <p:nvGrpSpPr>
+        <p:cNvPr id="1" name=""/>
+        <p:cNvGrpSpPr/>
+        <p:nvPr/>
+      </p:nvGrpSpPr>
+      <p:grpSpPr>
+        <a:xfrm>
+          <a:off x="0" y="0"/>
+          <a:ext cx="0" cy="0"/>
+          <a:chOff x="0" y="0"/>
+          <a:chExt cx="0" cy="0"/>
+        </a:xfrm>
+      </p:grpSpPr>
+      <p:sp>
+        <p:nvSpPr>
+          <p:cNvPr id="2" name="Espace réservé de l'image des diapositives 1"/>
+          <p:cNvSpPr>
+            <a:spLocks noGrp="1" noRot="1" noChangeAspect="1"/>
+          </p:cNvSpPr>
+          <p:nvPr>
+            <p:ph type="sldImg"/>
+          </p:nvPr>
+        </p:nvSpPr>
+        <p:spPr/>
+      </p:sp>
+      <p:sp>
+        <p:nvSpPr>
+          <p:cNvPr id="3" name="Espace réservé des notes 2"/>
+          <p:cNvSpPr>
+            <a:spLocks noGrp="1"/>
+          </p:cNvSpPr>
+          <p:nvPr>
+            <p:ph type="body" idx="1"/>
+          </p:nvPr>
+        </p:nvSpPr>
+        <p:spPr/>
+        <p:txBody>
+          <a:bodyPr/>
+          <a:lstStyle/>
+          <a:p>
+            <a:endParaRPr lang="es-AR" dirty="0"/>
+          </a:p>
+        </p:txBody>
+      </p:sp>
+      <p:sp>
+        <p:nvSpPr>
+          <p:cNvPr id="4" name="Espace réservé du numéro de diapositive 3"/>
+          <p:cNvSpPr>
+            <a:spLocks noGrp="1"/>
+          </p:cNvSpPr>
+          <p:nvPr>
+            <p:ph type="sldNum" sz="quarter" idx="5"/>
+          </p:nvPr>
+        </p:nvSpPr>
+        <p:spPr/>
+        <p:txBody>
+          <a:bodyPr/>
+          <a:lstStyle/>
+          <a:p>
+            <a:fld id="{CED0BE1B-9CB8-454F-BD68-366FF85AEE84}" type="slidenum">
+              <a:rPr lang="es-AR" smtClean="0"/>
+              <a:t>13</a:t>
+            </a:fld>
+            <a:endParaRPr lang="es-AR"/>
+          </a:p>
+        </p:txBody>
+      </p:sp>
+    </p:spTree>
+    <p:extLst>
+      <p:ext uri="{BB962C8B-B14F-4D97-AF65-F5344CB8AC3E}">
+        <p14:creationId xmlns:p14="http://schemas.microsoft.com/office/powerpoint/2010/main" val="3853085445"/>
+      </p:ext>
+    </p:extLst>
+  </p:cSld>
+  <p:clrMapOvr>
+    <a:masterClrMapping/>
+  </p:clrMapOvr>
+</p:notes>
+</file>
+
+<file path=ppt/notesSlides/notesSlide14.xml><?xml version="1.0" encoding="utf-8"?>
+<p:notes xmlns:a="http://schemas.openxmlformats.org/drawingml/2006/main" xmlns:r="http://schemas.openxmlformats.org/officeDocument/2006/relationships" xmlns:p="http://schemas.openxmlformats.org/presentationml/2006/main">
+  <p:cSld>
+    <p:spTree>
+      <p:nvGrpSpPr>
+        <p:cNvPr id="1" name=""/>
+        <p:cNvGrpSpPr/>
+        <p:nvPr/>
+      </p:nvGrpSpPr>
+      <p:grpSpPr>
+        <a:xfrm>
+          <a:off x="0" y="0"/>
+          <a:ext cx="0" cy="0"/>
+          <a:chOff x="0" y="0"/>
+          <a:chExt cx="0" cy="0"/>
+        </a:xfrm>
+      </p:grpSpPr>
+      <p:sp>
+        <p:nvSpPr>
+          <p:cNvPr id="2" name="Espace réservé de l'image des diapositives 1"/>
+          <p:cNvSpPr>
+            <a:spLocks noGrp="1" noRot="1" noChangeAspect="1"/>
+          </p:cNvSpPr>
+          <p:nvPr>
+            <p:ph type="sldImg"/>
+          </p:nvPr>
+        </p:nvSpPr>
+        <p:spPr/>
+      </p:sp>
+      <p:sp>
+        <p:nvSpPr>
+          <p:cNvPr id="3" name="Espace réservé des notes 2"/>
+          <p:cNvSpPr>
+            <a:spLocks noGrp="1"/>
+          </p:cNvSpPr>
+          <p:nvPr>
+            <p:ph type="body" idx="1"/>
+          </p:nvPr>
+        </p:nvSpPr>
+        <p:spPr/>
+        <p:txBody>
+          <a:bodyPr/>
+          <a:lstStyle/>
+          <a:p>
+            <a:endParaRPr lang="es-AR" dirty="0"/>
+          </a:p>
+        </p:txBody>
+      </p:sp>
+      <p:sp>
+        <p:nvSpPr>
+          <p:cNvPr id="4" name="Espace réservé du numéro de diapositive 3"/>
+          <p:cNvSpPr>
+            <a:spLocks noGrp="1"/>
+          </p:cNvSpPr>
+          <p:nvPr>
+            <p:ph type="sldNum" sz="quarter" idx="5"/>
+          </p:nvPr>
+        </p:nvSpPr>
+        <p:spPr/>
+        <p:txBody>
+          <a:bodyPr/>
+          <a:lstStyle/>
+          <a:p>
+            <a:fld id="{CED0BE1B-9CB8-454F-BD68-366FF85AEE84}" type="slidenum">
+              <a:rPr lang="es-AR" smtClean="0"/>
+              <a:t>14</a:t>
+            </a:fld>
+            <a:endParaRPr lang="es-AR"/>
+          </a:p>
+        </p:txBody>
+      </p:sp>
+    </p:spTree>
+    <p:extLst>
+      <p:ext uri="{BB962C8B-B14F-4D97-AF65-F5344CB8AC3E}">
+        <p14:creationId xmlns:p14="http://schemas.microsoft.com/office/powerpoint/2010/main" val="3800666175"/>
+      </p:ext>
+    </p:extLst>
+  </p:cSld>
+  <p:clrMapOvr>
+    <a:masterClrMapping/>
+  </p:clrMapOvr>
+</p:notes>
+</file>
+
+<file path=ppt/notesSlides/notesSlide2.xml><?xml version="1.0" encoding="utf-8"?>
 <p:notes xmlns:a="http://schemas.openxmlformats.org/drawingml/2006/main" xmlns:r="http://schemas.openxmlformats.org/officeDocument/2006/relationships" xmlns:p="http://schemas.openxmlformats.org/presentationml/2006/main">
   <p:cSld>
     <p:spTree>
@@ -984,7 +1250,7 @@
           <a:p>
             <a:fld id="{CED0BE1B-9CB8-454F-BD68-366FF85AEE84}" type="slidenum">
               <a:rPr lang="es-AR" smtClean="0"/>
-              <a:t>4</a:t>
+              <a:t>2</a:t>
             </a:fld>
             <a:endParaRPr lang="es-AR"/>
           </a:p>
@@ -1003,7 +1269,7 @@
 </p:notes>
 </file>
 
-<file path=ppt/notesSlides/notesSlide4.xml><?xml version="1.0" encoding="utf-8"?>
+<file path=ppt/notesSlides/notesSlide3.xml><?xml version="1.0" encoding="utf-8"?>
 <p:notes xmlns:a="http://schemas.openxmlformats.org/drawingml/2006/main" xmlns:r="http://schemas.openxmlformats.org/officeDocument/2006/relationships" xmlns:p="http://schemas.openxmlformats.org/presentationml/2006/main">
   <p:cSld>
     <p:spTree>
@@ -1049,25 +1315,31 @@
           <a:p>
             <a:r>
               <a:rPr lang="fr-FR" dirty="0"/>
-              <a:t>Gratuit </a:t>
-            </a:r>
-          </a:p>
-          <a:p>
+              <a:t>Dire que j’ai  parler de la multimodal </a:t>
+            </a:r>
+            <a:r>
+              <a:rPr lang="fr-FR" dirty="0" err="1"/>
+              <a:t>ité</a:t>
+            </a:r>
             <a:r>
               <a:rPr lang="fr-FR" dirty="0"/>
-              <a:t>restriction journalière</a:t>
+              <a:t> </a:t>
             </a:r>
           </a:p>
           <a:p>
             <a:r>
               <a:rPr lang="fr-FR" dirty="0"/>
-              <a:t>mais première impulsion cadre </a:t>
+              <a:t>Mentionner l’état de l’art qui faire le liens avec le </a:t>
             </a:r>
             <a:r>
               <a:rPr lang="fr-FR" dirty="0" err="1"/>
-              <a:t>Walhub</a:t>
-            </a:r>
-            <a:endParaRPr lang="fr-FR" dirty="0"/>
+              <a:t>usecase</a:t>
+            </a:r>
+            <a:r>
+              <a:rPr lang="fr-FR" dirty="0"/>
+              <a:t> </a:t>
+            </a:r>
+            <a:endParaRPr lang="es-AR" dirty="0"/>
           </a:p>
         </p:txBody>
       </p:sp>
@@ -1088,7 +1360,7 @@
           <a:p>
             <a:fld id="{CED0BE1B-9CB8-454F-BD68-366FF85AEE84}" type="slidenum">
               <a:rPr lang="es-AR" smtClean="0"/>
-              <a:t>5</a:t>
+              <a:t>3</a:t>
             </a:fld>
             <a:endParaRPr lang="es-AR"/>
           </a:p>
@@ -1097,7 +1369,141 @@
     </p:spTree>
     <p:extLst>
       <p:ext uri="{BB962C8B-B14F-4D97-AF65-F5344CB8AC3E}">
-        <p14:creationId xmlns:p14="http://schemas.microsoft.com/office/powerpoint/2010/main" val="740786588"/>
+        <p14:creationId xmlns:p14="http://schemas.microsoft.com/office/powerpoint/2010/main" val="1463193195"/>
+      </p:ext>
+    </p:extLst>
+  </p:cSld>
+  <p:clrMapOvr>
+    <a:masterClrMapping/>
+  </p:clrMapOvr>
+</p:notes>
+</file>
+
+<file path=ppt/notesSlides/notesSlide4.xml><?xml version="1.0" encoding="utf-8"?>
+<p:notes xmlns:a="http://schemas.openxmlformats.org/drawingml/2006/main" xmlns:r="http://schemas.openxmlformats.org/officeDocument/2006/relationships" xmlns:p="http://schemas.openxmlformats.org/presentationml/2006/main">
+  <p:cSld>
+    <p:spTree>
+      <p:nvGrpSpPr>
+        <p:cNvPr id="1" name="">
+          <a:extLst>
+            <a:ext uri="{FF2B5EF4-FFF2-40B4-BE49-F238E27FC236}">
+              <a16:creationId xmlns:a16="http://schemas.microsoft.com/office/drawing/2014/main" id="{FAA84598-E9D3-C483-B587-751298932391}"/>
+            </a:ext>
+          </a:extLst>
+        </p:cNvPr>
+        <p:cNvGrpSpPr/>
+        <p:nvPr/>
+      </p:nvGrpSpPr>
+      <p:grpSpPr>
+        <a:xfrm>
+          <a:off x="0" y="0"/>
+          <a:ext cx="0" cy="0"/>
+          <a:chOff x="0" y="0"/>
+          <a:chExt cx="0" cy="0"/>
+        </a:xfrm>
+      </p:grpSpPr>
+      <p:sp>
+        <p:nvSpPr>
+          <p:cNvPr id="2" name="Espace réservé de l'image des diapositives 1">
+            <a:extLst>
+              <a:ext uri="{FF2B5EF4-FFF2-40B4-BE49-F238E27FC236}">
+                <a16:creationId xmlns:a16="http://schemas.microsoft.com/office/drawing/2014/main" id="{796DC166-5BD5-2B56-959D-F92F070A5167}"/>
+              </a:ext>
+            </a:extLst>
+          </p:cNvPr>
+          <p:cNvSpPr>
+            <a:spLocks noGrp="1" noRot="1" noChangeAspect="1"/>
+          </p:cNvSpPr>
+          <p:nvPr>
+            <p:ph type="sldImg"/>
+          </p:nvPr>
+        </p:nvSpPr>
+        <p:spPr/>
+      </p:sp>
+      <p:sp>
+        <p:nvSpPr>
+          <p:cNvPr id="3" name="Espace réservé des notes 2">
+            <a:extLst>
+              <a:ext uri="{FF2B5EF4-FFF2-40B4-BE49-F238E27FC236}">
+                <a16:creationId xmlns:a16="http://schemas.microsoft.com/office/drawing/2014/main" id="{894FD51A-22CA-6CBA-2D2C-218DC11FB520}"/>
+              </a:ext>
+            </a:extLst>
+          </p:cNvPr>
+          <p:cNvSpPr>
+            <a:spLocks noGrp="1"/>
+          </p:cNvSpPr>
+          <p:nvPr>
+            <p:ph type="body" idx="1"/>
+          </p:nvPr>
+        </p:nvSpPr>
+        <p:spPr/>
+        <p:txBody>
+          <a:bodyPr/>
+          <a:lstStyle/>
+          <a:p>
+            <a:r>
+              <a:rPr lang="fr-FR" dirty="0"/>
+              <a:t>Dire que j’ai  parler de la multimodal </a:t>
+            </a:r>
+            <a:r>
+              <a:rPr lang="fr-FR" dirty="0" err="1"/>
+              <a:t>ité</a:t>
+            </a:r>
+            <a:r>
+              <a:rPr lang="fr-FR" dirty="0"/>
+              <a:t> </a:t>
+            </a:r>
+          </a:p>
+          <a:p>
+            <a:r>
+              <a:rPr lang="fr-FR" dirty="0"/>
+              <a:t>Mentionner l’état de l’art qui faire le liens avec le </a:t>
+            </a:r>
+            <a:r>
+              <a:rPr lang="fr-FR" dirty="0" err="1"/>
+              <a:t>usecase</a:t>
+            </a:r>
+            <a:r>
+              <a:rPr lang="fr-FR" dirty="0"/>
+              <a:t> </a:t>
+            </a:r>
+            <a:endParaRPr lang="es-AR" dirty="0"/>
+          </a:p>
+        </p:txBody>
+      </p:sp>
+      <p:sp>
+        <p:nvSpPr>
+          <p:cNvPr id="4" name="Espace réservé du numéro de diapositive 3">
+            <a:extLst>
+              <a:ext uri="{FF2B5EF4-FFF2-40B4-BE49-F238E27FC236}">
+                <a16:creationId xmlns:a16="http://schemas.microsoft.com/office/drawing/2014/main" id="{9DD3EB6C-CC4A-3AE5-CC1F-6BF5737820C6}"/>
+              </a:ext>
+            </a:extLst>
+          </p:cNvPr>
+          <p:cNvSpPr>
+            <a:spLocks noGrp="1"/>
+          </p:cNvSpPr>
+          <p:nvPr>
+            <p:ph type="sldNum" sz="quarter" idx="5"/>
+          </p:nvPr>
+        </p:nvSpPr>
+        <p:spPr/>
+        <p:txBody>
+          <a:bodyPr/>
+          <a:lstStyle/>
+          <a:p>
+            <a:fld id="{CED0BE1B-9CB8-454F-BD68-366FF85AEE84}" type="slidenum">
+              <a:rPr lang="es-AR" smtClean="0"/>
+              <a:t>4</a:t>
+            </a:fld>
+            <a:endParaRPr lang="es-AR"/>
+          </a:p>
+        </p:txBody>
+      </p:sp>
+    </p:spTree>
+    <p:extLst>
+      <p:ext uri="{BB962C8B-B14F-4D97-AF65-F5344CB8AC3E}">
+        <p14:creationId xmlns:p14="http://schemas.microsoft.com/office/powerpoint/2010/main" val="3592045690"/>
       </p:ext>
     </p:extLst>
   </p:cSld>
@@ -1151,7 +1557,64 @@
           <a:bodyPr/>
           <a:lstStyle/>
           <a:p>
-            <a:endParaRPr lang="fr-FR" dirty="0"/>
+            <a:pPr marL="0" marR="0" lvl="0" indent="0" algn="l" defTabSz="914400" rtl="0" eaLnBrk="1" fontAlgn="auto" latinLnBrk="0" hangingPunct="1">
+              <a:lnSpc>
+                <a:spcPct val="100000"/>
+              </a:lnSpc>
+              <a:spcBef>
+                <a:spcPts val="0"/>
+              </a:spcBef>
+              <a:spcAft>
+                <a:spcPts val="0"/>
+              </a:spcAft>
+              <a:buClrTx/>
+              <a:buSzTx/>
+              <a:buFontTx/>
+              <a:buNone/>
+              <a:tabLst/>
+              <a:defRPr/>
+            </a:pPr>
+            <a:r>
+              <a:rPr lang="fr-FR" dirty="0"/>
+              <a:t>Le Secteur d’activité </a:t>
+            </a:r>
+            <a:r>
+              <a:rPr lang="fr-FR" dirty="0" err="1"/>
+              <a:t>princuipalement</a:t>
+            </a:r>
+            <a:r>
+              <a:rPr lang="fr-FR" dirty="0"/>
+              <a:t>  la création et  l’aménagement </a:t>
+            </a:r>
+            <a:r>
+              <a:rPr lang="fr-FR" dirty="0" err="1"/>
+              <a:t>despace</a:t>
+            </a:r>
+            <a:r>
+              <a:rPr lang="fr-FR" dirty="0"/>
+              <a:t> </a:t>
+            </a:r>
+          </a:p>
+          <a:p>
+            <a:r>
+              <a:rPr lang="fr-FR" dirty="0"/>
+              <a:t> les stands de présentation de salon, la rénovation de pharmacie, musé </a:t>
+            </a:r>
+            <a:r>
+              <a:rPr lang="fr-FR" dirty="0" err="1"/>
+              <a:t>ect</a:t>
+            </a:r>
+            <a:r>
+              <a:rPr lang="fr-FR" dirty="0"/>
+              <a:t> …</a:t>
+            </a:r>
+          </a:p>
+          <a:p>
+            <a:r>
+              <a:rPr lang="fr-FR" dirty="0"/>
+              <a:t>Besoin spécifique  pour l’assistance de devis, expliqué le contexte </a:t>
+            </a:r>
+            <a:endParaRPr lang="es-AR" dirty="0"/>
           </a:p>
         </p:txBody>
       </p:sp>
@@ -1172,7 +1635,7 @@
           <a:p>
             <a:fld id="{CED0BE1B-9CB8-454F-BD68-366FF85AEE84}" type="slidenum">
               <a:rPr lang="es-AR" smtClean="0"/>
-              <a:t>6</a:t>
+              <a:t>5</a:t>
             </a:fld>
             <a:endParaRPr lang="es-AR"/>
           </a:p>
@@ -1181,7 +1644,7 @@
     </p:spTree>
     <p:extLst>
       <p:ext uri="{BB962C8B-B14F-4D97-AF65-F5344CB8AC3E}">
-        <p14:creationId xmlns:p14="http://schemas.microsoft.com/office/powerpoint/2010/main" val="2285810663"/>
+        <p14:creationId xmlns:p14="http://schemas.microsoft.com/office/powerpoint/2010/main" val="263777780"/>
       </p:ext>
     </p:extLst>
   </p:cSld>
@@ -1199,7 +1662,7 @@
         <p:cNvPr id="1" name="">
           <a:extLst>
             <a:ext uri="{FF2B5EF4-FFF2-40B4-BE49-F238E27FC236}">
-              <a16:creationId xmlns:a16="http://schemas.microsoft.com/office/drawing/2014/main" id="{C15740F1-4164-781E-1209-A2D75EE997E9}"/>
+              <a16:creationId xmlns:a16="http://schemas.microsoft.com/office/drawing/2014/main" id="{4B800C30-892E-F168-5B04-0D869F737BDF}"/>
             </a:ext>
           </a:extLst>
         </p:cNvPr>
@@ -1219,7 +1682,7 @@
           <p:cNvPr id="2" name="Espace réservé de l'image des diapositives 1">
             <a:extLst>
               <a:ext uri="{FF2B5EF4-FFF2-40B4-BE49-F238E27FC236}">
-                <a16:creationId xmlns:a16="http://schemas.microsoft.com/office/drawing/2014/main" id="{C18EE7B5-2BA3-6B6D-7FF2-F89F7FDB618D}"/>
+                <a16:creationId xmlns:a16="http://schemas.microsoft.com/office/drawing/2014/main" id="{AE153445-C1F3-AD37-C62D-D34891D7DB95}"/>
               </a:ext>
             </a:extLst>
           </p:cNvPr>
@@ -1237,7 +1700,7 @@
           <p:cNvPr id="3" name="Espace réservé des notes 2">
             <a:extLst>
               <a:ext uri="{FF2B5EF4-FFF2-40B4-BE49-F238E27FC236}">
-                <a16:creationId xmlns:a16="http://schemas.microsoft.com/office/drawing/2014/main" id="{FFA29F9A-770A-4DDE-7BC2-6B2090D79224}"/>
+                <a16:creationId xmlns:a16="http://schemas.microsoft.com/office/drawing/2014/main" id="{B22F5839-FC25-35A1-2425-5DFE254F5465}"/>
               </a:ext>
             </a:extLst>
           </p:cNvPr>
@@ -1253,15 +1716,89 @@
           <a:bodyPr/>
           <a:lstStyle/>
           <a:p>
-            <a:r>
-              <a:rPr lang="fr-FR" dirty="0"/>
-              <a:t>Liste des mat </a:t>
-            </a:r>
-          </a:p>
-          <a:p>
-            <a:r>
-              <a:rPr lang="fr-FR" dirty="0"/>
-              <a:t>Liste des main d’oeuvr²e et le coup horaire </a:t>
+            <a:pPr marL="0" marR="0" lvl="0" indent="0" algn="l" defTabSz="914400" rtl="0" eaLnBrk="1" fontAlgn="auto" latinLnBrk="0" hangingPunct="1">
+              <a:lnSpc>
+                <a:spcPct val="100000"/>
+              </a:lnSpc>
+              <a:spcBef>
+                <a:spcPts val="0"/>
+              </a:spcBef>
+              <a:spcAft>
+                <a:spcPts val="0"/>
+              </a:spcAft>
+              <a:buClrTx/>
+              <a:buSzTx/>
+              <a:buFontTx/>
+              <a:buNone/>
+              <a:tabLst/>
+              <a:defRPr/>
+            </a:pPr>
+            <a:r>
+              <a:rPr lang="es-AR" dirty="0" err="1"/>
+              <a:t>Fichier</a:t>
+            </a:r>
+            <a:r>
+              <a:rPr lang="es-AR" dirty="0"/>
+              <a:t> Exel qui </a:t>
+            </a:r>
+            <a:r>
+              <a:rPr lang="es-AR" dirty="0" err="1"/>
+              <a:t>est</a:t>
+            </a:r>
+            <a:r>
+              <a:rPr lang="es-AR" dirty="0"/>
+              <a:t>  la base de </a:t>
+            </a:r>
+            <a:r>
+              <a:rPr lang="es-AR" dirty="0" err="1"/>
+              <a:t>leurs</a:t>
+            </a:r>
+            <a:r>
+              <a:rPr lang="es-AR" dirty="0"/>
+              <a:t> </a:t>
+            </a:r>
+            <a:r>
+              <a:rPr lang="es-AR" dirty="0" err="1"/>
+              <a:t>devis</a:t>
+            </a:r>
+            <a:r>
+              <a:rPr lang="es-AR" dirty="0"/>
+              <a:t> </a:t>
+            </a:r>
+          </a:p>
+          <a:p>
+            <a:pPr marL="0" marR="0" lvl="0" indent="0" algn="l" defTabSz="914400" rtl="0" eaLnBrk="1" fontAlgn="auto" latinLnBrk="0" hangingPunct="1">
+              <a:lnSpc>
+                <a:spcPct val="100000"/>
+              </a:lnSpc>
+              <a:spcBef>
+                <a:spcPts val="0"/>
+              </a:spcBef>
+              <a:spcAft>
+                <a:spcPts val="0"/>
+              </a:spcAft>
+              <a:buClrTx/>
+              <a:buSzTx/>
+              <a:buFontTx/>
+              <a:buNone/>
+              <a:tabLst/>
+              <a:defRPr/>
+            </a:pPr>
+            <a:r>
+              <a:rPr lang="es-AR" dirty="0" err="1"/>
+              <a:t>Étroitement</a:t>
+            </a:r>
+            <a:r>
+              <a:rPr lang="es-AR" dirty="0"/>
+              <a:t> </a:t>
+            </a:r>
+            <a:r>
+              <a:rPr lang="es-AR" dirty="0" err="1"/>
+              <a:t>lier</a:t>
+            </a:r>
+            <a:r>
+              <a:rPr lang="es-AR" dirty="0"/>
+              <a:t> à  ODOO</a:t>
             </a:r>
           </a:p>
         </p:txBody>
@@ -1271,7 +1808,7 @@
           <p:cNvPr id="4" name="Espace réservé du numéro de diapositive 3">
             <a:extLst>
               <a:ext uri="{FF2B5EF4-FFF2-40B4-BE49-F238E27FC236}">
-                <a16:creationId xmlns:a16="http://schemas.microsoft.com/office/drawing/2014/main" id="{F0B7832E-C455-EAF3-989C-3A14A8154965}"/>
+                <a16:creationId xmlns:a16="http://schemas.microsoft.com/office/drawing/2014/main" id="{8B17FCFA-30A5-5A44-B735-18D7C36452CB}"/>
               </a:ext>
             </a:extLst>
           </p:cNvPr>
@@ -1289,7 +1826,7 @@
           <a:p>
             <a:fld id="{CED0BE1B-9CB8-454F-BD68-366FF85AEE84}" type="slidenum">
               <a:rPr lang="es-AR" smtClean="0"/>
-              <a:t>7</a:t>
+              <a:t>6</a:t>
             </a:fld>
             <a:endParaRPr lang="es-AR"/>
           </a:p>
@@ -1298,7 +1835,7 @@
     </p:spTree>
     <p:extLst>
       <p:ext uri="{BB962C8B-B14F-4D97-AF65-F5344CB8AC3E}">
-        <p14:creationId xmlns:p14="http://schemas.microsoft.com/office/powerpoint/2010/main" val="822254583"/>
+        <p14:creationId xmlns:p14="http://schemas.microsoft.com/office/powerpoint/2010/main" val="3626771347"/>
       </p:ext>
     </p:extLst>
   </p:cSld>
@@ -1354,14 +1891,25 @@
           <a:p>
             <a:r>
               <a:rPr lang="fr-FR" dirty="0"/>
-              <a:t>Echelle 1/1</a:t>
+              <a:t>Gratuit </a:t>
             </a:r>
           </a:p>
           <a:p>
             <a:r>
               <a:rPr lang="fr-FR" dirty="0"/>
-              <a:t>ou  une mesure </a:t>
-            </a:r>
+              <a:t>restriction journalière</a:t>
+            </a:r>
+          </a:p>
+          <a:p>
+            <a:r>
+              <a:rPr lang="fr-FR" dirty="0"/>
+              <a:t>mais première impulsion cadre </a:t>
+            </a:r>
+            <a:r>
+              <a:rPr lang="fr-FR" dirty="0" err="1"/>
+              <a:t>Walhub</a:t>
+            </a:r>
+            <a:endParaRPr lang="fr-FR" dirty="0"/>
           </a:p>
         </p:txBody>
       </p:sp>
@@ -1382,7 +1930,7 @@
           <a:p>
             <a:fld id="{CED0BE1B-9CB8-454F-BD68-366FF85AEE84}" type="slidenum">
               <a:rPr lang="es-AR" smtClean="0"/>
-              <a:t>8</a:t>
+              <a:t>7</a:t>
             </a:fld>
             <a:endParaRPr lang="es-AR"/>
           </a:p>
@@ -1391,7 +1939,7 @@
     </p:spTree>
     <p:extLst>
       <p:ext uri="{BB962C8B-B14F-4D97-AF65-F5344CB8AC3E}">
-        <p14:creationId xmlns:p14="http://schemas.microsoft.com/office/powerpoint/2010/main" val="2728888653"/>
+        <p14:creationId xmlns:p14="http://schemas.microsoft.com/office/powerpoint/2010/main" val="740786588"/>
       </p:ext>
     </p:extLst>
   </p:cSld>
@@ -1445,90 +1993,6 @@
           <a:bodyPr/>
           <a:lstStyle/>
           <a:p>
-            <a:r>
-              <a:rPr lang="fr-FR" dirty="0"/>
-              <a:t>Se spécialisé </a:t>
-            </a:r>
-          </a:p>
-          <a:p>
-            <a:endParaRPr lang="fr-FR" dirty="0"/>
-          </a:p>
-          <a:p>
-            <a:r>
-              <a:rPr lang="fr-FR" dirty="0"/>
-              <a:t>Une suite de taches :</a:t>
-            </a:r>
-          </a:p>
-          <a:p>
-            <a:r>
-              <a:rPr lang="fr-FR" dirty="0"/>
-              <a:t> complexité + longueurs</a:t>
-            </a:r>
-          </a:p>
-          <a:p>
-            <a:r>
-              <a:rPr lang="fr-FR" dirty="0"/>
-              <a:t>	</a:t>
-            </a:r>
-          </a:p>
-          <a:p>
-            <a:r>
-              <a:rPr lang="fr-FR" dirty="0"/>
-              <a:t>Quant mat </a:t>
-            </a:r>
-          </a:p>
-          <a:p>
-            <a:r>
-              <a:rPr lang="fr-FR" dirty="0"/>
-              <a:t>Quant main œuvres </a:t>
-            </a:r>
-          </a:p>
-          <a:p>
-            <a:r>
-              <a:rPr lang="fr-FR" dirty="0"/>
-              <a:t>Calcul</a:t>
-            </a:r>
-          </a:p>
-          <a:p>
-            <a:r>
-              <a:rPr lang="fr-FR" dirty="0"/>
-              <a:t>J’ai  mis en place Processus </a:t>
-            </a:r>
-            <a:r>
-              <a:rPr lang="fr-FR" dirty="0" err="1"/>
-              <a:t>iteratifs</a:t>
-            </a:r>
-            <a:endParaRPr lang="fr-FR" dirty="0"/>
-          </a:p>
-          <a:p>
-            <a:r>
-              <a:rPr lang="fr-FR" dirty="0"/>
-              <a:t>Avec une </a:t>
-            </a:r>
-            <a:r>
-              <a:rPr lang="fr-FR" dirty="0" err="1"/>
-              <a:t>mopyenne</a:t>
-            </a:r>
-            <a:r>
-              <a:rPr lang="fr-FR" dirty="0"/>
-              <a:t> écart type </a:t>
-            </a:r>
-          </a:p>
-          <a:p>
-            <a:r>
-              <a:rPr lang="fr-FR" dirty="0"/>
-              <a:t>Le modèle </a:t>
-            </a:r>
-            <a:r>
-              <a:rPr lang="fr-FR" dirty="0" err="1"/>
-              <a:t>haliciné</a:t>
-            </a:r>
-            <a:r>
-              <a:rPr lang="fr-FR" dirty="0"/>
-              <a:t> </a:t>
-            </a:r>
-          </a:p>
-          <a:p>
             <a:endParaRPr lang="fr-FR" dirty="0"/>
           </a:p>
         </p:txBody>
@@ -1550,7 +2014,7 @@
           <a:p>
             <a:fld id="{CED0BE1B-9CB8-454F-BD68-366FF85AEE84}" type="slidenum">
               <a:rPr lang="es-AR" smtClean="0"/>
-              <a:t>9</a:t>
+              <a:t>8</a:t>
             </a:fld>
             <a:endParaRPr lang="es-AR"/>
           </a:p>
@@ -1559,7 +2023,7 @@
     </p:spTree>
     <p:extLst>
       <p:ext uri="{BB962C8B-B14F-4D97-AF65-F5344CB8AC3E}">
-        <p14:creationId xmlns:p14="http://schemas.microsoft.com/office/powerpoint/2010/main" val="3185270882"/>
+        <p14:creationId xmlns:p14="http://schemas.microsoft.com/office/powerpoint/2010/main" val="2285810663"/>
       </p:ext>
     </p:extLst>
   </p:cSld>
@@ -1574,7 +2038,13 @@
   <p:cSld>
     <p:spTree>
       <p:nvGrpSpPr>
-        <p:cNvPr id="1" name=""/>
+        <p:cNvPr id="1" name="">
+          <a:extLst>
+            <a:ext uri="{FF2B5EF4-FFF2-40B4-BE49-F238E27FC236}">
+              <a16:creationId xmlns:a16="http://schemas.microsoft.com/office/drawing/2014/main" id="{C15740F1-4164-781E-1209-A2D75EE997E9}"/>
+            </a:ext>
+          </a:extLst>
+        </p:cNvPr>
         <p:cNvGrpSpPr/>
         <p:nvPr/>
       </p:nvGrpSpPr>
@@ -1588,7 +2058,13 @@
       </p:grpSpPr>
       <p:sp>
         <p:nvSpPr>
-          <p:cNvPr id="2" name="Espace réservé de l'image des diapositives 1"/>
+          <p:cNvPr id="2" name="Espace réservé de l'image des diapositives 1">
+            <a:extLst>
+              <a:ext uri="{FF2B5EF4-FFF2-40B4-BE49-F238E27FC236}">
+                <a16:creationId xmlns:a16="http://schemas.microsoft.com/office/drawing/2014/main" id="{C18EE7B5-2BA3-6B6D-7FF2-F89F7FDB618D}"/>
+              </a:ext>
+            </a:extLst>
+          </p:cNvPr>
           <p:cNvSpPr>
             <a:spLocks noGrp="1" noRot="1" noChangeAspect="1"/>
           </p:cNvSpPr>
@@ -1600,7 +2076,13 @@
       </p:sp>
       <p:sp>
         <p:nvSpPr>
-          <p:cNvPr id="3" name="Espace réservé des notes 2"/>
+          <p:cNvPr id="3" name="Espace réservé des notes 2">
+            <a:extLst>
+              <a:ext uri="{FF2B5EF4-FFF2-40B4-BE49-F238E27FC236}">
+                <a16:creationId xmlns:a16="http://schemas.microsoft.com/office/drawing/2014/main" id="{FFA29F9A-770A-4DDE-7BC2-6B2090D79224}"/>
+              </a:ext>
+            </a:extLst>
+          </p:cNvPr>
           <p:cNvSpPr>
             <a:spLocks noGrp="1"/>
           </p:cNvSpPr>
@@ -1615,14 +2097,26 @@
           <a:p>
             <a:r>
               <a:rPr lang="fr-FR" dirty="0"/>
-              <a:t> 1 requête prend entre 40 et 70 sec</a:t>
-            </a:r>
-          </a:p>
-        </p:txBody>
-      </p:sp>
-      <p:sp>
-        <p:nvSpPr>
-          <p:cNvPr id="4" name="Espace réservé du numéro de diapositive 3"/>
+              <a:t>Liste des mat </a:t>
+            </a:r>
+          </a:p>
+          <a:p>
+            <a:r>
+              <a:rPr lang="fr-FR" dirty="0"/>
+              <a:t>Liste des main d’oeuvr²e et le coup horaire </a:t>
+            </a:r>
+          </a:p>
+        </p:txBody>
+      </p:sp>
+      <p:sp>
+        <p:nvSpPr>
+          <p:cNvPr id="4" name="Espace réservé du numéro de diapositive 3">
+            <a:extLst>
+              <a:ext uri="{FF2B5EF4-FFF2-40B4-BE49-F238E27FC236}">
+                <a16:creationId xmlns:a16="http://schemas.microsoft.com/office/drawing/2014/main" id="{F0B7832E-C455-EAF3-989C-3A14A8154965}"/>
+              </a:ext>
+            </a:extLst>
+          </p:cNvPr>
           <p:cNvSpPr>
             <a:spLocks noGrp="1"/>
           </p:cNvSpPr>
@@ -1637,7 +2131,7 @@
           <a:p>
             <a:fld id="{CED0BE1B-9CB8-454F-BD68-366FF85AEE84}" type="slidenum">
               <a:rPr lang="es-AR" smtClean="0"/>
-              <a:t>10</a:t>
+              <a:t>9</a:t>
             </a:fld>
             <a:endParaRPr lang="es-AR"/>
           </a:p>
@@ -1646,7 +2140,7 @@
     </p:spTree>
     <p:extLst>
       <p:ext uri="{BB962C8B-B14F-4D97-AF65-F5344CB8AC3E}">
-        <p14:creationId xmlns:p14="http://schemas.microsoft.com/office/powerpoint/2010/main" val="1304009981"/>
+        <p14:creationId xmlns:p14="http://schemas.microsoft.com/office/powerpoint/2010/main" val="822254583"/>
       </p:ext>
     </p:extLst>
   </p:cSld>
@@ -4961,42 +5455,6 @@
       </p:sp>
       <p:sp>
         <p:nvSpPr>
-          <p:cNvPr id="2" name="Titre 1">
-            <a:extLst>
-              <a:ext uri="{FF2B5EF4-FFF2-40B4-BE49-F238E27FC236}">
-                <a16:creationId xmlns:a16="http://schemas.microsoft.com/office/drawing/2014/main" id="{F6945940-8F90-211F-DD3B-E222254B670F}"/>
-              </a:ext>
-            </a:extLst>
-          </p:cNvPr>
-          <p:cNvSpPr>
-            <a:spLocks noGrp="1"/>
-          </p:cNvSpPr>
-          <p:nvPr>
-            <p:ph type="ctrTitle"/>
-          </p:nvPr>
-        </p:nvSpPr>
-        <p:spPr>
-          <a:xfrm>
-            <a:off x="532015" y="4495568"/>
-            <a:ext cx="3861960" cy="1905232"/>
-          </a:xfrm>
-        </p:spPr>
-        <p:txBody>
-          <a:bodyPr vert="horz" lIns="91440" tIns="45720" rIns="91440" bIns="45720" rtlCol="0" anchor="ctr">
-            <a:normAutofit/>
-          </a:bodyPr>
-          <a:lstStyle/>
-          <a:p>
-            <a:pPr algn="l"/>
-            <a:r>
-              <a:rPr lang="en-US" sz="3200"/>
-              <a:t>Solution d’estimation de prix avec LLM pour Pluo</a:t>
-            </a:r>
-          </a:p>
-        </p:txBody>
-      </p:sp>
-      <p:sp>
-        <p:nvSpPr>
           <p:cNvPr id="21" name="Rectangle 20">
             <a:extLst>
               <a:ext uri="{FF2B5EF4-FFF2-40B4-BE49-F238E27FC236}">
@@ -5130,42 +5588,6 @@
       </p:sp>
       <p:pic>
         <p:nvPicPr>
-          <p:cNvPr id="5" name="Image 4" descr="Une image contenant Police, logo, Graphique, cercle&#10;&#10;Le contenu généré par l’IA peut être incorrect.">
-            <a:extLst>
-              <a:ext uri="{FF2B5EF4-FFF2-40B4-BE49-F238E27FC236}">
-                <a16:creationId xmlns:a16="http://schemas.microsoft.com/office/drawing/2014/main" id="{74B72717-064B-BA70-BD7A-6FE684F262CC}"/>
-              </a:ext>
-            </a:extLst>
-          </p:cNvPr>
-          <p:cNvPicPr>
-            <a:picLocks noChangeAspect="1"/>
-          </p:cNvPicPr>
-          <p:nvPr/>
-        </p:nvPicPr>
-        <p:blipFill>
-          <a:blip r:embed="rId2">
-            <a:extLst>
-              <a:ext uri="{28A0092B-C50C-407E-A947-70E740481C1C}">
-                <a14:useLocalDpi xmlns:a14="http://schemas.microsoft.com/office/drawing/2010/main" val="0"/>
-              </a:ext>
-            </a:extLst>
-          </a:blip>
-          <a:stretch>
-            <a:fillRect/>
-          </a:stretch>
-        </p:blipFill>
-        <p:spPr>
-          <a:xfrm>
-            <a:off x="1693366" y="364143"/>
-            <a:ext cx="3426462" cy="3426462"/>
-          </a:xfrm>
-          <a:prstGeom prst="rect">
-            <a:avLst/>
-          </a:prstGeom>
-        </p:spPr>
-      </p:pic>
-      <p:pic>
-        <p:nvPicPr>
           <p:cNvPr id="7" name="Image 6">
             <a:extLst>
               <a:ext uri="{FF2B5EF4-FFF2-40B4-BE49-F238E27FC236}">
@@ -5339,6 +5761,42 @@
           </a:p>
         </p:txBody>
       </p:sp>
+      <p:pic>
+        <p:nvPicPr>
+          <p:cNvPr id="5" name="Image 4" descr="Une image contenant texte, Police, logo, Graphique&#10;&#10;Le contenu généré par l’IA peut être incorrect.">
+            <a:extLst>
+              <a:ext uri="{FF2B5EF4-FFF2-40B4-BE49-F238E27FC236}">
+                <a16:creationId xmlns:a16="http://schemas.microsoft.com/office/drawing/2014/main" id="{B60AA1FC-4AF4-2BA0-80AF-F8BF80ECFF46}"/>
+              </a:ext>
+            </a:extLst>
+          </p:cNvPr>
+          <p:cNvPicPr>
+            <a:picLocks noChangeAspect="1"/>
+          </p:cNvPicPr>
+          <p:nvPr/>
+        </p:nvPicPr>
+        <p:blipFill>
+          <a:blip r:embed="rId4">
+            <a:extLst>
+              <a:ext uri="{28A0092B-C50C-407E-A947-70E740481C1C}">
+                <a14:useLocalDpi xmlns:a14="http://schemas.microsoft.com/office/drawing/2010/main" val="0"/>
+              </a:ext>
+            </a:extLst>
+          </a:blip>
+          <a:stretch>
+            <a:fillRect/>
+          </a:stretch>
+        </p:blipFill>
+        <p:spPr>
+          <a:xfrm>
+            <a:off x="997752" y="923693"/>
+            <a:ext cx="4819650" cy="2381250"/>
+          </a:xfrm>
+          <a:prstGeom prst="rect">
+            <a:avLst/>
+          </a:prstGeom>
+        </p:spPr>
+      </p:pic>
     </p:spTree>
     <p:extLst>
       <p:ext uri="{BB962C8B-B14F-4D97-AF65-F5344CB8AC3E}">
@@ -5353,6 +5811,1080 @@
 </file>
 
 <file path=ppt/slides/slide10.xml><?xml version="1.0" encoding="utf-8"?>
+<p:sld xmlns:a="http://schemas.openxmlformats.org/drawingml/2006/main" xmlns:r="http://schemas.openxmlformats.org/officeDocument/2006/relationships" xmlns:p="http://schemas.openxmlformats.org/presentationml/2006/main">
+  <p:cSld>
+    <p:bg>
+      <p:bgPr>
+        <a:solidFill>
+          <a:schemeClr val="bg1"/>
+        </a:solidFill>
+        <a:effectLst/>
+      </p:bgPr>
+    </p:bg>
+    <p:spTree>
+      <p:nvGrpSpPr>
+        <p:cNvPr id="1" name=""/>
+        <p:cNvGrpSpPr/>
+        <p:nvPr/>
+      </p:nvGrpSpPr>
+      <p:grpSpPr>
+        <a:xfrm>
+          <a:off x="0" y="0"/>
+          <a:ext cx="0" cy="0"/>
+          <a:chOff x="0" y="0"/>
+          <a:chExt cx="0" cy="0"/>
+        </a:xfrm>
+      </p:grpSpPr>
+      <p:sp useBgFill="1">
+        <p:nvSpPr>
+          <p:cNvPr id="45" name="Rectangle 44">
+            <a:extLst>
+              <a:ext uri="{FF2B5EF4-FFF2-40B4-BE49-F238E27FC236}">
+                <a16:creationId xmlns:a16="http://schemas.microsoft.com/office/drawing/2014/main" id="{058A14AF-9FB5-4CC7-BA35-E8E85D3EDF0E}"/>
+              </a:ext>
+              <a:ext uri="{C183D7F6-B498-43B3-948B-1728B52AA6E4}">
+                <adec:decorative xmlns:adec="http://schemas.microsoft.com/office/drawing/2017/decorative" val="1"/>
+              </a:ext>
+            </a:extLst>
+          </p:cNvPr>
+          <p:cNvSpPr>
+            <a:spLocks noGrp="1" noRot="1" noChangeAspect="1" noMove="1" noResize="1" noEditPoints="1" noAdjustHandles="1" noChangeArrowheads="1" noChangeShapeType="1" noTextEdit="1"/>
+          </p:cNvSpPr>
+          <p:nvPr>
+            <p:extLst>
+              <p:ext uri="{386F3935-93C4-4BCD-93E2-E3B085C9AB24}">
+                <p16:designElem xmlns:p16="http://schemas.microsoft.com/office/powerpoint/2015/main" val="1"/>
+              </p:ext>
+            </p:extLst>
+          </p:nvPr>
+        </p:nvSpPr>
+        <p:spPr>
+          <a:xfrm>
+            <a:off x="0" y="0"/>
+            <a:ext cx="12191999" cy="6857365"/>
+          </a:xfrm>
+          <a:prstGeom prst="rect">
+            <a:avLst/>
+          </a:prstGeom>
+          <a:ln>
+            <a:noFill/>
+          </a:ln>
+        </p:spPr>
+        <p:style>
+          <a:lnRef idx="2">
+            <a:schemeClr val="accent1">
+              <a:shade val="50000"/>
+            </a:schemeClr>
+          </a:lnRef>
+          <a:fillRef idx="1">
+            <a:schemeClr val="accent1"/>
+          </a:fillRef>
+          <a:effectRef idx="0">
+            <a:schemeClr val="accent1"/>
+          </a:effectRef>
+          <a:fontRef idx="minor">
+            <a:schemeClr val="lt1"/>
+          </a:fontRef>
+        </p:style>
+        <p:txBody>
+          <a:bodyPr rtlCol="0" anchor="ctr"/>
+          <a:lstStyle/>
+          <a:p>
+            <a:pPr algn="ctr"/>
+            <a:endParaRPr lang="en-US"/>
+          </a:p>
+        </p:txBody>
+      </p:sp>
+      <p:sp>
+        <p:nvSpPr>
+          <p:cNvPr id="2" name="Titre 1">
+            <a:extLst>
+              <a:ext uri="{FF2B5EF4-FFF2-40B4-BE49-F238E27FC236}">
+                <a16:creationId xmlns:a16="http://schemas.microsoft.com/office/drawing/2014/main" id="{F29C2CF4-9C9E-0AE0-07D4-821DC591368E}"/>
+              </a:ext>
+            </a:extLst>
+          </p:cNvPr>
+          <p:cNvSpPr>
+            <a:spLocks noGrp="1"/>
+          </p:cNvSpPr>
+          <p:nvPr>
+            <p:ph type="title"/>
+          </p:nvPr>
+        </p:nvSpPr>
+        <p:spPr>
+          <a:xfrm>
+            <a:off x="793662" y="386930"/>
+            <a:ext cx="10066122" cy="1298448"/>
+          </a:xfrm>
+        </p:spPr>
+        <p:txBody>
+          <a:bodyPr anchor="b">
+            <a:normAutofit/>
+          </a:bodyPr>
+          <a:lstStyle/>
+          <a:p>
+            <a:r>
+              <a:rPr lang="fr-FR" sz="4800"/>
+              <a:t>Fichier STL</a:t>
+            </a:r>
+            <a:endParaRPr lang="es-AR" sz="4800"/>
+          </a:p>
+        </p:txBody>
+      </p:sp>
+      <p:sp>
+        <p:nvSpPr>
+          <p:cNvPr id="47" name="Rectangle 46">
+            <a:extLst>
+              <a:ext uri="{FF2B5EF4-FFF2-40B4-BE49-F238E27FC236}">
+                <a16:creationId xmlns:a16="http://schemas.microsoft.com/office/drawing/2014/main" id="{3A9A4357-BD1D-4622-A4FE-766E6AB8DE84}"/>
+              </a:ext>
+              <a:ext uri="{C183D7F6-B498-43B3-948B-1728B52AA6E4}">
+                <adec:decorative xmlns:adec="http://schemas.microsoft.com/office/drawing/2017/decorative" val="1"/>
+              </a:ext>
+            </a:extLst>
+          </p:cNvPr>
+          <p:cNvSpPr>
+            <a:spLocks noGrp="1" noRot="1" noChangeAspect="1" noMove="1" noResize="1" noEditPoints="1" noAdjustHandles="1" noChangeArrowheads="1" noChangeShapeType="1" noTextEdit="1"/>
+          </p:cNvSpPr>
+          <p:nvPr>
+            <p:extLst>
+              <p:ext uri="{386F3935-93C4-4BCD-93E2-E3B085C9AB24}">
+                <p16:designElem xmlns:p16="http://schemas.microsoft.com/office/powerpoint/2015/main" val="1"/>
+              </p:ext>
+            </p:extLst>
+          </p:nvPr>
+        </p:nvSpPr>
+        <p:spPr>
+          <a:xfrm flipH="1" flipV="1">
+            <a:off x="-2" y="1998845"/>
+            <a:ext cx="11454595" cy="781699"/>
+          </a:xfrm>
+          <a:prstGeom prst="rect">
+            <a:avLst/>
+          </a:prstGeom>
+          <a:solidFill>
+            <a:schemeClr val="accent4"/>
+          </a:solidFill>
+          <a:ln>
+            <a:noFill/>
+          </a:ln>
+        </p:spPr>
+        <p:style>
+          <a:lnRef idx="2">
+            <a:schemeClr val="accent1">
+              <a:shade val="50000"/>
+            </a:schemeClr>
+          </a:lnRef>
+          <a:fillRef idx="1">
+            <a:schemeClr val="accent1"/>
+          </a:fillRef>
+          <a:effectRef idx="0">
+            <a:schemeClr val="accent1"/>
+          </a:effectRef>
+          <a:fontRef idx="minor">
+            <a:schemeClr val="lt1"/>
+          </a:fontRef>
+        </p:style>
+        <p:txBody>
+          <a:bodyPr rtlCol="0" anchor="ctr"/>
+          <a:lstStyle/>
+          <a:p>
+            <a:pPr algn="ctr"/>
+            <a:endParaRPr lang="en-US"/>
+          </a:p>
+        </p:txBody>
+      </p:sp>
+      <p:sp>
+        <p:nvSpPr>
+          <p:cNvPr id="49" name="Rectangle 48">
+            <a:extLst>
+              <a:ext uri="{FF2B5EF4-FFF2-40B4-BE49-F238E27FC236}">
+                <a16:creationId xmlns:a16="http://schemas.microsoft.com/office/drawing/2014/main" id="{E659831F-0D9A-4C63-9EBB-8435B85A440F}"/>
+              </a:ext>
+              <a:ext uri="{C183D7F6-B498-43B3-948B-1728B52AA6E4}">
+                <adec:decorative xmlns:adec="http://schemas.microsoft.com/office/drawing/2017/decorative" val="1"/>
+              </a:ext>
+            </a:extLst>
+          </p:cNvPr>
+          <p:cNvSpPr>
+            <a:spLocks noGrp="1" noRot="1" noChangeAspect="1" noMove="1" noResize="1" noEditPoints="1" noAdjustHandles="1" noChangeArrowheads="1" noChangeShapeType="1" noTextEdit="1"/>
+          </p:cNvSpPr>
+          <p:nvPr>
+            <p:extLst>
+              <p:ext uri="{386F3935-93C4-4BCD-93E2-E3B085C9AB24}">
+                <p16:designElem xmlns:p16="http://schemas.microsoft.com/office/powerpoint/2015/main" val="1"/>
+              </p:ext>
+            </p:extLst>
+          </p:nvPr>
+        </p:nvSpPr>
+        <p:spPr>
+          <a:xfrm>
+            <a:off x="0" y="2203079"/>
+            <a:ext cx="11383362" cy="4267991"/>
+          </a:xfrm>
+          <a:prstGeom prst="rect">
+            <a:avLst/>
+          </a:prstGeom>
+          <a:solidFill>
+            <a:schemeClr val="bg1"/>
+          </a:solidFill>
+          <a:ln>
+            <a:noFill/>
+          </a:ln>
+          <a:effectLst>
+            <a:outerShdw blurRad="139700" dist="127000" dir="5400000" algn="t" rotWithShape="0">
+              <a:prstClr val="black">
+                <a:alpha val="15000"/>
+              </a:prstClr>
+            </a:outerShdw>
+          </a:effectLst>
+        </p:spPr>
+        <p:style>
+          <a:lnRef idx="2">
+            <a:schemeClr val="accent1">
+              <a:shade val="50000"/>
+            </a:schemeClr>
+          </a:lnRef>
+          <a:fillRef idx="1">
+            <a:schemeClr val="accent1"/>
+          </a:fillRef>
+          <a:effectRef idx="0">
+            <a:schemeClr val="accent1"/>
+          </a:effectRef>
+          <a:fontRef idx="minor">
+            <a:schemeClr val="lt1"/>
+          </a:fontRef>
+        </p:style>
+        <p:txBody>
+          <a:bodyPr rtlCol="0" anchor="ctr"/>
+          <a:lstStyle/>
+          <a:p>
+            <a:pPr algn="ctr"/>
+            <a:endParaRPr lang="en-US"/>
+          </a:p>
+        </p:txBody>
+      </p:sp>
+      <p:sp>
+        <p:nvSpPr>
+          <p:cNvPr id="3" name="Espace réservé du contenu 2">
+            <a:extLst>
+              <a:ext uri="{FF2B5EF4-FFF2-40B4-BE49-F238E27FC236}">
+                <a16:creationId xmlns:a16="http://schemas.microsoft.com/office/drawing/2014/main" id="{DC69139D-ACD7-DA3C-913F-D7CA99A9E9D1}"/>
+              </a:ext>
+            </a:extLst>
+          </p:cNvPr>
+          <p:cNvSpPr>
+            <a:spLocks noGrp="1"/>
+          </p:cNvSpPr>
+          <p:nvPr>
+            <p:ph idx="1"/>
+          </p:nvPr>
+        </p:nvSpPr>
+        <p:spPr>
+          <a:xfrm>
+            <a:off x="793661" y="2599509"/>
+            <a:ext cx="4530898" cy="3639450"/>
+          </a:xfrm>
+        </p:spPr>
+        <p:txBody>
+          <a:bodyPr anchor="ctr">
+            <a:normAutofit/>
+          </a:bodyPr>
+          <a:lstStyle/>
+          <a:p>
+            <a:r>
+              <a:rPr lang="fr-FR" sz="2000" dirty="0"/>
+              <a:t>Fichier STL :</a:t>
+            </a:r>
+          </a:p>
+          <a:p>
+            <a:pPr lvl="1"/>
+            <a:r>
+              <a:rPr lang="fr-FR" sz="2000" dirty="0"/>
+              <a:t>la géométrie 3D</a:t>
+            </a:r>
+          </a:p>
+          <a:p>
+            <a:pPr lvl="1"/>
+            <a:r>
+              <a:rPr lang="fr-FR" sz="2000" dirty="0"/>
+              <a:t>le volume de la pièce</a:t>
+            </a:r>
+            <a:endParaRPr lang="es-AR" sz="2000" dirty="0"/>
+          </a:p>
+        </p:txBody>
+      </p:sp>
+      <p:pic>
+        <p:nvPicPr>
+          <p:cNvPr id="8" name="Image 7" descr="Une image contenant croquis, dessin, art, conception&#10;&#10;Le contenu généré par l’IA peut être incorrect.">
+            <a:extLst>
+              <a:ext uri="{FF2B5EF4-FFF2-40B4-BE49-F238E27FC236}">
+                <a16:creationId xmlns:a16="http://schemas.microsoft.com/office/drawing/2014/main" id="{9D4BEC2C-210C-AEE0-0963-510742BDB24C}"/>
+              </a:ext>
+            </a:extLst>
+          </p:cNvPr>
+          <p:cNvPicPr>
+            <a:picLocks noChangeAspect="1"/>
+          </p:cNvPicPr>
+          <p:nvPr/>
+        </p:nvPicPr>
+        <p:blipFill>
+          <a:blip r:embed="rId3"/>
+          <a:stretch>
+            <a:fillRect/>
+          </a:stretch>
+        </p:blipFill>
+        <p:spPr>
+          <a:xfrm>
+            <a:off x="5911532" y="2970116"/>
+            <a:ext cx="5150277" cy="2742522"/>
+          </a:xfrm>
+          <a:prstGeom prst="rect">
+            <a:avLst/>
+          </a:prstGeom>
+        </p:spPr>
+      </p:pic>
+      <p:sp>
+        <p:nvSpPr>
+          <p:cNvPr id="51" name="Rectangle 50">
+            <a:extLst>
+              <a:ext uri="{FF2B5EF4-FFF2-40B4-BE49-F238E27FC236}">
+                <a16:creationId xmlns:a16="http://schemas.microsoft.com/office/drawing/2014/main" id="{E6995CE5-F890-4ABA-82A2-26507CE8D2A3}"/>
+              </a:ext>
+              <a:ext uri="{C183D7F6-B498-43B3-948B-1728B52AA6E4}">
+                <adec:decorative xmlns:adec="http://schemas.microsoft.com/office/drawing/2017/decorative" val="1"/>
+              </a:ext>
+            </a:extLst>
+          </p:cNvPr>
+          <p:cNvSpPr>
+            <a:spLocks noGrp="1" noRot="1" noChangeAspect="1" noMove="1" noResize="1" noEditPoints="1" noAdjustHandles="1" noChangeArrowheads="1" noChangeShapeType="1" noTextEdit="1"/>
+          </p:cNvSpPr>
+          <p:nvPr>
+            <p:extLst>
+              <p:ext uri="{386F3935-93C4-4BCD-93E2-E3B085C9AB24}">
+                <p16:designElem xmlns:p16="http://schemas.microsoft.com/office/powerpoint/2015/main" val="1"/>
+              </p:ext>
+            </p:extLst>
+          </p:nvPr>
+        </p:nvSpPr>
+        <p:spPr>
+          <a:xfrm rot="5400000">
+            <a:off x="11228040" y="2313027"/>
+            <a:ext cx="781700" cy="152382"/>
+          </a:xfrm>
+          <a:prstGeom prst="rect">
+            <a:avLst/>
+          </a:prstGeom>
+          <a:solidFill>
+            <a:schemeClr val="accent4"/>
+          </a:solidFill>
+          <a:ln>
+            <a:noFill/>
+          </a:ln>
+        </p:spPr>
+        <p:style>
+          <a:lnRef idx="2">
+            <a:schemeClr val="accent1">
+              <a:shade val="50000"/>
+            </a:schemeClr>
+          </a:lnRef>
+          <a:fillRef idx="1">
+            <a:schemeClr val="accent1"/>
+          </a:fillRef>
+          <a:effectRef idx="0">
+            <a:schemeClr val="accent1"/>
+          </a:effectRef>
+          <a:fontRef idx="minor">
+            <a:schemeClr val="lt1"/>
+          </a:fontRef>
+        </p:style>
+        <p:txBody>
+          <a:bodyPr rtlCol="0" anchor="ctr"/>
+          <a:lstStyle/>
+          <a:p>
+            <a:pPr algn="ctr"/>
+            <a:endParaRPr lang="en-US"/>
+          </a:p>
+        </p:txBody>
+      </p:sp>
+    </p:spTree>
+    <p:extLst>
+      <p:ext uri="{BB962C8B-B14F-4D97-AF65-F5344CB8AC3E}">
+        <p14:creationId xmlns:p14="http://schemas.microsoft.com/office/powerpoint/2010/main" val="247735772"/>
+      </p:ext>
+    </p:extLst>
+  </p:cSld>
+  <p:clrMapOvr>
+    <a:masterClrMapping/>
+  </p:clrMapOvr>
+</p:sld>
+</file>
+
+<file path=ppt/slides/slide11.xml><?xml version="1.0" encoding="utf-8"?>
+<p:sld xmlns:a="http://schemas.openxmlformats.org/drawingml/2006/main" xmlns:r="http://schemas.openxmlformats.org/officeDocument/2006/relationships" xmlns:p="http://schemas.openxmlformats.org/presentationml/2006/main">
+  <p:cSld>
+    <p:bg>
+      <p:bgPr>
+        <a:solidFill>
+          <a:schemeClr val="bg1"/>
+        </a:solidFill>
+        <a:effectLst/>
+      </p:bgPr>
+    </p:bg>
+    <p:spTree>
+      <p:nvGrpSpPr>
+        <p:cNvPr id="1" name="">
+          <a:extLst>
+            <a:ext uri="{FF2B5EF4-FFF2-40B4-BE49-F238E27FC236}">
+              <a16:creationId xmlns:a16="http://schemas.microsoft.com/office/drawing/2014/main" id="{3DB78C39-F60A-997F-F0B9-7A19DE849337}"/>
+            </a:ext>
+          </a:extLst>
+        </p:cNvPr>
+        <p:cNvGrpSpPr/>
+        <p:nvPr/>
+      </p:nvGrpSpPr>
+      <p:grpSpPr>
+        <a:xfrm>
+          <a:off x="0" y="0"/>
+          <a:ext cx="0" cy="0"/>
+          <a:chOff x="0" y="0"/>
+          <a:chExt cx="0" cy="0"/>
+        </a:xfrm>
+      </p:grpSpPr>
+      <p:sp useBgFill="1">
+        <p:nvSpPr>
+          <p:cNvPr id="84" name="Rectangle 83">
+            <a:extLst>
+              <a:ext uri="{FF2B5EF4-FFF2-40B4-BE49-F238E27FC236}">
+                <a16:creationId xmlns:a16="http://schemas.microsoft.com/office/drawing/2014/main" id="{8B9AA7C6-5E5A-498E-A6DF-A943376E09BC}"/>
+              </a:ext>
+              <a:ext uri="{C183D7F6-B498-43B3-948B-1728B52AA6E4}">
+                <adec:decorative xmlns:adec="http://schemas.microsoft.com/office/drawing/2017/decorative" val="1"/>
+              </a:ext>
+            </a:extLst>
+          </p:cNvPr>
+          <p:cNvSpPr>
+            <a:spLocks noGrp="1" noRot="1" noChangeAspect="1" noMove="1" noResize="1" noEditPoints="1" noAdjustHandles="1" noChangeArrowheads="1" noChangeShapeType="1" noTextEdit="1"/>
+          </p:cNvSpPr>
+          <p:nvPr>
+            <p:extLst>
+              <p:ext uri="{386F3935-93C4-4BCD-93E2-E3B085C9AB24}">
+                <p16:designElem xmlns:p16="http://schemas.microsoft.com/office/powerpoint/2015/main" val="1"/>
+              </p:ext>
+            </p:extLst>
+          </p:nvPr>
+        </p:nvSpPr>
+        <p:spPr>
+          <a:xfrm>
+            <a:off x="0" y="0"/>
+            <a:ext cx="12191999" cy="6857365"/>
+          </a:xfrm>
+          <a:prstGeom prst="rect">
+            <a:avLst/>
+          </a:prstGeom>
+          <a:ln>
+            <a:noFill/>
+          </a:ln>
+        </p:spPr>
+        <p:style>
+          <a:lnRef idx="2">
+            <a:schemeClr val="accent1">
+              <a:shade val="50000"/>
+            </a:schemeClr>
+          </a:lnRef>
+          <a:fillRef idx="1">
+            <a:schemeClr val="accent1"/>
+          </a:fillRef>
+          <a:effectRef idx="0">
+            <a:schemeClr val="accent1"/>
+          </a:effectRef>
+          <a:fontRef idx="minor">
+            <a:schemeClr val="lt1"/>
+          </a:fontRef>
+        </p:style>
+        <p:txBody>
+          <a:bodyPr rtlCol="0" anchor="ctr"/>
+          <a:lstStyle/>
+          <a:p>
+            <a:pPr algn="ctr"/>
+            <a:endParaRPr lang="en-US"/>
+          </a:p>
+        </p:txBody>
+      </p:sp>
+      <p:grpSp>
+        <p:nvGrpSpPr>
+          <p:cNvPr id="85" name="Group 76">
+            <a:extLst>
+              <a:ext uri="{FF2B5EF4-FFF2-40B4-BE49-F238E27FC236}">
+                <a16:creationId xmlns:a16="http://schemas.microsoft.com/office/drawing/2014/main" id="{83EAB11A-76F7-48F4-9B4F-5BFDF4BF9670}"/>
+              </a:ext>
+              <a:ext uri="{C183D7F6-B498-43B3-948B-1728B52AA6E4}">
+                <adec:decorative xmlns:adec="http://schemas.microsoft.com/office/drawing/2017/decorative" val="1"/>
+              </a:ext>
+            </a:extLst>
+          </p:cNvPr>
+          <p:cNvGrpSpPr>
+            <a:grpSpLocks noGrp="1" noUngrp="1" noRot="1" noChangeAspect="1" noMove="1" noResize="1"/>
+          </p:cNvGrpSpPr>
+          <p:nvPr>
+            <p:extLst>
+              <p:ext uri="{386F3935-93C4-4BCD-93E2-E3B085C9AB24}">
+                <p16:designElem xmlns:p16="http://schemas.microsoft.com/office/powerpoint/2015/main" val="1"/>
+              </p:ext>
+            </p:extLst>
+          </p:nvPr>
+        </p:nvGrpSpPr>
+        <p:grpSpPr>
+          <a:xfrm>
+            <a:off x="74300" y="2385102"/>
+            <a:ext cx="574091" cy="2087796"/>
+            <a:chOff x="209668" y="2857422"/>
+            <a:chExt cx="463662" cy="2087796"/>
+          </a:xfrm>
+        </p:grpSpPr>
+        <p:sp>
+          <p:nvSpPr>
+            <p:cNvPr id="86" name="Rectangle 85">
+              <a:extLst>
+                <a:ext uri="{FF2B5EF4-FFF2-40B4-BE49-F238E27FC236}">
+                  <a16:creationId xmlns:a16="http://schemas.microsoft.com/office/drawing/2014/main" id="{74D4C416-D5F4-4F6F-A6F1-87A21CD4FCAF}"/>
+                </a:ext>
+                <a:ext uri="{C183D7F6-B498-43B3-948B-1728B52AA6E4}">
+                  <adec:decorative xmlns:adec="http://schemas.microsoft.com/office/drawing/2017/decorative" val="1"/>
+                </a:ext>
+              </a:extLst>
+            </p:cNvPr>
+            <p:cNvSpPr/>
+            <p:nvPr>
+              <p:extLst>
+                <p:ext uri="{386F3935-93C4-4BCD-93E2-E3B085C9AB24}">
+                  <p16:designElem xmlns:p16="http://schemas.microsoft.com/office/powerpoint/2015/main" val="1"/>
+                </p:ext>
+              </p:extLst>
+            </p:nvPr>
+          </p:nvSpPr>
+          <p:spPr>
+            <a:xfrm flipH="1" flipV="1">
+              <a:off x="423947" y="2857422"/>
+              <a:ext cx="249383" cy="2087795"/>
+            </a:xfrm>
+            <a:prstGeom prst="rect">
+              <a:avLst/>
+            </a:prstGeom>
+            <a:solidFill>
+              <a:schemeClr val="accent4"/>
+            </a:solidFill>
+            <a:ln>
+              <a:noFill/>
+            </a:ln>
+          </p:spPr>
+          <p:style>
+            <a:lnRef idx="2">
+              <a:schemeClr val="accent1">
+                <a:shade val="50000"/>
+              </a:schemeClr>
+            </a:lnRef>
+            <a:fillRef idx="1">
+              <a:schemeClr val="accent1"/>
+            </a:fillRef>
+            <a:effectRef idx="0">
+              <a:schemeClr val="accent1"/>
+            </a:effectRef>
+            <a:fontRef idx="minor">
+              <a:schemeClr val="lt1"/>
+            </a:fontRef>
+          </p:style>
+          <p:txBody>
+            <a:bodyPr rtlCol="0" anchor="ctr"/>
+            <a:lstStyle/>
+            <a:p>
+              <a:pPr algn="ctr"/>
+              <a:endParaRPr lang="en-US"/>
+            </a:p>
+          </p:txBody>
+        </p:sp>
+        <p:cxnSp>
+          <p:nvCxnSpPr>
+            <p:cNvPr id="79" name="Straight Connector 78">
+              <a:extLst>
+                <a:ext uri="{FF2B5EF4-FFF2-40B4-BE49-F238E27FC236}">
+                  <a16:creationId xmlns:a16="http://schemas.microsoft.com/office/drawing/2014/main" id="{C6AC1C30-21C6-4BF6-93EE-B211D7A85011}"/>
+                </a:ext>
+                <a:ext uri="{C183D7F6-B498-43B3-948B-1728B52AA6E4}">
+                  <adec:decorative xmlns:adec="http://schemas.microsoft.com/office/drawing/2017/decorative" val="1"/>
+                </a:ext>
+              </a:extLst>
+            </p:cNvPr>
+            <p:cNvCxnSpPr>
+              <a:cxnSpLocks/>
+            </p:cNvCxnSpPr>
+            <p:nvPr>
+              <p:extLst>
+                <p:ext uri="{386F3935-93C4-4BCD-93E2-E3B085C9AB24}">
+                  <p16:designElem xmlns:p16="http://schemas.microsoft.com/office/powerpoint/2015/main" val="1"/>
+                </p:ext>
+              </p:extLst>
+            </p:nvPr>
+          </p:nvCxnSpPr>
+          <p:spPr>
+            <a:xfrm flipH="1">
+              <a:off x="209668" y="2857423"/>
+              <a:ext cx="1" cy="2087795"/>
+            </a:xfrm>
+            <a:prstGeom prst="line">
+              <a:avLst/>
+            </a:prstGeom>
+            <a:ln w="177800">
+              <a:solidFill>
+                <a:schemeClr val="accent4"/>
+              </a:solidFill>
+            </a:ln>
+          </p:spPr>
+          <p:style>
+            <a:lnRef idx="1">
+              <a:schemeClr val="accent1"/>
+            </a:lnRef>
+            <a:fillRef idx="0">
+              <a:schemeClr val="accent1"/>
+            </a:fillRef>
+            <a:effectRef idx="0">
+              <a:schemeClr val="accent1"/>
+            </a:effectRef>
+            <a:fontRef idx="minor">
+              <a:schemeClr val="tx1"/>
+            </a:fontRef>
+          </p:style>
+        </p:cxnSp>
+      </p:grpSp>
+      <p:sp>
+        <p:nvSpPr>
+          <p:cNvPr id="87" name="Rectangle 86">
+            <a:extLst>
+              <a:ext uri="{FF2B5EF4-FFF2-40B4-BE49-F238E27FC236}">
+                <a16:creationId xmlns:a16="http://schemas.microsoft.com/office/drawing/2014/main" id="{81E140AE-0ABF-47C8-BF32-7D2F0CF2BA44}"/>
+              </a:ext>
+              <a:ext uri="{C183D7F6-B498-43B3-948B-1728B52AA6E4}">
+                <adec:decorative xmlns:adec="http://schemas.microsoft.com/office/drawing/2017/decorative" val="1"/>
+              </a:ext>
+            </a:extLst>
+          </p:cNvPr>
+          <p:cNvSpPr>
+            <a:spLocks noGrp="1" noRot="1" noChangeAspect="1" noMove="1" noResize="1" noEditPoints="1" noAdjustHandles="1" noChangeArrowheads="1" noChangeShapeType="1" noTextEdit="1"/>
+          </p:cNvSpPr>
+          <p:nvPr>
+            <p:extLst>
+              <p:ext uri="{386F3935-93C4-4BCD-93E2-E3B085C9AB24}">
+                <p16:designElem xmlns:p16="http://schemas.microsoft.com/office/powerpoint/2015/main" val="1"/>
+              </p:ext>
+            </p:extLst>
+          </p:nvPr>
+        </p:nvSpPr>
+        <p:spPr>
+          <a:xfrm flipH="1">
+            <a:off x="10697670" y="0"/>
+            <a:ext cx="1494330" cy="6858000"/>
+          </a:xfrm>
+          <a:prstGeom prst="rect">
+            <a:avLst/>
+          </a:prstGeom>
+          <a:solidFill>
+            <a:schemeClr val="accent4"/>
+          </a:solidFill>
+          <a:ln>
+            <a:noFill/>
+          </a:ln>
+        </p:spPr>
+        <p:style>
+          <a:lnRef idx="2">
+            <a:schemeClr val="accent1">
+              <a:shade val="50000"/>
+            </a:schemeClr>
+          </a:lnRef>
+          <a:fillRef idx="1">
+            <a:schemeClr val="accent1"/>
+          </a:fillRef>
+          <a:effectRef idx="0">
+            <a:schemeClr val="accent1"/>
+          </a:effectRef>
+          <a:fontRef idx="minor">
+            <a:schemeClr val="lt1"/>
+          </a:fontRef>
+        </p:style>
+        <p:txBody>
+          <a:bodyPr rtlCol="0" anchor="ctr"/>
+          <a:lstStyle/>
+          <a:p>
+            <a:pPr algn="ctr"/>
+            <a:endParaRPr lang="en-US"/>
+          </a:p>
+        </p:txBody>
+      </p:sp>
+      <p:sp>
+        <p:nvSpPr>
+          <p:cNvPr id="83" name="Rectangle 82">
+            <a:extLst>
+              <a:ext uri="{FF2B5EF4-FFF2-40B4-BE49-F238E27FC236}">
+                <a16:creationId xmlns:a16="http://schemas.microsoft.com/office/drawing/2014/main" id="{CBC4F608-B4B8-48C3-9572-C0F061B1CD99}"/>
+              </a:ext>
+              <a:ext uri="{C183D7F6-B498-43B3-948B-1728B52AA6E4}">
+                <adec:decorative xmlns:adec="http://schemas.microsoft.com/office/drawing/2017/decorative" val="1"/>
+              </a:ext>
+            </a:extLst>
+          </p:cNvPr>
+          <p:cNvSpPr>
+            <a:spLocks noGrp="1" noRot="1" noChangeAspect="1" noMove="1" noResize="1" noEditPoints="1" noAdjustHandles="1" noChangeArrowheads="1" noChangeShapeType="1" noTextEdit="1"/>
+          </p:cNvSpPr>
+          <p:nvPr>
+            <p:extLst>
+              <p:ext uri="{386F3935-93C4-4BCD-93E2-E3B085C9AB24}">
+                <p16:designElem xmlns:p16="http://schemas.microsoft.com/office/powerpoint/2015/main" val="1"/>
+              </p:ext>
+            </p:extLst>
+          </p:nvPr>
+        </p:nvSpPr>
+        <p:spPr>
+          <a:xfrm>
+            <a:off x="579528" y="631767"/>
+            <a:ext cx="11111729" cy="5752404"/>
+          </a:xfrm>
+          <a:prstGeom prst="rect">
+            <a:avLst/>
+          </a:prstGeom>
+          <a:solidFill>
+            <a:schemeClr val="bg1"/>
+          </a:solidFill>
+          <a:ln>
+            <a:noFill/>
+          </a:ln>
+          <a:effectLst>
+            <a:outerShdw blurRad="139700" dist="127000" dir="5400000" algn="t" rotWithShape="0">
+              <a:prstClr val="black">
+                <a:alpha val="15000"/>
+              </a:prstClr>
+            </a:outerShdw>
+          </a:effectLst>
+        </p:spPr>
+        <p:style>
+          <a:lnRef idx="2">
+            <a:schemeClr val="accent1">
+              <a:shade val="50000"/>
+            </a:schemeClr>
+          </a:lnRef>
+          <a:fillRef idx="1">
+            <a:schemeClr val="accent1"/>
+          </a:fillRef>
+          <a:effectRef idx="0">
+            <a:schemeClr val="accent1"/>
+          </a:effectRef>
+          <a:fontRef idx="minor">
+            <a:schemeClr val="lt1"/>
+          </a:fontRef>
+        </p:style>
+        <p:txBody>
+          <a:bodyPr rtlCol="0" anchor="ctr"/>
+          <a:lstStyle/>
+          <a:p>
+            <a:pPr algn="ctr"/>
+            <a:endParaRPr lang="en-US"/>
+          </a:p>
+        </p:txBody>
+      </p:sp>
+      <p:sp>
+        <p:nvSpPr>
+          <p:cNvPr id="2" name="Titre 1">
+            <a:extLst>
+              <a:ext uri="{FF2B5EF4-FFF2-40B4-BE49-F238E27FC236}">
+                <a16:creationId xmlns:a16="http://schemas.microsoft.com/office/drawing/2014/main" id="{BCB07747-4D69-5ABF-258D-80F805A4DDB8}"/>
+              </a:ext>
+            </a:extLst>
+          </p:cNvPr>
+          <p:cNvSpPr>
+            <a:spLocks noGrp="1"/>
+          </p:cNvSpPr>
+          <p:nvPr>
+            <p:ph type="title"/>
+          </p:nvPr>
+        </p:nvSpPr>
+        <p:spPr>
+          <a:xfrm>
+            <a:off x="1153618" y="1239927"/>
+            <a:ext cx="4008586" cy="4680583"/>
+          </a:xfrm>
+        </p:spPr>
+        <p:txBody>
+          <a:bodyPr anchor="ctr">
+            <a:normAutofit/>
+          </a:bodyPr>
+          <a:lstStyle/>
+          <a:p>
+            <a:r>
+              <a:rPr lang="fr-FR" sz="5200" dirty="0"/>
+              <a:t>Prompt</a:t>
+            </a:r>
+            <a:endParaRPr lang="es-AR" sz="5200" dirty="0"/>
+          </a:p>
+        </p:txBody>
+      </p:sp>
+      <p:sp>
+        <p:nvSpPr>
+          <p:cNvPr id="3" name="Espace réservé du contenu 2">
+            <a:extLst>
+              <a:ext uri="{FF2B5EF4-FFF2-40B4-BE49-F238E27FC236}">
+                <a16:creationId xmlns:a16="http://schemas.microsoft.com/office/drawing/2014/main" id="{E715C691-8D23-2BBB-9895-63EAE85A5079}"/>
+              </a:ext>
+            </a:extLst>
+          </p:cNvPr>
+          <p:cNvSpPr>
+            <a:spLocks noGrp="1"/>
+          </p:cNvSpPr>
+          <p:nvPr>
+            <p:ph idx="1"/>
+          </p:nvPr>
+        </p:nvSpPr>
+        <p:spPr>
+          <a:xfrm>
+            <a:off x="6291923" y="1239927"/>
+            <a:ext cx="4971824" cy="4680583"/>
+          </a:xfrm>
+        </p:spPr>
+        <p:txBody>
+          <a:bodyPr anchor="ctr">
+            <a:normAutofit/>
+          </a:bodyPr>
+          <a:lstStyle/>
+          <a:p>
+            <a:pPr marL="0" indent="0">
+              <a:buNone/>
+            </a:pPr>
+            <a:r>
+              <a:rPr lang="fr-FR" sz="1000" dirty="0"/>
+              <a:t>Tu es un expert en devis pour une entreprise spécialisée dans la fabrication de meubles sur mesure.</a:t>
+            </a:r>
+            <a:br>
+              <a:rPr lang="fr-FR" sz="1000" dirty="0"/>
+            </a:br>
+            <a:r>
+              <a:rPr lang="fr-FR" sz="1000" dirty="0"/>
+              <a:t>Tu vas analyser trois types d'entrée : une image du meuble, un fichier STL du meuble, et la liste des matériaux nécessaires à la fabrication du meuble.</a:t>
+            </a:r>
+            <a:br>
+              <a:rPr lang="fr-FR" sz="1000" dirty="0"/>
+            </a:br>
+            <a:br>
+              <a:rPr lang="fr-FR" sz="1000" dirty="0"/>
+            </a:br>
+            <a:r>
+              <a:rPr lang="fr-FR" sz="1000" dirty="0"/>
+              <a:t>Ta tâche consiste à :</a:t>
+            </a:r>
+            <a:br>
+              <a:rPr lang="fr-FR" sz="1000" dirty="0"/>
+            </a:br>
+            <a:r>
+              <a:rPr lang="fr-FR" sz="1000" dirty="0"/>
+              <a:t>1. Évaluer la complexité du meuble en s’appuyant sur les documents fournis. Dans le STL, la longueur du meuble est de 484 cm ; je te laisse en déduire le reste des cotes.</a:t>
+            </a:r>
+            <a:br>
+              <a:rPr lang="fr-FR" sz="1000" dirty="0"/>
+            </a:br>
+            <a:r>
+              <a:rPr lang="fr-FR" sz="1000" dirty="0"/>
+              <a:t>2. Estimer la quantité nécessaire pour chacun des matériaux suivants :</a:t>
+            </a:r>
+            <a:br>
+              <a:rPr lang="fr-FR" sz="1000" dirty="0"/>
+            </a:br>
+            <a:r>
+              <a:rPr lang="fr-FR" sz="1000" dirty="0"/>
+              <a:t>- Tube 30 mm x 30 mm</a:t>
+            </a:r>
+            <a:br>
+              <a:rPr lang="fr-FR" sz="1000" dirty="0"/>
+            </a:br>
+            <a:r>
+              <a:rPr lang="fr-FR" sz="1000" dirty="0"/>
+              <a:t>- SOFTWOOD 18 mm (244 cm x 122 cm)</a:t>
+            </a:r>
+            <a:br>
+              <a:rPr lang="fr-FR" sz="1000" dirty="0"/>
+            </a:br>
+            <a:r>
+              <a:rPr lang="fr-FR" sz="1000" dirty="0"/>
+              <a:t>- MDF 18 mm (305 cm x 122 cm)</a:t>
+            </a:r>
+            <a:br>
+              <a:rPr lang="fr-FR" sz="1000" dirty="0"/>
+            </a:br>
+            <a:r>
+              <a:rPr lang="fr-FR" sz="1000" dirty="0"/>
+              <a:t>- MDF 9 mm (305 cm x 122 cm)</a:t>
+            </a:r>
+            <a:br>
+              <a:rPr lang="fr-FR" sz="1000" dirty="0"/>
+            </a:br>
+            <a:r>
+              <a:rPr lang="fr-FR" sz="1000" dirty="0"/>
+              <a:t>- STRAT EGGER W1000 ST9 BLANC (305 cm x 130 cm)</a:t>
+            </a:r>
+            <a:br>
+              <a:rPr lang="fr-FR" sz="1000" dirty="0"/>
+            </a:br>
+            <a:r>
+              <a:rPr lang="fr-FR" sz="1000" dirty="0"/>
+              <a:t>3. Estimer le temps de main-d'œuvre requis par type :</a:t>
+            </a:r>
+            <a:br>
+              <a:rPr lang="fr-FR" sz="1000" dirty="0"/>
+            </a:br>
+            <a:r>
+              <a:rPr lang="fr-FR" sz="1000" dirty="0"/>
+              <a:t>- M.O. menuiserie</a:t>
+            </a:r>
+            <a:br>
+              <a:rPr lang="fr-FR" sz="1000" dirty="0"/>
+            </a:br>
+            <a:r>
+              <a:rPr lang="fr-FR" sz="1000" dirty="0"/>
+              <a:t>- M.O. CNC</a:t>
+            </a:r>
+            <a:br>
+              <a:rPr lang="fr-FR" sz="1000" dirty="0"/>
+            </a:br>
+            <a:r>
+              <a:rPr lang="fr-FR" sz="1000" dirty="0"/>
+              <a:t>- M.O. scie</a:t>
+            </a:r>
+            <a:br>
+              <a:rPr lang="fr-FR" sz="1000" dirty="0"/>
+            </a:br>
+            <a:r>
+              <a:rPr lang="fr-FR" sz="1000" dirty="0"/>
+              <a:t>4. Calculer le prix total du projet, en prenant en compte :</a:t>
+            </a:r>
+            <a:br>
+              <a:rPr lang="fr-FR" sz="1000" dirty="0"/>
+            </a:br>
+            <a:r>
+              <a:rPr lang="fr-FR" sz="1000" dirty="0"/>
+              <a:t>- Le coût des matériaux utilisés</a:t>
+            </a:r>
+            <a:br>
+              <a:rPr lang="fr-FR" sz="1000" dirty="0"/>
+            </a:br>
+            <a:r>
+              <a:rPr lang="fr-FR" sz="1000" dirty="0"/>
+              <a:t>- Le coût horaire de la main-d'œuvre, selon les tarifs suivants :</a:t>
+            </a:r>
+            <a:br>
+              <a:rPr lang="fr-FR" sz="1000" dirty="0"/>
+            </a:br>
+            <a:r>
+              <a:rPr lang="fr-FR" sz="1000" dirty="0"/>
+              <a:t>- M.O. menuiserie : X € / h</a:t>
+            </a:r>
+            <a:br>
+              <a:rPr lang="fr-FR" sz="1000" dirty="0"/>
+            </a:br>
+            <a:r>
+              <a:rPr lang="fr-FR" sz="1000" dirty="0"/>
+              <a:t>- M.O. CNC : Y € / h</a:t>
+            </a:r>
+            <a:br>
+              <a:rPr lang="fr-FR" sz="1000" dirty="0"/>
+            </a:br>
+            <a:r>
+              <a:rPr lang="fr-FR" sz="1000" dirty="0"/>
+              <a:t>- M.O. scie : Z € / h</a:t>
+            </a:r>
+            <a:br>
+              <a:rPr lang="fr-FR" sz="1000" dirty="0"/>
+            </a:br>
+            <a:br>
+              <a:rPr lang="fr-FR" sz="1000" dirty="0"/>
+            </a:br>
+            <a:r>
+              <a:rPr lang="fr-FR" sz="1000" dirty="0"/>
+              <a:t>Ne me détaille pas les calculs. Donne uniquement le résultat final au format JSON suivant, sans aucun texte autour :</a:t>
+            </a:r>
+            <a:br>
+              <a:rPr lang="fr-FR" sz="1000" dirty="0"/>
+            </a:br>
+            <a:br>
+              <a:rPr lang="fr-FR" sz="1000" dirty="0"/>
+            </a:br>
+            <a:r>
+              <a:rPr lang="fr-FR" sz="1000" dirty="0"/>
+              <a:t>{</a:t>
+            </a:r>
+            <a:br>
+              <a:rPr lang="fr-FR" sz="1000" dirty="0"/>
+            </a:br>
+            <a:r>
+              <a:rPr lang="fr-FR" sz="1000" dirty="0"/>
+              <a:t>"</a:t>
+            </a:r>
+            <a:r>
+              <a:rPr lang="fr-FR" sz="1000" dirty="0" err="1"/>
+              <a:t>prix_final</a:t>
+            </a:r>
+            <a:r>
+              <a:rPr lang="fr-FR" sz="1000" dirty="0"/>
+              <a:t>": 0.00,</a:t>
+            </a:r>
+            <a:br>
+              <a:rPr lang="fr-FR" sz="1000" dirty="0"/>
+            </a:br>
+            <a:r>
+              <a:rPr lang="fr-FR" sz="1000" dirty="0"/>
+              <a:t>"</a:t>
+            </a:r>
+            <a:r>
+              <a:rPr lang="fr-FR" sz="1000" dirty="0" err="1"/>
+              <a:t>prix_material</a:t>
+            </a:r>
+            <a:r>
+              <a:rPr lang="fr-FR" sz="1000" dirty="0"/>
+              <a:t>": 0.00,</a:t>
+            </a:r>
+            <a:br>
+              <a:rPr lang="fr-FR" sz="1000" dirty="0"/>
+            </a:br>
+            <a:r>
+              <a:rPr lang="fr-FR" sz="1000" dirty="0"/>
+              <a:t>"</a:t>
+            </a:r>
+            <a:r>
+              <a:rPr lang="fr-FR" sz="1000" dirty="0" err="1"/>
+              <a:t>prix_manoeuvre</a:t>
+            </a:r>
+            <a:r>
+              <a:rPr lang="fr-FR" sz="1000" dirty="0"/>
+              <a:t>": 0.00</a:t>
+            </a:r>
+            <a:br>
+              <a:rPr lang="fr-FR" sz="1000" dirty="0"/>
+            </a:br>
+            <a:r>
+              <a:rPr lang="fr-FR" sz="1000" dirty="0"/>
+              <a:t>}</a:t>
+            </a:r>
+          </a:p>
+        </p:txBody>
+      </p:sp>
+    </p:spTree>
+    <p:extLst>
+      <p:ext uri="{BB962C8B-B14F-4D97-AF65-F5344CB8AC3E}">
+        <p14:creationId xmlns:p14="http://schemas.microsoft.com/office/powerpoint/2010/main" val="325488366"/>
+      </p:ext>
+    </p:extLst>
+  </p:cSld>
+  <p:clrMapOvr>
+    <a:masterClrMapping/>
+  </p:clrMapOvr>
+</p:sld>
+</file>
+
+<file path=ppt/slides/slide12.xml><?xml version="1.0" encoding="utf-8"?>
 <p:sld xmlns:a="http://schemas.openxmlformats.org/drawingml/2006/main" xmlns:r="http://schemas.openxmlformats.org/officeDocument/2006/relationships" xmlns:p="http://schemas.openxmlformats.org/presentationml/2006/main">
   <p:cSld>
     <p:bg>
@@ -5793,7 +7325,7 @@
 </p:sld>
 </file>
 
-<file path=ppt/slides/slide11.xml><?xml version="1.0" encoding="utf-8"?>
+<file path=ppt/slides/slide13.xml><?xml version="1.0" encoding="utf-8"?>
 <p:sld xmlns:a="http://schemas.openxmlformats.org/drawingml/2006/main" xmlns:r="http://schemas.openxmlformats.org/officeDocument/2006/relationships" xmlns:p="http://schemas.openxmlformats.org/presentationml/2006/main">
   <p:cSld>
     <p:bg>
@@ -6299,12 +7831,44 @@
           <a:p>
             <a:pPr algn="r"/>
             <a:r>
+              <a:rPr lang="es-AR" sz="4000" dirty="0" err="1">
+                <a:solidFill>
+                  <a:schemeClr val="bg1"/>
+                </a:solidFill>
+              </a:rPr>
+              <a:t>Possibilités</a:t>
+            </a:r>
+            <a:r>
+              <a:rPr lang="es-AR" sz="4000" dirty="0">
+                <a:solidFill>
+                  <a:schemeClr val="bg1"/>
+                </a:solidFill>
+              </a:rPr>
+              <a:t> </a:t>
+            </a:r>
+            <a:r>
+              <a:rPr lang="es-AR" sz="4000" dirty="0" err="1">
+                <a:solidFill>
+                  <a:schemeClr val="bg1"/>
+                </a:solidFill>
+              </a:rPr>
+              <a:t>d’amélioration</a:t>
+            </a:r>
+            <a:r>
+              <a:rPr lang="es-AR" sz="4000" dirty="0">
+                <a:solidFill>
+                  <a:schemeClr val="bg1"/>
+                </a:solidFill>
+              </a:rPr>
+              <a:t> </a:t>
+            </a:r>
+            <a:r>
               <a:rPr lang="fr-FR" sz="4000" dirty="0">
                 <a:solidFill>
                   <a:srgbClr val="FFFFFF"/>
                 </a:solidFill>
               </a:rPr>
-              <a:t>Possibilité d’optimisation: </a:t>
+              <a:t>: </a:t>
             </a:r>
             <a:endParaRPr lang="es-AR" sz="4000" dirty="0">
               <a:solidFill>
@@ -6356,7 +7920,15 @@
           <a:p>
             <a:r>
               <a:rPr lang="fr-FR" sz="2000" dirty="0"/>
-              <a:t>Entraîner un agent pour obtenir les prix réels des matériaux.</a:t>
+              <a:t>Entraîner divers agents pour </a:t>
+            </a:r>
+            <a:r>
+              <a:rPr lang="fr-FR" sz="2000" dirty="0" err="1"/>
+              <a:t>augemters</a:t>
+            </a:r>
+            <a:r>
+              <a:rPr lang="fr-FR" sz="2000" dirty="0"/>
+              <a:t>.</a:t>
             </a:r>
           </a:p>
           <a:p>
@@ -6386,7 +7958,7 @@
 </p:sld>
 </file>
 
-<file path=ppt/slides/slide12.xml><?xml version="1.0" encoding="utf-8"?>
+<file path=ppt/slides/slide14.xml><?xml version="1.0" encoding="utf-8"?>
 <p:sld xmlns:a="http://schemas.openxmlformats.org/drawingml/2006/main" xmlns:r="http://schemas.openxmlformats.org/officeDocument/2006/relationships" xmlns:p="http://schemas.openxmlformats.org/presentationml/2006/main">
   <p:cSld>
     <p:bg>
@@ -6965,6 +8537,16 @@
               <a:rPr lang="fr-FR" dirty="0"/>
               <a:t>La complexité des meubles.</a:t>
             </a:r>
+          </a:p>
+          <a:p>
+            <a:r>
+              <a:rPr lang="fr-FR" dirty="0" err="1"/>
+              <a:t>Generalisation</a:t>
+            </a:r>
+            <a:r>
+              <a:rPr lang="fr-FR" dirty="0"/>
+              <a:t> sur plusieurs type meubles</a:t>
+            </a:r>
             <a:endParaRPr lang="es-AR" dirty="0"/>
           </a:p>
           <a:p>
@@ -6979,86 +8561,6 @@
     <p:extLst>
       <p:ext uri="{BB962C8B-B14F-4D97-AF65-F5344CB8AC3E}">
         <p14:creationId xmlns:p14="http://schemas.microsoft.com/office/powerpoint/2010/main" val="2958120704"/>
-      </p:ext>
-    </p:extLst>
-  </p:cSld>
-  <p:clrMapOvr>
-    <a:masterClrMapping/>
-  </p:clrMapOvr>
-</p:sld>
-</file>
-
-<file path=ppt/slides/slide13.xml><?xml version="1.0" encoding="utf-8"?>
-<p:sld xmlns:a="http://schemas.openxmlformats.org/drawingml/2006/main" xmlns:r="http://schemas.openxmlformats.org/officeDocument/2006/relationships" xmlns:p="http://schemas.openxmlformats.org/presentationml/2006/main">
-  <p:cSld>
-    <p:spTree>
-      <p:nvGrpSpPr>
-        <p:cNvPr id="1" name=""/>
-        <p:cNvGrpSpPr/>
-        <p:nvPr/>
-      </p:nvGrpSpPr>
-      <p:grpSpPr>
-        <a:xfrm>
-          <a:off x="0" y="0"/>
-          <a:ext cx="0" cy="0"/>
-          <a:chOff x="0" y="0"/>
-          <a:chExt cx="0" cy="0"/>
-        </a:xfrm>
-      </p:grpSpPr>
-      <p:sp>
-        <p:nvSpPr>
-          <p:cNvPr id="2" name="Titre 1">
-            <a:extLst>
-              <a:ext uri="{FF2B5EF4-FFF2-40B4-BE49-F238E27FC236}">
-                <a16:creationId xmlns:a16="http://schemas.microsoft.com/office/drawing/2014/main" id="{D1F7F70E-92B8-3CB6-7209-7D89619987C1}"/>
-              </a:ext>
-            </a:extLst>
-          </p:cNvPr>
-          <p:cNvSpPr>
-            <a:spLocks noGrp="1"/>
-          </p:cNvSpPr>
-          <p:nvPr>
-            <p:ph type="title"/>
-          </p:nvPr>
-        </p:nvSpPr>
-        <p:spPr/>
-        <p:txBody>
-          <a:bodyPr/>
-          <a:lstStyle/>
-          <a:p>
-            <a:endParaRPr lang="es-AR"/>
-          </a:p>
-        </p:txBody>
-      </p:sp>
-      <p:sp>
-        <p:nvSpPr>
-          <p:cNvPr id="3" name="Espace réservé du contenu 2">
-            <a:extLst>
-              <a:ext uri="{FF2B5EF4-FFF2-40B4-BE49-F238E27FC236}">
-                <a16:creationId xmlns:a16="http://schemas.microsoft.com/office/drawing/2014/main" id="{E5ABB8C1-F48D-C278-4357-B2C977277491}"/>
-              </a:ext>
-            </a:extLst>
-          </p:cNvPr>
-          <p:cNvSpPr>
-            <a:spLocks noGrp="1"/>
-          </p:cNvSpPr>
-          <p:nvPr>
-            <p:ph idx="1"/>
-          </p:nvPr>
-        </p:nvSpPr>
-        <p:spPr/>
-        <p:txBody>
-          <a:bodyPr/>
-          <a:lstStyle/>
-          <a:p>
-            <a:endParaRPr lang="es-AR"/>
-          </a:p>
-        </p:txBody>
-      </p:sp>
-    </p:spTree>
-    <p:extLst>
-      <p:ext uri="{BB962C8B-B14F-4D97-AF65-F5344CB8AC3E}">
-        <p14:creationId xmlns:p14="http://schemas.microsoft.com/office/powerpoint/2010/main" val="643016186"/>
       </p:ext>
     </p:extLst>
   </p:cSld>
@@ -7084,7 +8586,7 @@
         <p:cNvPr id="1" name="">
           <a:extLst>
             <a:ext uri="{FF2B5EF4-FFF2-40B4-BE49-F238E27FC236}">
-              <a16:creationId xmlns:a16="http://schemas.microsoft.com/office/drawing/2014/main" id="{65D9088A-7D19-418C-3701-02F3E2B917AB}"/>
+              <a16:creationId xmlns:a16="http://schemas.microsoft.com/office/drawing/2014/main" id="{EEB4852D-15A4-3270-E0AA-428BB9CDC430}"/>
             </a:ext>
           </a:extLst>
         </p:cNvPr>
@@ -7101,1639 +8603,10 @@
       </p:grpSpPr>
       <p:sp useBgFill="1">
         <p:nvSpPr>
-          <p:cNvPr id="1036" name="Rectangle 1035">
-            <a:extLst>
-              <a:ext uri="{FF2B5EF4-FFF2-40B4-BE49-F238E27FC236}">
-                <a16:creationId xmlns:a16="http://schemas.microsoft.com/office/drawing/2014/main" id="{7BDAC5B6-20CE-447F-8BA1-F2274AC7AE5B}"/>
-              </a:ext>
-              <a:ext uri="{C183D7F6-B498-43B3-948B-1728B52AA6E4}">
-                <adec:decorative xmlns:adec="http://schemas.microsoft.com/office/drawing/2017/decorative" val="1"/>
-              </a:ext>
-            </a:extLst>
-          </p:cNvPr>
-          <p:cNvSpPr>
-            <a:spLocks noGrp="1" noRot="1" noChangeAspect="1" noMove="1" noResize="1" noEditPoints="1" noAdjustHandles="1" noChangeArrowheads="1" noChangeShapeType="1" noTextEdit="1"/>
-          </p:cNvSpPr>
-          <p:nvPr>
-            <p:extLst>
-              <p:ext uri="{386F3935-93C4-4BCD-93E2-E3B085C9AB24}">
-                <p16:designElem xmlns:p16="http://schemas.microsoft.com/office/powerpoint/2015/main" val="1"/>
-              </p:ext>
-            </p:extLst>
-          </p:nvPr>
-        </p:nvSpPr>
-        <p:spPr>
-          <a:xfrm>
-            <a:off x="0" y="0"/>
-            <a:ext cx="12192000" cy="6858000"/>
-          </a:xfrm>
-          <a:prstGeom prst="rect">
-            <a:avLst/>
-          </a:prstGeom>
-          <a:ln>
-            <a:noFill/>
-          </a:ln>
-        </p:spPr>
-        <p:style>
-          <a:lnRef idx="2">
-            <a:schemeClr val="accent1">
-              <a:shade val="50000"/>
-            </a:schemeClr>
-          </a:lnRef>
-          <a:fillRef idx="1">
-            <a:schemeClr val="accent1"/>
-          </a:fillRef>
-          <a:effectRef idx="0">
-            <a:schemeClr val="accent1"/>
-          </a:effectRef>
-          <a:fontRef idx="minor">
-            <a:schemeClr val="lt1"/>
-          </a:fontRef>
-        </p:style>
-        <p:txBody>
-          <a:bodyPr rtlCol="0" anchor="ctr"/>
-          <a:lstStyle/>
-          <a:p>
-            <a:pPr algn="ctr"/>
-            <a:endParaRPr lang="en-US"/>
-          </a:p>
-        </p:txBody>
-      </p:sp>
-      <p:sp>
-        <p:nvSpPr>
-          <p:cNvPr id="1038" name="Freeform: Shape 1037">
-            <a:extLst>
-              <a:ext uri="{FF2B5EF4-FFF2-40B4-BE49-F238E27FC236}">
-                <a16:creationId xmlns:a16="http://schemas.microsoft.com/office/drawing/2014/main" id="{D1D22B31-BF8F-446B-9009-8A251FB177CB}"/>
-              </a:ext>
-              <a:ext uri="{C183D7F6-B498-43B3-948B-1728B52AA6E4}">
-                <adec:decorative xmlns:adec="http://schemas.microsoft.com/office/drawing/2017/decorative" val="1"/>
-              </a:ext>
-            </a:extLst>
-          </p:cNvPr>
-          <p:cNvSpPr>
-            <a:spLocks noGrp="1" noRot="1" noChangeAspect="1" noMove="1" noResize="1" noEditPoints="1" noAdjustHandles="1" noChangeArrowheads="1" noChangeShapeType="1" noTextEdit="1"/>
-          </p:cNvSpPr>
-          <p:nvPr>
-            <p:extLst>
-              <p:ext uri="{386F3935-93C4-4BCD-93E2-E3B085C9AB24}">
-                <p16:designElem xmlns:p16="http://schemas.microsoft.com/office/powerpoint/2015/main" val="1"/>
-              </p:ext>
-            </p:extLst>
-          </p:nvPr>
-        </p:nvSpPr>
-        <p:spPr>
-          <a:xfrm>
-            <a:off x="0" y="0"/>
-            <a:ext cx="12192000" cy="6858000"/>
-          </a:xfrm>
-          <a:custGeom>
-            <a:avLst/>
-            <a:gdLst>
-              <a:gd name="connsiteX0" fmla="*/ 3094406 w 12192000"/>
-              <a:gd name="connsiteY0" fmla="*/ 283966 h 6858000"/>
-              <a:gd name="connsiteX1" fmla="*/ 3038833 w 12192000"/>
-              <a:gd name="connsiteY1" fmla="*/ 309661 h 6858000"/>
-              <a:gd name="connsiteX2" fmla="*/ 3348384 w 12192000"/>
-              <a:gd name="connsiteY2" fmla="*/ 406000 h 6858000"/>
-              <a:gd name="connsiteX3" fmla="*/ 2864309 w 12192000"/>
-              <a:gd name="connsiteY3" fmla="*/ 355295 h 6858000"/>
-              <a:gd name="connsiteX4" fmla="*/ 2856039 w 12192000"/>
-              <a:gd name="connsiteY4" fmla="*/ 388058 h 6858000"/>
-              <a:gd name="connsiteX5" fmla="*/ 3405794 w 12192000"/>
-              <a:gd name="connsiteY5" fmla="*/ 512089 h 6858000"/>
-              <a:gd name="connsiteX6" fmla="*/ 3356651 w 12192000"/>
-              <a:gd name="connsiteY6" fmla="*/ 531204 h 6858000"/>
-              <a:gd name="connsiteX7" fmla="*/ 3064552 w 12192000"/>
-              <a:gd name="connsiteY7" fmla="*/ 483228 h 6858000"/>
-              <a:gd name="connsiteX8" fmla="*/ 3005765 w 12192000"/>
-              <a:gd name="connsiteY8" fmla="*/ 495708 h 6858000"/>
-              <a:gd name="connsiteX9" fmla="*/ 3034700 w 12192000"/>
-              <a:gd name="connsiteY9" fmla="*/ 553823 h 6858000"/>
-              <a:gd name="connsiteX10" fmla="*/ 3161459 w 12192000"/>
-              <a:gd name="connsiteY10" fmla="*/ 576445 h 6858000"/>
-              <a:gd name="connsiteX11" fmla="*/ 3358949 w 12192000"/>
-              <a:gd name="connsiteY11" fmla="*/ 712961 h 6858000"/>
-              <a:gd name="connsiteX12" fmla="*/ 3059960 w 12192000"/>
-              <a:gd name="connsiteY12" fmla="*/ 696576 h 6858000"/>
-              <a:gd name="connsiteX13" fmla="*/ 3007143 w 12192000"/>
-              <a:gd name="connsiteY13" fmla="*/ 729732 h 6858000"/>
-              <a:gd name="connsiteX14" fmla="*/ 2986935 w 12192000"/>
-              <a:gd name="connsiteY14" fmla="*/ 772635 h 6858000"/>
-              <a:gd name="connsiteX15" fmla="*/ 2871197 w 12192000"/>
-              <a:gd name="connsiteY15" fmla="*/ 808127 h 6858000"/>
-              <a:gd name="connsiteX16" fmla="*/ 3053071 w 12192000"/>
-              <a:gd name="connsiteY16" fmla="*/ 847913 h 6858000"/>
-              <a:gd name="connsiteX17" fmla="*/ 2858796 w 12192000"/>
-              <a:gd name="connsiteY17" fmla="*/ 847913 h 6858000"/>
-              <a:gd name="connsiteX18" fmla="*/ 2635588 w 12192000"/>
-              <a:gd name="connsiteY18" fmla="*/ 820611 h 6858000"/>
-              <a:gd name="connsiteX19" fmla="*/ 2397683 w 12192000"/>
-              <a:gd name="connsiteY19" fmla="*/ 829190 h 6858000"/>
-              <a:gd name="connsiteX20" fmla="*/ 1921874 w 12192000"/>
-              <a:gd name="connsiteY20" fmla="*/ 778877 h 6858000"/>
-              <a:gd name="connsiteX21" fmla="*/ 1695450 w 12192000"/>
-              <a:gd name="connsiteY21" fmla="*/ 782386 h 6858000"/>
-              <a:gd name="connsiteX22" fmla="*/ 2954324 w 12192000"/>
-              <a:gd name="connsiteY22" fmla="*/ 1120940 h 6858000"/>
-              <a:gd name="connsiteX23" fmla="*/ 2890028 w 12192000"/>
-              <a:gd name="connsiteY23" fmla="*/ 1195435 h 6858000"/>
-              <a:gd name="connsiteX24" fmla="*/ 3153652 w 12192000"/>
-              <a:gd name="connsiteY24" fmla="*/ 1276563 h 6858000"/>
-              <a:gd name="connsiteX25" fmla="*/ 3218410 w 12192000"/>
-              <a:gd name="connsiteY25" fmla="*/ 1356911 h 6858000"/>
-              <a:gd name="connsiteX26" fmla="*/ 3137118 w 12192000"/>
-              <a:gd name="connsiteY26" fmla="*/ 1349891 h 6858000"/>
-              <a:gd name="connsiteX27" fmla="*/ 3067309 w 12192000"/>
-              <a:gd name="connsiteY27" fmla="*/ 1365102 h 6858000"/>
-              <a:gd name="connsiteX28" fmla="*/ 3096243 w 12192000"/>
-              <a:gd name="connsiteY28" fmla="*/ 1467292 h 6858000"/>
-              <a:gd name="connsiteX29" fmla="*/ 3468716 w 12192000"/>
-              <a:gd name="connsiteY29" fmla="*/ 1599125 h 6858000"/>
-              <a:gd name="connsiteX30" fmla="*/ 3502241 w 12192000"/>
-              <a:gd name="connsiteY30" fmla="*/ 1642029 h 6858000"/>
-              <a:gd name="connsiteX31" fmla="*/ 3457692 w 12192000"/>
-              <a:gd name="connsiteY31" fmla="*/ 1672453 h 6858000"/>
-              <a:gd name="connsiteX32" fmla="*/ 3337362 w 12192000"/>
-              <a:gd name="connsiteY32" fmla="*/ 1688053 h 6858000"/>
-              <a:gd name="connsiteX33" fmla="*/ 3505915 w 12192000"/>
-              <a:gd name="connsiteY33" fmla="*/ 1834318 h 6858000"/>
-              <a:gd name="connsiteX34" fmla="*/ 3567458 w 12192000"/>
-              <a:gd name="connsiteY34" fmla="*/ 1874880 h 6858000"/>
-              <a:gd name="connsiteX35" fmla="*/ 3672634 w 12192000"/>
-              <a:gd name="connsiteY35" fmla="*/ 1937678 h 6858000"/>
-              <a:gd name="connsiteX36" fmla="*/ 3674470 w 12192000"/>
-              <a:gd name="connsiteY36" fmla="*/ 1956789 h 6858000"/>
-              <a:gd name="connsiteX37" fmla="*/ 3531176 w 12192000"/>
-              <a:gd name="connsiteY37" fmla="*/ 2024266 h 6858000"/>
-              <a:gd name="connsiteX38" fmla="*/ 3272604 w 12192000"/>
-              <a:gd name="connsiteY38" fmla="*/ 2005933 h 6858000"/>
-              <a:gd name="connsiteX39" fmla="*/ 3654720 w 12192000"/>
-              <a:gd name="connsiteY39" fmla="*/ 2106564 h 6858000"/>
-              <a:gd name="connsiteX40" fmla="*/ 2417892 w 12192000"/>
-              <a:gd name="connsiteY40" fmla="*/ 1866690 h 6858000"/>
-              <a:gd name="connsiteX41" fmla="*/ 2496888 w 12192000"/>
-              <a:gd name="connsiteY41" fmla="*/ 1929487 h 6858000"/>
-              <a:gd name="connsiteX42" fmla="*/ 2929526 w 12192000"/>
-              <a:gd name="connsiteY42" fmla="*/ 2094862 h 6858000"/>
-              <a:gd name="connsiteX43" fmla="*/ 3052152 w 12192000"/>
-              <a:gd name="connsiteY43" fmla="*/ 2198613 h 6858000"/>
-              <a:gd name="connsiteX44" fmla="*/ 3180748 w 12192000"/>
-              <a:gd name="connsiteY44" fmla="*/ 2255948 h 6858000"/>
-              <a:gd name="connsiteX45" fmla="*/ 3361244 w 12192000"/>
-              <a:gd name="connsiteY45" fmla="*/ 2254777 h 6858000"/>
-              <a:gd name="connsiteX46" fmla="*/ 3489382 w 12192000"/>
-              <a:gd name="connsiteY46" fmla="*/ 2342926 h 6858000"/>
-              <a:gd name="connsiteX47" fmla="*/ 3355733 w 12192000"/>
-              <a:gd name="connsiteY47" fmla="*/ 2361649 h 6858000"/>
-              <a:gd name="connsiteX48" fmla="*/ 3199121 w 12192000"/>
-              <a:gd name="connsiteY48" fmla="*/ 2347216 h 6858000"/>
-              <a:gd name="connsiteX49" fmla="*/ 2861091 w 12192000"/>
-              <a:gd name="connsiteY49" fmla="*/ 2351896 h 6858000"/>
-              <a:gd name="connsiteX50" fmla="*/ 2667278 w 12192000"/>
-              <a:gd name="connsiteY50" fmla="*/ 2369058 h 6858000"/>
-              <a:gd name="connsiteX51" fmla="*/ 2221781 w 12192000"/>
-              <a:gd name="connsiteY51" fmla="*/ 2339805 h 6858000"/>
-              <a:gd name="connsiteX52" fmla="*/ 2247961 w 12192000"/>
-              <a:gd name="connsiteY52" fmla="*/ 2414693 h 6858000"/>
-              <a:gd name="connsiteX53" fmla="*/ 2231425 w 12192000"/>
-              <a:gd name="connsiteY53" fmla="*/ 2479828 h 6858000"/>
-              <a:gd name="connsiteX54" fmla="*/ 2224996 w 12192000"/>
-              <a:gd name="connsiteY54" fmla="*/ 2621414 h 6858000"/>
-              <a:gd name="connsiteX55" fmla="*/ 2229131 w 12192000"/>
-              <a:gd name="connsiteY55" fmla="*/ 2644426 h 6858000"/>
-              <a:gd name="connsiteX56" fmla="*/ 2129466 w 12192000"/>
-              <a:gd name="connsiteY56" fmla="*/ 2659247 h 6858000"/>
-              <a:gd name="connsiteX57" fmla="*/ 2723312 w 12192000"/>
-              <a:gd name="connsiteY57" fmla="*/ 2953726 h 6858000"/>
-              <a:gd name="connsiteX58" fmla="*/ 2326496 w 12192000"/>
-              <a:gd name="connsiteY58" fmla="*/ 2878838 h 6858000"/>
-              <a:gd name="connsiteX59" fmla="*/ 2272759 w 12192000"/>
-              <a:gd name="connsiteY59" fmla="*/ 3002480 h 6858000"/>
-              <a:gd name="connsiteX60" fmla="*/ 2459226 w 12192000"/>
-              <a:gd name="connsiteY60" fmla="*/ 3112471 h 6858000"/>
-              <a:gd name="connsiteX61" fmla="*/ 2528117 w 12192000"/>
-              <a:gd name="connsiteY61" fmla="*/ 3330111 h 6858000"/>
-              <a:gd name="connsiteX62" fmla="*/ 2494590 w 12192000"/>
-              <a:gd name="connsiteY62" fmla="*/ 3529029 h 6858000"/>
-              <a:gd name="connsiteX63" fmla="*/ 2414677 w 12192000"/>
-              <a:gd name="connsiteY63" fmla="*/ 3592215 h 6858000"/>
-              <a:gd name="connsiteX64" fmla="*/ 2298940 w 12192000"/>
-              <a:gd name="connsiteY64" fmla="*/ 3705716 h 6858000"/>
-              <a:gd name="connsiteX65" fmla="*/ 2227294 w 12192000"/>
-              <a:gd name="connsiteY65" fmla="*/ 3775921 h 6858000"/>
-              <a:gd name="connsiteX66" fmla="*/ 1978366 w 12192000"/>
-              <a:gd name="connsiteY66" fmla="*/ 3748620 h 6858000"/>
-              <a:gd name="connsiteX67" fmla="*/ 2310421 w 12192000"/>
-              <a:gd name="connsiteY67" fmla="*/ 3926868 h 6858000"/>
-              <a:gd name="connsiteX68" fmla="*/ 2041285 w 12192000"/>
-              <a:gd name="connsiteY68" fmla="*/ 3904635 h 6858000"/>
-              <a:gd name="connsiteX69" fmla="*/ 1953565 w 12192000"/>
-              <a:gd name="connsiteY69" fmla="*/ 3917116 h 6858000"/>
-              <a:gd name="connsiteX70" fmla="*/ 2003623 w 12192000"/>
-              <a:gd name="connsiteY70" fmla="*/ 3974842 h 6858000"/>
-              <a:gd name="connsiteX71" fmla="*/ 2201114 w 12192000"/>
-              <a:gd name="connsiteY71" fmla="*/ 4072742 h 6858000"/>
-              <a:gd name="connsiteX72" fmla="*/ 2608032 w 12192000"/>
-              <a:gd name="connsiteY72" fmla="*/ 4337967 h 6858000"/>
-              <a:gd name="connsiteX73" fmla="*/ 2213973 w 12192000"/>
-              <a:gd name="connsiteY73" fmla="*/ 4216277 h 6858000"/>
-              <a:gd name="connsiteX74" fmla="*/ 2629158 w 12192000"/>
-              <a:gd name="connsiteY74" fmla="*/ 4488911 h 6858000"/>
-              <a:gd name="connsiteX75" fmla="*/ 2721471 w 12192000"/>
-              <a:gd name="connsiteY75" fmla="*/ 4579399 h 6858000"/>
-              <a:gd name="connsiteX76" fmla="*/ 2907939 w 12192000"/>
-              <a:gd name="connsiteY76" fmla="*/ 4804062 h 6858000"/>
-              <a:gd name="connsiteX77" fmla="*/ 2898753 w 12192000"/>
-              <a:gd name="connsiteY77" fmla="*/ 4829414 h 6858000"/>
-              <a:gd name="connsiteX78" fmla="*/ 2683352 w 12192000"/>
-              <a:gd name="connsiteY78" fmla="*/ 4793141 h 6858000"/>
-              <a:gd name="connsiteX79" fmla="*/ 2962594 w 12192000"/>
-              <a:gd name="connsiteY79" fmla="*/ 4981920 h 6858000"/>
-              <a:gd name="connsiteX80" fmla="*/ 3251019 w 12192000"/>
-              <a:gd name="connsiteY80" fmla="*/ 5127012 h 6858000"/>
-              <a:gd name="connsiteX81" fmla="*/ 3046180 w 12192000"/>
-              <a:gd name="connsiteY81" fmla="*/ 5104781 h 6858000"/>
-              <a:gd name="connsiteX82" fmla="*/ 2764646 w 12192000"/>
-              <a:gd name="connsiteY82" fmla="*/ 5021703 h 6858000"/>
-              <a:gd name="connsiteX83" fmla="*/ 2666820 w 12192000"/>
-              <a:gd name="connsiteY83" fmla="*/ 5052905 h 6858000"/>
-              <a:gd name="connsiteX84" fmla="*/ 2933657 w 12192000"/>
-              <a:gd name="connsiteY84" fmla="*/ 5190198 h 6858000"/>
-              <a:gd name="connsiteX85" fmla="*/ 3086598 w 12192000"/>
-              <a:gd name="connsiteY85" fmla="*/ 5253776 h 6858000"/>
-              <a:gd name="connsiteX86" fmla="*/ 3147680 w 12192000"/>
-              <a:gd name="connsiteY86" fmla="*/ 5302531 h 6858000"/>
-              <a:gd name="connsiteX87" fmla="*/ 3322204 w 12192000"/>
-              <a:gd name="connsiteY87" fmla="*/ 5476487 h 6858000"/>
-              <a:gd name="connsiteX88" fmla="*/ 3834758 w 12192000"/>
-              <a:gd name="connsiteY88" fmla="*/ 5666434 h 6858000"/>
-              <a:gd name="connsiteX89" fmla="*/ 4314240 w 12192000"/>
-              <a:gd name="connsiteY89" fmla="*/ 5902409 h 6858000"/>
-              <a:gd name="connsiteX90" fmla="*/ 4688552 w 12192000"/>
-              <a:gd name="connsiteY90" fmla="*/ 6049453 h 6858000"/>
-              <a:gd name="connsiteX91" fmla="*/ 5634660 w 12192000"/>
-              <a:gd name="connsiteY91" fmla="*/ 6238620 h 6858000"/>
-              <a:gd name="connsiteX92" fmla="*/ 9222980 w 12192000"/>
-              <a:gd name="connsiteY92" fmla="*/ 4955397 h 6858000"/>
-              <a:gd name="connsiteX93" fmla="*/ 9268448 w 12192000"/>
-              <a:gd name="connsiteY93" fmla="*/ 4917173 h 6858000"/>
-              <a:gd name="connsiteX94" fmla="*/ 9442512 w 12192000"/>
-              <a:gd name="connsiteY94" fmla="*/ 4773251 h 6858000"/>
-              <a:gd name="connsiteX95" fmla="*/ 9590400 w 12192000"/>
-              <a:gd name="connsiteY95" fmla="*/ 4643756 h 6858000"/>
-              <a:gd name="connsiteX96" fmla="*/ 9513242 w 12192000"/>
-              <a:gd name="connsiteY96" fmla="*/ 4600073 h 6858000"/>
-              <a:gd name="connsiteX97" fmla="*/ 9617498 w 12192000"/>
-              <a:gd name="connsiteY97" fmla="*/ 4476430 h 6858000"/>
-              <a:gd name="connsiteX98" fmla="*/ 9949094 w 12192000"/>
-              <a:gd name="connsiteY98" fmla="*/ 4095364 h 6858000"/>
-              <a:gd name="connsiteX99" fmla="*/ 10094686 w 12192000"/>
-              <a:gd name="connsiteY99" fmla="*/ 4011507 h 6858000"/>
-              <a:gd name="connsiteX100" fmla="*/ 10271967 w 12192000"/>
-              <a:gd name="connsiteY100" fmla="*/ 3800497 h 6858000"/>
-              <a:gd name="connsiteX101" fmla="*/ 10297226 w 12192000"/>
-              <a:gd name="connsiteY101" fmla="*/ 3751742 h 6858000"/>
-              <a:gd name="connsiteX102" fmla="*/ 10260943 w 12192000"/>
-              <a:gd name="connsiteY102" fmla="*/ 3689723 h 6858000"/>
-              <a:gd name="connsiteX103" fmla="*/ 10233847 w 12192000"/>
-              <a:gd name="connsiteY103" fmla="*/ 3627319 h 6858000"/>
-              <a:gd name="connsiteX104" fmla="*/ 10269209 w 12192000"/>
-              <a:gd name="connsiteY104" fmla="*/ 3608986 h 6858000"/>
-              <a:gd name="connsiteX105" fmla="*/ 10496550 w 12192000"/>
-              <a:gd name="connsiteY105" fmla="*/ 3577393 h 6858000"/>
-              <a:gd name="connsiteX106" fmla="*/ 10364738 w 12192000"/>
-              <a:gd name="connsiteY106" fmla="*/ 3458823 h 6858000"/>
-              <a:gd name="connsiteX107" fmla="*/ 10132346 w 12192000"/>
-              <a:gd name="connsiteY107" fmla="*/ 3282137 h 6858000"/>
-              <a:gd name="connsiteX108" fmla="*/ 10026712 w 12192000"/>
-              <a:gd name="connsiteY108" fmla="*/ 3156543 h 6858000"/>
-              <a:gd name="connsiteX109" fmla="*/ 10014312 w 12192000"/>
-              <a:gd name="connsiteY109" fmla="*/ 3044213 h 6858000"/>
-              <a:gd name="connsiteX110" fmla="*/ 9806718 w 12192000"/>
-              <a:gd name="connsiteY110" fmla="*/ 2977907 h 6858000"/>
-              <a:gd name="connsiteX111" fmla="*/ 10001912 w 12192000"/>
-              <a:gd name="connsiteY111" fmla="*/ 2740374 h 6858000"/>
-              <a:gd name="connsiteX112" fmla="*/ 10021662 w 12192000"/>
-              <a:gd name="connsiteY112" fmla="*/ 2691231 h 6858000"/>
-              <a:gd name="connsiteX113" fmla="*/ 9904546 w 12192000"/>
-              <a:gd name="connsiteY113" fmla="*/ 2515322 h 6858000"/>
-              <a:gd name="connsiteX114" fmla="*/ 9885256 w 12192000"/>
-              <a:gd name="connsiteY114" fmla="*/ 2487240 h 6858000"/>
-              <a:gd name="connsiteX115" fmla="*/ 9842085 w 12192000"/>
-              <a:gd name="connsiteY115" fmla="*/ 2431074 h 6858000"/>
-              <a:gd name="connsiteX116" fmla="*/ 9718078 w 12192000"/>
-              <a:gd name="connsiteY116" fmla="*/ 2417424 h 6858000"/>
-              <a:gd name="connsiteX117" fmla="*/ 9782378 w 12192000"/>
-              <a:gd name="connsiteY117" fmla="*/ 2377641 h 6858000"/>
-              <a:gd name="connsiteX118" fmla="*/ 9907302 w 12192000"/>
-              <a:gd name="connsiteY118" fmla="*/ 2243078 h 6858000"/>
-              <a:gd name="connsiteX119" fmla="*/ 9824171 w 12192000"/>
-              <a:gd name="connsiteY119" fmla="*/ 2114365 h 6858000"/>
-              <a:gd name="connsiteX120" fmla="*/ 9818662 w 12192000"/>
-              <a:gd name="connsiteY120" fmla="*/ 2043377 h 6858000"/>
-              <a:gd name="connsiteX121" fmla="*/ 9958740 w 12192000"/>
-              <a:gd name="connsiteY121" fmla="*/ 1952499 h 6858000"/>
-              <a:gd name="connsiteX122" fmla="*/ 10064374 w 12192000"/>
-              <a:gd name="connsiteY122" fmla="*/ 1916615 h 6858000"/>
-              <a:gd name="connsiteX123" fmla="*/ 10113055 w 12192000"/>
-              <a:gd name="connsiteY123" fmla="*/ 1865131 h 6858000"/>
-              <a:gd name="connsiteX124" fmla="*/ 10055646 w 12192000"/>
-              <a:gd name="connsiteY124" fmla="*/ 1822227 h 6858000"/>
-              <a:gd name="connsiteX125" fmla="*/ 9800748 w 12192000"/>
-              <a:gd name="connsiteY125" fmla="*/ 1720036 h 6858000"/>
-              <a:gd name="connsiteX126" fmla="*/ 9938071 w 12192000"/>
-              <a:gd name="connsiteY126" fmla="*/ 1634617 h 6858000"/>
-              <a:gd name="connsiteX127" fmla="*/ 9220224 w 12192000"/>
-              <a:gd name="connsiteY127" fmla="*/ 1231709 h 6858000"/>
-              <a:gd name="connsiteX128" fmla="*/ 9133419 w 12192000"/>
-              <a:gd name="connsiteY128" fmla="*/ 1170083 h 6858000"/>
-              <a:gd name="connsiteX129" fmla="*/ 8672768 w 12192000"/>
-              <a:gd name="connsiteY129" fmla="*/ 1020699 h 6858000"/>
-              <a:gd name="connsiteX130" fmla="*/ 8198797 w 12192000"/>
-              <a:gd name="connsiteY130" fmla="*/ 915000 h 6858000"/>
-              <a:gd name="connsiteX131" fmla="*/ 8528095 w 12192000"/>
-              <a:gd name="connsiteY131" fmla="*/ 691898 h 6858000"/>
-              <a:gd name="connsiteX132" fmla="*/ 8025190 w 12192000"/>
-              <a:gd name="connsiteY132" fmla="*/ 640021 h 6858000"/>
-              <a:gd name="connsiteX133" fmla="*/ 7976047 w 12192000"/>
-              <a:gd name="connsiteY133" fmla="*/ 641584 h 6858000"/>
-              <a:gd name="connsiteX134" fmla="*/ 6988604 w 12192000"/>
-              <a:gd name="connsiteY134" fmla="*/ 607260 h 6858000"/>
-              <a:gd name="connsiteX135" fmla="*/ 5573116 w 12192000"/>
-              <a:gd name="connsiteY135" fmla="*/ 493368 h 6858000"/>
-              <a:gd name="connsiteX136" fmla="*/ 4401503 w 12192000"/>
-              <a:gd name="connsiteY136" fmla="*/ 425112 h 6858000"/>
-              <a:gd name="connsiteX137" fmla="*/ 3154109 w 12192000"/>
-              <a:gd name="connsiteY137" fmla="*/ 292499 h 6858000"/>
-              <a:gd name="connsiteX138" fmla="*/ 3094406 w 12192000"/>
-              <a:gd name="connsiteY138" fmla="*/ 283966 h 6858000"/>
-              <a:gd name="connsiteX139" fmla="*/ 0 w 12192000"/>
-              <a:gd name="connsiteY139" fmla="*/ 0 h 6858000"/>
-              <a:gd name="connsiteX140" fmla="*/ 12192000 w 12192000"/>
-              <a:gd name="connsiteY140" fmla="*/ 0 h 6858000"/>
-              <a:gd name="connsiteX141" fmla="*/ 12192000 w 12192000"/>
-              <a:gd name="connsiteY141" fmla="*/ 6858000 h 6858000"/>
-              <a:gd name="connsiteX142" fmla="*/ 0 w 12192000"/>
-              <a:gd name="connsiteY142" fmla="*/ 6858000 h 6858000"/>
-            </a:gdLst>
-            <a:ahLst/>
-            <a:cxnLst>
-              <a:cxn ang="0">
-                <a:pos x="connsiteX0" y="connsiteY0"/>
-              </a:cxn>
-              <a:cxn ang="0">
-                <a:pos x="connsiteX1" y="connsiteY1"/>
-              </a:cxn>
-              <a:cxn ang="0">
-                <a:pos x="connsiteX2" y="connsiteY2"/>
-              </a:cxn>
-              <a:cxn ang="0">
-                <a:pos x="connsiteX3" y="connsiteY3"/>
-              </a:cxn>
-              <a:cxn ang="0">
-                <a:pos x="connsiteX4" y="connsiteY4"/>
-              </a:cxn>
-              <a:cxn ang="0">
-                <a:pos x="connsiteX5" y="connsiteY5"/>
-              </a:cxn>
-              <a:cxn ang="0">
-                <a:pos x="connsiteX6" y="connsiteY6"/>
-              </a:cxn>
-              <a:cxn ang="0">
-                <a:pos x="connsiteX7" y="connsiteY7"/>
-              </a:cxn>
-              <a:cxn ang="0">
-                <a:pos x="connsiteX8" y="connsiteY8"/>
-              </a:cxn>
-              <a:cxn ang="0">
-                <a:pos x="connsiteX9" y="connsiteY9"/>
-              </a:cxn>
-              <a:cxn ang="0">
-                <a:pos x="connsiteX10" y="connsiteY10"/>
-              </a:cxn>
-              <a:cxn ang="0">
-                <a:pos x="connsiteX11" y="connsiteY11"/>
-              </a:cxn>
-              <a:cxn ang="0">
-                <a:pos x="connsiteX12" y="connsiteY12"/>
-              </a:cxn>
-              <a:cxn ang="0">
-                <a:pos x="connsiteX13" y="connsiteY13"/>
-              </a:cxn>
-              <a:cxn ang="0">
-                <a:pos x="connsiteX14" y="connsiteY14"/>
-              </a:cxn>
-              <a:cxn ang="0">
-                <a:pos x="connsiteX15" y="connsiteY15"/>
-              </a:cxn>
-              <a:cxn ang="0">
-                <a:pos x="connsiteX16" y="connsiteY16"/>
-              </a:cxn>
-              <a:cxn ang="0">
-                <a:pos x="connsiteX17" y="connsiteY17"/>
-              </a:cxn>
-              <a:cxn ang="0">
-                <a:pos x="connsiteX18" y="connsiteY18"/>
-              </a:cxn>
-              <a:cxn ang="0">
-                <a:pos x="connsiteX19" y="connsiteY19"/>
-              </a:cxn>
-              <a:cxn ang="0">
-                <a:pos x="connsiteX20" y="connsiteY20"/>
-              </a:cxn>
-              <a:cxn ang="0">
-                <a:pos x="connsiteX21" y="connsiteY21"/>
-              </a:cxn>
-              <a:cxn ang="0">
-                <a:pos x="connsiteX22" y="connsiteY22"/>
-              </a:cxn>
-              <a:cxn ang="0">
-                <a:pos x="connsiteX23" y="connsiteY23"/>
-              </a:cxn>
-              <a:cxn ang="0">
-                <a:pos x="connsiteX24" y="connsiteY24"/>
-              </a:cxn>
-              <a:cxn ang="0">
-                <a:pos x="connsiteX25" y="connsiteY25"/>
-              </a:cxn>
-              <a:cxn ang="0">
-                <a:pos x="connsiteX26" y="connsiteY26"/>
-              </a:cxn>
-              <a:cxn ang="0">
-                <a:pos x="connsiteX27" y="connsiteY27"/>
-              </a:cxn>
-              <a:cxn ang="0">
-                <a:pos x="connsiteX28" y="connsiteY28"/>
-              </a:cxn>
-              <a:cxn ang="0">
-                <a:pos x="connsiteX29" y="connsiteY29"/>
-              </a:cxn>
-              <a:cxn ang="0">
-                <a:pos x="connsiteX30" y="connsiteY30"/>
-              </a:cxn>
-              <a:cxn ang="0">
-                <a:pos x="connsiteX31" y="connsiteY31"/>
-              </a:cxn>
-              <a:cxn ang="0">
-                <a:pos x="connsiteX32" y="connsiteY32"/>
-              </a:cxn>
-              <a:cxn ang="0">
-                <a:pos x="connsiteX33" y="connsiteY33"/>
-              </a:cxn>
-              <a:cxn ang="0">
-                <a:pos x="connsiteX34" y="connsiteY34"/>
-              </a:cxn>
-              <a:cxn ang="0">
-                <a:pos x="connsiteX35" y="connsiteY35"/>
-              </a:cxn>
-              <a:cxn ang="0">
-                <a:pos x="connsiteX36" y="connsiteY36"/>
-              </a:cxn>
-              <a:cxn ang="0">
-                <a:pos x="connsiteX37" y="connsiteY37"/>
-              </a:cxn>
-              <a:cxn ang="0">
-                <a:pos x="connsiteX38" y="connsiteY38"/>
-              </a:cxn>
-              <a:cxn ang="0">
-                <a:pos x="connsiteX39" y="connsiteY39"/>
-              </a:cxn>
-              <a:cxn ang="0">
-                <a:pos x="connsiteX40" y="connsiteY40"/>
-              </a:cxn>
-              <a:cxn ang="0">
-                <a:pos x="connsiteX41" y="connsiteY41"/>
-              </a:cxn>
-              <a:cxn ang="0">
-                <a:pos x="connsiteX42" y="connsiteY42"/>
-              </a:cxn>
-              <a:cxn ang="0">
-                <a:pos x="connsiteX43" y="connsiteY43"/>
-              </a:cxn>
-              <a:cxn ang="0">
-                <a:pos x="connsiteX44" y="connsiteY44"/>
-              </a:cxn>
-              <a:cxn ang="0">
-                <a:pos x="connsiteX45" y="connsiteY45"/>
-              </a:cxn>
-              <a:cxn ang="0">
-                <a:pos x="connsiteX46" y="connsiteY46"/>
-              </a:cxn>
-              <a:cxn ang="0">
-                <a:pos x="connsiteX47" y="connsiteY47"/>
-              </a:cxn>
-              <a:cxn ang="0">
-                <a:pos x="connsiteX48" y="connsiteY48"/>
-              </a:cxn>
-              <a:cxn ang="0">
-                <a:pos x="connsiteX49" y="connsiteY49"/>
-              </a:cxn>
-              <a:cxn ang="0">
-                <a:pos x="connsiteX50" y="connsiteY50"/>
-              </a:cxn>
-              <a:cxn ang="0">
-                <a:pos x="connsiteX51" y="connsiteY51"/>
-              </a:cxn>
-              <a:cxn ang="0">
-                <a:pos x="connsiteX52" y="connsiteY52"/>
-              </a:cxn>
-              <a:cxn ang="0">
-                <a:pos x="connsiteX53" y="connsiteY53"/>
-              </a:cxn>
-              <a:cxn ang="0">
-                <a:pos x="connsiteX54" y="connsiteY54"/>
-              </a:cxn>
-              <a:cxn ang="0">
-                <a:pos x="connsiteX55" y="connsiteY55"/>
-              </a:cxn>
-              <a:cxn ang="0">
-                <a:pos x="connsiteX56" y="connsiteY56"/>
-              </a:cxn>
-              <a:cxn ang="0">
-                <a:pos x="connsiteX57" y="connsiteY57"/>
-              </a:cxn>
-              <a:cxn ang="0">
-                <a:pos x="connsiteX58" y="connsiteY58"/>
-              </a:cxn>
-              <a:cxn ang="0">
-                <a:pos x="connsiteX59" y="connsiteY59"/>
-              </a:cxn>
-              <a:cxn ang="0">
-                <a:pos x="connsiteX60" y="connsiteY60"/>
-              </a:cxn>
-              <a:cxn ang="0">
-                <a:pos x="connsiteX61" y="connsiteY61"/>
-              </a:cxn>
-              <a:cxn ang="0">
-                <a:pos x="connsiteX62" y="connsiteY62"/>
-              </a:cxn>
-              <a:cxn ang="0">
-                <a:pos x="connsiteX63" y="connsiteY63"/>
-              </a:cxn>
-              <a:cxn ang="0">
-                <a:pos x="connsiteX64" y="connsiteY64"/>
-              </a:cxn>
-              <a:cxn ang="0">
-                <a:pos x="connsiteX65" y="connsiteY65"/>
-              </a:cxn>
-              <a:cxn ang="0">
-                <a:pos x="connsiteX66" y="connsiteY66"/>
-              </a:cxn>
-              <a:cxn ang="0">
-                <a:pos x="connsiteX67" y="connsiteY67"/>
-              </a:cxn>
-              <a:cxn ang="0">
-                <a:pos x="connsiteX68" y="connsiteY68"/>
-              </a:cxn>
-              <a:cxn ang="0">
-                <a:pos x="connsiteX69" y="connsiteY69"/>
-              </a:cxn>
-              <a:cxn ang="0">
-                <a:pos x="connsiteX70" y="connsiteY70"/>
-              </a:cxn>
-              <a:cxn ang="0">
-                <a:pos x="connsiteX71" y="connsiteY71"/>
-              </a:cxn>
-              <a:cxn ang="0">
-                <a:pos x="connsiteX72" y="connsiteY72"/>
-              </a:cxn>
-              <a:cxn ang="0">
-                <a:pos x="connsiteX73" y="connsiteY73"/>
-              </a:cxn>
-              <a:cxn ang="0">
-                <a:pos x="connsiteX74" y="connsiteY74"/>
-              </a:cxn>
-              <a:cxn ang="0">
-                <a:pos x="connsiteX75" y="connsiteY75"/>
-              </a:cxn>
-              <a:cxn ang="0">
-                <a:pos x="connsiteX76" y="connsiteY76"/>
-              </a:cxn>
-              <a:cxn ang="0">
-                <a:pos x="connsiteX77" y="connsiteY77"/>
-              </a:cxn>
-              <a:cxn ang="0">
-                <a:pos x="connsiteX78" y="connsiteY78"/>
-              </a:cxn>
-              <a:cxn ang="0">
-                <a:pos x="connsiteX79" y="connsiteY79"/>
-              </a:cxn>
-              <a:cxn ang="0">
-                <a:pos x="connsiteX80" y="connsiteY80"/>
-              </a:cxn>
-              <a:cxn ang="0">
-                <a:pos x="connsiteX81" y="connsiteY81"/>
-              </a:cxn>
-              <a:cxn ang="0">
-                <a:pos x="connsiteX82" y="connsiteY82"/>
-              </a:cxn>
-              <a:cxn ang="0">
-                <a:pos x="connsiteX83" y="connsiteY83"/>
-              </a:cxn>
-              <a:cxn ang="0">
-                <a:pos x="connsiteX84" y="connsiteY84"/>
-              </a:cxn>
-              <a:cxn ang="0">
-                <a:pos x="connsiteX85" y="connsiteY85"/>
-              </a:cxn>
-              <a:cxn ang="0">
-                <a:pos x="connsiteX86" y="connsiteY86"/>
-              </a:cxn>
-              <a:cxn ang="0">
-                <a:pos x="connsiteX87" y="connsiteY87"/>
-              </a:cxn>
-              <a:cxn ang="0">
-                <a:pos x="connsiteX88" y="connsiteY88"/>
-              </a:cxn>
-              <a:cxn ang="0">
-                <a:pos x="connsiteX89" y="connsiteY89"/>
-              </a:cxn>
-              <a:cxn ang="0">
-                <a:pos x="connsiteX90" y="connsiteY90"/>
-              </a:cxn>
-              <a:cxn ang="0">
-                <a:pos x="connsiteX91" y="connsiteY91"/>
-              </a:cxn>
-              <a:cxn ang="0">
-                <a:pos x="connsiteX92" y="connsiteY92"/>
-              </a:cxn>
-              <a:cxn ang="0">
-                <a:pos x="connsiteX93" y="connsiteY93"/>
-              </a:cxn>
-              <a:cxn ang="0">
-                <a:pos x="connsiteX94" y="connsiteY94"/>
-              </a:cxn>
-              <a:cxn ang="0">
-                <a:pos x="connsiteX95" y="connsiteY95"/>
-              </a:cxn>
-              <a:cxn ang="0">
-                <a:pos x="connsiteX96" y="connsiteY96"/>
-              </a:cxn>
-              <a:cxn ang="0">
-                <a:pos x="connsiteX97" y="connsiteY97"/>
-              </a:cxn>
-              <a:cxn ang="0">
-                <a:pos x="connsiteX98" y="connsiteY98"/>
-              </a:cxn>
-              <a:cxn ang="0">
-                <a:pos x="connsiteX99" y="connsiteY99"/>
-              </a:cxn>
-              <a:cxn ang="0">
-                <a:pos x="connsiteX100" y="connsiteY100"/>
-              </a:cxn>
-              <a:cxn ang="0">
-                <a:pos x="connsiteX101" y="connsiteY101"/>
-              </a:cxn>
-              <a:cxn ang="0">
-                <a:pos x="connsiteX102" y="connsiteY102"/>
-              </a:cxn>
-              <a:cxn ang="0">
-                <a:pos x="connsiteX103" y="connsiteY103"/>
-              </a:cxn>
-              <a:cxn ang="0">
-                <a:pos x="connsiteX104" y="connsiteY104"/>
-              </a:cxn>
-              <a:cxn ang="0">
-                <a:pos x="connsiteX105" y="connsiteY105"/>
-              </a:cxn>
-              <a:cxn ang="0">
-                <a:pos x="connsiteX106" y="connsiteY106"/>
-              </a:cxn>
-              <a:cxn ang="0">
-                <a:pos x="connsiteX107" y="connsiteY107"/>
-              </a:cxn>
-              <a:cxn ang="0">
-                <a:pos x="connsiteX108" y="connsiteY108"/>
-              </a:cxn>
-              <a:cxn ang="0">
-                <a:pos x="connsiteX109" y="connsiteY109"/>
-              </a:cxn>
-              <a:cxn ang="0">
-                <a:pos x="connsiteX110" y="connsiteY110"/>
-              </a:cxn>
-              <a:cxn ang="0">
-                <a:pos x="connsiteX111" y="connsiteY111"/>
-              </a:cxn>
-              <a:cxn ang="0">
-                <a:pos x="connsiteX112" y="connsiteY112"/>
-              </a:cxn>
-              <a:cxn ang="0">
-                <a:pos x="connsiteX113" y="connsiteY113"/>
-              </a:cxn>
-              <a:cxn ang="0">
-                <a:pos x="connsiteX114" y="connsiteY114"/>
-              </a:cxn>
-              <a:cxn ang="0">
-                <a:pos x="connsiteX115" y="connsiteY115"/>
-              </a:cxn>
-              <a:cxn ang="0">
-                <a:pos x="connsiteX116" y="connsiteY116"/>
-              </a:cxn>
-              <a:cxn ang="0">
-                <a:pos x="connsiteX117" y="connsiteY117"/>
-              </a:cxn>
-              <a:cxn ang="0">
-                <a:pos x="connsiteX118" y="connsiteY118"/>
-              </a:cxn>
-              <a:cxn ang="0">
-                <a:pos x="connsiteX119" y="connsiteY119"/>
-              </a:cxn>
-              <a:cxn ang="0">
-                <a:pos x="connsiteX120" y="connsiteY120"/>
-              </a:cxn>
-              <a:cxn ang="0">
-                <a:pos x="connsiteX121" y="connsiteY121"/>
-              </a:cxn>
-              <a:cxn ang="0">
-                <a:pos x="connsiteX122" y="connsiteY122"/>
-              </a:cxn>
-              <a:cxn ang="0">
-                <a:pos x="connsiteX123" y="connsiteY123"/>
-              </a:cxn>
-              <a:cxn ang="0">
-                <a:pos x="connsiteX124" y="connsiteY124"/>
-              </a:cxn>
-              <a:cxn ang="0">
-                <a:pos x="connsiteX125" y="connsiteY125"/>
-              </a:cxn>
-              <a:cxn ang="0">
-                <a:pos x="connsiteX126" y="connsiteY126"/>
-              </a:cxn>
-              <a:cxn ang="0">
-                <a:pos x="connsiteX127" y="connsiteY127"/>
-              </a:cxn>
-              <a:cxn ang="0">
-                <a:pos x="connsiteX128" y="connsiteY128"/>
-              </a:cxn>
-              <a:cxn ang="0">
-                <a:pos x="connsiteX129" y="connsiteY129"/>
-              </a:cxn>
-              <a:cxn ang="0">
-                <a:pos x="connsiteX130" y="connsiteY130"/>
-              </a:cxn>
-              <a:cxn ang="0">
-                <a:pos x="connsiteX131" y="connsiteY131"/>
-              </a:cxn>
-              <a:cxn ang="0">
-                <a:pos x="connsiteX132" y="connsiteY132"/>
-              </a:cxn>
-              <a:cxn ang="0">
-                <a:pos x="connsiteX133" y="connsiteY133"/>
-              </a:cxn>
-              <a:cxn ang="0">
-                <a:pos x="connsiteX134" y="connsiteY134"/>
-              </a:cxn>
-              <a:cxn ang="0">
-                <a:pos x="connsiteX135" y="connsiteY135"/>
-              </a:cxn>
-              <a:cxn ang="0">
-                <a:pos x="connsiteX136" y="connsiteY136"/>
-              </a:cxn>
-              <a:cxn ang="0">
-                <a:pos x="connsiteX137" y="connsiteY137"/>
-              </a:cxn>
-              <a:cxn ang="0">
-                <a:pos x="connsiteX138" y="connsiteY138"/>
-              </a:cxn>
-              <a:cxn ang="0">
-                <a:pos x="connsiteX139" y="connsiteY139"/>
-              </a:cxn>
-              <a:cxn ang="0">
-                <a:pos x="connsiteX140" y="connsiteY140"/>
-              </a:cxn>
-              <a:cxn ang="0">
-                <a:pos x="connsiteX141" y="connsiteY141"/>
-              </a:cxn>
-              <a:cxn ang="0">
-                <a:pos x="connsiteX142" y="connsiteY142"/>
-              </a:cxn>
-            </a:cxnLst>
-            <a:rect l="l" t="t" r="r" b="b"/>
-            <a:pathLst>
-              <a:path w="12192000" h="6858000">
-                <a:moveTo>
-                  <a:pt x="3094406" y="283966"/>
-                </a:moveTo>
-                <a:cubicBezTo>
-                  <a:pt x="3074312" y="283528"/>
-                  <a:pt x="3054907" y="288795"/>
-                  <a:pt x="3038833" y="309661"/>
-                </a:cubicBezTo>
-                <a:cubicBezTo>
-                  <a:pt x="3124259" y="364657"/>
-                  <a:pt x="3233105" y="343983"/>
-                  <a:pt x="3348384" y="406000"/>
-                </a:cubicBezTo>
-                <a:cubicBezTo>
-                  <a:pt x="3161001" y="386497"/>
-                  <a:pt x="3012653" y="370896"/>
-                  <a:pt x="2864309" y="355295"/>
-                </a:cubicBezTo>
-                <a:cubicBezTo>
-                  <a:pt x="2861553" y="366216"/>
-                  <a:pt x="2858796" y="377136"/>
-                  <a:pt x="2856039" y="388058"/>
-                </a:cubicBezTo>
-                <a:cubicBezTo>
-                  <a:pt x="3045722" y="411070"/>
-                  <a:pt x="3221166" y="470356"/>
-                  <a:pt x="3405794" y="512089"/>
-                </a:cubicBezTo>
-                <a:cubicBezTo>
-                  <a:pt x="3388799" y="537835"/>
-                  <a:pt x="3371808" y="532763"/>
-                  <a:pt x="3356651" y="531204"/>
-                </a:cubicBezTo>
-                <a:cubicBezTo>
-                  <a:pt x="3257907" y="521062"/>
-                  <a:pt x="3159164" y="510922"/>
-                  <a:pt x="3064552" y="483228"/>
-                </a:cubicBezTo>
-                <a:cubicBezTo>
-                  <a:pt x="3043427" y="476987"/>
-                  <a:pt x="3017704" y="476987"/>
-                  <a:pt x="3005765" y="495708"/>
-                </a:cubicBezTo>
-                <a:cubicBezTo>
-                  <a:pt x="2988771" y="522231"/>
-                  <a:pt x="3013113" y="539393"/>
-                  <a:pt x="3034700" y="553823"/>
-                </a:cubicBezTo>
-                <a:cubicBezTo>
-                  <a:pt x="3072360" y="578787"/>
-                  <a:pt x="3117827" y="571767"/>
-                  <a:pt x="3161459" y="576445"/>
-                </a:cubicBezTo>
-                <a:cubicBezTo>
-                  <a:pt x="3277655" y="588537"/>
-                  <a:pt x="3333228" y="626370"/>
-                  <a:pt x="3358949" y="712961"/>
-                </a:cubicBezTo>
-                <a:cubicBezTo>
-                  <a:pt x="3256987" y="677857"/>
-                  <a:pt x="3158703" y="721151"/>
-                  <a:pt x="3059960" y="696576"/>
-                </a:cubicBezTo>
-                <a:cubicBezTo>
-                  <a:pt x="3034240" y="690338"/>
-                  <a:pt x="2993364" y="699698"/>
-                  <a:pt x="3007143" y="729732"/>
-                </a:cubicBezTo>
-                <a:cubicBezTo>
-                  <a:pt x="3020003" y="757814"/>
-                  <a:pt x="3062716" y="778096"/>
-                  <a:pt x="2986935" y="772635"/>
-                </a:cubicBezTo>
-                <a:cubicBezTo>
-                  <a:pt x="2932740" y="768735"/>
-                  <a:pt x="2826647" y="800329"/>
-                  <a:pt x="2871197" y="808127"/>
-                </a:cubicBezTo>
-                <a:cubicBezTo>
-                  <a:pt x="2927228" y="817881"/>
-                  <a:pt x="2981883" y="831921"/>
-                  <a:pt x="3053071" y="847913"/>
-                </a:cubicBezTo>
-                <a:cubicBezTo>
-                  <a:pt x="2974533" y="874043"/>
-                  <a:pt x="2918042" y="868584"/>
-                  <a:pt x="2858796" y="847913"/>
-                </a:cubicBezTo>
-                <a:cubicBezTo>
-                  <a:pt x="2787150" y="822949"/>
-                  <a:pt x="2693916" y="792528"/>
-                  <a:pt x="2635588" y="820611"/>
-                </a:cubicBezTo>
-                <a:cubicBezTo>
-                  <a:pt x="2548326" y="862734"/>
-                  <a:pt x="2475760" y="836211"/>
-                  <a:pt x="2397683" y="829190"/>
-                </a:cubicBezTo>
-                <a:cubicBezTo>
-                  <a:pt x="2238775" y="814759"/>
-                  <a:pt x="2081241" y="790576"/>
-                  <a:pt x="1921874" y="778877"/>
-                </a:cubicBezTo>
-                <a:cubicBezTo>
-                  <a:pt x="1858036" y="774195"/>
-                  <a:pt x="1789143" y="751964"/>
-                  <a:pt x="1695450" y="782386"/>
-                </a:cubicBezTo>
-                <a:cubicBezTo>
-                  <a:pt x="2119822" y="938012"/>
-                  <a:pt x="2575423" y="928262"/>
-                  <a:pt x="2954324" y="1120940"/>
-                </a:cubicBezTo>
-                <a:cubicBezTo>
-                  <a:pt x="2938251" y="1139269"/>
-                  <a:pt x="2856502" y="1191535"/>
-                  <a:pt x="2890028" y="1195435"/>
-                </a:cubicBezTo>
-                <a:cubicBezTo>
-                  <a:pt x="2984178" y="1206748"/>
-                  <a:pt x="3067767" y="1244971"/>
-                  <a:pt x="3153652" y="1276563"/>
-                </a:cubicBezTo>
-                <a:cubicBezTo>
-                  <a:pt x="3190855" y="1290216"/>
-                  <a:pt x="3235862" y="1308157"/>
-                  <a:pt x="3218410" y="1356911"/>
-                </a:cubicBezTo>
-                <a:cubicBezTo>
-                  <a:pt x="3186719" y="1370562"/>
-                  <a:pt x="3163296" y="1351451"/>
-                  <a:pt x="3137118" y="1349891"/>
-                </a:cubicBezTo>
-                <a:cubicBezTo>
-                  <a:pt x="3110480" y="1348331"/>
-                  <a:pt x="3050773" y="1358471"/>
-                  <a:pt x="3067309" y="1365102"/>
-                </a:cubicBezTo>
-                <a:cubicBezTo>
-                  <a:pt x="3142629" y="1395136"/>
-                  <a:pt x="3007143" y="1467292"/>
-                  <a:pt x="3096243" y="1467292"/>
-                </a:cubicBezTo>
-                <a:cubicBezTo>
-                  <a:pt x="3245506" y="1467681"/>
-                  <a:pt x="3324961" y="1595613"/>
-                  <a:pt x="3468716" y="1599125"/>
-                </a:cubicBezTo>
-                <a:cubicBezTo>
-                  <a:pt x="3491677" y="1599513"/>
-                  <a:pt x="3502700" y="1622137"/>
-                  <a:pt x="3502241" y="1642029"/>
-                </a:cubicBezTo>
-                <a:cubicBezTo>
-                  <a:pt x="3502241" y="1665822"/>
-                  <a:pt x="3481116" y="1670112"/>
-                  <a:pt x="3457692" y="1672453"/>
-                </a:cubicBezTo>
-                <a:cubicBezTo>
-                  <a:pt x="3421868" y="1675962"/>
-                  <a:pt x="3384667" y="1642029"/>
-                  <a:pt x="3337362" y="1688053"/>
-                </a:cubicBezTo>
-                <a:cubicBezTo>
-                  <a:pt x="3422329" y="1714966"/>
-                  <a:pt x="3507294" y="1741878"/>
-                  <a:pt x="3505915" y="1834318"/>
-                </a:cubicBezTo>
-                <a:cubicBezTo>
-                  <a:pt x="3505457" y="1859279"/>
-                  <a:pt x="3540820" y="1868640"/>
-                  <a:pt x="3567458" y="1874880"/>
-                </a:cubicBezTo>
-                <a:cubicBezTo>
-                  <a:pt x="3611549" y="1885023"/>
-                  <a:pt x="3648750" y="1902965"/>
-                  <a:pt x="3672634" y="1937678"/>
-                </a:cubicBezTo>
-                <a:cubicBezTo>
-                  <a:pt x="3672172" y="1944308"/>
-                  <a:pt x="3671715" y="1951329"/>
-                  <a:pt x="3674470" y="1956789"/>
-                </a:cubicBezTo>
-                <a:cubicBezTo>
-                  <a:pt x="3666664" y="2040646"/>
-                  <a:pt x="3602363" y="2038306"/>
-                  <a:pt x="3531176" y="2024266"/>
-                </a:cubicBezTo>
-                <a:cubicBezTo>
-                  <a:pt x="3446211" y="2007103"/>
-                  <a:pt x="3362164" y="1975900"/>
-                  <a:pt x="3272604" y="2005933"/>
-                </a:cubicBezTo>
-                <a:cubicBezTo>
-                  <a:pt x="3398905" y="2046107"/>
-                  <a:pt x="3536229" y="2049228"/>
-                  <a:pt x="3654720" y="2106564"/>
-                </a:cubicBezTo>
-                <a:cubicBezTo>
-                  <a:pt x="3221166" y="2117095"/>
-                  <a:pt x="2838130" y="1936116"/>
-                  <a:pt x="2417892" y="1866690"/>
-                </a:cubicBezTo>
-                <a:cubicBezTo>
-                  <a:pt x="2432130" y="1913105"/>
-                  <a:pt x="2466114" y="1922465"/>
-                  <a:pt x="2496888" y="1929487"/>
-                </a:cubicBezTo>
-                <a:cubicBezTo>
-                  <a:pt x="2652123" y="1964590"/>
-                  <a:pt x="2788067" y="2034408"/>
-                  <a:pt x="2929526" y="2094862"/>
-                </a:cubicBezTo>
-                <a:cubicBezTo>
-                  <a:pt x="2987851" y="2119825"/>
-                  <a:pt x="3030106" y="2144789"/>
-                  <a:pt x="3052152" y="2198613"/>
-                </a:cubicBezTo>
-                <a:cubicBezTo>
-                  <a:pt x="3071903" y="2247367"/>
-                  <a:pt x="3110021" y="2269990"/>
-                  <a:pt x="3180748" y="2255948"/>
-                </a:cubicBezTo>
-                <a:cubicBezTo>
-                  <a:pt x="3238157" y="2244246"/>
-                  <a:pt x="3301078" y="2250487"/>
-                  <a:pt x="3361244" y="2254777"/>
-                </a:cubicBezTo>
-                <a:cubicBezTo>
-                  <a:pt x="3430596" y="2259459"/>
-                  <a:pt x="3508213" y="2314455"/>
-                  <a:pt x="3489382" y="2342926"/>
-                </a:cubicBezTo>
-                <a:cubicBezTo>
-                  <a:pt x="3457233" y="2391292"/>
-                  <a:pt x="3403498" y="2367110"/>
-                  <a:pt x="3355733" y="2361649"/>
-                </a:cubicBezTo>
-                <a:cubicBezTo>
-                  <a:pt x="3301537" y="2355018"/>
-                  <a:pt x="3200957" y="2341367"/>
-                  <a:pt x="3199121" y="2347216"/>
-                </a:cubicBezTo>
-                <a:cubicBezTo>
-                  <a:pt x="3163754" y="2468518"/>
-                  <a:pt x="2914827" y="2362819"/>
-                  <a:pt x="2861091" y="2351896"/>
-                </a:cubicBezTo>
-                <a:cubicBezTo>
-                  <a:pt x="2794038" y="2338245"/>
-                  <a:pt x="2731116" y="2363208"/>
-                  <a:pt x="2667278" y="2369058"/>
-                </a:cubicBezTo>
-                <a:cubicBezTo>
-                  <a:pt x="2610328" y="2374518"/>
-                  <a:pt x="2288376" y="2391292"/>
-                  <a:pt x="2221781" y="2339805"/>
-                </a:cubicBezTo>
-                <a:cubicBezTo>
-                  <a:pt x="2212595" y="2379978"/>
-                  <a:pt x="2231884" y="2396361"/>
-                  <a:pt x="2247961" y="2414693"/>
-                </a:cubicBezTo>
-                <a:cubicBezTo>
-                  <a:pt x="2270465" y="2440824"/>
-                  <a:pt x="2274138" y="2459157"/>
-                  <a:pt x="2231425" y="2479828"/>
-                </a:cubicBezTo>
-                <a:cubicBezTo>
-                  <a:pt x="2109717" y="2539115"/>
-                  <a:pt x="2111557" y="2541065"/>
-                  <a:pt x="2224996" y="2621414"/>
-                </a:cubicBezTo>
-                <a:cubicBezTo>
-                  <a:pt x="2230509" y="2624923"/>
-                  <a:pt x="2228211" y="2636624"/>
-                  <a:pt x="2229131" y="2644426"/>
-                </a:cubicBezTo>
-                <a:cubicBezTo>
-                  <a:pt x="2199276" y="2656906"/>
-                  <a:pt x="2164373" y="2625703"/>
-                  <a:pt x="2129466" y="2659247"/>
-                </a:cubicBezTo>
-                <a:cubicBezTo>
-                  <a:pt x="2281487" y="2806680"/>
-                  <a:pt x="2513421" y="2842953"/>
-                  <a:pt x="2723312" y="2953726"/>
-                </a:cubicBezTo>
-                <a:cubicBezTo>
-                  <a:pt x="2553377" y="2990389"/>
-                  <a:pt x="2451419" y="2862456"/>
-                  <a:pt x="2326496" y="2878838"/>
-                </a:cubicBezTo>
-                <a:cubicBezTo>
-                  <a:pt x="2264036" y="2919012"/>
-                  <a:pt x="2449582" y="2983367"/>
-                  <a:pt x="2272759" y="3002480"/>
-                </a:cubicBezTo>
-                <a:cubicBezTo>
-                  <a:pt x="2349461" y="3037583"/>
-                  <a:pt x="2406411" y="3071905"/>
-                  <a:pt x="2459226" y="3112471"/>
-                </a:cubicBezTo>
-                <a:cubicBezTo>
-                  <a:pt x="2553377" y="3185016"/>
-                  <a:pt x="2571749" y="3232602"/>
-                  <a:pt x="2528117" y="3330111"/>
-                </a:cubicBezTo>
-                <a:cubicBezTo>
-                  <a:pt x="2499642" y="3394076"/>
-                  <a:pt x="2457848" y="3452973"/>
-                  <a:pt x="2494590" y="3529029"/>
-                </a:cubicBezTo>
-                <a:cubicBezTo>
-                  <a:pt x="2520308" y="3581294"/>
-                  <a:pt x="2510206" y="3615617"/>
-                  <a:pt x="2414677" y="3592215"/>
-                </a:cubicBezTo>
-                <a:cubicBezTo>
-                  <a:pt x="2311799" y="3567251"/>
-                  <a:pt x="2273221" y="3614057"/>
-                  <a:pt x="2298940" y="3705716"/>
-                </a:cubicBezTo>
-                <a:cubicBezTo>
-                  <a:pt x="2315473" y="3764612"/>
-                  <a:pt x="2298020" y="3782553"/>
-                  <a:pt x="2227294" y="3775921"/>
-                </a:cubicBezTo>
-                <a:cubicBezTo>
-                  <a:pt x="2149215" y="3768512"/>
-                  <a:pt x="2074811" y="3729898"/>
-                  <a:pt x="1978366" y="3748620"/>
-                </a:cubicBezTo>
-                <a:cubicBezTo>
-                  <a:pt x="2055522" y="3855492"/>
-                  <a:pt x="2220403" y="3825068"/>
-                  <a:pt x="2310421" y="3926868"/>
-                </a:cubicBezTo>
-                <a:cubicBezTo>
-                  <a:pt x="2202950" y="3927259"/>
-                  <a:pt x="2120739" y="3926868"/>
-                  <a:pt x="2041285" y="3904635"/>
-                </a:cubicBezTo>
-                <a:cubicBezTo>
-                  <a:pt x="2008216" y="3895664"/>
-                  <a:pt x="1971934" y="3886305"/>
-                  <a:pt x="1953565" y="3917116"/>
-                </a:cubicBezTo>
-                <a:cubicBezTo>
-                  <a:pt x="1931978" y="3954170"/>
-                  <a:pt x="1976527" y="3968211"/>
-                  <a:pt x="2003623" y="3974842"/>
-                </a:cubicBezTo>
-                <a:cubicBezTo>
-                  <a:pt x="2079866" y="3993563"/>
-                  <a:pt x="2138192" y="4038028"/>
-                  <a:pt x="2201114" y="4072742"/>
-                </a:cubicBezTo>
-                <a:cubicBezTo>
-                  <a:pt x="2339356" y="4148800"/>
-                  <a:pt x="2490917" y="4212375"/>
-                  <a:pt x="2608032" y="4337967"/>
-                </a:cubicBezTo>
-                <a:cubicBezTo>
-                  <a:pt x="2460606" y="4305983"/>
-                  <a:pt x="2350838" y="4231487"/>
-                  <a:pt x="2213973" y="4216277"/>
-                </a:cubicBezTo>
-                <a:cubicBezTo>
-                  <a:pt x="2332467" y="4330557"/>
-                  <a:pt x="2484945" y="4405834"/>
-                  <a:pt x="2629158" y="4488911"/>
-                </a:cubicBezTo>
-                <a:cubicBezTo>
-                  <a:pt x="2670494" y="4512315"/>
-                  <a:pt x="2712289" y="4528306"/>
-                  <a:pt x="2721471" y="4579399"/>
-                </a:cubicBezTo>
-                <a:cubicBezTo>
-                  <a:pt x="2739385" y="4678470"/>
-                  <a:pt x="2793121" y="4760378"/>
-                  <a:pt x="2907939" y="4804062"/>
-                </a:cubicBezTo>
-                <a:cubicBezTo>
-                  <a:pt x="2908859" y="4804452"/>
-                  <a:pt x="2902428" y="4819274"/>
-                  <a:pt x="2898753" y="4829414"/>
-                </a:cubicBezTo>
-                <a:cubicBezTo>
-                  <a:pt x="2828485" y="4832536"/>
-                  <a:pt x="2772912" y="4774028"/>
-                  <a:pt x="2683352" y="4793141"/>
-                </a:cubicBezTo>
-                <a:cubicBezTo>
-                  <a:pt x="2769239" y="4872708"/>
-                  <a:pt x="2840885" y="4944087"/>
-                  <a:pt x="2962594" y="4981920"/>
-                </a:cubicBezTo>
-                <a:cubicBezTo>
-                  <a:pt x="3059960" y="5011952"/>
-                  <a:pt x="3180289" y="5029503"/>
-                  <a:pt x="3251019" y="5127012"/>
-                </a:cubicBezTo>
-                <a:cubicBezTo>
-                  <a:pt x="3168808" y="5146126"/>
-                  <a:pt x="3107723" y="5121944"/>
-                  <a:pt x="3046180" y="5104781"/>
-                </a:cubicBezTo>
-                <a:cubicBezTo>
-                  <a:pt x="2952030" y="5078258"/>
-                  <a:pt x="2858796" y="5048226"/>
-                  <a:pt x="2764646" y="5021703"/>
-                </a:cubicBezTo>
-                <a:cubicBezTo>
-                  <a:pt x="2728821" y="5011563"/>
-                  <a:pt x="2689782" y="5004540"/>
-                  <a:pt x="2666820" y="5052905"/>
-                </a:cubicBezTo>
-                <a:cubicBezTo>
-                  <a:pt x="2786691" y="5063047"/>
-                  <a:pt x="2858337" y="5128575"/>
-                  <a:pt x="2933657" y="5190198"/>
-                </a:cubicBezTo>
-                <a:cubicBezTo>
-                  <a:pt x="2975911" y="5224912"/>
-                  <a:pt x="3010358" y="5271328"/>
-                  <a:pt x="3086598" y="5253776"/>
-                </a:cubicBezTo>
-                <a:cubicBezTo>
-                  <a:pt x="3126554" y="5244415"/>
-                  <a:pt x="3151814" y="5270547"/>
-                  <a:pt x="3147680" y="5302531"/>
-                </a:cubicBezTo>
-                <a:cubicBezTo>
-                  <a:pt x="3132525" y="5415251"/>
-                  <a:pt x="3225759" y="5454645"/>
-                  <a:pt x="3322204" y="5476487"/>
-                </a:cubicBezTo>
-                <a:cubicBezTo>
-                  <a:pt x="3504998" y="5517440"/>
-                  <a:pt x="3657018" y="5613779"/>
-                  <a:pt x="3834758" y="5666434"/>
-                </a:cubicBezTo>
-                <a:cubicBezTo>
-                  <a:pt x="4007445" y="5717529"/>
-                  <a:pt x="4141095" y="5838830"/>
-                  <a:pt x="4314240" y="5902409"/>
-                </a:cubicBezTo>
-                <a:cubicBezTo>
-                  <a:pt x="4439624" y="5948433"/>
-                  <a:pt x="4559494" y="6007718"/>
-                  <a:pt x="4688552" y="6049453"/>
-                </a:cubicBezTo>
-                <a:cubicBezTo>
-                  <a:pt x="4993968" y="6148131"/>
-                  <a:pt x="5305360" y="6227308"/>
-                  <a:pt x="5634660" y="6238620"/>
-                </a:cubicBezTo>
-                <a:cubicBezTo>
-                  <a:pt x="5906549" y="6247590"/>
-                  <a:pt x="8264931" y="6239010"/>
-                  <a:pt x="9222980" y="4955397"/>
-                </a:cubicBezTo>
-                <a:cubicBezTo>
-                  <a:pt x="9241350" y="4949155"/>
-                  <a:pt x="9262017" y="4932775"/>
-                  <a:pt x="9268448" y="4917173"/>
-                </a:cubicBezTo>
-                <a:cubicBezTo>
-                  <a:pt x="9299220" y="4844235"/>
-                  <a:pt x="9374540" y="4812644"/>
-                  <a:pt x="9442512" y="4773251"/>
-                </a:cubicBezTo>
-                <a:cubicBezTo>
-                  <a:pt x="9502220" y="4738536"/>
-                  <a:pt x="9565600" y="4702263"/>
-                  <a:pt x="9590400" y="4643756"/>
-                </a:cubicBezTo>
-                <a:cubicBezTo>
-                  <a:pt x="9623008" y="4565749"/>
-                  <a:pt x="9530236" y="4629716"/>
-                  <a:pt x="9513242" y="4600073"/>
-                </a:cubicBezTo>
-                <a:cubicBezTo>
-                  <a:pt x="9548605" y="4559509"/>
-                  <a:pt x="9603261" y="4522454"/>
-                  <a:pt x="9617498" y="4476430"/>
-                </a:cubicBezTo>
-                <a:cubicBezTo>
-                  <a:pt x="9669394" y="4310276"/>
-                  <a:pt x="9781460" y="4189364"/>
-                  <a:pt x="9949094" y="4095364"/>
-                </a:cubicBezTo>
-                <a:cubicBezTo>
-                  <a:pt x="9997318" y="4068452"/>
-                  <a:pt x="10029007" y="4019306"/>
-                  <a:pt x="10094686" y="4011507"/>
-                </a:cubicBezTo>
-                <a:cubicBezTo>
-                  <a:pt x="10240735" y="3994345"/>
-                  <a:pt x="10194808" y="3860171"/>
-                  <a:pt x="10271967" y="3800497"/>
-                </a:cubicBezTo>
-                <a:cubicBezTo>
-                  <a:pt x="10286662" y="3789184"/>
-                  <a:pt x="10299980" y="3766953"/>
-                  <a:pt x="10297226" y="3751742"/>
-                </a:cubicBezTo>
-                <a:cubicBezTo>
-                  <a:pt x="10293091" y="3729898"/>
-                  <a:pt x="10275639" y="3709227"/>
-                  <a:pt x="10260943" y="3689723"/>
-                </a:cubicBezTo>
-                <a:cubicBezTo>
-                  <a:pt x="10245786" y="3670222"/>
-                  <a:pt x="10222825" y="3653061"/>
-                  <a:pt x="10233847" y="3627319"/>
-                </a:cubicBezTo>
-                <a:cubicBezTo>
-                  <a:pt x="10238437" y="3616788"/>
-                  <a:pt x="10235225" y="3580125"/>
-                  <a:pt x="10269209" y="3608986"/>
-                </a:cubicBezTo>
-                <a:cubicBezTo>
-                  <a:pt x="10362443" y="3688165"/>
-                  <a:pt x="10416637" y="3613279"/>
-                  <a:pt x="10496550" y="3577393"/>
-                </a:cubicBezTo>
-                <a:cubicBezTo>
-                  <a:pt x="10432253" y="3540340"/>
-                  <a:pt x="10374383" y="3514208"/>
-                  <a:pt x="10364738" y="3458823"/>
-                </a:cubicBezTo>
-                <a:cubicBezTo>
-                  <a:pt x="10344991" y="3344542"/>
-                  <a:pt x="10260485" y="3292277"/>
-                  <a:pt x="10132346" y="3282137"/>
-                </a:cubicBezTo>
-                <a:cubicBezTo>
-                  <a:pt x="10179650" y="3171757"/>
-                  <a:pt x="10179650" y="3171757"/>
-                  <a:pt x="10026712" y="3156543"/>
-                </a:cubicBezTo>
-                <a:cubicBezTo>
-                  <a:pt x="10085499" y="3086337"/>
-                  <a:pt x="10085499" y="3068396"/>
-                  <a:pt x="10014312" y="3044213"/>
-                </a:cubicBezTo>
-                <a:cubicBezTo>
-                  <a:pt x="9945880" y="3021201"/>
-                  <a:pt x="9870100" y="3013401"/>
-                  <a:pt x="9806718" y="2977907"/>
-                </a:cubicBezTo>
-                <a:cubicBezTo>
-                  <a:pt x="9865047" y="2888199"/>
-                  <a:pt x="9881580" y="2784060"/>
-                  <a:pt x="10001912" y="2740374"/>
-                </a:cubicBezTo>
-                <a:cubicBezTo>
-                  <a:pt x="10020741" y="2733743"/>
-                  <a:pt x="10033600" y="2706830"/>
-                  <a:pt x="10021662" y="2691231"/>
-                </a:cubicBezTo>
-                <a:cubicBezTo>
-                  <a:pt x="9978030" y="2634675"/>
-                  <a:pt x="10040492" y="2527414"/>
-                  <a:pt x="9904546" y="2515322"/>
-                </a:cubicBezTo>
-                <a:cubicBezTo>
-                  <a:pt x="9887552" y="2514152"/>
-                  <a:pt x="9871936" y="2502450"/>
-                  <a:pt x="9885256" y="2487240"/>
-                </a:cubicBezTo>
-                <a:cubicBezTo>
-                  <a:pt x="9931184" y="2434196"/>
-                  <a:pt x="9875611" y="2437706"/>
-                  <a:pt x="9842085" y="2431074"/>
-                </a:cubicBezTo>
-                <a:cubicBezTo>
-                  <a:pt x="9801668" y="2422884"/>
-                  <a:pt x="9755740" y="2446287"/>
-                  <a:pt x="9718078" y="2417424"/>
-                </a:cubicBezTo>
-                <a:cubicBezTo>
-                  <a:pt x="9726806" y="2386999"/>
-                  <a:pt x="9759413" y="2387390"/>
-                  <a:pt x="9782378" y="2377641"/>
-                </a:cubicBezTo>
-                <a:cubicBezTo>
-                  <a:pt x="9849430" y="2349558"/>
-                  <a:pt x="9904086" y="2316013"/>
-                  <a:pt x="9907302" y="2243078"/>
-                </a:cubicBezTo>
-                <a:cubicBezTo>
-                  <a:pt x="9909596" y="2184182"/>
-                  <a:pt x="9916946" y="2132305"/>
-                  <a:pt x="9824171" y="2114365"/>
-                </a:cubicBezTo>
-                <a:cubicBezTo>
-                  <a:pt x="9785593" y="2106953"/>
-                  <a:pt x="9796616" y="2064440"/>
-                  <a:pt x="9818662" y="2043377"/>
-                </a:cubicBezTo>
-                <a:cubicBezTo>
-                  <a:pt x="9858160" y="2005933"/>
-                  <a:pt x="9890766" y="1956008"/>
-                  <a:pt x="9958740" y="1952499"/>
-                </a:cubicBezTo>
-                <a:cubicBezTo>
-                  <a:pt x="10000075" y="1950158"/>
-                  <a:pt x="10031764" y="1934556"/>
-                  <a:pt x="10064374" y="1916615"/>
-                </a:cubicBezTo>
-                <a:cubicBezTo>
-                  <a:pt x="10087795" y="1903743"/>
-                  <a:pt x="10115810" y="1892823"/>
-                  <a:pt x="10113055" y="1865131"/>
-                </a:cubicBezTo>
-                <a:cubicBezTo>
-                  <a:pt x="10110302" y="1838607"/>
-                  <a:pt x="10083203" y="1827686"/>
-                  <a:pt x="10055646" y="1822227"/>
-                </a:cubicBezTo>
-                <a:cubicBezTo>
-                  <a:pt x="9963792" y="1804675"/>
-                  <a:pt x="9877448" y="1778933"/>
-                  <a:pt x="9800748" y="1720036"/>
-                </a:cubicBezTo>
-                <a:cubicBezTo>
-                  <a:pt x="9851726" y="1688834"/>
-                  <a:pt x="9900410" y="1666211"/>
-                  <a:pt x="9938071" y="1634617"/>
-                </a:cubicBezTo>
-                <a:cubicBezTo>
-                  <a:pt x="10029007" y="1558172"/>
-                  <a:pt x="9258802" y="1317517"/>
-                  <a:pt x="9220224" y="1231709"/>
-                </a:cubicBezTo>
-                <a:cubicBezTo>
-                  <a:pt x="9208284" y="1205187"/>
-                  <a:pt x="9167410" y="1177883"/>
-                  <a:pt x="9133419" y="1170083"/>
-                </a:cubicBezTo>
-                <a:cubicBezTo>
-                  <a:pt x="8974052" y="1133420"/>
-                  <a:pt x="8835810" y="1051123"/>
-                  <a:pt x="8672768" y="1020699"/>
-                </a:cubicBezTo>
-                <a:cubicBezTo>
-                  <a:pt x="8518912" y="991837"/>
-                  <a:pt x="8367350" y="953222"/>
-                  <a:pt x="8198797" y="915000"/>
-                </a:cubicBezTo>
-                <a:cubicBezTo>
-                  <a:pt x="8302134" y="819048"/>
-                  <a:pt x="8485382" y="830361"/>
-                  <a:pt x="8528095" y="691898"/>
-                </a:cubicBezTo>
-                <a:cubicBezTo>
-                  <a:pt x="8361379" y="656013"/>
-                  <a:pt x="8185937" y="696968"/>
-                  <a:pt x="8025190" y="640021"/>
-                </a:cubicBezTo>
-                <a:cubicBezTo>
-                  <a:pt x="8011411" y="634954"/>
-                  <a:pt x="7992579" y="640021"/>
-                  <a:pt x="7976047" y="641584"/>
-                </a:cubicBezTo>
-                <a:cubicBezTo>
-                  <a:pt x="7644909" y="672005"/>
-                  <a:pt x="7315149" y="645484"/>
-                  <a:pt x="6988604" y="607260"/>
-                </a:cubicBezTo>
-                <a:cubicBezTo>
-                  <a:pt x="6518305" y="552656"/>
-                  <a:pt x="6046170" y="517941"/>
-                  <a:pt x="5573116" y="493368"/>
-                </a:cubicBezTo>
-                <a:cubicBezTo>
-                  <a:pt x="5182272" y="473086"/>
-                  <a:pt x="4790511" y="464116"/>
-                  <a:pt x="4401503" y="425112"/>
-                </a:cubicBezTo>
-                <a:cubicBezTo>
-                  <a:pt x="3985401" y="383379"/>
-                  <a:pt x="3569756" y="336184"/>
-                  <a:pt x="3154109" y="292499"/>
-                </a:cubicBezTo>
-                <a:cubicBezTo>
-                  <a:pt x="3135280" y="290549"/>
-                  <a:pt x="3114499" y="284406"/>
-                  <a:pt x="3094406" y="283966"/>
-                </a:cubicBezTo>
-                <a:close/>
-                <a:moveTo>
-                  <a:pt x="0" y="0"/>
-                </a:moveTo>
-                <a:lnTo>
-                  <a:pt x="12192000" y="0"/>
-                </a:lnTo>
-                <a:lnTo>
-                  <a:pt x="12192000" y="6858000"/>
-                </a:lnTo>
-                <a:lnTo>
-                  <a:pt x="0" y="6858000"/>
-                </a:lnTo>
-                <a:close/>
-              </a:path>
-            </a:pathLst>
-          </a:custGeom>
-          <a:solidFill>
-            <a:schemeClr val="bg2">
-              <a:alpha val="50000"/>
-            </a:schemeClr>
-          </a:solidFill>
-          <a:ln w="32707" cap="flat">
-            <a:noFill/>
-            <a:prstDash val="solid"/>
-            <a:miter/>
-          </a:ln>
-        </p:spPr>
-        <p:txBody>
-          <a:bodyPr wrap="square" rtlCol="0" anchor="ctr">
-            <a:noAutofit/>
-          </a:bodyPr>
-          <a:lstStyle/>
-          <a:p>
-            <a:pPr algn="ctr"/>
-            <a:endParaRPr lang="en-US"/>
-          </a:p>
-        </p:txBody>
-      </p:sp>
-      <p:pic>
-        <p:nvPicPr>
-          <p:cNvPr id="1026" name="Picture 2" descr="Home - Walhub">
-            <a:extLst>
-              <a:ext uri="{FF2B5EF4-FFF2-40B4-BE49-F238E27FC236}">
-                <a16:creationId xmlns:a16="http://schemas.microsoft.com/office/drawing/2014/main" id="{F7AA15B2-8CDD-4732-0690-3E2DEFEB2EE6}"/>
-              </a:ext>
-            </a:extLst>
-          </p:cNvPr>
-          <p:cNvPicPr>
-            <a:picLocks noChangeAspect="1" noChangeArrowheads="1"/>
-          </p:cNvPicPr>
-          <p:nvPr/>
-        </p:nvPicPr>
-        <p:blipFill>
-          <a:blip r:embed="rId3">
-            <a:extLst>
-              <a:ext uri="{28A0092B-C50C-407E-A947-70E740481C1C}">
-                <a14:useLocalDpi xmlns:a14="http://schemas.microsoft.com/office/drawing/2010/main" val="0"/>
-              </a:ext>
-            </a:extLst>
-          </a:blip>
-          <a:stretch>
-            <a:fillRect/>
-          </a:stretch>
-        </p:blipFill>
-        <p:spPr bwMode="auto">
-          <a:xfrm>
-            <a:off x="3841844" y="2020224"/>
-            <a:ext cx="4768755" cy="2469533"/>
-          </a:xfrm>
-          <a:prstGeom prst="rect">
-            <a:avLst/>
-          </a:prstGeom>
-          <a:noFill/>
-          <a:extLst>
-            <a:ext uri="{909E8E84-426E-40DD-AFC4-6F175D3DCCD1}">
-              <a14:hiddenFill xmlns:a14="http://schemas.microsoft.com/office/drawing/2010/main">
-                <a:solidFill>
-                  <a:srgbClr val="FFFFFF"/>
-                </a:solidFill>
-              </a14:hiddenFill>
-            </a:ext>
-          </a:extLst>
-        </p:spPr>
-      </p:pic>
-    </p:spTree>
-    <p:extLst>
-      <p:ext uri="{BB962C8B-B14F-4D97-AF65-F5344CB8AC3E}">
-        <p14:creationId xmlns:p14="http://schemas.microsoft.com/office/powerpoint/2010/main" val="845957291"/>
-      </p:ext>
-    </p:extLst>
-  </p:cSld>
-  <p:clrMapOvr>
-    <a:masterClrMapping/>
-  </p:clrMapOvr>
-</p:sld>
-</file>
-
-<file path=ppt/slides/slide3.xml><?xml version="1.0" encoding="utf-8"?>
-<p:sld xmlns:a="http://schemas.openxmlformats.org/drawingml/2006/main" xmlns:r="http://schemas.openxmlformats.org/officeDocument/2006/relationships" xmlns:p="http://schemas.openxmlformats.org/presentationml/2006/main">
-  <p:cSld>
-    <p:bg>
-      <p:bgPr>
-        <a:solidFill>
-          <a:schemeClr val="bg1"/>
-        </a:solidFill>
-        <a:effectLst/>
-      </p:bgPr>
-    </p:bg>
-    <p:spTree>
-      <p:nvGrpSpPr>
-        <p:cNvPr id="1" name=""/>
-        <p:cNvGrpSpPr/>
-        <p:nvPr/>
-      </p:nvGrpSpPr>
-      <p:grpSpPr>
-        <a:xfrm>
-          <a:off x="0" y="0"/>
-          <a:ext cx="0" cy="0"/>
-          <a:chOff x="0" y="0"/>
-          <a:chExt cx="0" cy="0"/>
-        </a:xfrm>
-      </p:grpSpPr>
-      <p:sp useBgFill="1">
-        <p:nvSpPr>
-          <p:cNvPr id="45" name="Rectangle 44">
-            <a:extLst>
-              <a:ext uri="{FF2B5EF4-FFF2-40B4-BE49-F238E27FC236}">
-                <a16:creationId xmlns:a16="http://schemas.microsoft.com/office/drawing/2014/main" id="{201CC55D-ED54-4C5C-95E6-10947BD1103B}"/>
+          <p:cNvPr id="49" name="Rectangle 48">
+            <a:extLst>
+              <a:ext uri="{FF2B5EF4-FFF2-40B4-BE49-F238E27FC236}">
+                <a16:creationId xmlns:a16="http://schemas.microsoft.com/office/drawing/2014/main" id="{1022CA72-2A63-428F-B586-37BA5AB6D265}"/>
               </a:ext>
               <a:ext uri="{C183D7F6-B498-43B3-948B-1728B52AA6E4}">
                 <adec:decorative xmlns:adec="http://schemas.microsoft.com/office/drawing/2017/decorative" val="1"/>
@@ -8793,6 +8666,790 @@
           <p:cNvPr id="2" name="Titre 1">
             <a:extLst>
               <a:ext uri="{FF2B5EF4-FFF2-40B4-BE49-F238E27FC236}">
+                <a16:creationId xmlns:a16="http://schemas.microsoft.com/office/drawing/2014/main" id="{912796D7-9D1C-B2CC-06BC-F8745FA838A6}"/>
+              </a:ext>
+            </a:extLst>
+          </p:cNvPr>
+          <p:cNvSpPr>
+            <a:spLocks noGrp="1"/>
+          </p:cNvSpPr>
+          <p:nvPr>
+            <p:ph type="title"/>
+          </p:nvPr>
+        </p:nvSpPr>
+        <p:spPr>
+          <a:xfrm>
+            <a:off x="532015" y="4495568"/>
+            <a:ext cx="3861960" cy="1905232"/>
+          </a:xfrm>
+        </p:spPr>
+        <p:txBody>
+          <a:bodyPr anchor="ctr">
+            <a:normAutofit/>
+          </a:bodyPr>
+          <a:lstStyle/>
+          <a:p>
+            <a:r>
+              <a:rPr lang="fr-FR" sz="3200" dirty="0"/>
+              <a:t>Sujet du stage: </a:t>
+            </a:r>
+            <a:endParaRPr lang="es-AR" sz="3200" dirty="0"/>
+          </a:p>
+        </p:txBody>
+      </p:sp>
+      <p:sp>
+        <p:nvSpPr>
+          <p:cNvPr id="51" name="Rectangle 50">
+            <a:extLst>
+              <a:ext uri="{FF2B5EF4-FFF2-40B4-BE49-F238E27FC236}">
+                <a16:creationId xmlns:a16="http://schemas.microsoft.com/office/drawing/2014/main" id="{95C8260E-968F-44E8-A823-ABB431311926}"/>
+              </a:ext>
+              <a:ext uri="{C183D7F6-B498-43B3-948B-1728B52AA6E4}">
+                <adec:decorative xmlns:adec="http://schemas.microsoft.com/office/drawing/2017/decorative" val="1"/>
+              </a:ext>
+            </a:extLst>
+          </p:cNvPr>
+          <p:cNvSpPr>
+            <a:spLocks noGrp="1" noRot="1" noChangeAspect="1" noMove="1" noResize="1" noEditPoints="1" noAdjustHandles="1" noChangeArrowheads="1" noChangeShapeType="1" noTextEdit="1"/>
+          </p:cNvSpPr>
+          <p:nvPr>
+            <p:extLst>
+              <p:ext uri="{386F3935-93C4-4BCD-93E2-E3B085C9AB24}">
+                <p16:designElem xmlns:p16="http://schemas.microsoft.com/office/powerpoint/2015/main" val="1"/>
+              </p:ext>
+            </p:extLst>
+          </p:nvPr>
+        </p:nvSpPr>
+        <p:spPr>
+          <a:xfrm>
+            <a:off x="0" y="0"/>
+            <a:ext cx="12192000" cy="865848"/>
+          </a:xfrm>
+          <a:prstGeom prst="rect">
+            <a:avLst/>
+          </a:prstGeom>
+          <a:solidFill>
+            <a:schemeClr val="accent4"/>
+          </a:solidFill>
+          <a:ln>
+            <a:noFill/>
+          </a:ln>
+        </p:spPr>
+        <p:style>
+          <a:lnRef idx="2">
+            <a:schemeClr val="accent1">
+              <a:shade val="50000"/>
+            </a:schemeClr>
+          </a:lnRef>
+          <a:fillRef idx="1">
+            <a:schemeClr val="accent1"/>
+          </a:fillRef>
+          <a:effectRef idx="0">
+            <a:schemeClr val="accent1"/>
+          </a:effectRef>
+          <a:fontRef idx="minor">
+            <a:schemeClr val="lt1"/>
+          </a:fontRef>
+        </p:style>
+        <p:txBody>
+          <a:bodyPr rtlCol="0" anchor="ctr"/>
+          <a:lstStyle/>
+          <a:p>
+            <a:pPr algn="ctr"/>
+            <a:endParaRPr lang="en-US"/>
+          </a:p>
+        </p:txBody>
+      </p:sp>
+      <p:sp>
+        <p:nvSpPr>
+          <p:cNvPr id="53" name="Rectangle 52">
+            <a:extLst>
+              <a:ext uri="{FF2B5EF4-FFF2-40B4-BE49-F238E27FC236}">
+                <a16:creationId xmlns:a16="http://schemas.microsoft.com/office/drawing/2014/main" id="{2C1BBA94-3F40-40AA-8BB9-E69E25E537C1}"/>
+              </a:ext>
+              <a:ext uri="{C183D7F6-B498-43B3-948B-1728B52AA6E4}">
+                <adec:decorative xmlns:adec="http://schemas.microsoft.com/office/drawing/2017/decorative" val="1"/>
+              </a:ext>
+            </a:extLst>
+          </p:cNvPr>
+          <p:cNvSpPr>
+            <a:spLocks noGrp="1" noRot="1" noChangeAspect="1" noMove="1" noResize="1" noEditPoints="1" noAdjustHandles="1" noChangeArrowheads="1" noChangeShapeType="1" noTextEdit="1"/>
+          </p:cNvSpPr>
+          <p:nvPr>
+            <p:extLst>
+              <p:ext uri="{386F3935-93C4-4BCD-93E2-E3B085C9AB24}">
+                <p16:designElem xmlns:p16="http://schemas.microsoft.com/office/powerpoint/2015/main" val="1"/>
+              </p:ext>
+            </p:extLst>
+          </p:nvPr>
+        </p:nvSpPr>
+        <p:spPr>
+          <a:xfrm>
+            <a:off x="517889" y="-1"/>
+            <a:ext cx="11231745" cy="4131425"/>
+          </a:xfrm>
+          <a:prstGeom prst="rect">
+            <a:avLst/>
+          </a:prstGeom>
+          <a:solidFill>
+            <a:schemeClr val="bg1"/>
+          </a:solidFill>
+          <a:ln>
+            <a:noFill/>
+          </a:ln>
+          <a:effectLst>
+            <a:outerShdw blurRad="139700" dist="127000" dir="5400000" algn="t" rotWithShape="0">
+              <a:prstClr val="black">
+                <a:alpha val="15000"/>
+              </a:prstClr>
+            </a:outerShdw>
+          </a:effectLst>
+        </p:spPr>
+        <p:style>
+          <a:lnRef idx="2">
+            <a:schemeClr val="accent1">
+              <a:shade val="50000"/>
+            </a:schemeClr>
+          </a:lnRef>
+          <a:fillRef idx="1">
+            <a:schemeClr val="accent1"/>
+          </a:fillRef>
+          <a:effectRef idx="0">
+            <a:schemeClr val="accent1"/>
+          </a:effectRef>
+          <a:fontRef idx="minor">
+            <a:schemeClr val="lt1"/>
+          </a:fontRef>
+        </p:style>
+        <p:txBody>
+          <a:bodyPr rtlCol="0" anchor="ctr"/>
+          <a:lstStyle/>
+          <a:p>
+            <a:pPr algn="ctr"/>
+            <a:endParaRPr lang="en-US"/>
+          </a:p>
+        </p:txBody>
+      </p:sp>
+      <p:pic>
+        <p:nvPicPr>
+          <p:cNvPr id="5" name="Image 4" descr="Une image contenant texte, carte, diagramme, Plan&#10;&#10;Le contenu généré par l’IA peut être incorrect.">
+            <a:extLst>
+              <a:ext uri="{FF2B5EF4-FFF2-40B4-BE49-F238E27FC236}">
+                <a16:creationId xmlns:a16="http://schemas.microsoft.com/office/drawing/2014/main" id="{FF0D263F-9FFF-1721-B374-74604AF4B5A6}"/>
+              </a:ext>
+            </a:extLst>
+          </p:cNvPr>
+          <p:cNvPicPr>
+            <a:picLocks noChangeAspect="1"/>
+          </p:cNvPicPr>
+          <p:nvPr/>
+        </p:nvPicPr>
+        <p:blipFill>
+          <a:blip r:embed="rId3">
+            <a:extLst>
+              <a:ext uri="{28A0092B-C50C-407E-A947-70E740481C1C}">
+                <a14:useLocalDpi xmlns:a14="http://schemas.microsoft.com/office/drawing/2010/main" val="0"/>
+              </a:ext>
+            </a:extLst>
+          </a:blip>
+          <a:srcRect l="14271" r="12257"/>
+          <a:stretch>
+            <a:fillRect/>
+          </a:stretch>
+        </p:blipFill>
+        <p:spPr>
+          <a:xfrm>
+            <a:off x="1688174" y="364143"/>
+            <a:ext cx="3436846" cy="3426462"/>
+          </a:xfrm>
+          <a:prstGeom prst="rect">
+            <a:avLst/>
+          </a:prstGeom>
+        </p:spPr>
+      </p:pic>
+      <p:pic>
+        <p:nvPicPr>
+          <p:cNvPr id="3" name="Espace réservé du contenu 5" descr="Une image contenant cercle, texte, diagramme, capture d’écran&#10;&#10;Le contenu généré par l’IA peut être incorrect.">
+            <a:extLst>
+              <a:ext uri="{FF2B5EF4-FFF2-40B4-BE49-F238E27FC236}">
+                <a16:creationId xmlns:a16="http://schemas.microsoft.com/office/drawing/2014/main" id="{3EC02ED2-999D-1CF1-3832-D13770D4A1E1}"/>
+              </a:ext>
+            </a:extLst>
+          </p:cNvPr>
+          <p:cNvPicPr>
+            <a:picLocks noChangeAspect="1"/>
+          </p:cNvPicPr>
+          <p:nvPr/>
+        </p:nvPicPr>
+        <p:blipFill>
+          <a:blip r:embed="rId4">
+            <a:extLst>
+              <a:ext uri="{28A0092B-C50C-407E-A947-70E740481C1C}">
+                <a14:useLocalDpi xmlns:a14="http://schemas.microsoft.com/office/drawing/2010/main" val="0"/>
+              </a:ext>
+            </a:extLst>
+          </a:blip>
+          <a:srcRect t="2090" b="85"/>
+          <a:stretch>
+            <a:fillRect/>
+          </a:stretch>
+        </p:blipFill>
+        <p:spPr>
+          <a:xfrm>
+            <a:off x="6297264" y="632666"/>
+            <a:ext cx="5136795" cy="2889414"/>
+          </a:xfrm>
+          <a:prstGeom prst="rect">
+            <a:avLst/>
+          </a:prstGeom>
+        </p:spPr>
+      </p:pic>
+      <p:sp>
+        <p:nvSpPr>
+          <p:cNvPr id="55" name="Rectangle 54">
+            <a:extLst>
+              <a:ext uri="{FF2B5EF4-FFF2-40B4-BE49-F238E27FC236}">
+                <a16:creationId xmlns:a16="http://schemas.microsoft.com/office/drawing/2014/main" id="{FE43805F-24A6-46A4-B19B-54F28347355C}"/>
+              </a:ext>
+              <a:ext uri="{C183D7F6-B498-43B3-948B-1728B52AA6E4}">
+                <adec:decorative xmlns:adec="http://schemas.microsoft.com/office/drawing/2017/decorative" val="1"/>
+              </a:ext>
+            </a:extLst>
+          </p:cNvPr>
+          <p:cNvSpPr>
+            <a:spLocks noGrp="1" noRot="1" noChangeAspect="1" noMove="1" noResize="1" noEditPoints="1" noAdjustHandles="1" noChangeArrowheads="1" noChangeShapeType="1" noTextEdit="1"/>
+          </p:cNvSpPr>
+          <p:nvPr>
+            <p:extLst>
+              <p:ext uri="{386F3935-93C4-4BCD-93E2-E3B085C9AB24}">
+                <p16:designElem xmlns:p16="http://schemas.microsoft.com/office/powerpoint/2015/main" val="1"/>
+              </p:ext>
+            </p:extLst>
+          </p:nvPr>
+        </p:nvSpPr>
+        <p:spPr>
+          <a:xfrm rot="5400000" flipH="1">
+            <a:off x="3837444" y="5460209"/>
+            <a:ext cx="1790365" cy="45719"/>
+          </a:xfrm>
+          <a:prstGeom prst="rect">
+            <a:avLst/>
+          </a:prstGeom>
+          <a:solidFill>
+            <a:schemeClr val="accent4"/>
+          </a:solidFill>
+          <a:ln>
+            <a:noFill/>
+          </a:ln>
+        </p:spPr>
+        <p:style>
+          <a:lnRef idx="2">
+            <a:schemeClr val="accent1">
+              <a:shade val="50000"/>
+            </a:schemeClr>
+          </a:lnRef>
+          <a:fillRef idx="1">
+            <a:schemeClr val="accent1"/>
+          </a:fillRef>
+          <a:effectRef idx="0">
+            <a:schemeClr val="accent1"/>
+          </a:effectRef>
+          <a:fontRef idx="minor">
+            <a:schemeClr val="lt1"/>
+          </a:fontRef>
+        </p:style>
+        <p:txBody>
+          <a:bodyPr rtlCol="0" anchor="ctr"/>
+          <a:lstStyle/>
+          <a:p>
+            <a:pPr algn="ctr"/>
+            <a:endParaRPr lang="en-US"/>
+          </a:p>
+        </p:txBody>
+      </p:sp>
+      <p:sp>
+        <p:nvSpPr>
+          <p:cNvPr id="4" name="Rectangle 1">
+            <a:extLst>
+              <a:ext uri="{FF2B5EF4-FFF2-40B4-BE49-F238E27FC236}">
+                <a16:creationId xmlns:a16="http://schemas.microsoft.com/office/drawing/2014/main" id="{8F165F2D-067F-9824-2702-9BDBD48ED914}"/>
+              </a:ext>
+            </a:extLst>
+          </p:cNvPr>
+          <p:cNvSpPr>
+            <a:spLocks noGrp="1" noChangeArrowheads="1"/>
+          </p:cNvSpPr>
+          <p:nvPr>
+            <p:ph idx="1"/>
+          </p:nvPr>
+        </p:nvSpPr>
+        <p:spPr bwMode="auto">
+          <a:xfrm>
+            <a:off x="5162719" y="4495568"/>
+            <a:ext cx="6586915" cy="1905232"/>
+          </a:xfrm>
+          <a:prstGeom prst="rect">
+            <a:avLst/>
+          </a:prstGeom>
+          <a:extLst>
+            <a:ext uri="{909E8E84-426E-40DD-AFC4-6F175D3DCCD1}">
+              <a14:hiddenFill xmlns:a14="http://schemas.microsoft.com/office/drawing/2010/main">
+                <a:solidFill>
+                  <a:schemeClr val="accent1"/>
+                </a:solidFill>
+              </a14:hiddenFill>
+            </a:ext>
+            <a:ext uri="{91240B29-F687-4F45-9708-019B960494DF}">
+              <a14:hiddenLine xmlns:a14="http://schemas.microsoft.com/office/drawing/2010/main" w="9525">
+                <a:solidFill>
+                  <a:schemeClr val="tx1"/>
+                </a:solidFill>
+                <a:miter lim="800000"/>
+                <a:headEnd/>
+                <a:tailEnd/>
+              </a14:hiddenLine>
+            </a:ext>
+            <a:ext uri="{AF507438-7753-43E0-B8FC-AC1667EBCBE1}">
+              <a14:hiddenEffects xmlns:a14="http://schemas.microsoft.com/office/drawing/2010/main">
+                <a:effectLst>
+                  <a:outerShdw dist="35921" dir="2700000" algn="ctr" rotWithShape="0">
+                    <a:schemeClr val="bg2"/>
+                  </a:outerShdw>
+                </a:effectLst>
+              </a14:hiddenEffects>
+            </a:ext>
+          </a:extLst>
+        </p:spPr>
+        <p:txBody>
+          <a:bodyPr vert="horz" lIns="91440" tIns="45720" rIns="91440" bIns="45720" numCol="1" anchor="ctr" anchorCtr="0" compatLnSpc="1">
+            <a:prstTxWarp prst="textNoShape">
+              <a:avLst/>
+            </a:prstTxWarp>
+            <a:normAutofit/>
+          </a:bodyPr>
+          <a:lstStyle/>
+          <a:p>
+            <a:pPr marL="0" indent="0" eaLnBrk="0" fontAlgn="base" hangingPunct="0">
+              <a:spcBef>
+                <a:spcPct val="0"/>
+              </a:spcBef>
+              <a:spcAft>
+                <a:spcPts val="600"/>
+              </a:spcAft>
+              <a:buNone/>
+            </a:pPr>
+            <a:r>
+              <a:rPr lang="fr-FR" sz="1800" dirty="0"/>
+              <a:t>Approches multimodales pour l’exploitation de plans 2D et 3D </a:t>
+            </a:r>
+            <a:r>
+              <a:rPr lang="es-AR" sz="1800" dirty="0" err="1"/>
+              <a:t>État</a:t>
+            </a:r>
+            <a:r>
+              <a:rPr lang="es-AR" sz="1800" dirty="0"/>
+              <a:t> </a:t>
+            </a:r>
+            <a:r>
+              <a:rPr lang="fr-FR" sz="1800" dirty="0"/>
+              <a:t>de l’art et exploration d’un cas d’usage</a:t>
+            </a:r>
+            <a:endParaRPr lang="es-AR" altLang="es-AR" sz="1800" dirty="0"/>
+          </a:p>
+        </p:txBody>
+      </p:sp>
+      <p:sp>
+        <p:nvSpPr>
+          <p:cNvPr id="6" name="Rectangle 5">
+            <a:extLst>
+              <a:ext uri="{FF2B5EF4-FFF2-40B4-BE49-F238E27FC236}">
+                <a16:creationId xmlns:a16="http://schemas.microsoft.com/office/drawing/2014/main" id="{444D4CED-EC47-90BE-40E1-500ABB0F3E02}"/>
+              </a:ext>
+            </a:extLst>
+          </p:cNvPr>
+          <p:cNvSpPr/>
+          <p:nvPr/>
+        </p:nvSpPr>
+        <p:spPr>
+          <a:xfrm>
+            <a:off x="9953248" y="5852049"/>
+            <a:ext cx="977153" cy="304800"/>
+          </a:xfrm>
+          <a:prstGeom prst="rect">
+            <a:avLst/>
+          </a:prstGeom>
+          <a:solidFill>
+            <a:schemeClr val="bg1"/>
+          </a:solidFill>
+          <a:ln>
+            <a:solidFill>
+              <a:schemeClr val="bg1"/>
+            </a:solidFill>
+          </a:ln>
+        </p:spPr>
+        <p:style>
+          <a:lnRef idx="2">
+            <a:schemeClr val="accent1">
+              <a:shade val="15000"/>
+            </a:schemeClr>
+          </a:lnRef>
+          <a:fillRef idx="1">
+            <a:schemeClr val="accent1"/>
+          </a:fillRef>
+          <a:effectRef idx="0">
+            <a:schemeClr val="accent1"/>
+          </a:effectRef>
+          <a:fontRef idx="minor">
+            <a:schemeClr val="lt1"/>
+          </a:fontRef>
+        </p:style>
+        <p:txBody>
+          <a:bodyPr rtlCol="0" anchor="ctr"/>
+          <a:lstStyle/>
+          <a:p>
+            <a:pPr algn="ctr"/>
+            <a:endParaRPr lang="es-AR"/>
+          </a:p>
+        </p:txBody>
+      </p:sp>
+    </p:spTree>
+    <p:extLst>
+      <p:ext uri="{BB962C8B-B14F-4D97-AF65-F5344CB8AC3E}">
+        <p14:creationId xmlns:p14="http://schemas.microsoft.com/office/powerpoint/2010/main" val="794637282"/>
+      </p:ext>
+    </p:extLst>
+  </p:cSld>
+  <p:clrMapOvr>
+    <a:masterClrMapping/>
+  </p:clrMapOvr>
+</p:sld>
+</file>
+
+<file path=ppt/slides/slide3.xml><?xml version="1.0" encoding="utf-8"?>
+<p:sld xmlns:a="http://schemas.openxmlformats.org/drawingml/2006/main" xmlns:r="http://schemas.openxmlformats.org/officeDocument/2006/relationships" xmlns:p="http://schemas.openxmlformats.org/presentationml/2006/main">
+  <p:cSld>
+    <p:spTree>
+      <p:nvGrpSpPr>
+        <p:cNvPr id="1" name=""/>
+        <p:cNvGrpSpPr/>
+        <p:nvPr/>
+      </p:nvGrpSpPr>
+      <p:grpSpPr>
+        <a:xfrm>
+          <a:off x="0" y="0"/>
+          <a:ext cx="0" cy="0"/>
+          <a:chOff x="0" y="0"/>
+          <a:chExt cx="0" cy="0"/>
+        </a:xfrm>
+      </p:grpSpPr>
+      <p:sp>
+        <p:nvSpPr>
+          <p:cNvPr id="2" name="Titre 1">
+            <a:extLst>
+              <a:ext uri="{FF2B5EF4-FFF2-40B4-BE49-F238E27FC236}">
+                <a16:creationId xmlns:a16="http://schemas.microsoft.com/office/drawing/2014/main" id="{4549B9A4-6B38-02F3-06BB-8D479C9F6B30}"/>
+              </a:ext>
+            </a:extLst>
+          </p:cNvPr>
+          <p:cNvSpPr>
+            <a:spLocks noGrp="1"/>
+          </p:cNvSpPr>
+          <p:nvPr>
+            <p:ph type="title"/>
+          </p:nvPr>
+        </p:nvSpPr>
+        <p:spPr/>
+        <p:txBody>
+          <a:bodyPr/>
+          <a:lstStyle/>
+          <a:p>
+            <a:r>
+              <a:rPr lang="fr-FR" dirty="0"/>
+              <a:t>Etats de l’art</a:t>
+            </a:r>
+            <a:endParaRPr lang="es-AR" dirty="0"/>
+          </a:p>
+        </p:txBody>
+      </p:sp>
+      <p:sp>
+        <p:nvSpPr>
+          <p:cNvPr id="3" name="Espace réservé du contenu 2">
+            <a:extLst>
+              <a:ext uri="{FF2B5EF4-FFF2-40B4-BE49-F238E27FC236}">
+                <a16:creationId xmlns:a16="http://schemas.microsoft.com/office/drawing/2014/main" id="{5070679D-C9AE-E41B-1E49-5A547CE3867F}"/>
+              </a:ext>
+            </a:extLst>
+          </p:cNvPr>
+          <p:cNvSpPr>
+            <a:spLocks noGrp="1"/>
+          </p:cNvSpPr>
+          <p:nvPr>
+            <p:ph idx="1"/>
+          </p:nvPr>
+        </p:nvSpPr>
+        <p:spPr/>
+        <p:txBody>
+          <a:bodyPr/>
+          <a:lstStyle/>
+          <a:p>
+            <a:r>
+              <a:rPr lang="fr-FR" dirty="0"/>
+              <a:t>Utilisation de plans assister par IA </a:t>
+            </a:r>
+          </a:p>
+          <a:p>
+            <a:r>
+              <a:rPr lang="fr-FR" dirty="0"/>
+              <a:t>Utilisation de plans et  d’une modalité </a:t>
+            </a:r>
+          </a:p>
+          <a:p>
+            <a:r>
+              <a:rPr lang="fr-FR" dirty="0"/>
+              <a:t>Conclusion </a:t>
+            </a:r>
+          </a:p>
+          <a:p>
+            <a:pPr marL="0" indent="0">
+              <a:buNone/>
+            </a:pPr>
+            <a:endParaRPr lang="fr-FR" dirty="0"/>
+          </a:p>
+        </p:txBody>
+      </p:sp>
+    </p:spTree>
+    <p:extLst>
+      <p:ext uri="{BB962C8B-B14F-4D97-AF65-F5344CB8AC3E}">
+        <p14:creationId xmlns:p14="http://schemas.microsoft.com/office/powerpoint/2010/main" val="575399702"/>
+      </p:ext>
+    </p:extLst>
+  </p:cSld>
+  <p:clrMapOvr>
+    <a:masterClrMapping/>
+  </p:clrMapOvr>
+</p:sld>
+</file>
+
+<file path=ppt/slides/slide4.xml><?xml version="1.0" encoding="utf-8"?>
+<p:sld xmlns:a="http://schemas.openxmlformats.org/drawingml/2006/main" xmlns:r="http://schemas.openxmlformats.org/officeDocument/2006/relationships" xmlns:p="http://schemas.openxmlformats.org/presentationml/2006/main">
+  <p:cSld>
+    <p:spTree>
+      <p:nvGrpSpPr>
+        <p:cNvPr id="1" name="">
+          <a:extLst>
+            <a:ext uri="{FF2B5EF4-FFF2-40B4-BE49-F238E27FC236}">
+              <a16:creationId xmlns:a16="http://schemas.microsoft.com/office/drawing/2014/main" id="{533AA2BB-0E0D-669B-C8B3-2DC8E7A619B9}"/>
+            </a:ext>
+          </a:extLst>
+        </p:cNvPr>
+        <p:cNvGrpSpPr/>
+        <p:nvPr/>
+      </p:nvGrpSpPr>
+      <p:grpSpPr>
+        <a:xfrm>
+          <a:off x="0" y="0"/>
+          <a:ext cx="0" cy="0"/>
+          <a:chOff x="0" y="0"/>
+          <a:chExt cx="0" cy="0"/>
+        </a:xfrm>
+      </p:grpSpPr>
+      <p:sp>
+        <p:nvSpPr>
+          <p:cNvPr id="2" name="Titre 1">
+            <a:extLst>
+              <a:ext uri="{FF2B5EF4-FFF2-40B4-BE49-F238E27FC236}">
+                <a16:creationId xmlns:a16="http://schemas.microsoft.com/office/drawing/2014/main" id="{9DFA2710-AACF-B53D-5D81-C8D8ABF00885}"/>
+              </a:ext>
+            </a:extLst>
+          </p:cNvPr>
+          <p:cNvSpPr>
+            <a:spLocks noGrp="1"/>
+          </p:cNvSpPr>
+          <p:nvPr>
+            <p:ph type="title"/>
+          </p:nvPr>
+        </p:nvSpPr>
+        <p:spPr/>
+        <p:txBody>
+          <a:bodyPr/>
+          <a:lstStyle/>
+          <a:p>
+            <a:r>
+              <a:rPr lang="fr-FR" dirty="0"/>
+              <a:t>intro</a:t>
+            </a:r>
+            <a:endParaRPr lang="es-AR" dirty="0"/>
+          </a:p>
+        </p:txBody>
+      </p:sp>
+      <p:sp>
+        <p:nvSpPr>
+          <p:cNvPr id="3" name="Espace réservé du contenu 2">
+            <a:extLst>
+              <a:ext uri="{FF2B5EF4-FFF2-40B4-BE49-F238E27FC236}">
+                <a16:creationId xmlns:a16="http://schemas.microsoft.com/office/drawing/2014/main" id="{78893D2C-7C13-4806-B04A-9807CC423060}"/>
+              </a:ext>
+            </a:extLst>
+          </p:cNvPr>
+          <p:cNvSpPr>
+            <a:spLocks noGrp="1"/>
+          </p:cNvSpPr>
+          <p:nvPr>
+            <p:ph idx="1"/>
+          </p:nvPr>
+        </p:nvSpPr>
+        <p:spPr/>
+        <p:txBody>
+          <a:bodyPr/>
+          <a:lstStyle/>
+          <a:p>
+            <a:r>
+              <a:rPr lang="fr-FR" dirty="0" err="1"/>
+              <a:t>Objetifs</a:t>
+            </a:r>
+            <a:r>
+              <a:rPr lang="fr-FR" dirty="0"/>
+              <a:t> du stage </a:t>
+            </a:r>
+          </a:p>
+          <a:p>
+            <a:r>
+              <a:rPr lang="fr-FR" dirty="0"/>
+              <a:t>Parler de l’anciennes présentation</a:t>
+            </a:r>
+          </a:p>
+          <a:p>
+            <a:r>
+              <a:rPr lang="fr-FR" dirty="0"/>
+              <a:t>Faire le liens avec le </a:t>
+            </a:r>
+            <a:r>
+              <a:rPr lang="fr-FR" dirty="0" err="1"/>
+              <a:t>usecase</a:t>
+            </a:r>
+            <a:r>
+              <a:rPr lang="fr-FR" dirty="0"/>
+              <a:t> et  expliquer pourquoi  c’est  multimodal </a:t>
+            </a:r>
+          </a:p>
+          <a:p>
+            <a:r>
+              <a:rPr lang="fr-FR" dirty="0"/>
+              <a:t> trouver visuel avec un devis </a:t>
+            </a:r>
+          </a:p>
+          <a:p>
+            <a:r>
+              <a:rPr lang="fr-FR" dirty="0"/>
+              <a:t>Parler de l’état l’art </a:t>
+            </a:r>
+            <a:endParaRPr lang="es-AR" dirty="0"/>
+          </a:p>
+        </p:txBody>
+      </p:sp>
+    </p:spTree>
+    <p:extLst>
+      <p:ext uri="{BB962C8B-B14F-4D97-AF65-F5344CB8AC3E}">
+        <p14:creationId xmlns:p14="http://schemas.microsoft.com/office/powerpoint/2010/main" val="3353125612"/>
+      </p:ext>
+    </p:extLst>
+  </p:cSld>
+  <p:clrMapOvr>
+    <a:masterClrMapping/>
+  </p:clrMapOvr>
+</p:sld>
+</file>
+
+<file path=ppt/slides/slide5.xml><?xml version="1.0" encoding="utf-8"?>
+<p:sld xmlns:a="http://schemas.openxmlformats.org/drawingml/2006/main" xmlns:r="http://schemas.openxmlformats.org/officeDocument/2006/relationships" xmlns:p="http://schemas.openxmlformats.org/presentationml/2006/main">
+  <p:cSld>
+    <p:bg>
+      <p:bgPr>
+        <a:solidFill>
+          <a:schemeClr val="bg1"/>
+        </a:solidFill>
+        <a:effectLst/>
+      </p:bgPr>
+    </p:bg>
+    <p:spTree>
+      <p:nvGrpSpPr>
+        <p:cNvPr id="1" name=""/>
+        <p:cNvGrpSpPr/>
+        <p:nvPr/>
+      </p:nvGrpSpPr>
+      <p:grpSpPr>
+        <a:xfrm>
+          <a:off x="0" y="0"/>
+          <a:ext cx="0" cy="0"/>
+          <a:chOff x="0" y="0"/>
+          <a:chExt cx="0" cy="0"/>
+        </a:xfrm>
+      </p:grpSpPr>
+      <p:sp useBgFill="1">
+        <p:nvSpPr>
+          <p:cNvPr id="45" name="Rectangle 44">
+            <a:extLst>
+              <a:ext uri="{FF2B5EF4-FFF2-40B4-BE49-F238E27FC236}">
+                <a16:creationId xmlns:a16="http://schemas.microsoft.com/office/drawing/2014/main" id="{201CC55D-ED54-4C5C-95E6-10947BD1103B}"/>
+              </a:ext>
+              <a:ext uri="{C183D7F6-B498-43B3-948B-1728B52AA6E4}">
+                <adec:decorative xmlns:adec="http://schemas.microsoft.com/office/drawing/2017/decorative" val="1"/>
+              </a:ext>
+            </a:extLst>
+          </p:cNvPr>
+          <p:cNvSpPr>
+            <a:spLocks noGrp="1" noRot="1" noChangeAspect="1" noMove="1" noResize="1" noEditPoints="1" noAdjustHandles="1" noChangeArrowheads="1" noChangeShapeType="1" noTextEdit="1"/>
+          </p:cNvSpPr>
+          <p:nvPr>
+            <p:extLst>
+              <p:ext uri="{386F3935-93C4-4BCD-93E2-E3B085C9AB24}">
+                <p16:designElem xmlns:p16="http://schemas.microsoft.com/office/powerpoint/2015/main" val="1"/>
+              </p:ext>
+            </p:extLst>
+          </p:nvPr>
+        </p:nvSpPr>
+        <p:spPr>
+          <a:xfrm>
+            <a:off x="0" y="0"/>
+            <a:ext cx="12191999" cy="6857365"/>
+          </a:xfrm>
+          <a:prstGeom prst="rect">
+            <a:avLst/>
+          </a:prstGeom>
+          <a:ln>
+            <a:noFill/>
+          </a:ln>
+        </p:spPr>
+        <p:style>
+          <a:lnRef idx="2">
+            <a:schemeClr val="accent1">
+              <a:shade val="50000"/>
+            </a:schemeClr>
+          </a:lnRef>
+          <a:fillRef idx="1">
+            <a:schemeClr val="accent1"/>
+          </a:fillRef>
+          <a:effectRef idx="0">
+            <a:schemeClr val="accent1"/>
+          </a:effectRef>
+          <a:fontRef idx="minor">
+            <a:schemeClr val="lt1"/>
+          </a:fontRef>
+        </p:style>
+        <p:txBody>
+          <a:bodyPr rtlCol="0" anchor="ctr"/>
+          <a:lstStyle/>
+          <a:p>
+            <a:pPr algn="ctr"/>
+            <a:endParaRPr lang="en-US"/>
+          </a:p>
+        </p:txBody>
+      </p:sp>
+      <p:sp>
+        <p:nvSpPr>
+          <p:cNvPr id="2" name="Titre 1">
+            <a:extLst>
+              <a:ext uri="{FF2B5EF4-FFF2-40B4-BE49-F238E27FC236}">
                 <a16:creationId xmlns:a16="http://schemas.microsoft.com/office/drawing/2014/main" id="{4018F347-98F0-2EA3-EB71-33E05013476B}"/>
               </a:ext>
             </a:extLst>
@@ -8817,10 +9474,14 @@
           <a:lstStyle/>
           <a:p>
             <a:r>
-              <a:rPr lang="fr-FR" sz="4000" b="1"/>
-              <a:t>Pluo: </a:t>
-            </a:r>
-            <a:endParaRPr lang="es-AR" sz="4000"/>
+              <a:rPr lang="fr-FR" sz="4000" dirty="0"/>
+              <a:t>Cas d’usage </a:t>
+            </a:r>
+            <a:r>
+              <a:rPr lang="fr-FR" sz="4000" b="1" dirty="0"/>
+              <a:t>: </a:t>
+            </a:r>
+            <a:endParaRPr lang="es-AR" sz="4000" dirty="0"/>
           </a:p>
         </p:txBody>
       </p:sp>
@@ -9070,13 +9731,22 @@
           <a:lstStyle/>
           <a:p>
             <a:r>
-              <a:rPr lang="es-AR" sz="2000"/>
-              <a:t>Secteur d’activité</a:t>
-            </a:r>
-          </a:p>
-          <a:p>
-            <a:r>
-              <a:rPr lang="fr-FR" sz="2000"/>
+              <a:rPr lang="es-AR" sz="2000" dirty="0" err="1"/>
+              <a:t>Secteur</a:t>
+            </a:r>
+            <a:r>
+              <a:rPr lang="es-AR" sz="2000" dirty="0"/>
+              <a:t> </a:t>
+            </a:r>
+            <a:r>
+              <a:rPr lang="es-AR" sz="2000" dirty="0" err="1"/>
+              <a:t>d’activité</a:t>
+            </a:r>
+            <a:endParaRPr lang="es-AR" sz="2000" dirty="0"/>
+          </a:p>
+          <a:p>
+            <a:r>
+              <a:rPr lang="fr-FR" sz="2000" dirty="0"/>
               <a:t>Leurs besoins</a:t>
             </a:r>
           </a:p>
@@ -9265,7 +9935,7 @@
 </p:sld>
 </file>
 
-<file path=ppt/slides/slide4.xml><?xml version="1.0" encoding="utf-8"?>
+<file path=ppt/slides/slide6.xml><?xml version="1.0" encoding="utf-8"?>
 <p:sld xmlns:a="http://schemas.openxmlformats.org/drawingml/2006/main" xmlns:r="http://schemas.openxmlformats.org/officeDocument/2006/relationships" xmlns:p="http://schemas.openxmlformats.org/presentationml/2006/main">
   <p:cSld>
     <p:bg>
@@ -9281,7 +9951,7 @@
         <p:cNvPr id="1" name="">
           <a:extLst>
             <a:ext uri="{FF2B5EF4-FFF2-40B4-BE49-F238E27FC236}">
-              <a16:creationId xmlns:a16="http://schemas.microsoft.com/office/drawing/2014/main" id="{EEB4852D-15A4-3270-E0AA-428BB9CDC430}"/>
+              <a16:creationId xmlns:a16="http://schemas.microsoft.com/office/drawing/2014/main" id="{1B01C01B-497F-0B97-7212-7B6826980FC9}"/>
             </a:ext>
           </a:extLst>
         </p:cNvPr>
@@ -9301,7 +9971,7 @@
           <p:cNvPr id="38" name="Rectangle 37">
             <a:extLst>
               <a:ext uri="{FF2B5EF4-FFF2-40B4-BE49-F238E27FC236}">
-                <a16:creationId xmlns:a16="http://schemas.microsoft.com/office/drawing/2014/main" id="{058A14AF-9FB5-4CC7-BA35-E8E85D3EDF0E}"/>
+                <a16:creationId xmlns:a16="http://schemas.microsoft.com/office/drawing/2014/main" id="{65E91F0C-2ADC-000B-C144-187724E7243B}"/>
               </a:ext>
               <a:ext uri="{C183D7F6-B498-43B3-948B-1728B52AA6E4}">
                 <adec:decorative xmlns:adec="http://schemas.microsoft.com/office/drawing/2017/decorative" val="1"/>
@@ -9361,7 +10031,7 @@
           <p:cNvPr id="2" name="Titre 1">
             <a:extLst>
               <a:ext uri="{FF2B5EF4-FFF2-40B4-BE49-F238E27FC236}">
-                <a16:creationId xmlns:a16="http://schemas.microsoft.com/office/drawing/2014/main" id="{912796D7-9D1C-B2CC-06BC-F8745FA838A6}"/>
+                <a16:creationId xmlns:a16="http://schemas.microsoft.com/office/drawing/2014/main" id="{3E6600D4-FD32-622F-71B9-EC888709FFF7}"/>
               </a:ext>
             </a:extLst>
           </p:cNvPr>
@@ -9385,10 +10055,10 @@
           <a:lstStyle/>
           <a:p>
             <a:r>
-              <a:rPr lang="fr-FR" sz="4800" b="1"/>
-              <a:t>Types de données à  dispositions</a:t>
-            </a:r>
-            <a:endParaRPr lang="es-AR" sz="4800"/>
+              <a:rPr lang="fr-FR" sz="4800" dirty="0"/>
+              <a:t>Types de données à disposition</a:t>
+            </a:r>
+            <a:endParaRPr lang="es-AR" sz="4800" dirty="0"/>
           </a:p>
         </p:txBody>
       </p:sp>
@@ -9397,7 +10067,7 @@
           <p:cNvPr id="40" name="Rectangle 39">
             <a:extLst>
               <a:ext uri="{FF2B5EF4-FFF2-40B4-BE49-F238E27FC236}">
-                <a16:creationId xmlns:a16="http://schemas.microsoft.com/office/drawing/2014/main" id="{3A9A4357-BD1D-4622-A4FE-766E6AB8DE84}"/>
+                <a16:creationId xmlns:a16="http://schemas.microsoft.com/office/drawing/2014/main" id="{E2D837A6-E26B-9EA5-60D4-3DDB5C8C5F4C}"/>
               </a:ext>
               <a:ext uri="{C183D7F6-B498-43B3-948B-1728B52AA6E4}">
                 <adec:decorative xmlns:adec="http://schemas.microsoft.com/office/drawing/2017/decorative" val="1"/>
@@ -9460,7 +10130,7 @@
           <p:cNvPr id="42" name="Rectangle 41">
             <a:extLst>
               <a:ext uri="{FF2B5EF4-FFF2-40B4-BE49-F238E27FC236}">
-                <a16:creationId xmlns:a16="http://schemas.microsoft.com/office/drawing/2014/main" id="{E659831F-0D9A-4C63-9EBB-8435B85A440F}"/>
+                <a16:creationId xmlns:a16="http://schemas.microsoft.com/office/drawing/2014/main" id="{2B309079-09EC-1204-E7F9-4A5FAC7F19C9}"/>
               </a:ext>
               <a:ext uri="{C183D7F6-B498-43B3-948B-1728B52AA6E4}">
                 <adec:decorative xmlns:adec="http://schemas.microsoft.com/office/drawing/2017/decorative" val="1"/>
@@ -9527,56 +10197,10 @@
       </p:sp>
       <p:sp>
         <p:nvSpPr>
-          <p:cNvPr id="3" name="Espace réservé du contenu 2">
-            <a:extLst>
-              <a:ext uri="{FF2B5EF4-FFF2-40B4-BE49-F238E27FC236}">
-                <a16:creationId xmlns:a16="http://schemas.microsoft.com/office/drawing/2014/main" id="{4ADC04C9-6851-C486-019B-A0AF15BF5F43}"/>
-              </a:ext>
-            </a:extLst>
-          </p:cNvPr>
-          <p:cNvSpPr>
-            <a:spLocks noGrp="1"/>
-          </p:cNvSpPr>
-          <p:nvPr>
-            <p:ph idx="1"/>
-          </p:nvPr>
-        </p:nvSpPr>
-        <p:spPr>
-          <a:xfrm>
-            <a:off x="793661" y="2599509"/>
-            <a:ext cx="4530898" cy="3639450"/>
-          </a:xfrm>
-        </p:spPr>
-        <p:txBody>
-          <a:bodyPr anchor="ctr">
-            <a:normAutofit/>
-          </a:bodyPr>
-          <a:lstStyle/>
-          <a:p>
-            <a:r>
-              <a:rPr lang="fr-FR" sz="2000" dirty="0"/>
-              <a:t>Fichier Excel</a:t>
-            </a:r>
-          </a:p>
-          <a:p>
-            <a:r>
-              <a:rPr lang="fr-FR" sz="2000" dirty="0"/>
-              <a:t>Un fichier </a:t>
-            </a:r>
-            <a:r>
-              <a:rPr lang="fr-FR" sz="2000" dirty="0" err="1"/>
-              <a:t>Vectorworks</a:t>
-            </a:r>
-            <a:endParaRPr lang="fr-FR" sz="2000" dirty="0"/>
-          </a:p>
-        </p:txBody>
-      </p:sp>
-      <p:sp>
-        <p:nvSpPr>
           <p:cNvPr id="44" name="Rectangle 43">
             <a:extLst>
               <a:ext uri="{FF2B5EF4-FFF2-40B4-BE49-F238E27FC236}">
-                <a16:creationId xmlns:a16="http://schemas.microsoft.com/office/drawing/2014/main" id="{E6995CE5-F890-4ABA-82A2-26507CE8D2A3}"/>
+                <a16:creationId xmlns:a16="http://schemas.microsoft.com/office/drawing/2014/main" id="{F2EA6979-B865-BE15-FE2E-9F4E072BCCFC}"/>
               </a:ext>
               <a:ext uri="{C183D7F6-B498-43B3-948B-1728B52AA6E4}">
                 <adec:decorative xmlns:adec="http://schemas.microsoft.com/office/drawing/2017/decorative" val="1"/>
@@ -9639,7 +10263,7 @@
           <p:cNvPr id="6" name="Rectangle 5">
             <a:extLst>
               <a:ext uri="{FF2B5EF4-FFF2-40B4-BE49-F238E27FC236}">
-                <a16:creationId xmlns:a16="http://schemas.microsoft.com/office/drawing/2014/main" id="{444D4CED-EC47-90BE-40E1-500ABB0F3E02}"/>
+                <a16:creationId xmlns:a16="http://schemas.microsoft.com/office/drawing/2014/main" id="{80600408-441D-8187-5314-F91F2B98B470}"/>
               </a:ext>
             </a:extLst>
           </p:cNvPr>
@@ -9688,10 +10312,189 @@
           </a:p>
         </p:txBody>
       </p:sp>
+      <p:sp>
+        <p:nvSpPr>
+          <p:cNvPr id="4" name="Rectangle 1">
+            <a:extLst>
+              <a:ext uri="{FF2B5EF4-FFF2-40B4-BE49-F238E27FC236}">
+                <a16:creationId xmlns:a16="http://schemas.microsoft.com/office/drawing/2014/main" id="{C8A2D4DE-CC6A-F9B6-82D6-36E6F8113743}"/>
+              </a:ext>
+            </a:extLst>
+          </p:cNvPr>
+          <p:cNvSpPr>
+            <a:spLocks noGrp="1" noChangeArrowheads="1"/>
+          </p:cNvSpPr>
+          <p:nvPr>
+            <p:ph idx="1"/>
+          </p:nvPr>
+        </p:nvSpPr>
+        <p:spPr bwMode="auto">
+          <a:xfrm>
+            <a:off x="793750" y="4095641"/>
+            <a:ext cx="2278252" cy="646331"/>
+          </a:xfrm>
+          <a:prstGeom prst="rect">
+            <a:avLst/>
+          </a:prstGeom>
+          <a:noFill/>
+          <a:ln>
+            <a:noFill/>
+          </a:ln>
+          <a:effectLst/>
+          <a:extLst>
+            <a:ext uri="{909E8E84-426E-40DD-AFC4-6F175D3DCCD1}">
+              <a14:hiddenFill xmlns:a14="http://schemas.microsoft.com/office/drawing/2010/main">
+                <a:solidFill>
+                  <a:schemeClr val="accent1"/>
+                </a:solidFill>
+              </a14:hiddenFill>
+            </a:ext>
+            <a:ext uri="{91240B29-F687-4F45-9708-019B960494DF}">
+              <a14:hiddenLine xmlns:a14="http://schemas.microsoft.com/office/drawing/2010/main" w="9525">
+                <a:solidFill>
+                  <a:schemeClr val="tx1"/>
+                </a:solidFill>
+                <a:miter lim="800000"/>
+                <a:headEnd/>
+                <a:tailEnd/>
+              </a14:hiddenLine>
+            </a:ext>
+            <a:ext uri="{AF507438-7753-43E0-B8FC-AC1667EBCBE1}">
+              <a14:hiddenEffects xmlns:a14="http://schemas.microsoft.com/office/drawing/2010/main">
+                <a:effectLst>
+                  <a:outerShdw dist="35921" dir="2700000" algn="ctr" rotWithShape="0">
+                    <a:schemeClr val="bg2"/>
+                  </a:outerShdw>
+                </a:effectLst>
+              </a14:hiddenEffects>
+            </a:ext>
+          </a:extLst>
+        </p:spPr>
+        <p:txBody>
+          <a:bodyPr vert="horz" wrap="none" lIns="91440" tIns="45720" rIns="91440" bIns="45720" numCol="1" anchor="ctr" anchorCtr="0" compatLnSpc="1">
+            <a:prstTxWarp prst="textNoShape">
+              <a:avLst/>
+            </a:prstTxWarp>
+            <a:spAutoFit/>
+          </a:bodyPr>
+          <a:lstStyle/>
+          <a:p>
+            <a:pPr marL="0" marR="0" lvl="0" indent="0" algn="l" defTabSz="914400" rtl="0" eaLnBrk="0" fontAlgn="base" latinLnBrk="0" hangingPunct="0">
+              <a:lnSpc>
+                <a:spcPct val="100000"/>
+              </a:lnSpc>
+              <a:spcBef>
+                <a:spcPct val="0"/>
+              </a:spcBef>
+              <a:spcAft>
+                <a:spcPct val="0"/>
+              </a:spcAft>
+              <a:buClrTx/>
+              <a:buSzTx/>
+              <a:buFontTx/>
+              <a:buChar char="•"/>
+              <a:tabLst/>
+            </a:pPr>
+            <a:r>
+              <a:rPr kumimoji="0" lang="es-AR" altLang="es-AR" sz="1800" i="0" u="none" strike="noStrike" cap="none" normalizeH="0" baseline="0" dirty="0" err="1">
+                <a:ln>
+                  <a:noFill/>
+                </a:ln>
+                <a:solidFill>
+                  <a:schemeClr val="tx1"/>
+                </a:solidFill>
+                <a:effectLst/>
+                <a:latin typeface="Arial" panose="020B0604020202020204" pitchFamily="34" charset="0"/>
+              </a:rPr>
+              <a:t>Fichier</a:t>
+            </a:r>
+            <a:r>
+              <a:rPr kumimoji="0" lang="es-AR" altLang="es-AR" sz="1800" i="0" u="none" strike="noStrike" cap="none" normalizeH="0" baseline="0" dirty="0">
+                <a:ln>
+                  <a:noFill/>
+                </a:ln>
+                <a:solidFill>
+                  <a:schemeClr val="tx1"/>
+                </a:solidFill>
+                <a:effectLst/>
+                <a:latin typeface="Arial" panose="020B0604020202020204" pitchFamily="34" charset="0"/>
+              </a:rPr>
+              <a:t> Excel</a:t>
+            </a:r>
+          </a:p>
+          <a:p>
+            <a:pPr marL="0" marR="0" lvl="0" indent="0" algn="l" defTabSz="914400" rtl="0" eaLnBrk="0" fontAlgn="base" latinLnBrk="0" hangingPunct="0">
+              <a:lnSpc>
+                <a:spcPct val="100000"/>
+              </a:lnSpc>
+              <a:spcBef>
+                <a:spcPct val="0"/>
+              </a:spcBef>
+              <a:spcAft>
+                <a:spcPct val="0"/>
+              </a:spcAft>
+              <a:buClrTx/>
+              <a:buSzTx/>
+              <a:buFontTx/>
+              <a:buChar char="•"/>
+              <a:tabLst/>
+            </a:pPr>
+            <a:r>
+              <a:rPr kumimoji="0" lang="es-AR" altLang="es-AR" sz="1800" i="0" u="none" strike="noStrike" cap="none" normalizeH="0" baseline="0" dirty="0" err="1">
+                <a:ln>
+                  <a:noFill/>
+                </a:ln>
+                <a:solidFill>
+                  <a:schemeClr val="tx1"/>
+                </a:solidFill>
+                <a:effectLst/>
+                <a:latin typeface="Arial" panose="020B0604020202020204" pitchFamily="34" charset="0"/>
+              </a:rPr>
+              <a:t>Fichier</a:t>
+            </a:r>
+            <a:r>
+              <a:rPr kumimoji="0" lang="es-AR" altLang="es-AR" sz="1800" i="0" u="none" strike="noStrike" cap="none" normalizeH="0" baseline="0" dirty="0">
+                <a:ln>
+                  <a:noFill/>
+                </a:ln>
+                <a:solidFill>
+                  <a:schemeClr val="tx1"/>
+                </a:solidFill>
+                <a:effectLst/>
+                <a:latin typeface="Arial" panose="020B0604020202020204" pitchFamily="34" charset="0"/>
+              </a:rPr>
+              <a:t> </a:t>
+            </a:r>
+            <a:r>
+              <a:rPr kumimoji="0" lang="es-AR" altLang="es-AR" sz="1800" i="0" u="none" strike="noStrike" cap="none" normalizeH="0" baseline="0" dirty="0" err="1">
+                <a:ln>
+                  <a:noFill/>
+                </a:ln>
+                <a:solidFill>
+                  <a:schemeClr val="tx1"/>
+                </a:solidFill>
+                <a:effectLst/>
+                <a:latin typeface="Arial" panose="020B0604020202020204" pitchFamily="34" charset="0"/>
+              </a:rPr>
+              <a:t>Vectorworks</a:t>
+            </a:r>
+            <a:endParaRPr kumimoji="0" lang="es-AR" altLang="es-AR" sz="1800" i="0" u="none" strike="noStrike" cap="none" normalizeH="0" baseline="0" dirty="0">
+              <a:ln>
+                <a:noFill/>
+              </a:ln>
+              <a:solidFill>
+                <a:schemeClr val="tx1"/>
+              </a:solidFill>
+              <a:effectLst/>
+              <a:latin typeface="Arial" panose="020B0604020202020204" pitchFamily="34" charset="0"/>
+            </a:endParaRPr>
+          </a:p>
+        </p:txBody>
+      </p:sp>
     </p:spTree>
     <p:extLst>
       <p:ext uri="{BB962C8B-B14F-4D97-AF65-F5344CB8AC3E}">
-        <p14:creationId xmlns:p14="http://schemas.microsoft.com/office/powerpoint/2010/main" val="794637282"/>
+        <p14:creationId xmlns:p14="http://schemas.microsoft.com/office/powerpoint/2010/main" val="378853460"/>
       </p:ext>
     </p:extLst>
   </p:cSld>
@@ -9701,7 +10504,7 @@
 </p:sld>
 </file>
 
-<file path=ppt/slides/slide5.xml><?xml version="1.0" encoding="utf-8"?>
+<file path=ppt/slides/slide7.xml><?xml version="1.0" encoding="utf-8"?>
 <p:sld xmlns:a="http://schemas.openxmlformats.org/drawingml/2006/main" xmlns:r="http://schemas.openxmlformats.org/officeDocument/2006/relationships" xmlns:p="http://schemas.openxmlformats.org/presentationml/2006/main">
   <p:cSld>
     <p:bg>
@@ -10023,10 +10826,9 @@
           </a:p>
           <a:p>
             <a:r>
-              <a:rPr lang="es-AR" sz="2000" dirty="0" err="1"/>
-              <a:t>Multimodale</a:t>
-            </a:r>
-            <a:endParaRPr lang="es-AR" sz="2000" dirty="0"/>
+              <a:rPr lang="es-AR" sz="2000" dirty="0"/>
+              <a:t>Multimodal</a:t>
+            </a:r>
           </a:p>
           <a:p>
             <a:r>
@@ -10125,7 +10927,7 @@
 </p:sld>
 </file>
 
-<file path=ppt/slides/slide6.xml><?xml version="1.0" encoding="utf-8"?>
+<file path=ppt/slides/slide8.xml><?xml version="1.0" encoding="utf-8"?>
 <p:sld xmlns:a="http://schemas.openxmlformats.org/drawingml/2006/main" xmlns:r="http://schemas.openxmlformats.org/officeDocument/2006/relationships" xmlns:p="http://schemas.openxmlformats.org/presentationml/2006/main">
   <p:cSld>
     <p:bg>
@@ -10498,7 +11300,7 @@
 </p:sld>
 </file>
 
-<file path=ppt/slides/slide7.xml><?xml version="1.0" encoding="utf-8"?>
+<file path=ppt/slides/slide9.xml><?xml version="1.0" encoding="utf-8"?>
 <p:sld xmlns:a="http://schemas.openxmlformats.org/drawingml/2006/main" xmlns:r="http://schemas.openxmlformats.org/officeDocument/2006/relationships" xmlns:p="http://schemas.openxmlformats.org/presentationml/2006/main">
   <p:cSld>
     <p:bg>
@@ -10863,1092 +11665,6 @@
     <p:extLst>
       <p:ext uri="{BB962C8B-B14F-4D97-AF65-F5344CB8AC3E}">
         <p14:creationId xmlns:p14="http://schemas.microsoft.com/office/powerpoint/2010/main" val="1424057555"/>
-      </p:ext>
-    </p:extLst>
-  </p:cSld>
-  <p:clrMapOvr>
-    <a:masterClrMapping/>
-  </p:clrMapOvr>
-</p:sld>
-</file>
-
-<file path=ppt/slides/slide8.xml><?xml version="1.0" encoding="utf-8"?>
-<p:sld xmlns:a="http://schemas.openxmlformats.org/drawingml/2006/main" xmlns:r="http://schemas.openxmlformats.org/officeDocument/2006/relationships" xmlns:p="http://schemas.openxmlformats.org/presentationml/2006/main">
-  <p:cSld>
-    <p:bg>
-      <p:bgPr>
-        <a:solidFill>
-          <a:schemeClr val="bg1"/>
-        </a:solidFill>
-        <a:effectLst/>
-      </p:bgPr>
-    </p:bg>
-    <p:spTree>
-      <p:nvGrpSpPr>
-        <p:cNvPr id="1" name=""/>
-        <p:cNvGrpSpPr/>
-        <p:nvPr/>
-      </p:nvGrpSpPr>
-      <p:grpSpPr>
-        <a:xfrm>
-          <a:off x="0" y="0"/>
-          <a:ext cx="0" cy="0"/>
-          <a:chOff x="0" y="0"/>
-          <a:chExt cx="0" cy="0"/>
-        </a:xfrm>
-      </p:grpSpPr>
-      <p:sp useBgFill="1">
-        <p:nvSpPr>
-          <p:cNvPr id="45" name="Rectangle 44">
-            <a:extLst>
-              <a:ext uri="{FF2B5EF4-FFF2-40B4-BE49-F238E27FC236}">
-                <a16:creationId xmlns:a16="http://schemas.microsoft.com/office/drawing/2014/main" id="{058A14AF-9FB5-4CC7-BA35-E8E85D3EDF0E}"/>
-              </a:ext>
-              <a:ext uri="{C183D7F6-B498-43B3-948B-1728B52AA6E4}">
-                <adec:decorative xmlns:adec="http://schemas.microsoft.com/office/drawing/2017/decorative" val="1"/>
-              </a:ext>
-            </a:extLst>
-          </p:cNvPr>
-          <p:cNvSpPr>
-            <a:spLocks noGrp="1" noRot="1" noChangeAspect="1" noMove="1" noResize="1" noEditPoints="1" noAdjustHandles="1" noChangeArrowheads="1" noChangeShapeType="1" noTextEdit="1"/>
-          </p:cNvSpPr>
-          <p:nvPr>
-            <p:extLst>
-              <p:ext uri="{386F3935-93C4-4BCD-93E2-E3B085C9AB24}">
-                <p16:designElem xmlns:p16="http://schemas.microsoft.com/office/powerpoint/2015/main" val="1"/>
-              </p:ext>
-            </p:extLst>
-          </p:nvPr>
-        </p:nvSpPr>
-        <p:spPr>
-          <a:xfrm>
-            <a:off x="0" y="0"/>
-            <a:ext cx="12191999" cy="6857365"/>
-          </a:xfrm>
-          <a:prstGeom prst="rect">
-            <a:avLst/>
-          </a:prstGeom>
-          <a:ln>
-            <a:noFill/>
-          </a:ln>
-        </p:spPr>
-        <p:style>
-          <a:lnRef idx="2">
-            <a:schemeClr val="accent1">
-              <a:shade val="50000"/>
-            </a:schemeClr>
-          </a:lnRef>
-          <a:fillRef idx="1">
-            <a:schemeClr val="accent1"/>
-          </a:fillRef>
-          <a:effectRef idx="0">
-            <a:schemeClr val="accent1"/>
-          </a:effectRef>
-          <a:fontRef idx="minor">
-            <a:schemeClr val="lt1"/>
-          </a:fontRef>
-        </p:style>
-        <p:txBody>
-          <a:bodyPr rtlCol="0" anchor="ctr"/>
-          <a:lstStyle/>
-          <a:p>
-            <a:pPr algn="ctr"/>
-            <a:endParaRPr lang="en-US"/>
-          </a:p>
-        </p:txBody>
-      </p:sp>
-      <p:sp>
-        <p:nvSpPr>
-          <p:cNvPr id="2" name="Titre 1">
-            <a:extLst>
-              <a:ext uri="{FF2B5EF4-FFF2-40B4-BE49-F238E27FC236}">
-                <a16:creationId xmlns:a16="http://schemas.microsoft.com/office/drawing/2014/main" id="{F29C2CF4-9C9E-0AE0-07D4-821DC591368E}"/>
-              </a:ext>
-            </a:extLst>
-          </p:cNvPr>
-          <p:cNvSpPr>
-            <a:spLocks noGrp="1"/>
-          </p:cNvSpPr>
-          <p:nvPr>
-            <p:ph type="title"/>
-          </p:nvPr>
-        </p:nvSpPr>
-        <p:spPr>
-          <a:xfrm>
-            <a:off x="793662" y="386930"/>
-            <a:ext cx="10066122" cy="1298448"/>
-          </a:xfrm>
-        </p:spPr>
-        <p:txBody>
-          <a:bodyPr anchor="b">
-            <a:normAutofit/>
-          </a:bodyPr>
-          <a:lstStyle/>
-          <a:p>
-            <a:r>
-              <a:rPr lang="fr-FR" sz="4800"/>
-              <a:t>Fichier STL</a:t>
-            </a:r>
-            <a:endParaRPr lang="es-AR" sz="4800"/>
-          </a:p>
-        </p:txBody>
-      </p:sp>
-      <p:sp>
-        <p:nvSpPr>
-          <p:cNvPr id="47" name="Rectangle 46">
-            <a:extLst>
-              <a:ext uri="{FF2B5EF4-FFF2-40B4-BE49-F238E27FC236}">
-                <a16:creationId xmlns:a16="http://schemas.microsoft.com/office/drawing/2014/main" id="{3A9A4357-BD1D-4622-A4FE-766E6AB8DE84}"/>
-              </a:ext>
-              <a:ext uri="{C183D7F6-B498-43B3-948B-1728B52AA6E4}">
-                <adec:decorative xmlns:adec="http://schemas.microsoft.com/office/drawing/2017/decorative" val="1"/>
-              </a:ext>
-            </a:extLst>
-          </p:cNvPr>
-          <p:cNvSpPr>
-            <a:spLocks noGrp="1" noRot="1" noChangeAspect="1" noMove="1" noResize="1" noEditPoints="1" noAdjustHandles="1" noChangeArrowheads="1" noChangeShapeType="1" noTextEdit="1"/>
-          </p:cNvSpPr>
-          <p:nvPr>
-            <p:extLst>
-              <p:ext uri="{386F3935-93C4-4BCD-93E2-E3B085C9AB24}">
-                <p16:designElem xmlns:p16="http://schemas.microsoft.com/office/powerpoint/2015/main" val="1"/>
-              </p:ext>
-            </p:extLst>
-          </p:nvPr>
-        </p:nvSpPr>
-        <p:spPr>
-          <a:xfrm flipH="1" flipV="1">
-            <a:off x="-2" y="1998845"/>
-            <a:ext cx="11454595" cy="781699"/>
-          </a:xfrm>
-          <a:prstGeom prst="rect">
-            <a:avLst/>
-          </a:prstGeom>
-          <a:solidFill>
-            <a:schemeClr val="accent4"/>
-          </a:solidFill>
-          <a:ln>
-            <a:noFill/>
-          </a:ln>
-        </p:spPr>
-        <p:style>
-          <a:lnRef idx="2">
-            <a:schemeClr val="accent1">
-              <a:shade val="50000"/>
-            </a:schemeClr>
-          </a:lnRef>
-          <a:fillRef idx="1">
-            <a:schemeClr val="accent1"/>
-          </a:fillRef>
-          <a:effectRef idx="0">
-            <a:schemeClr val="accent1"/>
-          </a:effectRef>
-          <a:fontRef idx="minor">
-            <a:schemeClr val="lt1"/>
-          </a:fontRef>
-        </p:style>
-        <p:txBody>
-          <a:bodyPr rtlCol="0" anchor="ctr"/>
-          <a:lstStyle/>
-          <a:p>
-            <a:pPr algn="ctr"/>
-            <a:endParaRPr lang="en-US"/>
-          </a:p>
-        </p:txBody>
-      </p:sp>
-      <p:sp>
-        <p:nvSpPr>
-          <p:cNvPr id="49" name="Rectangle 48">
-            <a:extLst>
-              <a:ext uri="{FF2B5EF4-FFF2-40B4-BE49-F238E27FC236}">
-                <a16:creationId xmlns:a16="http://schemas.microsoft.com/office/drawing/2014/main" id="{E659831F-0D9A-4C63-9EBB-8435B85A440F}"/>
-              </a:ext>
-              <a:ext uri="{C183D7F6-B498-43B3-948B-1728B52AA6E4}">
-                <adec:decorative xmlns:adec="http://schemas.microsoft.com/office/drawing/2017/decorative" val="1"/>
-              </a:ext>
-            </a:extLst>
-          </p:cNvPr>
-          <p:cNvSpPr>
-            <a:spLocks noGrp="1" noRot="1" noChangeAspect="1" noMove="1" noResize="1" noEditPoints="1" noAdjustHandles="1" noChangeArrowheads="1" noChangeShapeType="1" noTextEdit="1"/>
-          </p:cNvSpPr>
-          <p:nvPr>
-            <p:extLst>
-              <p:ext uri="{386F3935-93C4-4BCD-93E2-E3B085C9AB24}">
-                <p16:designElem xmlns:p16="http://schemas.microsoft.com/office/powerpoint/2015/main" val="1"/>
-              </p:ext>
-            </p:extLst>
-          </p:nvPr>
-        </p:nvSpPr>
-        <p:spPr>
-          <a:xfrm>
-            <a:off x="0" y="2203079"/>
-            <a:ext cx="11383362" cy="4267991"/>
-          </a:xfrm>
-          <a:prstGeom prst="rect">
-            <a:avLst/>
-          </a:prstGeom>
-          <a:solidFill>
-            <a:schemeClr val="bg1"/>
-          </a:solidFill>
-          <a:ln>
-            <a:noFill/>
-          </a:ln>
-          <a:effectLst>
-            <a:outerShdw blurRad="139700" dist="127000" dir="5400000" algn="t" rotWithShape="0">
-              <a:prstClr val="black">
-                <a:alpha val="15000"/>
-              </a:prstClr>
-            </a:outerShdw>
-          </a:effectLst>
-        </p:spPr>
-        <p:style>
-          <a:lnRef idx="2">
-            <a:schemeClr val="accent1">
-              <a:shade val="50000"/>
-            </a:schemeClr>
-          </a:lnRef>
-          <a:fillRef idx="1">
-            <a:schemeClr val="accent1"/>
-          </a:fillRef>
-          <a:effectRef idx="0">
-            <a:schemeClr val="accent1"/>
-          </a:effectRef>
-          <a:fontRef idx="minor">
-            <a:schemeClr val="lt1"/>
-          </a:fontRef>
-        </p:style>
-        <p:txBody>
-          <a:bodyPr rtlCol="0" anchor="ctr"/>
-          <a:lstStyle/>
-          <a:p>
-            <a:pPr algn="ctr"/>
-            <a:endParaRPr lang="en-US"/>
-          </a:p>
-        </p:txBody>
-      </p:sp>
-      <p:sp>
-        <p:nvSpPr>
-          <p:cNvPr id="3" name="Espace réservé du contenu 2">
-            <a:extLst>
-              <a:ext uri="{FF2B5EF4-FFF2-40B4-BE49-F238E27FC236}">
-                <a16:creationId xmlns:a16="http://schemas.microsoft.com/office/drawing/2014/main" id="{DC69139D-ACD7-DA3C-913F-D7CA99A9E9D1}"/>
-              </a:ext>
-            </a:extLst>
-          </p:cNvPr>
-          <p:cNvSpPr>
-            <a:spLocks noGrp="1"/>
-          </p:cNvSpPr>
-          <p:nvPr>
-            <p:ph idx="1"/>
-          </p:nvPr>
-        </p:nvSpPr>
-        <p:spPr>
-          <a:xfrm>
-            <a:off x="793661" y="2599509"/>
-            <a:ext cx="4530898" cy="3639450"/>
-          </a:xfrm>
-        </p:spPr>
-        <p:txBody>
-          <a:bodyPr anchor="ctr">
-            <a:normAutofit/>
-          </a:bodyPr>
-          <a:lstStyle/>
-          <a:p>
-            <a:r>
-              <a:rPr lang="fr-FR" sz="2000" dirty="0"/>
-              <a:t>Isoler la pièce</a:t>
-            </a:r>
-          </a:p>
-          <a:p>
-            <a:r>
-              <a:rPr lang="fr-FR" sz="2000" dirty="0"/>
-              <a:t>Export de la pièce au format STL</a:t>
-            </a:r>
-          </a:p>
-          <a:p>
-            <a:r>
-              <a:rPr lang="fr-FR" sz="2000" dirty="0"/>
-              <a:t>Ce fichier contient :</a:t>
-            </a:r>
-          </a:p>
-          <a:p>
-            <a:pPr lvl="1"/>
-            <a:r>
-              <a:rPr lang="fr-FR" sz="2000" dirty="0"/>
-              <a:t>la géométrie 3D</a:t>
-            </a:r>
-          </a:p>
-          <a:p>
-            <a:pPr lvl="1"/>
-            <a:r>
-              <a:rPr lang="fr-FR" sz="2000" dirty="0"/>
-              <a:t>le volume de la pièce</a:t>
-            </a:r>
-            <a:endParaRPr lang="es-AR" sz="2000" dirty="0"/>
-          </a:p>
-        </p:txBody>
-      </p:sp>
-      <p:pic>
-        <p:nvPicPr>
-          <p:cNvPr id="8" name="Image 7" descr="Une image contenant croquis, dessin, art, conception&#10;&#10;Le contenu généré par l’IA peut être incorrect.">
-            <a:extLst>
-              <a:ext uri="{FF2B5EF4-FFF2-40B4-BE49-F238E27FC236}">
-                <a16:creationId xmlns:a16="http://schemas.microsoft.com/office/drawing/2014/main" id="{9D4BEC2C-210C-AEE0-0963-510742BDB24C}"/>
-              </a:ext>
-            </a:extLst>
-          </p:cNvPr>
-          <p:cNvPicPr>
-            <a:picLocks noChangeAspect="1"/>
-          </p:cNvPicPr>
-          <p:nvPr/>
-        </p:nvPicPr>
-        <p:blipFill>
-          <a:blip r:embed="rId3"/>
-          <a:stretch>
-            <a:fillRect/>
-          </a:stretch>
-        </p:blipFill>
-        <p:spPr>
-          <a:xfrm>
-            <a:off x="5911532" y="2970116"/>
-            <a:ext cx="5150277" cy="2742522"/>
-          </a:xfrm>
-          <a:prstGeom prst="rect">
-            <a:avLst/>
-          </a:prstGeom>
-        </p:spPr>
-      </p:pic>
-      <p:sp>
-        <p:nvSpPr>
-          <p:cNvPr id="51" name="Rectangle 50">
-            <a:extLst>
-              <a:ext uri="{FF2B5EF4-FFF2-40B4-BE49-F238E27FC236}">
-                <a16:creationId xmlns:a16="http://schemas.microsoft.com/office/drawing/2014/main" id="{E6995CE5-F890-4ABA-82A2-26507CE8D2A3}"/>
-              </a:ext>
-              <a:ext uri="{C183D7F6-B498-43B3-948B-1728B52AA6E4}">
-                <adec:decorative xmlns:adec="http://schemas.microsoft.com/office/drawing/2017/decorative" val="1"/>
-              </a:ext>
-            </a:extLst>
-          </p:cNvPr>
-          <p:cNvSpPr>
-            <a:spLocks noGrp="1" noRot="1" noChangeAspect="1" noMove="1" noResize="1" noEditPoints="1" noAdjustHandles="1" noChangeArrowheads="1" noChangeShapeType="1" noTextEdit="1"/>
-          </p:cNvSpPr>
-          <p:nvPr>
-            <p:extLst>
-              <p:ext uri="{386F3935-93C4-4BCD-93E2-E3B085C9AB24}">
-                <p16:designElem xmlns:p16="http://schemas.microsoft.com/office/powerpoint/2015/main" val="1"/>
-              </p:ext>
-            </p:extLst>
-          </p:nvPr>
-        </p:nvSpPr>
-        <p:spPr>
-          <a:xfrm rot="5400000">
-            <a:off x="11228040" y="2313027"/>
-            <a:ext cx="781700" cy="152382"/>
-          </a:xfrm>
-          <a:prstGeom prst="rect">
-            <a:avLst/>
-          </a:prstGeom>
-          <a:solidFill>
-            <a:schemeClr val="accent4"/>
-          </a:solidFill>
-          <a:ln>
-            <a:noFill/>
-          </a:ln>
-        </p:spPr>
-        <p:style>
-          <a:lnRef idx="2">
-            <a:schemeClr val="accent1">
-              <a:shade val="50000"/>
-            </a:schemeClr>
-          </a:lnRef>
-          <a:fillRef idx="1">
-            <a:schemeClr val="accent1"/>
-          </a:fillRef>
-          <a:effectRef idx="0">
-            <a:schemeClr val="accent1"/>
-          </a:effectRef>
-          <a:fontRef idx="minor">
-            <a:schemeClr val="lt1"/>
-          </a:fontRef>
-        </p:style>
-        <p:txBody>
-          <a:bodyPr rtlCol="0" anchor="ctr"/>
-          <a:lstStyle/>
-          <a:p>
-            <a:pPr algn="ctr"/>
-            <a:endParaRPr lang="en-US"/>
-          </a:p>
-        </p:txBody>
-      </p:sp>
-    </p:spTree>
-    <p:extLst>
-      <p:ext uri="{BB962C8B-B14F-4D97-AF65-F5344CB8AC3E}">
-        <p14:creationId xmlns:p14="http://schemas.microsoft.com/office/powerpoint/2010/main" val="247735772"/>
-      </p:ext>
-    </p:extLst>
-  </p:cSld>
-  <p:clrMapOvr>
-    <a:masterClrMapping/>
-  </p:clrMapOvr>
-</p:sld>
-</file>
-
-<file path=ppt/slides/slide9.xml><?xml version="1.0" encoding="utf-8"?>
-<p:sld xmlns:a="http://schemas.openxmlformats.org/drawingml/2006/main" xmlns:r="http://schemas.openxmlformats.org/officeDocument/2006/relationships" xmlns:p="http://schemas.openxmlformats.org/presentationml/2006/main">
-  <p:cSld>
-    <p:bg>
-      <p:bgPr>
-        <a:solidFill>
-          <a:schemeClr val="bg1"/>
-        </a:solidFill>
-        <a:effectLst/>
-      </p:bgPr>
-    </p:bg>
-    <p:spTree>
-      <p:nvGrpSpPr>
-        <p:cNvPr id="1" name="">
-          <a:extLst>
-            <a:ext uri="{FF2B5EF4-FFF2-40B4-BE49-F238E27FC236}">
-              <a16:creationId xmlns:a16="http://schemas.microsoft.com/office/drawing/2014/main" id="{3DB78C39-F60A-997F-F0B9-7A19DE849337}"/>
-            </a:ext>
-          </a:extLst>
-        </p:cNvPr>
-        <p:cNvGrpSpPr/>
-        <p:nvPr/>
-      </p:nvGrpSpPr>
-      <p:grpSpPr>
-        <a:xfrm>
-          <a:off x="0" y="0"/>
-          <a:ext cx="0" cy="0"/>
-          <a:chOff x="0" y="0"/>
-          <a:chExt cx="0" cy="0"/>
-        </a:xfrm>
-      </p:grpSpPr>
-      <p:sp useBgFill="1">
-        <p:nvSpPr>
-          <p:cNvPr id="84" name="Rectangle 83">
-            <a:extLst>
-              <a:ext uri="{FF2B5EF4-FFF2-40B4-BE49-F238E27FC236}">
-                <a16:creationId xmlns:a16="http://schemas.microsoft.com/office/drawing/2014/main" id="{8B9AA7C6-5E5A-498E-A6DF-A943376E09BC}"/>
-              </a:ext>
-              <a:ext uri="{C183D7F6-B498-43B3-948B-1728B52AA6E4}">
-                <adec:decorative xmlns:adec="http://schemas.microsoft.com/office/drawing/2017/decorative" val="1"/>
-              </a:ext>
-            </a:extLst>
-          </p:cNvPr>
-          <p:cNvSpPr>
-            <a:spLocks noGrp="1" noRot="1" noChangeAspect="1" noMove="1" noResize="1" noEditPoints="1" noAdjustHandles="1" noChangeArrowheads="1" noChangeShapeType="1" noTextEdit="1"/>
-          </p:cNvSpPr>
-          <p:nvPr>
-            <p:extLst>
-              <p:ext uri="{386F3935-93C4-4BCD-93E2-E3B085C9AB24}">
-                <p16:designElem xmlns:p16="http://schemas.microsoft.com/office/powerpoint/2015/main" val="1"/>
-              </p:ext>
-            </p:extLst>
-          </p:nvPr>
-        </p:nvSpPr>
-        <p:spPr>
-          <a:xfrm>
-            <a:off x="0" y="0"/>
-            <a:ext cx="12191999" cy="6857365"/>
-          </a:xfrm>
-          <a:prstGeom prst="rect">
-            <a:avLst/>
-          </a:prstGeom>
-          <a:ln>
-            <a:noFill/>
-          </a:ln>
-        </p:spPr>
-        <p:style>
-          <a:lnRef idx="2">
-            <a:schemeClr val="accent1">
-              <a:shade val="50000"/>
-            </a:schemeClr>
-          </a:lnRef>
-          <a:fillRef idx="1">
-            <a:schemeClr val="accent1"/>
-          </a:fillRef>
-          <a:effectRef idx="0">
-            <a:schemeClr val="accent1"/>
-          </a:effectRef>
-          <a:fontRef idx="minor">
-            <a:schemeClr val="lt1"/>
-          </a:fontRef>
-        </p:style>
-        <p:txBody>
-          <a:bodyPr rtlCol="0" anchor="ctr"/>
-          <a:lstStyle/>
-          <a:p>
-            <a:pPr algn="ctr"/>
-            <a:endParaRPr lang="en-US"/>
-          </a:p>
-        </p:txBody>
-      </p:sp>
-      <p:grpSp>
-        <p:nvGrpSpPr>
-          <p:cNvPr id="85" name="Group 76">
-            <a:extLst>
-              <a:ext uri="{FF2B5EF4-FFF2-40B4-BE49-F238E27FC236}">
-                <a16:creationId xmlns:a16="http://schemas.microsoft.com/office/drawing/2014/main" id="{83EAB11A-76F7-48F4-9B4F-5BFDF4BF9670}"/>
-              </a:ext>
-              <a:ext uri="{C183D7F6-B498-43B3-948B-1728B52AA6E4}">
-                <adec:decorative xmlns:adec="http://schemas.microsoft.com/office/drawing/2017/decorative" val="1"/>
-              </a:ext>
-            </a:extLst>
-          </p:cNvPr>
-          <p:cNvGrpSpPr>
-            <a:grpSpLocks noGrp="1" noUngrp="1" noRot="1" noChangeAspect="1" noMove="1" noResize="1"/>
-          </p:cNvGrpSpPr>
-          <p:nvPr>
-            <p:extLst>
-              <p:ext uri="{386F3935-93C4-4BCD-93E2-E3B085C9AB24}">
-                <p16:designElem xmlns:p16="http://schemas.microsoft.com/office/powerpoint/2015/main" val="1"/>
-              </p:ext>
-            </p:extLst>
-          </p:nvPr>
-        </p:nvGrpSpPr>
-        <p:grpSpPr>
-          <a:xfrm>
-            <a:off x="74300" y="2385102"/>
-            <a:ext cx="574091" cy="2087796"/>
-            <a:chOff x="209668" y="2857422"/>
-            <a:chExt cx="463662" cy="2087796"/>
-          </a:xfrm>
-        </p:grpSpPr>
-        <p:sp>
-          <p:nvSpPr>
-            <p:cNvPr id="86" name="Rectangle 85">
-              <a:extLst>
-                <a:ext uri="{FF2B5EF4-FFF2-40B4-BE49-F238E27FC236}">
-                  <a16:creationId xmlns:a16="http://schemas.microsoft.com/office/drawing/2014/main" id="{74D4C416-D5F4-4F6F-A6F1-87A21CD4FCAF}"/>
-                </a:ext>
-                <a:ext uri="{C183D7F6-B498-43B3-948B-1728B52AA6E4}">
-                  <adec:decorative xmlns:adec="http://schemas.microsoft.com/office/drawing/2017/decorative" val="1"/>
-                </a:ext>
-              </a:extLst>
-            </p:cNvPr>
-            <p:cNvSpPr/>
-            <p:nvPr>
-              <p:extLst>
-                <p:ext uri="{386F3935-93C4-4BCD-93E2-E3B085C9AB24}">
-                  <p16:designElem xmlns:p16="http://schemas.microsoft.com/office/powerpoint/2015/main" val="1"/>
-                </p:ext>
-              </p:extLst>
-            </p:nvPr>
-          </p:nvSpPr>
-          <p:spPr>
-            <a:xfrm flipH="1" flipV="1">
-              <a:off x="423947" y="2857422"/>
-              <a:ext cx="249383" cy="2087795"/>
-            </a:xfrm>
-            <a:prstGeom prst="rect">
-              <a:avLst/>
-            </a:prstGeom>
-            <a:solidFill>
-              <a:schemeClr val="accent4"/>
-            </a:solidFill>
-            <a:ln>
-              <a:noFill/>
-            </a:ln>
-          </p:spPr>
-          <p:style>
-            <a:lnRef idx="2">
-              <a:schemeClr val="accent1">
-                <a:shade val="50000"/>
-              </a:schemeClr>
-            </a:lnRef>
-            <a:fillRef idx="1">
-              <a:schemeClr val="accent1"/>
-            </a:fillRef>
-            <a:effectRef idx="0">
-              <a:schemeClr val="accent1"/>
-            </a:effectRef>
-            <a:fontRef idx="minor">
-              <a:schemeClr val="lt1"/>
-            </a:fontRef>
-          </p:style>
-          <p:txBody>
-            <a:bodyPr rtlCol="0" anchor="ctr"/>
-            <a:lstStyle/>
-            <a:p>
-              <a:pPr algn="ctr"/>
-              <a:endParaRPr lang="en-US"/>
-            </a:p>
-          </p:txBody>
-        </p:sp>
-        <p:cxnSp>
-          <p:nvCxnSpPr>
-            <p:cNvPr id="79" name="Straight Connector 78">
-              <a:extLst>
-                <a:ext uri="{FF2B5EF4-FFF2-40B4-BE49-F238E27FC236}">
-                  <a16:creationId xmlns:a16="http://schemas.microsoft.com/office/drawing/2014/main" id="{C6AC1C30-21C6-4BF6-93EE-B211D7A85011}"/>
-                </a:ext>
-                <a:ext uri="{C183D7F6-B498-43B3-948B-1728B52AA6E4}">
-                  <adec:decorative xmlns:adec="http://schemas.microsoft.com/office/drawing/2017/decorative" val="1"/>
-                </a:ext>
-              </a:extLst>
-            </p:cNvPr>
-            <p:cNvCxnSpPr>
-              <a:cxnSpLocks/>
-            </p:cNvCxnSpPr>
-            <p:nvPr>
-              <p:extLst>
-                <p:ext uri="{386F3935-93C4-4BCD-93E2-E3B085C9AB24}">
-                  <p16:designElem xmlns:p16="http://schemas.microsoft.com/office/powerpoint/2015/main" val="1"/>
-                </p:ext>
-              </p:extLst>
-            </p:nvPr>
-          </p:nvCxnSpPr>
-          <p:spPr>
-            <a:xfrm flipH="1">
-              <a:off x="209668" y="2857423"/>
-              <a:ext cx="1" cy="2087795"/>
-            </a:xfrm>
-            <a:prstGeom prst="line">
-              <a:avLst/>
-            </a:prstGeom>
-            <a:ln w="177800">
-              <a:solidFill>
-                <a:schemeClr val="accent4"/>
-              </a:solidFill>
-            </a:ln>
-          </p:spPr>
-          <p:style>
-            <a:lnRef idx="1">
-              <a:schemeClr val="accent1"/>
-            </a:lnRef>
-            <a:fillRef idx="0">
-              <a:schemeClr val="accent1"/>
-            </a:fillRef>
-            <a:effectRef idx="0">
-              <a:schemeClr val="accent1"/>
-            </a:effectRef>
-            <a:fontRef idx="minor">
-              <a:schemeClr val="tx1"/>
-            </a:fontRef>
-          </p:style>
-        </p:cxnSp>
-      </p:grpSp>
-      <p:sp>
-        <p:nvSpPr>
-          <p:cNvPr id="87" name="Rectangle 86">
-            <a:extLst>
-              <a:ext uri="{FF2B5EF4-FFF2-40B4-BE49-F238E27FC236}">
-                <a16:creationId xmlns:a16="http://schemas.microsoft.com/office/drawing/2014/main" id="{81E140AE-0ABF-47C8-BF32-7D2F0CF2BA44}"/>
-              </a:ext>
-              <a:ext uri="{C183D7F6-B498-43B3-948B-1728B52AA6E4}">
-                <adec:decorative xmlns:adec="http://schemas.microsoft.com/office/drawing/2017/decorative" val="1"/>
-              </a:ext>
-            </a:extLst>
-          </p:cNvPr>
-          <p:cNvSpPr>
-            <a:spLocks noGrp="1" noRot="1" noChangeAspect="1" noMove="1" noResize="1" noEditPoints="1" noAdjustHandles="1" noChangeArrowheads="1" noChangeShapeType="1" noTextEdit="1"/>
-          </p:cNvSpPr>
-          <p:nvPr>
-            <p:extLst>
-              <p:ext uri="{386F3935-93C4-4BCD-93E2-E3B085C9AB24}">
-                <p16:designElem xmlns:p16="http://schemas.microsoft.com/office/powerpoint/2015/main" val="1"/>
-              </p:ext>
-            </p:extLst>
-          </p:nvPr>
-        </p:nvSpPr>
-        <p:spPr>
-          <a:xfrm flipH="1">
-            <a:off x="10697670" y="0"/>
-            <a:ext cx="1494330" cy="6858000"/>
-          </a:xfrm>
-          <a:prstGeom prst="rect">
-            <a:avLst/>
-          </a:prstGeom>
-          <a:solidFill>
-            <a:schemeClr val="accent4"/>
-          </a:solidFill>
-          <a:ln>
-            <a:noFill/>
-          </a:ln>
-        </p:spPr>
-        <p:style>
-          <a:lnRef idx="2">
-            <a:schemeClr val="accent1">
-              <a:shade val="50000"/>
-            </a:schemeClr>
-          </a:lnRef>
-          <a:fillRef idx="1">
-            <a:schemeClr val="accent1"/>
-          </a:fillRef>
-          <a:effectRef idx="0">
-            <a:schemeClr val="accent1"/>
-          </a:effectRef>
-          <a:fontRef idx="minor">
-            <a:schemeClr val="lt1"/>
-          </a:fontRef>
-        </p:style>
-        <p:txBody>
-          <a:bodyPr rtlCol="0" anchor="ctr"/>
-          <a:lstStyle/>
-          <a:p>
-            <a:pPr algn="ctr"/>
-            <a:endParaRPr lang="en-US"/>
-          </a:p>
-        </p:txBody>
-      </p:sp>
-      <p:sp>
-        <p:nvSpPr>
-          <p:cNvPr id="83" name="Rectangle 82">
-            <a:extLst>
-              <a:ext uri="{FF2B5EF4-FFF2-40B4-BE49-F238E27FC236}">
-                <a16:creationId xmlns:a16="http://schemas.microsoft.com/office/drawing/2014/main" id="{CBC4F608-B4B8-48C3-9572-C0F061B1CD99}"/>
-              </a:ext>
-              <a:ext uri="{C183D7F6-B498-43B3-948B-1728B52AA6E4}">
-                <adec:decorative xmlns:adec="http://schemas.microsoft.com/office/drawing/2017/decorative" val="1"/>
-              </a:ext>
-            </a:extLst>
-          </p:cNvPr>
-          <p:cNvSpPr>
-            <a:spLocks noGrp="1" noRot="1" noChangeAspect="1" noMove="1" noResize="1" noEditPoints="1" noAdjustHandles="1" noChangeArrowheads="1" noChangeShapeType="1" noTextEdit="1"/>
-          </p:cNvSpPr>
-          <p:nvPr>
-            <p:extLst>
-              <p:ext uri="{386F3935-93C4-4BCD-93E2-E3B085C9AB24}">
-                <p16:designElem xmlns:p16="http://schemas.microsoft.com/office/powerpoint/2015/main" val="1"/>
-              </p:ext>
-            </p:extLst>
-          </p:nvPr>
-        </p:nvSpPr>
-        <p:spPr>
-          <a:xfrm>
-            <a:off x="579528" y="631767"/>
-            <a:ext cx="11111729" cy="5752404"/>
-          </a:xfrm>
-          <a:prstGeom prst="rect">
-            <a:avLst/>
-          </a:prstGeom>
-          <a:solidFill>
-            <a:schemeClr val="bg1"/>
-          </a:solidFill>
-          <a:ln>
-            <a:noFill/>
-          </a:ln>
-          <a:effectLst>
-            <a:outerShdw blurRad="139700" dist="127000" dir="5400000" algn="t" rotWithShape="0">
-              <a:prstClr val="black">
-                <a:alpha val="15000"/>
-              </a:prstClr>
-            </a:outerShdw>
-          </a:effectLst>
-        </p:spPr>
-        <p:style>
-          <a:lnRef idx="2">
-            <a:schemeClr val="accent1">
-              <a:shade val="50000"/>
-            </a:schemeClr>
-          </a:lnRef>
-          <a:fillRef idx="1">
-            <a:schemeClr val="accent1"/>
-          </a:fillRef>
-          <a:effectRef idx="0">
-            <a:schemeClr val="accent1"/>
-          </a:effectRef>
-          <a:fontRef idx="minor">
-            <a:schemeClr val="lt1"/>
-          </a:fontRef>
-        </p:style>
-        <p:txBody>
-          <a:bodyPr rtlCol="0" anchor="ctr"/>
-          <a:lstStyle/>
-          <a:p>
-            <a:pPr algn="ctr"/>
-            <a:endParaRPr lang="en-US"/>
-          </a:p>
-        </p:txBody>
-      </p:sp>
-      <p:sp>
-        <p:nvSpPr>
-          <p:cNvPr id="2" name="Titre 1">
-            <a:extLst>
-              <a:ext uri="{FF2B5EF4-FFF2-40B4-BE49-F238E27FC236}">
-                <a16:creationId xmlns:a16="http://schemas.microsoft.com/office/drawing/2014/main" id="{BCB07747-4D69-5ABF-258D-80F805A4DDB8}"/>
-              </a:ext>
-            </a:extLst>
-          </p:cNvPr>
-          <p:cNvSpPr>
-            <a:spLocks noGrp="1"/>
-          </p:cNvSpPr>
-          <p:nvPr>
-            <p:ph type="title"/>
-          </p:nvPr>
-        </p:nvSpPr>
-        <p:spPr>
-          <a:xfrm>
-            <a:off x="1153618" y="1239927"/>
-            <a:ext cx="4008586" cy="4680583"/>
-          </a:xfrm>
-        </p:spPr>
-        <p:txBody>
-          <a:bodyPr anchor="ctr">
-            <a:normAutofit/>
-          </a:bodyPr>
-          <a:lstStyle/>
-          <a:p>
-            <a:r>
-              <a:rPr lang="fr-FR" sz="5200" dirty="0"/>
-              <a:t>Prompt</a:t>
-            </a:r>
-            <a:endParaRPr lang="es-AR" sz="5200" dirty="0"/>
-          </a:p>
-        </p:txBody>
-      </p:sp>
-      <p:sp>
-        <p:nvSpPr>
-          <p:cNvPr id="3" name="Espace réservé du contenu 2">
-            <a:extLst>
-              <a:ext uri="{FF2B5EF4-FFF2-40B4-BE49-F238E27FC236}">
-                <a16:creationId xmlns:a16="http://schemas.microsoft.com/office/drawing/2014/main" id="{E715C691-8D23-2BBB-9895-63EAE85A5079}"/>
-              </a:ext>
-            </a:extLst>
-          </p:cNvPr>
-          <p:cNvSpPr>
-            <a:spLocks noGrp="1"/>
-          </p:cNvSpPr>
-          <p:nvPr>
-            <p:ph idx="1"/>
-          </p:nvPr>
-        </p:nvSpPr>
-        <p:spPr>
-          <a:xfrm>
-            <a:off x="6291923" y="1239927"/>
-            <a:ext cx="4971824" cy="4680583"/>
-          </a:xfrm>
-        </p:spPr>
-        <p:txBody>
-          <a:bodyPr anchor="ctr">
-            <a:normAutofit/>
-          </a:bodyPr>
-          <a:lstStyle/>
-          <a:p>
-            <a:pPr marL="0" indent="0">
-              <a:buNone/>
-            </a:pPr>
-            <a:r>
-              <a:rPr lang="fr-FR" sz="1000" dirty="0"/>
-              <a:t>Tu es un expert en devis pour une entreprise spécialisée dans la fabrication de meubles sur mesure.</a:t>
-            </a:r>
-            <a:br>
-              <a:rPr lang="fr-FR" sz="1000" dirty="0"/>
-            </a:br>
-            <a:r>
-              <a:rPr lang="fr-FR" sz="1000" dirty="0"/>
-              <a:t>Tu vas analyser trois types d'entrée : une image du meuble, un fichier STL du meuble, et la liste des matériaux nécessaires à la fabrication du meuble.</a:t>
-            </a:r>
-            <a:br>
-              <a:rPr lang="fr-FR" sz="1000" dirty="0"/>
-            </a:br>
-            <a:br>
-              <a:rPr lang="fr-FR" sz="1000" dirty="0"/>
-            </a:br>
-            <a:r>
-              <a:rPr lang="fr-FR" sz="1000" dirty="0"/>
-              <a:t>Ta tâche consiste à :</a:t>
-            </a:r>
-            <a:br>
-              <a:rPr lang="fr-FR" sz="1000" dirty="0"/>
-            </a:br>
-            <a:r>
-              <a:rPr lang="fr-FR" sz="1000" dirty="0"/>
-              <a:t>1. Évaluer la complexité du meuble en s’appuyant sur les documents fournis. Dans le STL, la longueur du meuble est de 484 cm ; je te laisse en déduire le reste des cotes.</a:t>
-            </a:r>
-            <a:br>
-              <a:rPr lang="fr-FR" sz="1000" dirty="0"/>
-            </a:br>
-            <a:r>
-              <a:rPr lang="fr-FR" sz="1000" dirty="0"/>
-              <a:t>2. Estimer la quantité nécessaire pour chacun des matériaux suivants :</a:t>
-            </a:r>
-            <a:br>
-              <a:rPr lang="fr-FR" sz="1000" dirty="0"/>
-            </a:br>
-            <a:r>
-              <a:rPr lang="fr-FR" sz="1000" dirty="0"/>
-              <a:t>- Tube 30 mm x 30 mm</a:t>
-            </a:r>
-            <a:br>
-              <a:rPr lang="fr-FR" sz="1000" dirty="0"/>
-            </a:br>
-            <a:r>
-              <a:rPr lang="fr-FR" sz="1000" dirty="0"/>
-              <a:t>- SOFTWOOD 18 mm (244 cm x 122 cm)</a:t>
-            </a:r>
-            <a:br>
-              <a:rPr lang="fr-FR" sz="1000" dirty="0"/>
-            </a:br>
-            <a:r>
-              <a:rPr lang="fr-FR" sz="1000" dirty="0"/>
-              <a:t>- MDF 18 mm (305 cm x 122 cm)</a:t>
-            </a:r>
-            <a:br>
-              <a:rPr lang="fr-FR" sz="1000" dirty="0"/>
-            </a:br>
-            <a:r>
-              <a:rPr lang="fr-FR" sz="1000" dirty="0"/>
-              <a:t>- MDF 9 mm (305 cm x 122 cm)</a:t>
-            </a:r>
-            <a:br>
-              <a:rPr lang="fr-FR" sz="1000" dirty="0"/>
-            </a:br>
-            <a:r>
-              <a:rPr lang="fr-FR" sz="1000" dirty="0"/>
-              <a:t>- STRAT EGGER W1000 ST9 BLANC (305 cm x 130 cm)</a:t>
-            </a:r>
-            <a:br>
-              <a:rPr lang="fr-FR" sz="1000" dirty="0"/>
-            </a:br>
-            <a:r>
-              <a:rPr lang="fr-FR" sz="1000" dirty="0"/>
-              <a:t>3. Estimer le temps de main-d'œuvre requis par type :</a:t>
-            </a:r>
-            <a:br>
-              <a:rPr lang="fr-FR" sz="1000" dirty="0"/>
-            </a:br>
-            <a:r>
-              <a:rPr lang="fr-FR" sz="1000" dirty="0"/>
-              <a:t>- M.O. menuiserie</a:t>
-            </a:r>
-            <a:br>
-              <a:rPr lang="fr-FR" sz="1000" dirty="0"/>
-            </a:br>
-            <a:r>
-              <a:rPr lang="fr-FR" sz="1000" dirty="0"/>
-              <a:t>- M.O. CNC</a:t>
-            </a:r>
-            <a:br>
-              <a:rPr lang="fr-FR" sz="1000" dirty="0"/>
-            </a:br>
-            <a:r>
-              <a:rPr lang="fr-FR" sz="1000" dirty="0"/>
-              <a:t>- M.O. scie</a:t>
-            </a:r>
-            <a:br>
-              <a:rPr lang="fr-FR" sz="1000" dirty="0"/>
-            </a:br>
-            <a:r>
-              <a:rPr lang="fr-FR" sz="1000" dirty="0"/>
-              <a:t>4. Calculer le prix total du projet, en prenant en compte :</a:t>
-            </a:r>
-            <a:br>
-              <a:rPr lang="fr-FR" sz="1000" dirty="0"/>
-            </a:br>
-            <a:r>
-              <a:rPr lang="fr-FR" sz="1000" dirty="0"/>
-              <a:t>- Le coût des matériaux utilisés</a:t>
-            </a:r>
-            <a:br>
-              <a:rPr lang="fr-FR" sz="1000" dirty="0"/>
-            </a:br>
-            <a:r>
-              <a:rPr lang="fr-FR" sz="1000" dirty="0"/>
-              <a:t>- Le coût horaire de la main-d'œuvre, selon les tarifs suivants :</a:t>
-            </a:r>
-            <a:br>
-              <a:rPr lang="fr-FR" sz="1000" dirty="0"/>
-            </a:br>
-            <a:r>
-              <a:rPr lang="fr-FR" sz="1000" dirty="0"/>
-              <a:t>- M.O. menuiserie : 35,31 € / h</a:t>
-            </a:r>
-            <a:br>
-              <a:rPr lang="fr-FR" sz="1000" dirty="0"/>
-            </a:br>
-            <a:r>
-              <a:rPr lang="fr-FR" sz="1000" dirty="0"/>
-              <a:t>- M.O. CNC : 40,58 € / h</a:t>
-            </a:r>
-            <a:br>
-              <a:rPr lang="fr-FR" sz="1000" dirty="0"/>
-            </a:br>
-            <a:r>
-              <a:rPr lang="fr-FR" sz="1000" dirty="0"/>
-              <a:t>- M.O. scie : 40,58 € / h</a:t>
-            </a:r>
-            <a:br>
-              <a:rPr lang="fr-FR" sz="1000" dirty="0"/>
-            </a:br>
-            <a:br>
-              <a:rPr lang="fr-FR" sz="1000" dirty="0"/>
-            </a:br>
-            <a:r>
-              <a:rPr lang="fr-FR" sz="1000" dirty="0"/>
-              <a:t>Ne me détaille pas les calculs. Donne uniquement le résultat final au format JSON suivant, sans aucun texte autour :</a:t>
-            </a:r>
-            <a:br>
-              <a:rPr lang="fr-FR" sz="1000" dirty="0"/>
-            </a:br>
-            <a:br>
-              <a:rPr lang="fr-FR" sz="1000" dirty="0"/>
-            </a:br>
-            <a:r>
-              <a:rPr lang="fr-FR" sz="1000" dirty="0"/>
-              <a:t>{</a:t>
-            </a:r>
-            <a:br>
-              <a:rPr lang="fr-FR" sz="1000" dirty="0"/>
-            </a:br>
-            <a:r>
-              <a:rPr lang="fr-FR" sz="1000" dirty="0"/>
-              <a:t>"</a:t>
-            </a:r>
-            <a:r>
-              <a:rPr lang="fr-FR" sz="1000" dirty="0" err="1"/>
-              <a:t>prix_final</a:t>
-            </a:r>
-            <a:r>
-              <a:rPr lang="fr-FR" sz="1000" dirty="0"/>
-              <a:t>": 0.00,</a:t>
-            </a:r>
-            <a:br>
-              <a:rPr lang="fr-FR" sz="1000" dirty="0"/>
-            </a:br>
-            <a:r>
-              <a:rPr lang="fr-FR" sz="1000" dirty="0"/>
-              <a:t>"</a:t>
-            </a:r>
-            <a:r>
-              <a:rPr lang="fr-FR" sz="1000" dirty="0" err="1"/>
-              <a:t>prix_material</a:t>
-            </a:r>
-            <a:r>
-              <a:rPr lang="fr-FR" sz="1000" dirty="0"/>
-              <a:t>": 0.00,</a:t>
-            </a:r>
-            <a:br>
-              <a:rPr lang="fr-FR" sz="1000" dirty="0"/>
-            </a:br>
-            <a:r>
-              <a:rPr lang="fr-FR" sz="1000" dirty="0"/>
-              <a:t>"</a:t>
-            </a:r>
-            <a:r>
-              <a:rPr lang="fr-FR" sz="1000" dirty="0" err="1"/>
-              <a:t>prix_manoeuvre</a:t>
-            </a:r>
-            <a:r>
-              <a:rPr lang="fr-FR" sz="1000" dirty="0"/>
-              <a:t>": 0.00</a:t>
-            </a:r>
-            <a:br>
-              <a:rPr lang="fr-FR" sz="1000" dirty="0"/>
-            </a:br>
-            <a:r>
-              <a:rPr lang="fr-FR" sz="1000" dirty="0"/>
-              <a:t>}</a:t>
-            </a:r>
-          </a:p>
-        </p:txBody>
-      </p:sp>
-    </p:spTree>
-    <p:extLst>
-      <p:ext uri="{BB962C8B-B14F-4D97-AF65-F5344CB8AC3E}">
-        <p14:creationId xmlns:p14="http://schemas.microsoft.com/office/powerpoint/2010/main" val="325488366"/>
       </p:ext>
     </p:extLst>
   </p:cSld>

--- a/TIM Pluo/Slide_Pluo.pptx
+++ b/TIM Pluo/Slide_Pluo.pptx
@@ -5,23 +5,21 @@
     <p:sldMasterId id="2147483648" r:id="rId1"/>
   </p:sldMasterIdLst>
   <p:notesMasterIdLst>
-    <p:notesMasterId r:id="rId16"/>
+    <p:notesMasterId r:id="rId14"/>
   </p:notesMasterIdLst>
   <p:sldIdLst>
     <p:sldId id="256" r:id="rId2"/>
     <p:sldId id="269" r:id="rId3"/>
-    <p:sldId id="274" r:id="rId4"/>
-    <p:sldId id="276" r:id="rId5"/>
-    <p:sldId id="258" r:id="rId6"/>
-    <p:sldId id="275" r:id="rId7"/>
-    <p:sldId id="261" r:id="rId8"/>
-    <p:sldId id="260" r:id="rId9"/>
-    <p:sldId id="273" r:id="rId10"/>
-    <p:sldId id="259" r:id="rId11"/>
-    <p:sldId id="272" r:id="rId12"/>
-    <p:sldId id="262" r:id="rId13"/>
-    <p:sldId id="263" r:id="rId14"/>
-    <p:sldId id="270" r:id="rId15"/>
+    <p:sldId id="258" r:id="rId4"/>
+    <p:sldId id="275" r:id="rId5"/>
+    <p:sldId id="261" r:id="rId6"/>
+    <p:sldId id="260" r:id="rId7"/>
+    <p:sldId id="273" r:id="rId8"/>
+    <p:sldId id="259" r:id="rId9"/>
+    <p:sldId id="272" r:id="rId10"/>
+    <p:sldId id="262" r:id="rId11"/>
+    <p:sldId id="263" r:id="rId12"/>
+    <p:sldId id="270" r:id="rId13"/>
   </p:sldIdLst>
   <p:sldSz cx="12192000" cy="6858000"/>
   <p:notesSz cx="6858000" cy="9144000"/>
@@ -210,7 +208,7 @@
           <a:p>
             <a:fld id="{9B5082A6-11C5-4584-B4A7-5F6CB8C8BF42}" type="datetimeFigureOut">
               <a:rPr lang="es-AR" smtClean="0"/>
-              <a:t>24/2/2026</a:t>
+              <a:t>25/2/2026</a:t>
             </a:fld>
             <a:endParaRPr lang="es-AR"/>
           </a:p>
@@ -608,13 +606,7 @@
           <a:p>
             <a:r>
               <a:rPr lang="fr-FR" dirty="0"/>
-              <a:t>Echelle 1/1</a:t>
-            </a:r>
-          </a:p>
-          <a:p>
-            <a:r>
-              <a:rPr lang="fr-FR" dirty="0"/>
-              <a:t>ou  une mesure </a:t>
+              <a:t> 1 requête prend entre 40 et 70 sec</a:t>
             </a:r>
           </a:p>
         </p:txBody>
@@ -645,7 +637,7 @@
     </p:spTree>
     <p:extLst>
       <p:ext uri="{BB962C8B-B14F-4D97-AF65-F5344CB8AC3E}">
-        <p14:creationId xmlns:p14="http://schemas.microsoft.com/office/powerpoint/2010/main" val="2728888653"/>
+        <p14:creationId xmlns:p14="http://schemas.microsoft.com/office/powerpoint/2010/main" val="1304009981"/>
       </p:ext>
     </p:extLst>
   </p:cSld>
@@ -699,91 +691,7 @@
           <a:bodyPr/>
           <a:lstStyle/>
           <a:p>
-            <a:r>
-              <a:rPr lang="fr-FR" dirty="0"/>
-              <a:t>Se spécialisé </a:t>
-            </a:r>
-          </a:p>
-          <a:p>
-            <a:endParaRPr lang="fr-FR" dirty="0"/>
-          </a:p>
-          <a:p>
-            <a:r>
-              <a:rPr lang="fr-FR" dirty="0"/>
-              <a:t>Une suite de taches :</a:t>
-            </a:r>
-          </a:p>
-          <a:p>
-            <a:r>
-              <a:rPr lang="fr-FR" dirty="0"/>
-              <a:t> complexité + longueurs</a:t>
-            </a:r>
-          </a:p>
-          <a:p>
-            <a:r>
-              <a:rPr lang="fr-FR" dirty="0"/>
-              <a:t>	</a:t>
-            </a:r>
-          </a:p>
-          <a:p>
-            <a:r>
-              <a:rPr lang="fr-FR" dirty="0"/>
-              <a:t>Quant mat </a:t>
-            </a:r>
-          </a:p>
-          <a:p>
-            <a:r>
-              <a:rPr lang="fr-FR" dirty="0"/>
-              <a:t>Quant main œuvres </a:t>
-            </a:r>
-          </a:p>
-          <a:p>
-            <a:r>
-              <a:rPr lang="fr-FR" dirty="0"/>
-              <a:t>Calcul</a:t>
-            </a:r>
-          </a:p>
-          <a:p>
-            <a:r>
-              <a:rPr lang="fr-FR" dirty="0"/>
-              <a:t>J’ai  mis en place Processus </a:t>
-            </a:r>
-            <a:r>
-              <a:rPr lang="fr-FR" dirty="0" err="1"/>
-              <a:t>iteratifs</a:t>
-            </a:r>
-            <a:endParaRPr lang="fr-FR" dirty="0"/>
-          </a:p>
-          <a:p>
-            <a:r>
-              <a:rPr lang="fr-FR" dirty="0"/>
-              <a:t>Avec une </a:t>
-            </a:r>
-            <a:r>
-              <a:rPr lang="fr-FR" dirty="0" err="1"/>
-              <a:t>mopyenne</a:t>
-            </a:r>
-            <a:r>
-              <a:rPr lang="fr-FR" dirty="0"/>
-              <a:t> écart type </a:t>
-            </a:r>
-          </a:p>
-          <a:p>
-            <a:r>
-              <a:rPr lang="fr-FR" dirty="0"/>
-              <a:t>Le modèle </a:t>
-            </a:r>
-            <a:r>
-              <a:rPr lang="fr-FR" dirty="0" err="1"/>
-              <a:t>haliciné</a:t>
-            </a:r>
-            <a:r>
-              <a:rPr lang="fr-FR" dirty="0"/>
-              <a:t> </a:t>
-            </a:r>
-          </a:p>
-          <a:p>
-            <a:endParaRPr lang="fr-FR" dirty="0"/>
+            <a:endParaRPr lang="es-AR" dirty="0"/>
           </a:p>
         </p:txBody>
       </p:sp>
@@ -813,7 +721,7 @@
     </p:spTree>
     <p:extLst>
       <p:ext uri="{BB962C8B-B14F-4D97-AF65-F5344CB8AC3E}">
-        <p14:creationId xmlns:p14="http://schemas.microsoft.com/office/powerpoint/2010/main" val="3185270882"/>
+        <p14:creationId xmlns:p14="http://schemas.microsoft.com/office/powerpoint/2010/main" val="3853085445"/>
       </p:ext>
     </p:extLst>
   </p:cSld>
@@ -867,10 +775,7 @@
           <a:bodyPr/>
           <a:lstStyle/>
           <a:p>
-            <a:r>
-              <a:rPr lang="fr-FR" dirty="0"/>
-              <a:t> 1 requête prend entre 40 et 70 sec</a:t>
-            </a:r>
+            <a:endParaRPr lang="es-AR" dirty="0"/>
           </a:p>
         </p:txBody>
       </p:sp>
@@ -892,174 +797,6 @@
             <a:fld id="{CED0BE1B-9CB8-454F-BD68-366FF85AEE84}" type="slidenum">
               <a:rPr lang="es-AR" smtClean="0"/>
               <a:t>12</a:t>
-            </a:fld>
-            <a:endParaRPr lang="es-AR"/>
-          </a:p>
-        </p:txBody>
-      </p:sp>
-    </p:spTree>
-    <p:extLst>
-      <p:ext uri="{BB962C8B-B14F-4D97-AF65-F5344CB8AC3E}">
-        <p14:creationId xmlns:p14="http://schemas.microsoft.com/office/powerpoint/2010/main" val="1304009981"/>
-      </p:ext>
-    </p:extLst>
-  </p:cSld>
-  <p:clrMapOvr>
-    <a:masterClrMapping/>
-  </p:clrMapOvr>
-</p:notes>
-</file>
-
-<file path=ppt/notesSlides/notesSlide13.xml><?xml version="1.0" encoding="utf-8"?>
-<p:notes xmlns:a="http://schemas.openxmlformats.org/drawingml/2006/main" xmlns:r="http://schemas.openxmlformats.org/officeDocument/2006/relationships" xmlns:p="http://schemas.openxmlformats.org/presentationml/2006/main">
-  <p:cSld>
-    <p:spTree>
-      <p:nvGrpSpPr>
-        <p:cNvPr id="1" name=""/>
-        <p:cNvGrpSpPr/>
-        <p:nvPr/>
-      </p:nvGrpSpPr>
-      <p:grpSpPr>
-        <a:xfrm>
-          <a:off x="0" y="0"/>
-          <a:ext cx="0" cy="0"/>
-          <a:chOff x="0" y="0"/>
-          <a:chExt cx="0" cy="0"/>
-        </a:xfrm>
-      </p:grpSpPr>
-      <p:sp>
-        <p:nvSpPr>
-          <p:cNvPr id="2" name="Espace réservé de l'image des diapositives 1"/>
-          <p:cNvSpPr>
-            <a:spLocks noGrp="1" noRot="1" noChangeAspect="1"/>
-          </p:cNvSpPr>
-          <p:nvPr>
-            <p:ph type="sldImg"/>
-          </p:nvPr>
-        </p:nvSpPr>
-        <p:spPr/>
-      </p:sp>
-      <p:sp>
-        <p:nvSpPr>
-          <p:cNvPr id="3" name="Espace réservé des notes 2"/>
-          <p:cNvSpPr>
-            <a:spLocks noGrp="1"/>
-          </p:cNvSpPr>
-          <p:nvPr>
-            <p:ph type="body" idx="1"/>
-          </p:nvPr>
-        </p:nvSpPr>
-        <p:spPr/>
-        <p:txBody>
-          <a:bodyPr/>
-          <a:lstStyle/>
-          <a:p>
-            <a:endParaRPr lang="es-AR" dirty="0"/>
-          </a:p>
-        </p:txBody>
-      </p:sp>
-      <p:sp>
-        <p:nvSpPr>
-          <p:cNvPr id="4" name="Espace réservé du numéro de diapositive 3"/>
-          <p:cNvSpPr>
-            <a:spLocks noGrp="1"/>
-          </p:cNvSpPr>
-          <p:nvPr>
-            <p:ph type="sldNum" sz="quarter" idx="5"/>
-          </p:nvPr>
-        </p:nvSpPr>
-        <p:spPr/>
-        <p:txBody>
-          <a:bodyPr/>
-          <a:lstStyle/>
-          <a:p>
-            <a:fld id="{CED0BE1B-9CB8-454F-BD68-366FF85AEE84}" type="slidenum">
-              <a:rPr lang="es-AR" smtClean="0"/>
-              <a:t>13</a:t>
-            </a:fld>
-            <a:endParaRPr lang="es-AR"/>
-          </a:p>
-        </p:txBody>
-      </p:sp>
-    </p:spTree>
-    <p:extLst>
-      <p:ext uri="{BB962C8B-B14F-4D97-AF65-F5344CB8AC3E}">
-        <p14:creationId xmlns:p14="http://schemas.microsoft.com/office/powerpoint/2010/main" val="3853085445"/>
-      </p:ext>
-    </p:extLst>
-  </p:cSld>
-  <p:clrMapOvr>
-    <a:masterClrMapping/>
-  </p:clrMapOvr>
-</p:notes>
-</file>
-
-<file path=ppt/notesSlides/notesSlide14.xml><?xml version="1.0" encoding="utf-8"?>
-<p:notes xmlns:a="http://schemas.openxmlformats.org/drawingml/2006/main" xmlns:r="http://schemas.openxmlformats.org/officeDocument/2006/relationships" xmlns:p="http://schemas.openxmlformats.org/presentationml/2006/main">
-  <p:cSld>
-    <p:spTree>
-      <p:nvGrpSpPr>
-        <p:cNvPr id="1" name=""/>
-        <p:cNvGrpSpPr/>
-        <p:nvPr/>
-      </p:nvGrpSpPr>
-      <p:grpSpPr>
-        <a:xfrm>
-          <a:off x="0" y="0"/>
-          <a:ext cx="0" cy="0"/>
-          <a:chOff x="0" y="0"/>
-          <a:chExt cx="0" cy="0"/>
-        </a:xfrm>
-      </p:grpSpPr>
-      <p:sp>
-        <p:nvSpPr>
-          <p:cNvPr id="2" name="Espace réservé de l'image des diapositives 1"/>
-          <p:cNvSpPr>
-            <a:spLocks noGrp="1" noRot="1" noChangeAspect="1"/>
-          </p:cNvSpPr>
-          <p:nvPr>
-            <p:ph type="sldImg"/>
-          </p:nvPr>
-        </p:nvSpPr>
-        <p:spPr/>
-      </p:sp>
-      <p:sp>
-        <p:nvSpPr>
-          <p:cNvPr id="3" name="Espace réservé des notes 2"/>
-          <p:cNvSpPr>
-            <a:spLocks noGrp="1"/>
-          </p:cNvSpPr>
-          <p:nvPr>
-            <p:ph type="body" idx="1"/>
-          </p:nvPr>
-        </p:nvSpPr>
-        <p:spPr/>
-        <p:txBody>
-          <a:bodyPr/>
-          <a:lstStyle/>
-          <a:p>
-            <a:endParaRPr lang="es-AR" dirty="0"/>
-          </a:p>
-        </p:txBody>
-      </p:sp>
-      <p:sp>
-        <p:nvSpPr>
-          <p:cNvPr id="4" name="Espace réservé du numéro de diapositive 3"/>
-          <p:cNvSpPr>
-            <a:spLocks noGrp="1"/>
-          </p:cNvSpPr>
-          <p:nvPr>
-            <p:ph type="sldNum" sz="quarter" idx="5"/>
-          </p:nvPr>
-        </p:nvSpPr>
-        <p:spPr/>
-        <p:txBody>
-          <a:bodyPr/>
-          <a:lstStyle/>
-          <a:p>
-            <a:fld id="{CED0BE1B-9CB8-454F-BD68-366FF85AEE84}" type="slidenum">
-              <a:rPr lang="es-AR" smtClean="0"/>
-              <a:t>14</a:t>
             </a:fld>
             <a:endParaRPr lang="es-AR"/>
           </a:p>
@@ -1159,35 +896,27 @@
             </a:pPr>
             <a:r>
               <a:rPr lang="es-AR" dirty="0" err="1"/>
-              <a:t>Fichier</a:t>
+              <a:t>Etat</a:t>
             </a:r>
             <a:r>
               <a:rPr lang="es-AR" dirty="0"/>
-              <a:t> Exel qui </a:t>
+              <a:t> de </a:t>
             </a:r>
             <a:r>
               <a:rPr lang="es-AR" dirty="0" err="1"/>
-              <a:t>est</a:t>
+              <a:t>l’art</a:t>
             </a:r>
             <a:r>
               <a:rPr lang="es-AR" dirty="0"/>
-              <a:t>  la base de </a:t>
+              <a:t> ce qui se </a:t>
             </a:r>
             <a:r>
               <a:rPr lang="es-AR" dirty="0" err="1"/>
-              <a:t>leurs</a:t>
+              <a:t>fait</a:t>
             </a:r>
             <a:r>
               <a:rPr lang="es-AR" dirty="0"/>
-              <a:t> </a:t>
-            </a:r>
-            <a:r>
-              <a:rPr lang="es-AR" dirty="0" err="1"/>
-              <a:t>devis</a:t>
-            </a:r>
-            <a:r>
-              <a:rPr lang="es-AR" dirty="0"/>
-              <a:t> </a:t>
+              <a:t> deja en </a:t>
             </a:r>
           </a:p>
           <a:p>
@@ -1210,7 +939,7 @@
             </a:pPr>
             <a:r>
               <a:rPr lang="es-AR" dirty="0" err="1"/>
-              <a:t>Étroitement</a:t>
+              <a:t>J’ai</a:t>
             </a:r>
             <a:r>
               <a:rPr lang="es-AR" dirty="0"/>
@@ -1218,12 +947,275 @@
             </a:r>
             <a:r>
               <a:rPr lang="es-AR" dirty="0" err="1"/>
-              <a:t>lier</a:t>
+              <a:t>vu</a:t>
             </a:r>
             <a:r>
               <a:rPr lang="es-AR" dirty="0"/>
-              <a:t> à  ODOO</a:t>
-            </a:r>
+              <a:t> multimodal </a:t>
+            </a:r>
+          </a:p>
+          <a:p>
+            <a:pPr marL="0" marR="0" lvl="0" indent="0" algn="l" defTabSz="914400" rtl="0" eaLnBrk="1" fontAlgn="auto" latinLnBrk="0" hangingPunct="1">
+              <a:lnSpc>
+                <a:spcPct val="100000"/>
+              </a:lnSpc>
+              <a:spcBef>
+                <a:spcPts val="0"/>
+              </a:spcBef>
+              <a:spcAft>
+                <a:spcPts val="0"/>
+              </a:spcAft>
+              <a:buClrTx/>
+              <a:buSzTx/>
+              <a:buFontTx/>
+              <a:buNone/>
+              <a:tabLst/>
+              <a:defRPr/>
+            </a:pPr>
+            <a:r>
+              <a:rPr lang="es-AR" dirty="0"/>
+              <a:t>Ce qui se </a:t>
+            </a:r>
+            <a:r>
+              <a:rPr lang="es-AR" dirty="0" err="1"/>
+              <a:t>fait</a:t>
+            </a:r>
+            <a:r>
+              <a:rPr lang="es-AR" dirty="0"/>
+              <a:t> unimodal 2D:</a:t>
+            </a:r>
+          </a:p>
+          <a:p>
+            <a:pPr marL="628650" marR="0" lvl="1" indent="-171450" algn="l" defTabSz="914400" rtl="0" eaLnBrk="1" fontAlgn="auto" latinLnBrk="0" hangingPunct="1">
+              <a:lnSpc>
+                <a:spcPct val="100000"/>
+              </a:lnSpc>
+              <a:spcBef>
+                <a:spcPts val="0"/>
+              </a:spcBef>
+              <a:spcAft>
+                <a:spcPts val="0"/>
+              </a:spcAft>
+              <a:buClrTx/>
+              <a:buSzTx/>
+              <a:buFont typeface="Arial" panose="020B0604020202020204" pitchFamily="34" charset="0"/>
+              <a:buChar char="•"/>
+              <a:tabLst/>
+              <a:defRPr/>
+            </a:pPr>
+            <a:r>
+              <a:rPr lang="es-AR" dirty="0" err="1"/>
+              <a:t>detection</a:t>
+            </a:r>
+            <a:r>
+              <a:rPr lang="es-AR" dirty="0"/>
+              <a:t> </a:t>
+            </a:r>
+            <a:r>
+              <a:rPr lang="es-AR" dirty="0" err="1"/>
+              <a:t>d’objet</a:t>
+            </a:r>
+            <a:endParaRPr lang="es-AR" dirty="0"/>
+          </a:p>
+          <a:p>
+            <a:pPr marL="628650" marR="0" lvl="1" indent="-171450" algn="l" defTabSz="914400" rtl="0" eaLnBrk="1" fontAlgn="auto" latinLnBrk="0" hangingPunct="1">
+              <a:lnSpc>
+                <a:spcPct val="100000"/>
+              </a:lnSpc>
+              <a:spcBef>
+                <a:spcPts val="0"/>
+              </a:spcBef>
+              <a:spcAft>
+                <a:spcPts val="0"/>
+              </a:spcAft>
+              <a:buClrTx/>
+              <a:buSzTx/>
+              <a:buFont typeface="Arial" panose="020B0604020202020204" pitchFamily="34" charset="0"/>
+              <a:buChar char="•"/>
+              <a:tabLst/>
+              <a:defRPr/>
+            </a:pPr>
+            <a:r>
+              <a:rPr lang="es-AR" dirty="0" err="1"/>
+              <a:t>passage</a:t>
+            </a:r>
+            <a:r>
+              <a:rPr lang="es-AR" dirty="0"/>
+              <a:t> en 3D</a:t>
+            </a:r>
+          </a:p>
+          <a:p>
+            <a:pPr marL="0" marR="0" lvl="0" indent="0" algn="l" defTabSz="914400" rtl="0" eaLnBrk="1" fontAlgn="auto" latinLnBrk="0" hangingPunct="1">
+              <a:lnSpc>
+                <a:spcPct val="100000"/>
+              </a:lnSpc>
+              <a:spcBef>
+                <a:spcPts val="0"/>
+              </a:spcBef>
+              <a:spcAft>
+                <a:spcPts val="0"/>
+              </a:spcAft>
+              <a:buClrTx/>
+              <a:buSzTx/>
+              <a:buFontTx/>
+              <a:buNone/>
+              <a:tabLst/>
+              <a:defRPr/>
+            </a:pPr>
+            <a:r>
+              <a:rPr lang="es-AR" dirty="0"/>
+              <a:t>Ce qui se </a:t>
+            </a:r>
+            <a:r>
+              <a:rPr lang="es-AR" dirty="0" err="1"/>
+              <a:t>fais</a:t>
+            </a:r>
+            <a:r>
+              <a:rPr lang="es-AR" dirty="0"/>
+              <a:t> unimodal 3D</a:t>
+            </a:r>
+          </a:p>
+          <a:p>
+            <a:pPr marL="628650" marR="0" lvl="1" indent="-171450" algn="l" defTabSz="914400" rtl="0" eaLnBrk="1" fontAlgn="auto" latinLnBrk="0" hangingPunct="1">
+              <a:lnSpc>
+                <a:spcPct val="100000"/>
+              </a:lnSpc>
+              <a:spcBef>
+                <a:spcPts val="0"/>
+              </a:spcBef>
+              <a:spcAft>
+                <a:spcPts val="0"/>
+              </a:spcAft>
+              <a:buClrTx/>
+              <a:buSzTx/>
+              <a:buFont typeface="Arial" panose="020B0604020202020204" pitchFamily="34" charset="0"/>
+              <a:buChar char="•"/>
+              <a:tabLst/>
+              <a:defRPr/>
+            </a:pPr>
+            <a:r>
+              <a:rPr lang="es-AR" dirty="0"/>
+              <a:t>a</a:t>
+            </a:r>
+          </a:p>
+          <a:p>
+            <a:pPr marL="0" marR="0" lvl="0" indent="0" algn="l" defTabSz="914400" rtl="0" eaLnBrk="1" fontAlgn="auto" latinLnBrk="0" hangingPunct="1">
+              <a:lnSpc>
+                <a:spcPct val="100000"/>
+              </a:lnSpc>
+              <a:spcBef>
+                <a:spcPts val="0"/>
+              </a:spcBef>
+              <a:spcAft>
+                <a:spcPts val="0"/>
+              </a:spcAft>
+              <a:buClrTx/>
+              <a:buSzTx/>
+              <a:buFontTx/>
+              <a:buNone/>
+              <a:tabLst/>
+              <a:defRPr/>
+            </a:pPr>
+            <a:r>
+              <a:rPr lang="es-AR" dirty="0"/>
+              <a:t>Un </a:t>
+            </a:r>
+            <a:r>
+              <a:rPr lang="es-AR" dirty="0" err="1"/>
+              <a:t>exemple</a:t>
+            </a:r>
+            <a:r>
+              <a:rPr lang="es-AR" dirty="0"/>
+              <a:t> de Multimodal + plan</a:t>
+            </a:r>
+          </a:p>
+          <a:p>
+            <a:pPr marL="628650" marR="0" lvl="1" indent="-171450" algn="l" defTabSz="914400" rtl="0" eaLnBrk="1" fontAlgn="auto" latinLnBrk="0" hangingPunct="1">
+              <a:lnSpc>
+                <a:spcPct val="100000"/>
+              </a:lnSpc>
+              <a:spcBef>
+                <a:spcPts val="0"/>
+              </a:spcBef>
+              <a:spcAft>
+                <a:spcPts val="0"/>
+              </a:spcAft>
+              <a:buClrTx/>
+              <a:buSzTx/>
+              <a:buFont typeface="Arial" panose="020B0604020202020204" pitchFamily="34" charset="0"/>
+              <a:buChar char="•"/>
+              <a:tabLst/>
+              <a:defRPr/>
+            </a:pPr>
+            <a:r>
+              <a:rPr lang="es-AR" dirty="0"/>
+              <a:t>La </a:t>
+            </a:r>
+            <a:r>
+              <a:rPr lang="es-AR" dirty="0" err="1"/>
+              <a:t>detection</a:t>
+            </a:r>
+            <a:r>
+              <a:rPr lang="es-AR" dirty="0"/>
+              <a:t> </a:t>
+            </a:r>
+            <a:r>
+              <a:rPr lang="es-AR" dirty="0" err="1"/>
+              <a:t>d’objet</a:t>
+            </a:r>
+            <a:r>
+              <a:rPr lang="es-AR" dirty="0"/>
+              <a:t> </a:t>
+            </a:r>
+            <a:r>
+              <a:rPr lang="es-AR" dirty="0" err="1"/>
+              <a:t>pour</a:t>
+            </a:r>
+            <a:r>
+              <a:rPr lang="es-AR" dirty="0"/>
+              <a:t> les </a:t>
+            </a:r>
+            <a:r>
+              <a:rPr lang="es-AR" dirty="0" err="1"/>
+              <a:t>system</a:t>
+            </a:r>
+            <a:r>
+              <a:rPr lang="es-AR" dirty="0"/>
+              <a:t> </a:t>
+            </a:r>
+            <a:r>
+              <a:rPr lang="es-AR" dirty="0" err="1"/>
+              <a:t>enbarqué</a:t>
+            </a:r>
+            <a:r>
+              <a:rPr lang="es-AR" dirty="0"/>
+              <a:t> des </a:t>
+            </a:r>
+            <a:r>
+              <a:rPr lang="es-AR" dirty="0" err="1"/>
+              <a:t>voitures</a:t>
+            </a:r>
+            <a:endParaRPr lang="es-AR" dirty="0"/>
+          </a:p>
+          <a:p>
+            <a:pPr marL="0" marR="0" lvl="0" indent="0" algn="l" defTabSz="914400" rtl="0" eaLnBrk="1" fontAlgn="auto" latinLnBrk="0" hangingPunct="1">
+              <a:lnSpc>
+                <a:spcPct val="100000"/>
+              </a:lnSpc>
+              <a:spcBef>
+                <a:spcPts val="0"/>
+              </a:spcBef>
+              <a:spcAft>
+                <a:spcPts val="0"/>
+              </a:spcAft>
+              <a:buClrTx/>
+              <a:buSzTx/>
+              <a:buFontTx/>
+              <a:buNone/>
+              <a:tabLst/>
+              <a:defRPr/>
+            </a:pPr>
+            <a:endParaRPr lang="es-AR" dirty="0"/>
           </a:p>
         </p:txBody>
       </p:sp>
@@ -1313,13 +1305,38 @@
           <a:bodyPr/>
           <a:lstStyle/>
           <a:p>
+            <a:pPr marL="0" marR="0" lvl="0" indent="0" algn="l" defTabSz="914400" rtl="0" eaLnBrk="1" fontAlgn="auto" latinLnBrk="0" hangingPunct="1">
+              <a:lnSpc>
+                <a:spcPct val="100000"/>
+              </a:lnSpc>
+              <a:spcBef>
+                <a:spcPts val="0"/>
+              </a:spcBef>
+              <a:spcAft>
+                <a:spcPts val="0"/>
+              </a:spcAft>
+              <a:buClrTx/>
+              <a:buSzTx/>
+              <a:buFontTx/>
+              <a:buNone/>
+              <a:tabLst/>
+              <a:defRPr/>
+            </a:pPr>
             <a:r>
               <a:rPr lang="fr-FR" dirty="0"/>
-              <a:t>Dire que j’ai  parler de la multimodal </a:t>
+              <a:t>Le Secteur d’activité </a:t>
             </a:r>
             <a:r>
               <a:rPr lang="fr-FR" dirty="0" err="1"/>
-              <a:t>ité</a:t>
+              <a:t>princuipalement</a:t>
+            </a:r>
+            <a:r>
+              <a:rPr lang="fr-FR" dirty="0"/>
+              <a:t>  la création et  l’aménagement </a:t>
+            </a:r>
+            <a:r>
+              <a:rPr lang="fr-FR" dirty="0" err="1"/>
+              <a:t>despace</a:t>
             </a:r>
             <a:r>
               <a:rPr lang="fr-FR" dirty="0"/>
@@ -1329,15 +1346,33 @@
           <a:p>
             <a:r>
               <a:rPr lang="fr-FR" dirty="0"/>
-              <a:t>Mentionner l’état de l’art qui faire le liens avec le </a:t>
+              <a:t> les stands de présentation de salon, la rénovation de pharmacie, musé </a:t>
             </a:r>
             <a:r>
               <a:rPr lang="fr-FR" dirty="0" err="1"/>
-              <a:t>usecase</a:t>
+              <a:t>ect</a:t>
             </a:r>
             <a:r>
               <a:rPr lang="fr-FR" dirty="0"/>
-              <a:t> </a:t>
+              <a:t> …</a:t>
+            </a:r>
+          </a:p>
+          <a:p>
+            <a:r>
+              <a:rPr lang="fr-FR" dirty="0"/>
+              <a:t>Donc il dispose d’une collection de meuble</a:t>
+            </a:r>
+          </a:p>
+          <a:p>
+            <a:r>
+              <a:rPr lang="fr-FR" dirty="0"/>
+              <a:t>Meuble sur mesure </a:t>
+            </a:r>
+          </a:p>
+          <a:p>
+            <a:r>
+              <a:rPr lang="fr-FR" dirty="0"/>
+              <a:t>Besoin spécifique  pour l’assistance de devis, expliqué le contexte </a:t>
             </a:r>
             <a:endParaRPr lang="es-AR" dirty="0"/>
           </a:p>
@@ -1369,7 +1404,7 @@
     </p:spTree>
     <p:extLst>
       <p:ext uri="{BB962C8B-B14F-4D97-AF65-F5344CB8AC3E}">
-        <p14:creationId xmlns:p14="http://schemas.microsoft.com/office/powerpoint/2010/main" val="1463193195"/>
+        <p14:creationId xmlns:p14="http://schemas.microsoft.com/office/powerpoint/2010/main" val="263777780"/>
       </p:ext>
     </p:extLst>
   </p:cSld>
@@ -1387,7 +1422,7 @@
         <p:cNvPr id="1" name="">
           <a:extLst>
             <a:ext uri="{FF2B5EF4-FFF2-40B4-BE49-F238E27FC236}">
-              <a16:creationId xmlns:a16="http://schemas.microsoft.com/office/drawing/2014/main" id="{FAA84598-E9D3-C483-B587-751298932391}"/>
+              <a16:creationId xmlns:a16="http://schemas.microsoft.com/office/drawing/2014/main" id="{4B800C30-892E-F168-5B04-0D869F737BDF}"/>
             </a:ext>
           </a:extLst>
         </p:cNvPr>
@@ -1407,7 +1442,7 @@
           <p:cNvPr id="2" name="Espace réservé de l'image des diapositives 1">
             <a:extLst>
               <a:ext uri="{FF2B5EF4-FFF2-40B4-BE49-F238E27FC236}">
-                <a16:creationId xmlns:a16="http://schemas.microsoft.com/office/drawing/2014/main" id="{796DC166-5BD5-2B56-959D-F92F070A5167}"/>
+                <a16:creationId xmlns:a16="http://schemas.microsoft.com/office/drawing/2014/main" id="{AE153445-C1F3-AD37-C62D-D34891D7DB95}"/>
               </a:ext>
             </a:extLst>
           </p:cNvPr>
@@ -1425,7 +1460,7 @@
           <p:cNvPr id="3" name="Espace réservé des notes 2">
             <a:extLst>
               <a:ext uri="{FF2B5EF4-FFF2-40B4-BE49-F238E27FC236}">
-                <a16:creationId xmlns:a16="http://schemas.microsoft.com/office/drawing/2014/main" id="{894FD51A-22CA-6CBA-2D2C-218DC11FB520}"/>
+                <a16:creationId xmlns:a16="http://schemas.microsoft.com/office/drawing/2014/main" id="{B22F5839-FC25-35A1-2425-5DFE254F5465}"/>
               </a:ext>
             </a:extLst>
           </p:cNvPr>
@@ -1441,34 +1476,162 @@
           <a:bodyPr/>
           <a:lstStyle/>
           <a:p>
-            <a:r>
-              <a:rPr lang="fr-FR" dirty="0"/>
-              <a:t>Dire que j’ai  parler de la multimodal </a:t>
-            </a:r>
-            <a:r>
-              <a:rPr lang="fr-FR" dirty="0" err="1"/>
-              <a:t>ité</a:t>
-            </a:r>
-            <a:r>
-              <a:rPr lang="fr-FR" dirty="0"/>
+            <a:pPr marL="0" marR="0" lvl="0" indent="0" algn="l" defTabSz="914400" rtl="0" eaLnBrk="1" fontAlgn="auto" latinLnBrk="0" hangingPunct="1">
+              <a:lnSpc>
+                <a:spcPct val="100000"/>
+              </a:lnSpc>
+              <a:spcBef>
+                <a:spcPts val="0"/>
+              </a:spcBef>
+              <a:spcAft>
+                <a:spcPts val="0"/>
+              </a:spcAft>
+              <a:buClrTx/>
+              <a:buSzTx/>
+              <a:buFontTx/>
+              <a:buNone/>
+              <a:tabLst/>
+              <a:defRPr/>
+            </a:pPr>
+            <a:r>
+              <a:rPr lang="es-AR" dirty="0" err="1"/>
+              <a:t>Fichier</a:t>
+            </a:r>
+            <a:r>
+              <a:rPr lang="es-AR" dirty="0"/>
+              <a:t> Exel qui </a:t>
+            </a:r>
+            <a:r>
+              <a:rPr lang="es-AR" dirty="0" err="1"/>
+              <a:t>est</a:t>
+            </a:r>
+            <a:r>
+              <a:rPr lang="es-AR" dirty="0"/>
+              <a:t>  la base de </a:t>
+            </a:r>
+            <a:r>
+              <a:rPr lang="es-AR" dirty="0" err="1"/>
+              <a:t>leurs</a:t>
+            </a:r>
+            <a:r>
+              <a:rPr lang="es-AR" dirty="0"/>
               <a:t> </a:t>
             </a:r>
-          </a:p>
-          <a:p>
-            <a:r>
-              <a:rPr lang="fr-FR" dirty="0"/>
-              <a:t>Mentionner l’état de l’art qui faire le liens avec le </a:t>
-            </a:r>
-            <a:r>
-              <a:rPr lang="fr-FR" dirty="0" err="1"/>
-              <a:t>usecase</a:t>
-            </a:r>
-            <a:r>
-              <a:rPr lang="fr-FR" dirty="0"/>
+            <a:r>
+              <a:rPr lang="es-AR" dirty="0" err="1"/>
+              <a:t>devis</a:t>
+            </a:r>
+            <a:r>
+              <a:rPr lang="es-AR" dirty="0"/>
               <a:t> </a:t>
             </a:r>
+          </a:p>
+          <a:p>
+            <a:pPr marL="0" marR="0" lvl="0" indent="0" algn="l" defTabSz="914400" rtl="0" eaLnBrk="1" fontAlgn="auto" latinLnBrk="0" hangingPunct="1">
+              <a:lnSpc>
+                <a:spcPct val="100000"/>
+              </a:lnSpc>
+              <a:spcBef>
+                <a:spcPts val="0"/>
+              </a:spcBef>
+              <a:spcAft>
+                <a:spcPts val="0"/>
+              </a:spcAft>
+              <a:buClrTx/>
+              <a:buSzTx/>
+              <a:buFontTx/>
+              <a:buNone/>
+              <a:tabLst/>
+              <a:defRPr/>
+            </a:pPr>
+            <a:r>
+              <a:rPr lang="es-AR" dirty="0"/>
+              <a:t>	</a:t>
+            </a:r>
+            <a:r>
+              <a:rPr lang="es-AR" dirty="0" err="1"/>
+              <a:t>matériaux</a:t>
+            </a:r>
+            <a:r>
+              <a:rPr lang="es-AR" dirty="0"/>
+              <a:t> et  </a:t>
+            </a:r>
+            <a:r>
+              <a:rPr lang="es-AR" dirty="0" err="1"/>
+              <a:t>quantité</a:t>
+            </a:r>
             <a:endParaRPr lang="es-AR" dirty="0"/>
           </a:p>
+          <a:p>
+            <a:pPr marL="0" marR="0" lvl="0" indent="0" algn="l" defTabSz="914400" rtl="0" eaLnBrk="1" fontAlgn="auto" latinLnBrk="0" hangingPunct="1">
+              <a:lnSpc>
+                <a:spcPct val="100000"/>
+              </a:lnSpc>
+              <a:spcBef>
+                <a:spcPts val="0"/>
+              </a:spcBef>
+              <a:spcAft>
+                <a:spcPts val="0"/>
+              </a:spcAft>
+              <a:buClrTx/>
+              <a:buSzTx/>
+              <a:buFontTx/>
+              <a:buNone/>
+              <a:tabLst/>
+              <a:defRPr/>
+            </a:pPr>
+            <a:r>
+              <a:rPr lang="es-AR" dirty="0"/>
+              <a:t>	</a:t>
+            </a:r>
+            <a:r>
+              <a:rPr lang="es-AR" dirty="0" err="1"/>
+              <a:t>quandtioté</a:t>
+            </a:r>
+            <a:r>
+              <a:rPr lang="es-AR" dirty="0"/>
+              <a:t> de </a:t>
+            </a:r>
+            <a:r>
+              <a:rPr lang="es-AR" dirty="0" err="1"/>
+              <a:t>main</a:t>
+            </a:r>
+            <a:r>
+              <a:rPr lang="es-AR" dirty="0"/>
+              <a:t> </a:t>
+            </a:r>
+            <a:r>
+              <a:rPr lang="es-AR" dirty="0" err="1"/>
+              <a:t>d’oeuvre</a:t>
+            </a:r>
+            <a:r>
+              <a:rPr lang="es-AR" dirty="0"/>
+              <a:t> </a:t>
+            </a:r>
+          </a:p>
+          <a:p>
+            <a:pPr marL="0" marR="0" lvl="0" indent="0" algn="l" defTabSz="914400" rtl="0" eaLnBrk="1" fontAlgn="auto" latinLnBrk="0" hangingPunct="1">
+              <a:lnSpc>
+                <a:spcPct val="100000"/>
+              </a:lnSpc>
+              <a:spcBef>
+                <a:spcPts val="0"/>
+              </a:spcBef>
+              <a:spcAft>
+                <a:spcPts val="0"/>
+              </a:spcAft>
+              <a:buClrTx/>
+              <a:buSzTx/>
+              <a:buFontTx/>
+              <a:buNone/>
+              <a:tabLst/>
+              <a:defRPr/>
+            </a:pPr>
+            <a:r>
+              <a:rPr lang="es-AR" dirty="0"/>
+              <a:t>	et  le Prix </a:t>
+            </a:r>
+          </a:p>
         </p:txBody>
       </p:sp>
       <p:sp>
@@ -1476,7 +1639,7 @@
           <p:cNvPr id="4" name="Espace réservé du numéro de diapositive 3">
             <a:extLst>
               <a:ext uri="{FF2B5EF4-FFF2-40B4-BE49-F238E27FC236}">
-                <a16:creationId xmlns:a16="http://schemas.microsoft.com/office/drawing/2014/main" id="{9DD3EB6C-CC4A-3AE5-CC1F-6BF5737820C6}"/>
+                <a16:creationId xmlns:a16="http://schemas.microsoft.com/office/drawing/2014/main" id="{8B17FCFA-30A5-5A44-B735-18D7C36452CB}"/>
               </a:ext>
             </a:extLst>
           </p:cNvPr>
@@ -1503,7 +1666,7 @@
     </p:spTree>
     <p:extLst>
       <p:ext uri="{BB962C8B-B14F-4D97-AF65-F5344CB8AC3E}">
-        <p14:creationId xmlns:p14="http://schemas.microsoft.com/office/powerpoint/2010/main" val="3592045690"/>
+        <p14:creationId xmlns:p14="http://schemas.microsoft.com/office/powerpoint/2010/main" val="3626771347"/>
       </p:ext>
     </p:extLst>
   </p:cSld>
@@ -1557,64 +1720,27 @@
           <a:bodyPr/>
           <a:lstStyle/>
           <a:p>
-            <a:pPr marL="0" marR="0" lvl="0" indent="0" algn="l" defTabSz="914400" rtl="0" eaLnBrk="1" fontAlgn="auto" latinLnBrk="0" hangingPunct="1">
-              <a:lnSpc>
-                <a:spcPct val="100000"/>
-              </a:lnSpc>
-              <a:spcBef>
-                <a:spcPts val="0"/>
-              </a:spcBef>
-              <a:spcAft>
-                <a:spcPts val="0"/>
-              </a:spcAft>
-              <a:buClrTx/>
-              <a:buSzTx/>
-              <a:buFontTx/>
-              <a:buNone/>
-              <a:tabLst/>
-              <a:defRPr/>
-            </a:pPr>
             <a:r>
               <a:rPr lang="fr-FR" dirty="0"/>
-              <a:t>Le Secteur d’activité </a:t>
+              <a:t>Gratuit </a:t>
+            </a:r>
+          </a:p>
+          <a:p>
+            <a:r>
+              <a:rPr lang="fr-FR" dirty="0"/>
+              <a:t>restriction journalière</a:t>
+            </a:r>
+          </a:p>
+          <a:p>
+            <a:r>
+              <a:rPr lang="fr-FR" dirty="0"/>
+              <a:t>mais première impulsion cadre </a:t>
             </a:r>
             <a:r>
               <a:rPr lang="fr-FR" dirty="0" err="1"/>
-              <a:t>princuipalement</a:t>
-            </a:r>
-            <a:r>
-              <a:rPr lang="fr-FR" dirty="0"/>
-              <a:t>  la création et  l’aménagement </a:t>
-            </a:r>
-            <a:r>
-              <a:rPr lang="fr-FR" dirty="0" err="1"/>
-              <a:t>despace</a:t>
-            </a:r>
-            <a:r>
-              <a:rPr lang="fr-FR" dirty="0"/>
-              <a:t> </a:t>
-            </a:r>
-          </a:p>
-          <a:p>
-            <a:r>
-              <a:rPr lang="fr-FR" dirty="0"/>
-              <a:t> les stands de présentation de salon, la rénovation de pharmacie, musé </a:t>
-            </a:r>
-            <a:r>
-              <a:rPr lang="fr-FR" dirty="0" err="1"/>
-              <a:t>ect</a:t>
-            </a:r>
-            <a:r>
-              <a:rPr lang="fr-FR" dirty="0"/>
-              <a:t> …</a:t>
-            </a:r>
-          </a:p>
-          <a:p>
-            <a:r>
-              <a:rPr lang="fr-FR" dirty="0"/>
-              <a:t>Besoin spécifique  pour l’assistance de devis, expliqué le contexte </a:t>
-            </a:r>
-            <a:endParaRPr lang="es-AR" dirty="0"/>
+              <a:t>Walhub</a:t>
+            </a:r>
+            <a:endParaRPr lang="fr-FR" dirty="0"/>
           </a:p>
         </p:txBody>
       </p:sp>
@@ -1644,7 +1770,7 @@
     </p:spTree>
     <p:extLst>
       <p:ext uri="{BB962C8B-B14F-4D97-AF65-F5344CB8AC3E}">
-        <p14:creationId xmlns:p14="http://schemas.microsoft.com/office/powerpoint/2010/main" val="263777780"/>
+        <p14:creationId xmlns:p14="http://schemas.microsoft.com/office/powerpoint/2010/main" val="740786588"/>
       </p:ext>
     </p:extLst>
   </p:cSld>
@@ -1655,197 +1781,6 @@
 </file>
 
 <file path=ppt/notesSlides/notesSlide6.xml><?xml version="1.0" encoding="utf-8"?>
-<p:notes xmlns:a="http://schemas.openxmlformats.org/drawingml/2006/main" xmlns:r="http://schemas.openxmlformats.org/officeDocument/2006/relationships" xmlns:p="http://schemas.openxmlformats.org/presentationml/2006/main">
-  <p:cSld>
-    <p:spTree>
-      <p:nvGrpSpPr>
-        <p:cNvPr id="1" name="">
-          <a:extLst>
-            <a:ext uri="{FF2B5EF4-FFF2-40B4-BE49-F238E27FC236}">
-              <a16:creationId xmlns:a16="http://schemas.microsoft.com/office/drawing/2014/main" id="{4B800C30-892E-F168-5B04-0D869F737BDF}"/>
-            </a:ext>
-          </a:extLst>
-        </p:cNvPr>
-        <p:cNvGrpSpPr/>
-        <p:nvPr/>
-      </p:nvGrpSpPr>
-      <p:grpSpPr>
-        <a:xfrm>
-          <a:off x="0" y="0"/>
-          <a:ext cx="0" cy="0"/>
-          <a:chOff x="0" y="0"/>
-          <a:chExt cx="0" cy="0"/>
-        </a:xfrm>
-      </p:grpSpPr>
-      <p:sp>
-        <p:nvSpPr>
-          <p:cNvPr id="2" name="Espace réservé de l'image des diapositives 1">
-            <a:extLst>
-              <a:ext uri="{FF2B5EF4-FFF2-40B4-BE49-F238E27FC236}">
-                <a16:creationId xmlns:a16="http://schemas.microsoft.com/office/drawing/2014/main" id="{AE153445-C1F3-AD37-C62D-D34891D7DB95}"/>
-              </a:ext>
-            </a:extLst>
-          </p:cNvPr>
-          <p:cNvSpPr>
-            <a:spLocks noGrp="1" noRot="1" noChangeAspect="1"/>
-          </p:cNvSpPr>
-          <p:nvPr>
-            <p:ph type="sldImg"/>
-          </p:nvPr>
-        </p:nvSpPr>
-        <p:spPr/>
-      </p:sp>
-      <p:sp>
-        <p:nvSpPr>
-          <p:cNvPr id="3" name="Espace réservé des notes 2">
-            <a:extLst>
-              <a:ext uri="{FF2B5EF4-FFF2-40B4-BE49-F238E27FC236}">
-                <a16:creationId xmlns:a16="http://schemas.microsoft.com/office/drawing/2014/main" id="{B22F5839-FC25-35A1-2425-5DFE254F5465}"/>
-              </a:ext>
-            </a:extLst>
-          </p:cNvPr>
-          <p:cNvSpPr>
-            <a:spLocks noGrp="1"/>
-          </p:cNvSpPr>
-          <p:nvPr>
-            <p:ph type="body" idx="1"/>
-          </p:nvPr>
-        </p:nvSpPr>
-        <p:spPr/>
-        <p:txBody>
-          <a:bodyPr/>
-          <a:lstStyle/>
-          <a:p>
-            <a:pPr marL="0" marR="0" lvl="0" indent="0" algn="l" defTabSz="914400" rtl="0" eaLnBrk="1" fontAlgn="auto" latinLnBrk="0" hangingPunct="1">
-              <a:lnSpc>
-                <a:spcPct val="100000"/>
-              </a:lnSpc>
-              <a:spcBef>
-                <a:spcPts val="0"/>
-              </a:spcBef>
-              <a:spcAft>
-                <a:spcPts val="0"/>
-              </a:spcAft>
-              <a:buClrTx/>
-              <a:buSzTx/>
-              <a:buFontTx/>
-              <a:buNone/>
-              <a:tabLst/>
-              <a:defRPr/>
-            </a:pPr>
-            <a:r>
-              <a:rPr lang="es-AR" dirty="0" err="1"/>
-              <a:t>Fichier</a:t>
-            </a:r>
-            <a:r>
-              <a:rPr lang="es-AR" dirty="0"/>
-              <a:t> Exel qui </a:t>
-            </a:r>
-            <a:r>
-              <a:rPr lang="es-AR" dirty="0" err="1"/>
-              <a:t>est</a:t>
-            </a:r>
-            <a:r>
-              <a:rPr lang="es-AR" dirty="0"/>
-              <a:t>  la base de </a:t>
-            </a:r>
-            <a:r>
-              <a:rPr lang="es-AR" dirty="0" err="1"/>
-              <a:t>leurs</a:t>
-            </a:r>
-            <a:r>
-              <a:rPr lang="es-AR" dirty="0"/>
-              <a:t> </a:t>
-            </a:r>
-            <a:r>
-              <a:rPr lang="es-AR" dirty="0" err="1"/>
-              <a:t>devis</a:t>
-            </a:r>
-            <a:r>
-              <a:rPr lang="es-AR" dirty="0"/>
-              <a:t> </a:t>
-            </a:r>
-          </a:p>
-          <a:p>
-            <a:pPr marL="0" marR="0" lvl="0" indent="0" algn="l" defTabSz="914400" rtl="0" eaLnBrk="1" fontAlgn="auto" latinLnBrk="0" hangingPunct="1">
-              <a:lnSpc>
-                <a:spcPct val="100000"/>
-              </a:lnSpc>
-              <a:spcBef>
-                <a:spcPts val="0"/>
-              </a:spcBef>
-              <a:spcAft>
-                <a:spcPts val="0"/>
-              </a:spcAft>
-              <a:buClrTx/>
-              <a:buSzTx/>
-              <a:buFontTx/>
-              <a:buNone/>
-              <a:tabLst/>
-              <a:defRPr/>
-            </a:pPr>
-            <a:r>
-              <a:rPr lang="es-AR" dirty="0" err="1"/>
-              <a:t>Étroitement</a:t>
-            </a:r>
-            <a:r>
-              <a:rPr lang="es-AR" dirty="0"/>
-              <a:t> </a:t>
-            </a:r>
-            <a:r>
-              <a:rPr lang="es-AR" dirty="0" err="1"/>
-              <a:t>lier</a:t>
-            </a:r>
-            <a:r>
-              <a:rPr lang="es-AR" dirty="0"/>
-              <a:t> à  ODOO</a:t>
-            </a:r>
-          </a:p>
-        </p:txBody>
-      </p:sp>
-      <p:sp>
-        <p:nvSpPr>
-          <p:cNvPr id="4" name="Espace réservé du numéro de diapositive 3">
-            <a:extLst>
-              <a:ext uri="{FF2B5EF4-FFF2-40B4-BE49-F238E27FC236}">
-                <a16:creationId xmlns:a16="http://schemas.microsoft.com/office/drawing/2014/main" id="{8B17FCFA-30A5-5A44-B735-18D7C36452CB}"/>
-              </a:ext>
-            </a:extLst>
-          </p:cNvPr>
-          <p:cNvSpPr>
-            <a:spLocks noGrp="1"/>
-          </p:cNvSpPr>
-          <p:nvPr>
-            <p:ph type="sldNum" sz="quarter" idx="5"/>
-          </p:nvPr>
-        </p:nvSpPr>
-        <p:spPr/>
-        <p:txBody>
-          <a:bodyPr/>
-          <a:lstStyle/>
-          <a:p>
-            <a:fld id="{CED0BE1B-9CB8-454F-BD68-366FF85AEE84}" type="slidenum">
-              <a:rPr lang="es-AR" smtClean="0"/>
-              <a:t>6</a:t>
-            </a:fld>
-            <a:endParaRPr lang="es-AR"/>
-          </a:p>
-        </p:txBody>
-      </p:sp>
-    </p:spTree>
-    <p:extLst>
-      <p:ext uri="{BB962C8B-B14F-4D97-AF65-F5344CB8AC3E}">
-        <p14:creationId xmlns:p14="http://schemas.microsoft.com/office/powerpoint/2010/main" val="3626771347"/>
-      </p:ext>
-    </p:extLst>
-  </p:cSld>
-  <p:clrMapOvr>
-    <a:masterClrMapping/>
-  </p:clrMapOvr>
-</p:notes>
-</file>
-
-<file path=ppt/notesSlides/notesSlide7.xml><?xml version="1.0" encoding="utf-8"?>
 <p:notes xmlns:a="http://schemas.openxmlformats.org/drawingml/2006/main" xmlns:r="http://schemas.openxmlformats.org/officeDocument/2006/relationships" xmlns:p="http://schemas.openxmlformats.org/presentationml/2006/main">
   <p:cSld>
     <p:spTree>
@@ -1891,31 +1826,137 @@
           <a:p>
             <a:r>
               <a:rPr lang="fr-FR" dirty="0"/>
-              <a:t>Gratuit </a:t>
+              <a:t>Dans un premier temps j’ai simplement envoyé une image du  meuble avec un prompt basic</a:t>
             </a:r>
           </a:p>
           <a:p>
             <a:r>
               <a:rPr lang="fr-FR" dirty="0"/>
-              <a:t>restriction journalière</a:t>
-            </a:r>
-          </a:p>
+              <a:t>Besoin de plus d’informations </a:t>
+            </a:r>
+          </a:p>
+        </p:txBody>
+      </p:sp>
+      <p:sp>
+        <p:nvSpPr>
+          <p:cNvPr id="4" name="Espace réservé du numéro de diapositive 3"/>
+          <p:cNvSpPr>
+            <a:spLocks noGrp="1"/>
+          </p:cNvSpPr>
+          <p:nvPr>
+            <p:ph type="sldNum" sz="quarter" idx="5"/>
+          </p:nvPr>
+        </p:nvSpPr>
+        <p:spPr/>
+        <p:txBody>
+          <a:bodyPr/>
+          <a:lstStyle/>
+          <a:p>
+            <a:fld id="{CED0BE1B-9CB8-454F-BD68-366FF85AEE84}" type="slidenum">
+              <a:rPr lang="es-AR" smtClean="0"/>
+              <a:t>6</a:t>
+            </a:fld>
+            <a:endParaRPr lang="es-AR"/>
+          </a:p>
+        </p:txBody>
+      </p:sp>
+    </p:spTree>
+    <p:extLst>
+      <p:ext uri="{BB962C8B-B14F-4D97-AF65-F5344CB8AC3E}">
+        <p14:creationId xmlns:p14="http://schemas.microsoft.com/office/powerpoint/2010/main" val="2285810663"/>
+      </p:ext>
+    </p:extLst>
+  </p:cSld>
+  <p:clrMapOvr>
+    <a:masterClrMapping/>
+  </p:clrMapOvr>
+</p:notes>
+</file>
+
+<file path=ppt/notesSlides/notesSlide7.xml><?xml version="1.0" encoding="utf-8"?>
+<p:notes xmlns:a="http://schemas.openxmlformats.org/drawingml/2006/main" xmlns:r="http://schemas.openxmlformats.org/officeDocument/2006/relationships" xmlns:p="http://schemas.openxmlformats.org/presentationml/2006/main">
+  <p:cSld>
+    <p:spTree>
+      <p:nvGrpSpPr>
+        <p:cNvPr id="1" name="">
+          <a:extLst>
+            <a:ext uri="{FF2B5EF4-FFF2-40B4-BE49-F238E27FC236}">
+              <a16:creationId xmlns:a16="http://schemas.microsoft.com/office/drawing/2014/main" id="{C15740F1-4164-781E-1209-A2D75EE997E9}"/>
+            </a:ext>
+          </a:extLst>
+        </p:cNvPr>
+        <p:cNvGrpSpPr/>
+        <p:nvPr/>
+      </p:nvGrpSpPr>
+      <p:grpSpPr>
+        <a:xfrm>
+          <a:off x="0" y="0"/>
+          <a:ext cx="0" cy="0"/>
+          <a:chOff x="0" y="0"/>
+          <a:chExt cx="0" cy="0"/>
+        </a:xfrm>
+      </p:grpSpPr>
+      <p:sp>
+        <p:nvSpPr>
+          <p:cNvPr id="2" name="Espace réservé de l'image des diapositives 1">
+            <a:extLst>
+              <a:ext uri="{FF2B5EF4-FFF2-40B4-BE49-F238E27FC236}">
+                <a16:creationId xmlns:a16="http://schemas.microsoft.com/office/drawing/2014/main" id="{C18EE7B5-2BA3-6B6D-7FF2-F89F7FDB618D}"/>
+              </a:ext>
+            </a:extLst>
+          </p:cNvPr>
+          <p:cNvSpPr>
+            <a:spLocks noGrp="1" noRot="1" noChangeAspect="1"/>
+          </p:cNvSpPr>
+          <p:nvPr>
+            <p:ph type="sldImg"/>
+          </p:nvPr>
+        </p:nvSpPr>
+        <p:spPr/>
+      </p:sp>
+      <p:sp>
+        <p:nvSpPr>
+          <p:cNvPr id="3" name="Espace réservé des notes 2">
+            <a:extLst>
+              <a:ext uri="{FF2B5EF4-FFF2-40B4-BE49-F238E27FC236}">
+                <a16:creationId xmlns:a16="http://schemas.microsoft.com/office/drawing/2014/main" id="{FFA29F9A-770A-4DDE-7BC2-6B2090D79224}"/>
+              </a:ext>
+            </a:extLst>
+          </p:cNvPr>
+          <p:cNvSpPr>
+            <a:spLocks noGrp="1"/>
+          </p:cNvSpPr>
+          <p:nvPr>
+            <p:ph type="body" idx="1"/>
+          </p:nvPr>
+        </p:nvSpPr>
+        <p:spPr/>
+        <p:txBody>
+          <a:bodyPr/>
+          <a:lstStyle/>
           <a:p>
             <a:r>
               <a:rPr lang="fr-FR" dirty="0"/>
-              <a:t>mais première impulsion cadre </a:t>
-            </a:r>
-            <a:r>
-              <a:rPr lang="fr-FR" dirty="0" err="1"/>
-              <a:t>Walhub</a:t>
-            </a:r>
-            <a:endParaRPr lang="fr-FR" dirty="0"/>
-          </a:p>
-        </p:txBody>
-      </p:sp>
-      <p:sp>
-        <p:nvSpPr>
-          <p:cNvPr id="4" name="Espace réservé du numéro de diapositive 3"/>
+              <a:t>Une Liste des matériaux</a:t>
+            </a:r>
+          </a:p>
+          <a:p>
+            <a:r>
+              <a:rPr lang="fr-FR" dirty="0"/>
+              <a:t>Et la Liste des main d’oeuvr²e et le coup horaire </a:t>
+            </a:r>
+          </a:p>
+        </p:txBody>
+      </p:sp>
+      <p:sp>
+        <p:nvSpPr>
+          <p:cNvPr id="4" name="Espace réservé du numéro de diapositive 3">
+            <a:extLst>
+              <a:ext uri="{FF2B5EF4-FFF2-40B4-BE49-F238E27FC236}">
+                <a16:creationId xmlns:a16="http://schemas.microsoft.com/office/drawing/2014/main" id="{F0B7832E-C455-EAF3-989C-3A14A8154965}"/>
+              </a:ext>
+            </a:extLst>
+          </p:cNvPr>
           <p:cNvSpPr>
             <a:spLocks noGrp="1"/>
           </p:cNvSpPr>
@@ -1939,7 +1980,7 @@
     </p:spTree>
     <p:extLst>
       <p:ext uri="{BB962C8B-B14F-4D97-AF65-F5344CB8AC3E}">
-        <p14:creationId xmlns:p14="http://schemas.microsoft.com/office/powerpoint/2010/main" val="740786588"/>
+        <p14:creationId xmlns:p14="http://schemas.microsoft.com/office/powerpoint/2010/main" val="822254583"/>
       </p:ext>
     </p:extLst>
   </p:cSld>
@@ -1993,7 +2034,16 @@
           <a:bodyPr/>
           <a:lstStyle/>
           <a:p>
-            <a:endParaRPr lang="fr-FR" dirty="0"/>
+            <a:r>
+              <a:rPr lang="fr-FR" dirty="0"/>
+              <a:t>Echelle 1/1</a:t>
+            </a:r>
+          </a:p>
+          <a:p>
+            <a:r>
+              <a:rPr lang="fr-FR" dirty="0"/>
+              <a:t>ou  une mesure </a:t>
+            </a:r>
           </a:p>
         </p:txBody>
       </p:sp>
@@ -2023,7 +2073,7 @@
     </p:spTree>
     <p:extLst>
       <p:ext uri="{BB962C8B-B14F-4D97-AF65-F5344CB8AC3E}">
-        <p14:creationId xmlns:p14="http://schemas.microsoft.com/office/powerpoint/2010/main" val="2285810663"/>
+        <p14:creationId xmlns:p14="http://schemas.microsoft.com/office/powerpoint/2010/main" val="2728888653"/>
       </p:ext>
     </p:extLst>
   </p:cSld>
@@ -2038,13 +2088,7 @@
   <p:cSld>
     <p:spTree>
       <p:nvGrpSpPr>
-        <p:cNvPr id="1" name="">
-          <a:extLst>
-            <a:ext uri="{FF2B5EF4-FFF2-40B4-BE49-F238E27FC236}">
-              <a16:creationId xmlns:a16="http://schemas.microsoft.com/office/drawing/2014/main" id="{C15740F1-4164-781E-1209-A2D75EE997E9}"/>
-            </a:ext>
-          </a:extLst>
-        </p:cNvPr>
+        <p:cNvPr id="1" name=""/>
         <p:cNvGrpSpPr/>
         <p:nvPr/>
       </p:nvGrpSpPr>
@@ -2058,13 +2102,7 @@
       </p:grpSpPr>
       <p:sp>
         <p:nvSpPr>
-          <p:cNvPr id="2" name="Espace réservé de l'image des diapositives 1">
-            <a:extLst>
-              <a:ext uri="{FF2B5EF4-FFF2-40B4-BE49-F238E27FC236}">
-                <a16:creationId xmlns:a16="http://schemas.microsoft.com/office/drawing/2014/main" id="{C18EE7B5-2BA3-6B6D-7FF2-F89F7FDB618D}"/>
-              </a:ext>
-            </a:extLst>
-          </p:cNvPr>
+          <p:cNvPr id="2" name="Espace réservé de l'image des diapositives 1"/>
           <p:cNvSpPr>
             <a:spLocks noGrp="1" noRot="1" noChangeAspect="1"/>
           </p:cNvSpPr>
@@ -2076,13 +2114,7 @@
       </p:sp>
       <p:sp>
         <p:nvSpPr>
-          <p:cNvPr id="3" name="Espace réservé des notes 2">
-            <a:extLst>
-              <a:ext uri="{FF2B5EF4-FFF2-40B4-BE49-F238E27FC236}">
-                <a16:creationId xmlns:a16="http://schemas.microsoft.com/office/drawing/2014/main" id="{FFA29F9A-770A-4DDE-7BC2-6B2090D79224}"/>
-              </a:ext>
-            </a:extLst>
-          </p:cNvPr>
+          <p:cNvPr id="3" name="Espace réservé des notes 2"/>
           <p:cNvSpPr>
             <a:spLocks noGrp="1"/>
           </p:cNvSpPr>
@@ -2097,26 +2129,95 @@
           <a:p>
             <a:r>
               <a:rPr lang="fr-FR" dirty="0"/>
-              <a:t>Liste des mat </a:t>
-            </a:r>
+              <a:t>Se spécialisé </a:t>
+            </a:r>
+          </a:p>
+          <a:p>
+            <a:endParaRPr lang="fr-FR" dirty="0"/>
           </a:p>
           <a:p>
             <a:r>
               <a:rPr lang="fr-FR" dirty="0"/>
-              <a:t>Liste des main d’oeuvr²e et le coup horaire </a:t>
-            </a:r>
-          </a:p>
-        </p:txBody>
-      </p:sp>
-      <p:sp>
-        <p:nvSpPr>
-          <p:cNvPr id="4" name="Espace réservé du numéro de diapositive 3">
-            <a:extLst>
-              <a:ext uri="{FF2B5EF4-FFF2-40B4-BE49-F238E27FC236}">
-                <a16:creationId xmlns:a16="http://schemas.microsoft.com/office/drawing/2014/main" id="{F0B7832E-C455-EAF3-989C-3A14A8154965}"/>
-              </a:ext>
-            </a:extLst>
-          </p:cNvPr>
+              <a:t>Une suite de taches :</a:t>
+            </a:r>
+          </a:p>
+          <a:p>
+            <a:r>
+              <a:rPr lang="fr-FR" dirty="0"/>
+              <a:t> complexité + longueurs</a:t>
+            </a:r>
+          </a:p>
+          <a:p>
+            <a:r>
+              <a:rPr lang="fr-FR" dirty="0"/>
+              <a:t>	</a:t>
+            </a:r>
+          </a:p>
+          <a:p>
+            <a:r>
+              <a:rPr lang="fr-FR" dirty="0"/>
+              <a:t>Quant mat </a:t>
+            </a:r>
+          </a:p>
+          <a:p>
+            <a:r>
+              <a:rPr lang="fr-FR" dirty="0"/>
+              <a:t>Quant main œuvres </a:t>
+            </a:r>
+          </a:p>
+          <a:p>
+            <a:r>
+              <a:rPr lang="fr-FR" dirty="0"/>
+              <a:t>Calcul</a:t>
+            </a:r>
+          </a:p>
+          <a:p>
+            <a:r>
+              <a:rPr lang="fr-FR" dirty="0"/>
+              <a:t>J’ai  mis en place Processus </a:t>
+            </a:r>
+            <a:r>
+              <a:rPr lang="fr-FR" dirty="0" err="1"/>
+              <a:t>iteratifs</a:t>
+            </a:r>
+            <a:endParaRPr lang="fr-FR" dirty="0"/>
+          </a:p>
+          <a:p>
+            <a:r>
+              <a:rPr lang="fr-FR" dirty="0"/>
+              <a:t>Avec une </a:t>
+            </a:r>
+            <a:r>
+              <a:rPr lang="fr-FR" dirty="0" err="1"/>
+              <a:t>mopyenne</a:t>
+            </a:r>
+            <a:r>
+              <a:rPr lang="fr-FR" dirty="0"/>
+              <a:t> écart type </a:t>
+            </a:r>
+          </a:p>
+          <a:p>
+            <a:r>
+              <a:rPr lang="fr-FR" dirty="0"/>
+              <a:t>Le modèle </a:t>
+            </a:r>
+            <a:r>
+              <a:rPr lang="fr-FR" dirty="0" err="1"/>
+              <a:t>haliciné</a:t>
+            </a:r>
+            <a:r>
+              <a:rPr lang="fr-FR" dirty="0"/>
+              <a:t> </a:t>
+            </a:r>
+          </a:p>
+          <a:p>
+            <a:endParaRPr lang="fr-FR" dirty="0"/>
+          </a:p>
+        </p:txBody>
+      </p:sp>
+      <p:sp>
+        <p:nvSpPr>
+          <p:cNvPr id="4" name="Espace réservé du numéro de diapositive 3"/>
           <p:cNvSpPr>
             <a:spLocks noGrp="1"/>
           </p:cNvSpPr>
@@ -2140,7 +2241,7 @@
     </p:spTree>
     <p:extLst>
       <p:ext uri="{BB962C8B-B14F-4D97-AF65-F5344CB8AC3E}">
-        <p14:creationId xmlns:p14="http://schemas.microsoft.com/office/powerpoint/2010/main" val="822254583"/>
+        <p14:creationId xmlns:p14="http://schemas.microsoft.com/office/powerpoint/2010/main" val="3185270882"/>
       </p:ext>
     </p:extLst>
   </p:cSld>
@@ -2299,7 +2400,7 @@
           <a:p>
             <a:fld id="{AFF98120-A03B-421F-8E42-0D275B84E880}" type="datetimeFigureOut">
               <a:rPr lang="es-AR" smtClean="0"/>
-              <a:t>24/2/2026</a:t>
+              <a:t>25/2/2026</a:t>
             </a:fld>
             <a:endParaRPr lang="es-AR"/>
           </a:p>
@@ -2499,7 +2600,7 @@
           <a:p>
             <a:fld id="{AFF98120-A03B-421F-8E42-0D275B84E880}" type="datetimeFigureOut">
               <a:rPr lang="es-AR" smtClean="0"/>
-              <a:t>24/2/2026</a:t>
+              <a:t>25/2/2026</a:t>
             </a:fld>
             <a:endParaRPr lang="es-AR"/>
           </a:p>
@@ -2709,7 +2810,7 @@
           <a:p>
             <a:fld id="{AFF98120-A03B-421F-8E42-0D275B84E880}" type="datetimeFigureOut">
               <a:rPr lang="es-AR" smtClean="0"/>
-              <a:t>24/2/2026</a:t>
+              <a:t>25/2/2026</a:t>
             </a:fld>
             <a:endParaRPr lang="es-AR"/>
           </a:p>
@@ -2909,7 +3010,7 @@
           <a:p>
             <a:fld id="{AFF98120-A03B-421F-8E42-0D275B84E880}" type="datetimeFigureOut">
               <a:rPr lang="es-AR" smtClean="0"/>
-              <a:t>24/2/2026</a:t>
+              <a:t>25/2/2026</a:t>
             </a:fld>
             <a:endParaRPr lang="es-AR"/>
           </a:p>
@@ -3185,7 +3286,7 @@
           <a:p>
             <a:fld id="{AFF98120-A03B-421F-8E42-0D275B84E880}" type="datetimeFigureOut">
               <a:rPr lang="es-AR" smtClean="0"/>
-              <a:t>24/2/2026</a:t>
+              <a:t>25/2/2026</a:t>
             </a:fld>
             <a:endParaRPr lang="es-AR"/>
           </a:p>
@@ -3453,7 +3554,7 @@
           <a:p>
             <a:fld id="{AFF98120-A03B-421F-8E42-0D275B84E880}" type="datetimeFigureOut">
               <a:rPr lang="es-AR" smtClean="0"/>
-              <a:t>24/2/2026</a:t>
+              <a:t>25/2/2026</a:t>
             </a:fld>
             <a:endParaRPr lang="es-AR"/>
           </a:p>
@@ -3868,7 +3969,7 @@
           <a:p>
             <a:fld id="{AFF98120-A03B-421F-8E42-0D275B84E880}" type="datetimeFigureOut">
               <a:rPr lang="es-AR" smtClean="0"/>
-              <a:t>24/2/2026</a:t>
+              <a:t>25/2/2026</a:t>
             </a:fld>
             <a:endParaRPr lang="es-AR"/>
           </a:p>
@@ -4010,7 +4111,7 @@
           <a:p>
             <a:fld id="{AFF98120-A03B-421F-8E42-0D275B84E880}" type="datetimeFigureOut">
               <a:rPr lang="es-AR" smtClean="0"/>
-              <a:t>24/2/2026</a:t>
+              <a:t>25/2/2026</a:t>
             </a:fld>
             <a:endParaRPr lang="es-AR"/>
           </a:p>
@@ -4123,7 +4224,7 @@
           <a:p>
             <a:fld id="{AFF98120-A03B-421F-8E42-0D275B84E880}" type="datetimeFigureOut">
               <a:rPr lang="es-AR" smtClean="0"/>
-              <a:t>24/2/2026</a:t>
+              <a:t>25/2/2026</a:t>
             </a:fld>
             <a:endParaRPr lang="es-AR"/>
           </a:p>
@@ -4436,7 +4537,7 @@
           <a:p>
             <a:fld id="{AFF98120-A03B-421F-8E42-0D275B84E880}" type="datetimeFigureOut">
               <a:rPr lang="es-AR" smtClean="0"/>
-              <a:t>24/2/2026</a:t>
+              <a:t>25/2/2026</a:t>
             </a:fld>
             <a:endParaRPr lang="es-AR"/>
           </a:p>
@@ -4725,7 +4826,7 @@
           <a:p>
             <a:fld id="{AFF98120-A03B-421F-8E42-0D275B84E880}" type="datetimeFigureOut">
               <a:rPr lang="es-AR" smtClean="0"/>
-              <a:t>24/2/2026</a:t>
+              <a:t>25/2/2026</a:t>
             </a:fld>
             <a:endParaRPr lang="es-AR"/>
           </a:p>
@@ -4968,7 +5069,7 @@
           <a:p>
             <a:fld id="{AFF98120-A03B-421F-8E42-0D275B84E880}" type="datetimeFigureOut">
               <a:rPr lang="es-AR" smtClean="0"/>
-              <a:t>24/2/2026</a:t>
+              <a:t>25/2/2026</a:t>
             </a:fld>
             <a:endParaRPr lang="es-AR"/>
           </a:p>
@@ -5837,1080 +5938,6 @@
       </p:grpSpPr>
       <p:sp useBgFill="1">
         <p:nvSpPr>
-          <p:cNvPr id="45" name="Rectangle 44">
-            <a:extLst>
-              <a:ext uri="{FF2B5EF4-FFF2-40B4-BE49-F238E27FC236}">
-                <a16:creationId xmlns:a16="http://schemas.microsoft.com/office/drawing/2014/main" id="{058A14AF-9FB5-4CC7-BA35-E8E85D3EDF0E}"/>
-              </a:ext>
-              <a:ext uri="{C183D7F6-B498-43B3-948B-1728B52AA6E4}">
-                <adec:decorative xmlns:adec="http://schemas.microsoft.com/office/drawing/2017/decorative" val="1"/>
-              </a:ext>
-            </a:extLst>
-          </p:cNvPr>
-          <p:cNvSpPr>
-            <a:spLocks noGrp="1" noRot="1" noChangeAspect="1" noMove="1" noResize="1" noEditPoints="1" noAdjustHandles="1" noChangeArrowheads="1" noChangeShapeType="1" noTextEdit="1"/>
-          </p:cNvSpPr>
-          <p:nvPr>
-            <p:extLst>
-              <p:ext uri="{386F3935-93C4-4BCD-93E2-E3B085C9AB24}">
-                <p16:designElem xmlns:p16="http://schemas.microsoft.com/office/powerpoint/2015/main" val="1"/>
-              </p:ext>
-            </p:extLst>
-          </p:nvPr>
-        </p:nvSpPr>
-        <p:spPr>
-          <a:xfrm>
-            <a:off x="0" y="0"/>
-            <a:ext cx="12191999" cy="6857365"/>
-          </a:xfrm>
-          <a:prstGeom prst="rect">
-            <a:avLst/>
-          </a:prstGeom>
-          <a:ln>
-            <a:noFill/>
-          </a:ln>
-        </p:spPr>
-        <p:style>
-          <a:lnRef idx="2">
-            <a:schemeClr val="accent1">
-              <a:shade val="50000"/>
-            </a:schemeClr>
-          </a:lnRef>
-          <a:fillRef idx="1">
-            <a:schemeClr val="accent1"/>
-          </a:fillRef>
-          <a:effectRef idx="0">
-            <a:schemeClr val="accent1"/>
-          </a:effectRef>
-          <a:fontRef idx="minor">
-            <a:schemeClr val="lt1"/>
-          </a:fontRef>
-        </p:style>
-        <p:txBody>
-          <a:bodyPr rtlCol="0" anchor="ctr"/>
-          <a:lstStyle/>
-          <a:p>
-            <a:pPr algn="ctr"/>
-            <a:endParaRPr lang="en-US"/>
-          </a:p>
-        </p:txBody>
-      </p:sp>
-      <p:sp>
-        <p:nvSpPr>
-          <p:cNvPr id="2" name="Titre 1">
-            <a:extLst>
-              <a:ext uri="{FF2B5EF4-FFF2-40B4-BE49-F238E27FC236}">
-                <a16:creationId xmlns:a16="http://schemas.microsoft.com/office/drawing/2014/main" id="{F29C2CF4-9C9E-0AE0-07D4-821DC591368E}"/>
-              </a:ext>
-            </a:extLst>
-          </p:cNvPr>
-          <p:cNvSpPr>
-            <a:spLocks noGrp="1"/>
-          </p:cNvSpPr>
-          <p:nvPr>
-            <p:ph type="title"/>
-          </p:nvPr>
-        </p:nvSpPr>
-        <p:spPr>
-          <a:xfrm>
-            <a:off x="793662" y="386930"/>
-            <a:ext cx="10066122" cy="1298448"/>
-          </a:xfrm>
-        </p:spPr>
-        <p:txBody>
-          <a:bodyPr anchor="b">
-            <a:normAutofit/>
-          </a:bodyPr>
-          <a:lstStyle/>
-          <a:p>
-            <a:r>
-              <a:rPr lang="fr-FR" sz="4800"/>
-              <a:t>Fichier STL</a:t>
-            </a:r>
-            <a:endParaRPr lang="es-AR" sz="4800"/>
-          </a:p>
-        </p:txBody>
-      </p:sp>
-      <p:sp>
-        <p:nvSpPr>
-          <p:cNvPr id="47" name="Rectangle 46">
-            <a:extLst>
-              <a:ext uri="{FF2B5EF4-FFF2-40B4-BE49-F238E27FC236}">
-                <a16:creationId xmlns:a16="http://schemas.microsoft.com/office/drawing/2014/main" id="{3A9A4357-BD1D-4622-A4FE-766E6AB8DE84}"/>
-              </a:ext>
-              <a:ext uri="{C183D7F6-B498-43B3-948B-1728B52AA6E4}">
-                <adec:decorative xmlns:adec="http://schemas.microsoft.com/office/drawing/2017/decorative" val="1"/>
-              </a:ext>
-            </a:extLst>
-          </p:cNvPr>
-          <p:cNvSpPr>
-            <a:spLocks noGrp="1" noRot="1" noChangeAspect="1" noMove="1" noResize="1" noEditPoints="1" noAdjustHandles="1" noChangeArrowheads="1" noChangeShapeType="1" noTextEdit="1"/>
-          </p:cNvSpPr>
-          <p:nvPr>
-            <p:extLst>
-              <p:ext uri="{386F3935-93C4-4BCD-93E2-E3B085C9AB24}">
-                <p16:designElem xmlns:p16="http://schemas.microsoft.com/office/powerpoint/2015/main" val="1"/>
-              </p:ext>
-            </p:extLst>
-          </p:nvPr>
-        </p:nvSpPr>
-        <p:spPr>
-          <a:xfrm flipH="1" flipV="1">
-            <a:off x="-2" y="1998845"/>
-            <a:ext cx="11454595" cy="781699"/>
-          </a:xfrm>
-          <a:prstGeom prst="rect">
-            <a:avLst/>
-          </a:prstGeom>
-          <a:solidFill>
-            <a:schemeClr val="accent4"/>
-          </a:solidFill>
-          <a:ln>
-            <a:noFill/>
-          </a:ln>
-        </p:spPr>
-        <p:style>
-          <a:lnRef idx="2">
-            <a:schemeClr val="accent1">
-              <a:shade val="50000"/>
-            </a:schemeClr>
-          </a:lnRef>
-          <a:fillRef idx="1">
-            <a:schemeClr val="accent1"/>
-          </a:fillRef>
-          <a:effectRef idx="0">
-            <a:schemeClr val="accent1"/>
-          </a:effectRef>
-          <a:fontRef idx="minor">
-            <a:schemeClr val="lt1"/>
-          </a:fontRef>
-        </p:style>
-        <p:txBody>
-          <a:bodyPr rtlCol="0" anchor="ctr"/>
-          <a:lstStyle/>
-          <a:p>
-            <a:pPr algn="ctr"/>
-            <a:endParaRPr lang="en-US"/>
-          </a:p>
-        </p:txBody>
-      </p:sp>
-      <p:sp>
-        <p:nvSpPr>
-          <p:cNvPr id="49" name="Rectangle 48">
-            <a:extLst>
-              <a:ext uri="{FF2B5EF4-FFF2-40B4-BE49-F238E27FC236}">
-                <a16:creationId xmlns:a16="http://schemas.microsoft.com/office/drawing/2014/main" id="{E659831F-0D9A-4C63-9EBB-8435B85A440F}"/>
-              </a:ext>
-              <a:ext uri="{C183D7F6-B498-43B3-948B-1728B52AA6E4}">
-                <adec:decorative xmlns:adec="http://schemas.microsoft.com/office/drawing/2017/decorative" val="1"/>
-              </a:ext>
-            </a:extLst>
-          </p:cNvPr>
-          <p:cNvSpPr>
-            <a:spLocks noGrp="1" noRot="1" noChangeAspect="1" noMove="1" noResize="1" noEditPoints="1" noAdjustHandles="1" noChangeArrowheads="1" noChangeShapeType="1" noTextEdit="1"/>
-          </p:cNvSpPr>
-          <p:nvPr>
-            <p:extLst>
-              <p:ext uri="{386F3935-93C4-4BCD-93E2-E3B085C9AB24}">
-                <p16:designElem xmlns:p16="http://schemas.microsoft.com/office/powerpoint/2015/main" val="1"/>
-              </p:ext>
-            </p:extLst>
-          </p:nvPr>
-        </p:nvSpPr>
-        <p:spPr>
-          <a:xfrm>
-            <a:off x="0" y="2203079"/>
-            <a:ext cx="11383362" cy="4267991"/>
-          </a:xfrm>
-          <a:prstGeom prst="rect">
-            <a:avLst/>
-          </a:prstGeom>
-          <a:solidFill>
-            <a:schemeClr val="bg1"/>
-          </a:solidFill>
-          <a:ln>
-            <a:noFill/>
-          </a:ln>
-          <a:effectLst>
-            <a:outerShdw blurRad="139700" dist="127000" dir="5400000" algn="t" rotWithShape="0">
-              <a:prstClr val="black">
-                <a:alpha val="15000"/>
-              </a:prstClr>
-            </a:outerShdw>
-          </a:effectLst>
-        </p:spPr>
-        <p:style>
-          <a:lnRef idx="2">
-            <a:schemeClr val="accent1">
-              <a:shade val="50000"/>
-            </a:schemeClr>
-          </a:lnRef>
-          <a:fillRef idx="1">
-            <a:schemeClr val="accent1"/>
-          </a:fillRef>
-          <a:effectRef idx="0">
-            <a:schemeClr val="accent1"/>
-          </a:effectRef>
-          <a:fontRef idx="minor">
-            <a:schemeClr val="lt1"/>
-          </a:fontRef>
-        </p:style>
-        <p:txBody>
-          <a:bodyPr rtlCol="0" anchor="ctr"/>
-          <a:lstStyle/>
-          <a:p>
-            <a:pPr algn="ctr"/>
-            <a:endParaRPr lang="en-US"/>
-          </a:p>
-        </p:txBody>
-      </p:sp>
-      <p:sp>
-        <p:nvSpPr>
-          <p:cNvPr id="3" name="Espace réservé du contenu 2">
-            <a:extLst>
-              <a:ext uri="{FF2B5EF4-FFF2-40B4-BE49-F238E27FC236}">
-                <a16:creationId xmlns:a16="http://schemas.microsoft.com/office/drawing/2014/main" id="{DC69139D-ACD7-DA3C-913F-D7CA99A9E9D1}"/>
-              </a:ext>
-            </a:extLst>
-          </p:cNvPr>
-          <p:cNvSpPr>
-            <a:spLocks noGrp="1"/>
-          </p:cNvSpPr>
-          <p:nvPr>
-            <p:ph idx="1"/>
-          </p:nvPr>
-        </p:nvSpPr>
-        <p:spPr>
-          <a:xfrm>
-            <a:off x="793661" y="2599509"/>
-            <a:ext cx="4530898" cy="3639450"/>
-          </a:xfrm>
-        </p:spPr>
-        <p:txBody>
-          <a:bodyPr anchor="ctr">
-            <a:normAutofit/>
-          </a:bodyPr>
-          <a:lstStyle/>
-          <a:p>
-            <a:r>
-              <a:rPr lang="fr-FR" sz="2000" dirty="0"/>
-              <a:t>Fichier STL :</a:t>
-            </a:r>
-          </a:p>
-          <a:p>
-            <a:pPr lvl="1"/>
-            <a:r>
-              <a:rPr lang="fr-FR" sz="2000" dirty="0"/>
-              <a:t>la géométrie 3D</a:t>
-            </a:r>
-          </a:p>
-          <a:p>
-            <a:pPr lvl="1"/>
-            <a:r>
-              <a:rPr lang="fr-FR" sz="2000" dirty="0"/>
-              <a:t>le volume de la pièce</a:t>
-            </a:r>
-            <a:endParaRPr lang="es-AR" sz="2000" dirty="0"/>
-          </a:p>
-        </p:txBody>
-      </p:sp>
-      <p:pic>
-        <p:nvPicPr>
-          <p:cNvPr id="8" name="Image 7" descr="Une image contenant croquis, dessin, art, conception&#10;&#10;Le contenu généré par l’IA peut être incorrect.">
-            <a:extLst>
-              <a:ext uri="{FF2B5EF4-FFF2-40B4-BE49-F238E27FC236}">
-                <a16:creationId xmlns:a16="http://schemas.microsoft.com/office/drawing/2014/main" id="{9D4BEC2C-210C-AEE0-0963-510742BDB24C}"/>
-              </a:ext>
-            </a:extLst>
-          </p:cNvPr>
-          <p:cNvPicPr>
-            <a:picLocks noChangeAspect="1"/>
-          </p:cNvPicPr>
-          <p:nvPr/>
-        </p:nvPicPr>
-        <p:blipFill>
-          <a:blip r:embed="rId3"/>
-          <a:stretch>
-            <a:fillRect/>
-          </a:stretch>
-        </p:blipFill>
-        <p:spPr>
-          <a:xfrm>
-            <a:off x="5911532" y="2970116"/>
-            <a:ext cx="5150277" cy="2742522"/>
-          </a:xfrm>
-          <a:prstGeom prst="rect">
-            <a:avLst/>
-          </a:prstGeom>
-        </p:spPr>
-      </p:pic>
-      <p:sp>
-        <p:nvSpPr>
-          <p:cNvPr id="51" name="Rectangle 50">
-            <a:extLst>
-              <a:ext uri="{FF2B5EF4-FFF2-40B4-BE49-F238E27FC236}">
-                <a16:creationId xmlns:a16="http://schemas.microsoft.com/office/drawing/2014/main" id="{E6995CE5-F890-4ABA-82A2-26507CE8D2A3}"/>
-              </a:ext>
-              <a:ext uri="{C183D7F6-B498-43B3-948B-1728B52AA6E4}">
-                <adec:decorative xmlns:adec="http://schemas.microsoft.com/office/drawing/2017/decorative" val="1"/>
-              </a:ext>
-            </a:extLst>
-          </p:cNvPr>
-          <p:cNvSpPr>
-            <a:spLocks noGrp="1" noRot="1" noChangeAspect="1" noMove="1" noResize="1" noEditPoints="1" noAdjustHandles="1" noChangeArrowheads="1" noChangeShapeType="1" noTextEdit="1"/>
-          </p:cNvSpPr>
-          <p:nvPr>
-            <p:extLst>
-              <p:ext uri="{386F3935-93C4-4BCD-93E2-E3B085C9AB24}">
-                <p16:designElem xmlns:p16="http://schemas.microsoft.com/office/powerpoint/2015/main" val="1"/>
-              </p:ext>
-            </p:extLst>
-          </p:nvPr>
-        </p:nvSpPr>
-        <p:spPr>
-          <a:xfrm rot="5400000">
-            <a:off x="11228040" y="2313027"/>
-            <a:ext cx="781700" cy="152382"/>
-          </a:xfrm>
-          <a:prstGeom prst="rect">
-            <a:avLst/>
-          </a:prstGeom>
-          <a:solidFill>
-            <a:schemeClr val="accent4"/>
-          </a:solidFill>
-          <a:ln>
-            <a:noFill/>
-          </a:ln>
-        </p:spPr>
-        <p:style>
-          <a:lnRef idx="2">
-            <a:schemeClr val="accent1">
-              <a:shade val="50000"/>
-            </a:schemeClr>
-          </a:lnRef>
-          <a:fillRef idx="1">
-            <a:schemeClr val="accent1"/>
-          </a:fillRef>
-          <a:effectRef idx="0">
-            <a:schemeClr val="accent1"/>
-          </a:effectRef>
-          <a:fontRef idx="minor">
-            <a:schemeClr val="lt1"/>
-          </a:fontRef>
-        </p:style>
-        <p:txBody>
-          <a:bodyPr rtlCol="0" anchor="ctr"/>
-          <a:lstStyle/>
-          <a:p>
-            <a:pPr algn="ctr"/>
-            <a:endParaRPr lang="en-US"/>
-          </a:p>
-        </p:txBody>
-      </p:sp>
-    </p:spTree>
-    <p:extLst>
-      <p:ext uri="{BB962C8B-B14F-4D97-AF65-F5344CB8AC3E}">
-        <p14:creationId xmlns:p14="http://schemas.microsoft.com/office/powerpoint/2010/main" val="247735772"/>
-      </p:ext>
-    </p:extLst>
-  </p:cSld>
-  <p:clrMapOvr>
-    <a:masterClrMapping/>
-  </p:clrMapOvr>
-</p:sld>
-</file>
-
-<file path=ppt/slides/slide11.xml><?xml version="1.0" encoding="utf-8"?>
-<p:sld xmlns:a="http://schemas.openxmlformats.org/drawingml/2006/main" xmlns:r="http://schemas.openxmlformats.org/officeDocument/2006/relationships" xmlns:p="http://schemas.openxmlformats.org/presentationml/2006/main">
-  <p:cSld>
-    <p:bg>
-      <p:bgPr>
-        <a:solidFill>
-          <a:schemeClr val="bg1"/>
-        </a:solidFill>
-        <a:effectLst/>
-      </p:bgPr>
-    </p:bg>
-    <p:spTree>
-      <p:nvGrpSpPr>
-        <p:cNvPr id="1" name="">
-          <a:extLst>
-            <a:ext uri="{FF2B5EF4-FFF2-40B4-BE49-F238E27FC236}">
-              <a16:creationId xmlns:a16="http://schemas.microsoft.com/office/drawing/2014/main" id="{3DB78C39-F60A-997F-F0B9-7A19DE849337}"/>
-            </a:ext>
-          </a:extLst>
-        </p:cNvPr>
-        <p:cNvGrpSpPr/>
-        <p:nvPr/>
-      </p:nvGrpSpPr>
-      <p:grpSpPr>
-        <a:xfrm>
-          <a:off x="0" y="0"/>
-          <a:ext cx="0" cy="0"/>
-          <a:chOff x="0" y="0"/>
-          <a:chExt cx="0" cy="0"/>
-        </a:xfrm>
-      </p:grpSpPr>
-      <p:sp useBgFill="1">
-        <p:nvSpPr>
-          <p:cNvPr id="84" name="Rectangle 83">
-            <a:extLst>
-              <a:ext uri="{FF2B5EF4-FFF2-40B4-BE49-F238E27FC236}">
-                <a16:creationId xmlns:a16="http://schemas.microsoft.com/office/drawing/2014/main" id="{8B9AA7C6-5E5A-498E-A6DF-A943376E09BC}"/>
-              </a:ext>
-              <a:ext uri="{C183D7F6-B498-43B3-948B-1728B52AA6E4}">
-                <adec:decorative xmlns:adec="http://schemas.microsoft.com/office/drawing/2017/decorative" val="1"/>
-              </a:ext>
-            </a:extLst>
-          </p:cNvPr>
-          <p:cNvSpPr>
-            <a:spLocks noGrp="1" noRot="1" noChangeAspect="1" noMove="1" noResize="1" noEditPoints="1" noAdjustHandles="1" noChangeArrowheads="1" noChangeShapeType="1" noTextEdit="1"/>
-          </p:cNvSpPr>
-          <p:nvPr>
-            <p:extLst>
-              <p:ext uri="{386F3935-93C4-4BCD-93E2-E3B085C9AB24}">
-                <p16:designElem xmlns:p16="http://schemas.microsoft.com/office/powerpoint/2015/main" val="1"/>
-              </p:ext>
-            </p:extLst>
-          </p:nvPr>
-        </p:nvSpPr>
-        <p:spPr>
-          <a:xfrm>
-            <a:off x="0" y="0"/>
-            <a:ext cx="12191999" cy="6857365"/>
-          </a:xfrm>
-          <a:prstGeom prst="rect">
-            <a:avLst/>
-          </a:prstGeom>
-          <a:ln>
-            <a:noFill/>
-          </a:ln>
-        </p:spPr>
-        <p:style>
-          <a:lnRef idx="2">
-            <a:schemeClr val="accent1">
-              <a:shade val="50000"/>
-            </a:schemeClr>
-          </a:lnRef>
-          <a:fillRef idx="1">
-            <a:schemeClr val="accent1"/>
-          </a:fillRef>
-          <a:effectRef idx="0">
-            <a:schemeClr val="accent1"/>
-          </a:effectRef>
-          <a:fontRef idx="minor">
-            <a:schemeClr val="lt1"/>
-          </a:fontRef>
-        </p:style>
-        <p:txBody>
-          <a:bodyPr rtlCol="0" anchor="ctr"/>
-          <a:lstStyle/>
-          <a:p>
-            <a:pPr algn="ctr"/>
-            <a:endParaRPr lang="en-US"/>
-          </a:p>
-        </p:txBody>
-      </p:sp>
-      <p:grpSp>
-        <p:nvGrpSpPr>
-          <p:cNvPr id="85" name="Group 76">
-            <a:extLst>
-              <a:ext uri="{FF2B5EF4-FFF2-40B4-BE49-F238E27FC236}">
-                <a16:creationId xmlns:a16="http://schemas.microsoft.com/office/drawing/2014/main" id="{83EAB11A-76F7-48F4-9B4F-5BFDF4BF9670}"/>
-              </a:ext>
-              <a:ext uri="{C183D7F6-B498-43B3-948B-1728B52AA6E4}">
-                <adec:decorative xmlns:adec="http://schemas.microsoft.com/office/drawing/2017/decorative" val="1"/>
-              </a:ext>
-            </a:extLst>
-          </p:cNvPr>
-          <p:cNvGrpSpPr>
-            <a:grpSpLocks noGrp="1" noUngrp="1" noRot="1" noChangeAspect="1" noMove="1" noResize="1"/>
-          </p:cNvGrpSpPr>
-          <p:nvPr>
-            <p:extLst>
-              <p:ext uri="{386F3935-93C4-4BCD-93E2-E3B085C9AB24}">
-                <p16:designElem xmlns:p16="http://schemas.microsoft.com/office/powerpoint/2015/main" val="1"/>
-              </p:ext>
-            </p:extLst>
-          </p:nvPr>
-        </p:nvGrpSpPr>
-        <p:grpSpPr>
-          <a:xfrm>
-            <a:off x="74300" y="2385102"/>
-            <a:ext cx="574091" cy="2087796"/>
-            <a:chOff x="209668" y="2857422"/>
-            <a:chExt cx="463662" cy="2087796"/>
-          </a:xfrm>
-        </p:grpSpPr>
-        <p:sp>
-          <p:nvSpPr>
-            <p:cNvPr id="86" name="Rectangle 85">
-              <a:extLst>
-                <a:ext uri="{FF2B5EF4-FFF2-40B4-BE49-F238E27FC236}">
-                  <a16:creationId xmlns:a16="http://schemas.microsoft.com/office/drawing/2014/main" id="{74D4C416-D5F4-4F6F-A6F1-87A21CD4FCAF}"/>
-                </a:ext>
-                <a:ext uri="{C183D7F6-B498-43B3-948B-1728B52AA6E4}">
-                  <adec:decorative xmlns:adec="http://schemas.microsoft.com/office/drawing/2017/decorative" val="1"/>
-                </a:ext>
-              </a:extLst>
-            </p:cNvPr>
-            <p:cNvSpPr/>
-            <p:nvPr>
-              <p:extLst>
-                <p:ext uri="{386F3935-93C4-4BCD-93E2-E3B085C9AB24}">
-                  <p16:designElem xmlns:p16="http://schemas.microsoft.com/office/powerpoint/2015/main" val="1"/>
-                </p:ext>
-              </p:extLst>
-            </p:nvPr>
-          </p:nvSpPr>
-          <p:spPr>
-            <a:xfrm flipH="1" flipV="1">
-              <a:off x="423947" y="2857422"/>
-              <a:ext cx="249383" cy="2087795"/>
-            </a:xfrm>
-            <a:prstGeom prst="rect">
-              <a:avLst/>
-            </a:prstGeom>
-            <a:solidFill>
-              <a:schemeClr val="accent4"/>
-            </a:solidFill>
-            <a:ln>
-              <a:noFill/>
-            </a:ln>
-          </p:spPr>
-          <p:style>
-            <a:lnRef idx="2">
-              <a:schemeClr val="accent1">
-                <a:shade val="50000"/>
-              </a:schemeClr>
-            </a:lnRef>
-            <a:fillRef idx="1">
-              <a:schemeClr val="accent1"/>
-            </a:fillRef>
-            <a:effectRef idx="0">
-              <a:schemeClr val="accent1"/>
-            </a:effectRef>
-            <a:fontRef idx="minor">
-              <a:schemeClr val="lt1"/>
-            </a:fontRef>
-          </p:style>
-          <p:txBody>
-            <a:bodyPr rtlCol="0" anchor="ctr"/>
-            <a:lstStyle/>
-            <a:p>
-              <a:pPr algn="ctr"/>
-              <a:endParaRPr lang="en-US"/>
-            </a:p>
-          </p:txBody>
-        </p:sp>
-        <p:cxnSp>
-          <p:nvCxnSpPr>
-            <p:cNvPr id="79" name="Straight Connector 78">
-              <a:extLst>
-                <a:ext uri="{FF2B5EF4-FFF2-40B4-BE49-F238E27FC236}">
-                  <a16:creationId xmlns:a16="http://schemas.microsoft.com/office/drawing/2014/main" id="{C6AC1C30-21C6-4BF6-93EE-B211D7A85011}"/>
-                </a:ext>
-                <a:ext uri="{C183D7F6-B498-43B3-948B-1728B52AA6E4}">
-                  <adec:decorative xmlns:adec="http://schemas.microsoft.com/office/drawing/2017/decorative" val="1"/>
-                </a:ext>
-              </a:extLst>
-            </p:cNvPr>
-            <p:cNvCxnSpPr>
-              <a:cxnSpLocks/>
-            </p:cNvCxnSpPr>
-            <p:nvPr>
-              <p:extLst>
-                <p:ext uri="{386F3935-93C4-4BCD-93E2-E3B085C9AB24}">
-                  <p16:designElem xmlns:p16="http://schemas.microsoft.com/office/powerpoint/2015/main" val="1"/>
-                </p:ext>
-              </p:extLst>
-            </p:nvPr>
-          </p:nvCxnSpPr>
-          <p:spPr>
-            <a:xfrm flipH="1">
-              <a:off x="209668" y="2857423"/>
-              <a:ext cx="1" cy="2087795"/>
-            </a:xfrm>
-            <a:prstGeom prst="line">
-              <a:avLst/>
-            </a:prstGeom>
-            <a:ln w="177800">
-              <a:solidFill>
-                <a:schemeClr val="accent4"/>
-              </a:solidFill>
-            </a:ln>
-          </p:spPr>
-          <p:style>
-            <a:lnRef idx="1">
-              <a:schemeClr val="accent1"/>
-            </a:lnRef>
-            <a:fillRef idx="0">
-              <a:schemeClr val="accent1"/>
-            </a:fillRef>
-            <a:effectRef idx="0">
-              <a:schemeClr val="accent1"/>
-            </a:effectRef>
-            <a:fontRef idx="minor">
-              <a:schemeClr val="tx1"/>
-            </a:fontRef>
-          </p:style>
-        </p:cxnSp>
-      </p:grpSp>
-      <p:sp>
-        <p:nvSpPr>
-          <p:cNvPr id="87" name="Rectangle 86">
-            <a:extLst>
-              <a:ext uri="{FF2B5EF4-FFF2-40B4-BE49-F238E27FC236}">
-                <a16:creationId xmlns:a16="http://schemas.microsoft.com/office/drawing/2014/main" id="{81E140AE-0ABF-47C8-BF32-7D2F0CF2BA44}"/>
-              </a:ext>
-              <a:ext uri="{C183D7F6-B498-43B3-948B-1728B52AA6E4}">
-                <adec:decorative xmlns:adec="http://schemas.microsoft.com/office/drawing/2017/decorative" val="1"/>
-              </a:ext>
-            </a:extLst>
-          </p:cNvPr>
-          <p:cNvSpPr>
-            <a:spLocks noGrp="1" noRot="1" noChangeAspect="1" noMove="1" noResize="1" noEditPoints="1" noAdjustHandles="1" noChangeArrowheads="1" noChangeShapeType="1" noTextEdit="1"/>
-          </p:cNvSpPr>
-          <p:nvPr>
-            <p:extLst>
-              <p:ext uri="{386F3935-93C4-4BCD-93E2-E3B085C9AB24}">
-                <p16:designElem xmlns:p16="http://schemas.microsoft.com/office/powerpoint/2015/main" val="1"/>
-              </p:ext>
-            </p:extLst>
-          </p:nvPr>
-        </p:nvSpPr>
-        <p:spPr>
-          <a:xfrm flipH="1">
-            <a:off x="10697670" y="0"/>
-            <a:ext cx="1494330" cy="6858000"/>
-          </a:xfrm>
-          <a:prstGeom prst="rect">
-            <a:avLst/>
-          </a:prstGeom>
-          <a:solidFill>
-            <a:schemeClr val="accent4"/>
-          </a:solidFill>
-          <a:ln>
-            <a:noFill/>
-          </a:ln>
-        </p:spPr>
-        <p:style>
-          <a:lnRef idx="2">
-            <a:schemeClr val="accent1">
-              <a:shade val="50000"/>
-            </a:schemeClr>
-          </a:lnRef>
-          <a:fillRef idx="1">
-            <a:schemeClr val="accent1"/>
-          </a:fillRef>
-          <a:effectRef idx="0">
-            <a:schemeClr val="accent1"/>
-          </a:effectRef>
-          <a:fontRef idx="minor">
-            <a:schemeClr val="lt1"/>
-          </a:fontRef>
-        </p:style>
-        <p:txBody>
-          <a:bodyPr rtlCol="0" anchor="ctr"/>
-          <a:lstStyle/>
-          <a:p>
-            <a:pPr algn="ctr"/>
-            <a:endParaRPr lang="en-US"/>
-          </a:p>
-        </p:txBody>
-      </p:sp>
-      <p:sp>
-        <p:nvSpPr>
-          <p:cNvPr id="83" name="Rectangle 82">
-            <a:extLst>
-              <a:ext uri="{FF2B5EF4-FFF2-40B4-BE49-F238E27FC236}">
-                <a16:creationId xmlns:a16="http://schemas.microsoft.com/office/drawing/2014/main" id="{CBC4F608-B4B8-48C3-9572-C0F061B1CD99}"/>
-              </a:ext>
-              <a:ext uri="{C183D7F6-B498-43B3-948B-1728B52AA6E4}">
-                <adec:decorative xmlns:adec="http://schemas.microsoft.com/office/drawing/2017/decorative" val="1"/>
-              </a:ext>
-            </a:extLst>
-          </p:cNvPr>
-          <p:cNvSpPr>
-            <a:spLocks noGrp="1" noRot="1" noChangeAspect="1" noMove="1" noResize="1" noEditPoints="1" noAdjustHandles="1" noChangeArrowheads="1" noChangeShapeType="1" noTextEdit="1"/>
-          </p:cNvSpPr>
-          <p:nvPr>
-            <p:extLst>
-              <p:ext uri="{386F3935-93C4-4BCD-93E2-E3B085C9AB24}">
-                <p16:designElem xmlns:p16="http://schemas.microsoft.com/office/powerpoint/2015/main" val="1"/>
-              </p:ext>
-            </p:extLst>
-          </p:nvPr>
-        </p:nvSpPr>
-        <p:spPr>
-          <a:xfrm>
-            <a:off x="579528" y="631767"/>
-            <a:ext cx="11111729" cy="5752404"/>
-          </a:xfrm>
-          <a:prstGeom prst="rect">
-            <a:avLst/>
-          </a:prstGeom>
-          <a:solidFill>
-            <a:schemeClr val="bg1"/>
-          </a:solidFill>
-          <a:ln>
-            <a:noFill/>
-          </a:ln>
-          <a:effectLst>
-            <a:outerShdw blurRad="139700" dist="127000" dir="5400000" algn="t" rotWithShape="0">
-              <a:prstClr val="black">
-                <a:alpha val="15000"/>
-              </a:prstClr>
-            </a:outerShdw>
-          </a:effectLst>
-        </p:spPr>
-        <p:style>
-          <a:lnRef idx="2">
-            <a:schemeClr val="accent1">
-              <a:shade val="50000"/>
-            </a:schemeClr>
-          </a:lnRef>
-          <a:fillRef idx="1">
-            <a:schemeClr val="accent1"/>
-          </a:fillRef>
-          <a:effectRef idx="0">
-            <a:schemeClr val="accent1"/>
-          </a:effectRef>
-          <a:fontRef idx="minor">
-            <a:schemeClr val="lt1"/>
-          </a:fontRef>
-        </p:style>
-        <p:txBody>
-          <a:bodyPr rtlCol="0" anchor="ctr"/>
-          <a:lstStyle/>
-          <a:p>
-            <a:pPr algn="ctr"/>
-            <a:endParaRPr lang="en-US"/>
-          </a:p>
-        </p:txBody>
-      </p:sp>
-      <p:sp>
-        <p:nvSpPr>
-          <p:cNvPr id="2" name="Titre 1">
-            <a:extLst>
-              <a:ext uri="{FF2B5EF4-FFF2-40B4-BE49-F238E27FC236}">
-                <a16:creationId xmlns:a16="http://schemas.microsoft.com/office/drawing/2014/main" id="{BCB07747-4D69-5ABF-258D-80F805A4DDB8}"/>
-              </a:ext>
-            </a:extLst>
-          </p:cNvPr>
-          <p:cNvSpPr>
-            <a:spLocks noGrp="1"/>
-          </p:cNvSpPr>
-          <p:nvPr>
-            <p:ph type="title"/>
-          </p:nvPr>
-        </p:nvSpPr>
-        <p:spPr>
-          <a:xfrm>
-            <a:off x="1153618" y="1239927"/>
-            <a:ext cx="4008586" cy="4680583"/>
-          </a:xfrm>
-        </p:spPr>
-        <p:txBody>
-          <a:bodyPr anchor="ctr">
-            <a:normAutofit/>
-          </a:bodyPr>
-          <a:lstStyle/>
-          <a:p>
-            <a:r>
-              <a:rPr lang="fr-FR" sz="5200" dirty="0"/>
-              <a:t>Prompt</a:t>
-            </a:r>
-            <a:endParaRPr lang="es-AR" sz="5200" dirty="0"/>
-          </a:p>
-        </p:txBody>
-      </p:sp>
-      <p:sp>
-        <p:nvSpPr>
-          <p:cNvPr id="3" name="Espace réservé du contenu 2">
-            <a:extLst>
-              <a:ext uri="{FF2B5EF4-FFF2-40B4-BE49-F238E27FC236}">
-                <a16:creationId xmlns:a16="http://schemas.microsoft.com/office/drawing/2014/main" id="{E715C691-8D23-2BBB-9895-63EAE85A5079}"/>
-              </a:ext>
-            </a:extLst>
-          </p:cNvPr>
-          <p:cNvSpPr>
-            <a:spLocks noGrp="1"/>
-          </p:cNvSpPr>
-          <p:nvPr>
-            <p:ph idx="1"/>
-          </p:nvPr>
-        </p:nvSpPr>
-        <p:spPr>
-          <a:xfrm>
-            <a:off x="6291923" y="1239927"/>
-            <a:ext cx="4971824" cy="4680583"/>
-          </a:xfrm>
-        </p:spPr>
-        <p:txBody>
-          <a:bodyPr anchor="ctr">
-            <a:normAutofit/>
-          </a:bodyPr>
-          <a:lstStyle/>
-          <a:p>
-            <a:pPr marL="0" indent="0">
-              <a:buNone/>
-            </a:pPr>
-            <a:r>
-              <a:rPr lang="fr-FR" sz="1000" dirty="0"/>
-              <a:t>Tu es un expert en devis pour une entreprise spécialisée dans la fabrication de meubles sur mesure.</a:t>
-            </a:r>
-            <a:br>
-              <a:rPr lang="fr-FR" sz="1000" dirty="0"/>
-            </a:br>
-            <a:r>
-              <a:rPr lang="fr-FR" sz="1000" dirty="0"/>
-              <a:t>Tu vas analyser trois types d'entrée : une image du meuble, un fichier STL du meuble, et la liste des matériaux nécessaires à la fabrication du meuble.</a:t>
-            </a:r>
-            <a:br>
-              <a:rPr lang="fr-FR" sz="1000" dirty="0"/>
-            </a:br>
-            <a:br>
-              <a:rPr lang="fr-FR" sz="1000" dirty="0"/>
-            </a:br>
-            <a:r>
-              <a:rPr lang="fr-FR" sz="1000" dirty="0"/>
-              <a:t>Ta tâche consiste à :</a:t>
-            </a:r>
-            <a:br>
-              <a:rPr lang="fr-FR" sz="1000" dirty="0"/>
-            </a:br>
-            <a:r>
-              <a:rPr lang="fr-FR" sz="1000" dirty="0"/>
-              <a:t>1. Évaluer la complexité du meuble en s’appuyant sur les documents fournis. Dans le STL, la longueur du meuble est de 484 cm ; je te laisse en déduire le reste des cotes.</a:t>
-            </a:r>
-            <a:br>
-              <a:rPr lang="fr-FR" sz="1000" dirty="0"/>
-            </a:br>
-            <a:r>
-              <a:rPr lang="fr-FR" sz="1000" dirty="0"/>
-              <a:t>2. Estimer la quantité nécessaire pour chacun des matériaux suivants :</a:t>
-            </a:r>
-            <a:br>
-              <a:rPr lang="fr-FR" sz="1000" dirty="0"/>
-            </a:br>
-            <a:r>
-              <a:rPr lang="fr-FR" sz="1000" dirty="0"/>
-              <a:t>- Tube 30 mm x 30 mm</a:t>
-            </a:r>
-            <a:br>
-              <a:rPr lang="fr-FR" sz="1000" dirty="0"/>
-            </a:br>
-            <a:r>
-              <a:rPr lang="fr-FR" sz="1000" dirty="0"/>
-              <a:t>- SOFTWOOD 18 mm (244 cm x 122 cm)</a:t>
-            </a:r>
-            <a:br>
-              <a:rPr lang="fr-FR" sz="1000" dirty="0"/>
-            </a:br>
-            <a:r>
-              <a:rPr lang="fr-FR" sz="1000" dirty="0"/>
-              <a:t>- MDF 18 mm (305 cm x 122 cm)</a:t>
-            </a:r>
-            <a:br>
-              <a:rPr lang="fr-FR" sz="1000" dirty="0"/>
-            </a:br>
-            <a:r>
-              <a:rPr lang="fr-FR" sz="1000" dirty="0"/>
-              <a:t>- MDF 9 mm (305 cm x 122 cm)</a:t>
-            </a:r>
-            <a:br>
-              <a:rPr lang="fr-FR" sz="1000" dirty="0"/>
-            </a:br>
-            <a:r>
-              <a:rPr lang="fr-FR" sz="1000" dirty="0"/>
-              <a:t>- STRAT EGGER W1000 ST9 BLANC (305 cm x 130 cm)</a:t>
-            </a:r>
-            <a:br>
-              <a:rPr lang="fr-FR" sz="1000" dirty="0"/>
-            </a:br>
-            <a:r>
-              <a:rPr lang="fr-FR" sz="1000" dirty="0"/>
-              <a:t>3. Estimer le temps de main-d'œuvre requis par type :</a:t>
-            </a:r>
-            <a:br>
-              <a:rPr lang="fr-FR" sz="1000" dirty="0"/>
-            </a:br>
-            <a:r>
-              <a:rPr lang="fr-FR" sz="1000" dirty="0"/>
-              <a:t>- M.O. menuiserie</a:t>
-            </a:r>
-            <a:br>
-              <a:rPr lang="fr-FR" sz="1000" dirty="0"/>
-            </a:br>
-            <a:r>
-              <a:rPr lang="fr-FR" sz="1000" dirty="0"/>
-              <a:t>- M.O. CNC</a:t>
-            </a:r>
-            <a:br>
-              <a:rPr lang="fr-FR" sz="1000" dirty="0"/>
-            </a:br>
-            <a:r>
-              <a:rPr lang="fr-FR" sz="1000" dirty="0"/>
-              <a:t>- M.O. scie</a:t>
-            </a:r>
-            <a:br>
-              <a:rPr lang="fr-FR" sz="1000" dirty="0"/>
-            </a:br>
-            <a:r>
-              <a:rPr lang="fr-FR" sz="1000" dirty="0"/>
-              <a:t>4. Calculer le prix total du projet, en prenant en compte :</a:t>
-            </a:r>
-            <a:br>
-              <a:rPr lang="fr-FR" sz="1000" dirty="0"/>
-            </a:br>
-            <a:r>
-              <a:rPr lang="fr-FR" sz="1000" dirty="0"/>
-              <a:t>- Le coût des matériaux utilisés</a:t>
-            </a:r>
-            <a:br>
-              <a:rPr lang="fr-FR" sz="1000" dirty="0"/>
-            </a:br>
-            <a:r>
-              <a:rPr lang="fr-FR" sz="1000" dirty="0"/>
-              <a:t>- Le coût horaire de la main-d'œuvre, selon les tarifs suivants :</a:t>
-            </a:r>
-            <a:br>
-              <a:rPr lang="fr-FR" sz="1000" dirty="0"/>
-            </a:br>
-            <a:r>
-              <a:rPr lang="fr-FR" sz="1000" dirty="0"/>
-              <a:t>- M.O. menuiserie : X € / h</a:t>
-            </a:r>
-            <a:br>
-              <a:rPr lang="fr-FR" sz="1000" dirty="0"/>
-            </a:br>
-            <a:r>
-              <a:rPr lang="fr-FR" sz="1000" dirty="0"/>
-              <a:t>- M.O. CNC : Y € / h</a:t>
-            </a:r>
-            <a:br>
-              <a:rPr lang="fr-FR" sz="1000" dirty="0"/>
-            </a:br>
-            <a:r>
-              <a:rPr lang="fr-FR" sz="1000" dirty="0"/>
-              <a:t>- M.O. scie : Z € / h</a:t>
-            </a:r>
-            <a:br>
-              <a:rPr lang="fr-FR" sz="1000" dirty="0"/>
-            </a:br>
-            <a:br>
-              <a:rPr lang="fr-FR" sz="1000" dirty="0"/>
-            </a:br>
-            <a:r>
-              <a:rPr lang="fr-FR" sz="1000" dirty="0"/>
-              <a:t>Ne me détaille pas les calculs. Donne uniquement le résultat final au format JSON suivant, sans aucun texte autour :</a:t>
-            </a:r>
-            <a:br>
-              <a:rPr lang="fr-FR" sz="1000" dirty="0"/>
-            </a:br>
-            <a:br>
-              <a:rPr lang="fr-FR" sz="1000" dirty="0"/>
-            </a:br>
-            <a:r>
-              <a:rPr lang="fr-FR" sz="1000" dirty="0"/>
-              <a:t>{</a:t>
-            </a:r>
-            <a:br>
-              <a:rPr lang="fr-FR" sz="1000" dirty="0"/>
-            </a:br>
-            <a:r>
-              <a:rPr lang="fr-FR" sz="1000" dirty="0"/>
-              <a:t>"</a:t>
-            </a:r>
-            <a:r>
-              <a:rPr lang="fr-FR" sz="1000" dirty="0" err="1"/>
-              <a:t>prix_final</a:t>
-            </a:r>
-            <a:r>
-              <a:rPr lang="fr-FR" sz="1000" dirty="0"/>
-              <a:t>": 0.00,</a:t>
-            </a:r>
-            <a:br>
-              <a:rPr lang="fr-FR" sz="1000" dirty="0"/>
-            </a:br>
-            <a:r>
-              <a:rPr lang="fr-FR" sz="1000" dirty="0"/>
-              <a:t>"</a:t>
-            </a:r>
-            <a:r>
-              <a:rPr lang="fr-FR" sz="1000" dirty="0" err="1"/>
-              <a:t>prix_material</a:t>
-            </a:r>
-            <a:r>
-              <a:rPr lang="fr-FR" sz="1000" dirty="0"/>
-              <a:t>": 0.00,</a:t>
-            </a:r>
-            <a:br>
-              <a:rPr lang="fr-FR" sz="1000" dirty="0"/>
-            </a:br>
-            <a:r>
-              <a:rPr lang="fr-FR" sz="1000" dirty="0"/>
-              <a:t>"</a:t>
-            </a:r>
-            <a:r>
-              <a:rPr lang="fr-FR" sz="1000" dirty="0" err="1"/>
-              <a:t>prix_manoeuvre</a:t>
-            </a:r>
-            <a:r>
-              <a:rPr lang="fr-FR" sz="1000" dirty="0"/>
-              <a:t>": 0.00</a:t>
-            </a:r>
-            <a:br>
-              <a:rPr lang="fr-FR" sz="1000" dirty="0"/>
-            </a:br>
-            <a:r>
-              <a:rPr lang="fr-FR" sz="1000" dirty="0"/>
-              <a:t>}</a:t>
-            </a:r>
-          </a:p>
-        </p:txBody>
-      </p:sp>
-    </p:spTree>
-    <p:extLst>
-      <p:ext uri="{BB962C8B-B14F-4D97-AF65-F5344CB8AC3E}">
-        <p14:creationId xmlns:p14="http://schemas.microsoft.com/office/powerpoint/2010/main" val="325488366"/>
-      </p:ext>
-    </p:extLst>
-  </p:cSld>
-  <p:clrMapOvr>
-    <a:masterClrMapping/>
-  </p:clrMapOvr>
-</p:sld>
-</file>
-
-<file path=ppt/slides/slide12.xml><?xml version="1.0" encoding="utf-8"?>
-<p:sld xmlns:a="http://schemas.openxmlformats.org/drawingml/2006/main" xmlns:r="http://schemas.openxmlformats.org/officeDocument/2006/relationships" xmlns:p="http://schemas.openxmlformats.org/presentationml/2006/main">
-  <p:cSld>
-    <p:bg>
-      <p:bgPr>
-        <a:solidFill>
-          <a:schemeClr val="bg1"/>
-        </a:solidFill>
-        <a:effectLst/>
-      </p:bgPr>
-    </p:bg>
-    <p:spTree>
-      <p:nvGrpSpPr>
-        <p:cNvPr id="1" name=""/>
-        <p:cNvGrpSpPr/>
-        <p:nvPr/>
-      </p:nvGrpSpPr>
-      <p:grpSpPr>
-        <a:xfrm>
-          <a:off x="0" y="0"/>
-          <a:ext cx="0" cy="0"/>
-          <a:chOff x="0" y="0"/>
-          <a:chExt cx="0" cy="0"/>
-        </a:xfrm>
-      </p:grpSpPr>
-      <p:sp useBgFill="1">
-        <p:nvSpPr>
           <p:cNvPr id="8" name="Rectangle 7">
             <a:extLst>
               <a:ext uri="{FF2B5EF4-FFF2-40B4-BE49-F238E27FC236}">
@@ -7266,15 +6293,7 @@
             </a:br>
             <a:r>
               <a:rPr lang="fr-FR" sz="2400" dirty="0"/>
-              <a:t>Prix estimé par </a:t>
-            </a:r>
-            <a:r>
-              <a:rPr lang="fr-FR" sz="2400" dirty="0" err="1"/>
-              <a:t>Pluo</a:t>
-            </a:r>
-            <a:r>
-              <a:rPr lang="fr-FR" sz="2400" dirty="0"/>
-              <a:t> : 5115 euros</a:t>
+              <a:t>Prix estimé par l’entreprise : 5115 euros</a:t>
             </a:r>
             <a:br>
               <a:rPr lang="fr-FR" sz="2400" dirty="0"/>
@@ -7325,7 +6344,7 @@
 </p:sld>
 </file>
 
-<file path=ppt/slides/slide13.xml><?xml version="1.0" encoding="utf-8"?>
+<file path=ppt/slides/slide11.xml><?xml version="1.0" encoding="utf-8"?>
 <p:sld xmlns:a="http://schemas.openxmlformats.org/drawingml/2006/main" xmlns:r="http://schemas.openxmlformats.org/officeDocument/2006/relationships" xmlns:p="http://schemas.openxmlformats.org/presentationml/2006/main">
   <p:cSld>
     <p:bg>
@@ -7908,7 +6927,7 @@
           <a:p>
             <a:r>
               <a:rPr lang="fr-FR" sz="2000" dirty="0"/>
-              <a:t>Fournir des exemples au modèle, si possible à deux niveaux de difficulté, afin de l’encadrer dans l’estimation du prix.</a:t>
+              <a:t>Fournir des exemples au modèle, si possible à deux niveaux de complexité, afin de l’encadrer dans l’estimation du prix.</a:t>
             </a:r>
           </a:p>
           <a:p>
@@ -7920,15 +6939,7 @@
           <a:p>
             <a:r>
               <a:rPr lang="fr-FR" sz="2000" dirty="0"/>
-              <a:t>Entraîner divers agents pour </a:t>
-            </a:r>
-            <a:r>
-              <a:rPr lang="fr-FR" sz="2000" dirty="0" err="1"/>
-              <a:t>augemters</a:t>
-            </a:r>
-            <a:r>
-              <a:rPr lang="fr-FR" sz="2000" dirty="0"/>
-              <a:t>.</a:t>
+              <a:t>Entraîner divers agents.</a:t>
             </a:r>
           </a:p>
           <a:p>
@@ -7958,7 +6969,7 @@
 </p:sld>
 </file>
 
-<file path=ppt/slides/slide14.xml><?xml version="1.0" encoding="utf-8"?>
+<file path=ppt/slides/slide12.xml><?xml version="1.0" encoding="utf-8"?>
 <p:sld xmlns:a="http://schemas.openxmlformats.org/drawingml/2006/main" xmlns:r="http://schemas.openxmlformats.org/officeDocument/2006/relationships" xmlns:p="http://schemas.openxmlformats.org/presentationml/2006/main">
   <p:cSld>
     <p:bg>
@@ -8535,17 +7546,13 @@
           <a:p>
             <a:r>
               <a:rPr lang="fr-FR" dirty="0"/>
-              <a:t>La complexité des meubles.</a:t>
-            </a:r>
-          </a:p>
-          <a:p>
-            <a:r>
-              <a:rPr lang="fr-FR" dirty="0" err="1"/>
-              <a:t>Generalisation</a:t>
-            </a:r>
+              <a:t>Généralisation sur plusieurs type meubles</a:t>
+            </a:r>
+          </a:p>
+          <a:p>
             <a:r>
               <a:rPr lang="fr-FR" dirty="0"/>
-              <a:t> sur plusieurs type meubles</a:t>
+              <a:t>…</a:t>
             </a:r>
             <a:endParaRPr lang="es-AR" dirty="0"/>
           </a:p>
@@ -8603,10 +7610,10 @@
       </p:grpSpPr>
       <p:sp useBgFill="1">
         <p:nvSpPr>
-          <p:cNvPr id="49" name="Rectangle 48">
-            <a:extLst>
-              <a:ext uri="{FF2B5EF4-FFF2-40B4-BE49-F238E27FC236}">
-                <a16:creationId xmlns:a16="http://schemas.microsoft.com/office/drawing/2014/main" id="{1022CA72-2A63-428F-B586-37BA5AB6D265}"/>
+          <p:cNvPr id="60" name="Rectangle 59">
+            <a:extLst>
+              <a:ext uri="{FF2B5EF4-FFF2-40B4-BE49-F238E27FC236}">
+                <a16:creationId xmlns:a16="http://schemas.microsoft.com/office/drawing/2014/main" id="{149FB5C3-7336-4FE0-A30C-CC0A3646D499}"/>
               </a:ext>
               <a:ext uri="{C183D7F6-B498-43B3-948B-1728B52AA6E4}">
                 <adec:decorative xmlns:adec="http://schemas.microsoft.com/office/drawing/2017/decorative" val="1"/>
@@ -8661,57 +7668,21 @@
           </a:p>
         </p:txBody>
       </p:sp>
-      <p:sp>
-        <p:nvSpPr>
-          <p:cNvPr id="2" name="Titre 1">
-            <a:extLst>
-              <a:ext uri="{FF2B5EF4-FFF2-40B4-BE49-F238E27FC236}">
-                <a16:creationId xmlns:a16="http://schemas.microsoft.com/office/drawing/2014/main" id="{912796D7-9D1C-B2CC-06BC-F8745FA838A6}"/>
-              </a:ext>
-            </a:extLst>
-          </p:cNvPr>
-          <p:cNvSpPr>
-            <a:spLocks noGrp="1"/>
-          </p:cNvSpPr>
-          <p:nvPr>
-            <p:ph type="title"/>
-          </p:nvPr>
-        </p:nvSpPr>
-        <p:spPr>
-          <a:xfrm>
-            <a:off x="532015" y="4495568"/>
-            <a:ext cx="3861960" cy="1905232"/>
-          </a:xfrm>
-        </p:spPr>
-        <p:txBody>
-          <a:bodyPr anchor="ctr">
-            <a:normAutofit/>
-          </a:bodyPr>
-          <a:lstStyle/>
-          <a:p>
-            <a:r>
-              <a:rPr lang="fr-FR" sz="3200" dirty="0"/>
-              <a:t>Sujet du stage: </a:t>
-            </a:r>
-            <a:endParaRPr lang="es-AR" sz="3200" dirty="0"/>
-          </a:p>
-        </p:txBody>
-      </p:sp>
-      <p:sp>
-        <p:nvSpPr>
-          <p:cNvPr id="51" name="Rectangle 50">
-            <a:extLst>
-              <a:ext uri="{FF2B5EF4-FFF2-40B4-BE49-F238E27FC236}">
-                <a16:creationId xmlns:a16="http://schemas.microsoft.com/office/drawing/2014/main" id="{95C8260E-968F-44E8-A823-ABB431311926}"/>
+      <p:grpSp>
+        <p:nvGrpSpPr>
+          <p:cNvPr id="62" name="Group 61">
+            <a:extLst>
+              <a:ext uri="{FF2B5EF4-FFF2-40B4-BE49-F238E27FC236}">
+                <a16:creationId xmlns:a16="http://schemas.microsoft.com/office/drawing/2014/main" id="{19A6B5CE-CB1D-48EE-8B43-E952235C8371}"/>
               </a:ext>
               <a:ext uri="{C183D7F6-B498-43B3-948B-1728B52AA6E4}">
                 <adec:decorative xmlns:adec="http://schemas.microsoft.com/office/drawing/2017/decorative" val="1"/>
               </a:ext>
             </a:extLst>
           </p:cNvPr>
-          <p:cNvSpPr>
-            <a:spLocks noGrp="1" noRot="1" noChangeAspect="1" noMove="1" noResize="1" noEditPoints="1" noAdjustHandles="1" noChangeArrowheads="1" noChangeShapeType="1" noTextEdit="1"/>
-          </p:cNvSpPr>
+          <p:cNvGrpSpPr>
+            <a:grpSpLocks noGrp="1" noUngrp="1" noRot="1" noChangeAspect="1" noMove="1" noResize="1"/>
+          </p:cNvGrpSpPr>
           <p:nvPr>
             <p:extLst>
               <p:ext uri="{386F3935-93C4-4BCD-93E2-E3B085C9AB24}">
@@ -8719,53 +7690,143 @@
               </p:ext>
             </p:extLst>
           </p:nvPr>
-        </p:nvSpPr>
-        <p:spPr>
-          <a:xfrm>
-            <a:off x="0" y="0"/>
-            <a:ext cx="12192000" cy="865848"/>
+        </p:nvGrpSpPr>
+        <p:grpSpPr>
+          <a:xfrm rot="5400000">
+            <a:off x="-2340441" y="2666183"/>
+            <a:ext cx="5860051" cy="527712"/>
+            <a:chOff x="6081624" y="1998368"/>
+            <a:chExt cx="5613457" cy="782175"/>
           </a:xfrm>
-          <a:prstGeom prst="rect">
-            <a:avLst/>
-          </a:prstGeom>
           <a:solidFill>
             <a:schemeClr val="accent4"/>
           </a:solidFill>
-          <a:ln>
-            <a:noFill/>
-          </a:ln>
-        </p:spPr>
-        <p:style>
-          <a:lnRef idx="2">
-            <a:schemeClr val="accent1">
-              <a:shade val="50000"/>
-            </a:schemeClr>
-          </a:lnRef>
-          <a:fillRef idx="1">
-            <a:schemeClr val="accent1"/>
-          </a:fillRef>
-          <a:effectRef idx="0">
-            <a:schemeClr val="accent1"/>
-          </a:effectRef>
-          <a:fontRef idx="minor">
-            <a:schemeClr val="lt1"/>
-          </a:fontRef>
-        </p:style>
-        <p:txBody>
-          <a:bodyPr rtlCol="0" anchor="ctr"/>
-          <a:lstStyle/>
-          <a:p>
-            <a:pPr algn="ctr"/>
-            <a:endParaRPr lang="en-US"/>
-          </a:p>
-        </p:txBody>
-      </p:sp>
-      <p:sp>
-        <p:nvSpPr>
-          <p:cNvPr id="53" name="Rectangle 52">
-            <a:extLst>
-              <a:ext uri="{FF2B5EF4-FFF2-40B4-BE49-F238E27FC236}">
-                <a16:creationId xmlns:a16="http://schemas.microsoft.com/office/drawing/2014/main" id="{2C1BBA94-3F40-40AA-8BB9-E69E25E537C1}"/>
+        </p:grpSpPr>
+        <p:sp>
+          <p:nvSpPr>
+            <p:cNvPr id="63" name="Rectangle 62">
+              <a:extLst>
+                <a:ext uri="{FF2B5EF4-FFF2-40B4-BE49-F238E27FC236}">
+                  <a16:creationId xmlns:a16="http://schemas.microsoft.com/office/drawing/2014/main" id="{E3F3EAA5-4E15-400B-BBA3-82B3F49A2178}"/>
+                </a:ext>
+                <a:ext uri="{C183D7F6-B498-43B3-948B-1728B52AA6E4}">
+                  <adec:decorative xmlns:adec="http://schemas.microsoft.com/office/drawing/2017/decorative" val="1"/>
+                </a:ext>
+              </a:extLst>
+            </p:cNvPr>
+            <p:cNvSpPr/>
+            <p:nvPr>
+              <p:extLst>
+                <p:ext uri="{386F3935-93C4-4BCD-93E2-E3B085C9AB24}">
+                  <p16:designElem xmlns:p16="http://schemas.microsoft.com/office/powerpoint/2015/main" val="1"/>
+                </p:ext>
+              </p:extLst>
+            </p:nvPr>
+          </p:nvSpPr>
+          <p:spPr>
+            <a:xfrm rot="5400000">
+              <a:off x="11228040" y="2313027"/>
+              <a:ext cx="781700" cy="152382"/>
+            </a:xfrm>
+            <a:prstGeom prst="rect">
+              <a:avLst/>
+            </a:prstGeom>
+            <a:grpFill/>
+            <a:ln>
+              <a:noFill/>
+            </a:ln>
+          </p:spPr>
+          <p:style>
+            <a:lnRef idx="2">
+              <a:schemeClr val="accent1">
+                <a:shade val="50000"/>
+              </a:schemeClr>
+            </a:lnRef>
+            <a:fillRef idx="1">
+              <a:schemeClr val="accent1"/>
+            </a:fillRef>
+            <a:effectRef idx="0">
+              <a:schemeClr val="accent1"/>
+            </a:effectRef>
+            <a:fontRef idx="minor">
+              <a:schemeClr val="lt1"/>
+            </a:fontRef>
+          </p:style>
+          <p:txBody>
+            <a:bodyPr rtlCol="0" anchor="ctr"/>
+            <a:lstStyle/>
+            <a:p>
+              <a:pPr algn="ctr"/>
+              <a:endParaRPr lang="en-US"/>
+            </a:p>
+          </p:txBody>
+        </p:sp>
+        <p:sp>
+          <p:nvSpPr>
+            <p:cNvPr id="64" name="Rectangle 63">
+              <a:extLst>
+                <a:ext uri="{FF2B5EF4-FFF2-40B4-BE49-F238E27FC236}">
+                  <a16:creationId xmlns:a16="http://schemas.microsoft.com/office/drawing/2014/main" id="{72BA2E40-BE9B-4C54-9CDD-40EE804CCE64}"/>
+                </a:ext>
+                <a:ext uri="{C183D7F6-B498-43B3-948B-1728B52AA6E4}">
+                  <adec:decorative xmlns:adec="http://schemas.microsoft.com/office/drawing/2017/decorative" val="1"/>
+                </a:ext>
+              </a:extLst>
+            </p:cNvPr>
+            <p:cNvSpPr/>
+            <p:nvPr>
+              <p:extLst>
+                <p:ext uri="{386F3935-93C4-4BCD-93E2-E3B085C9AB24}">
+                  <p16:designElem xmlns:p16="http://schemas.microsoft.com/office/powerpoint/2015/main" val="1"/>
+                </p:ext>
+              </p:extLst>
+            </p:nvPr>
+          </p:nvSpPr>
+          <p:spPr>
+            <a:xfrm flipH="1" flipV="1">
+              <a:off x="6081624" y="1998844"/>
+              <a:ext cx="5372968" cy="781699"/>
+            </a:xfrm>
+            <a:prstGeom prst="rect">
+              <a:avLst/>
+            </a:prstGeom>
+            <a:grpFill/>
+            <a:ln>
+              <a:noFill/>
+            </a:ln>
+          </p:spPr>
+          <p:style>
+            <a:lnRef idx="2">
+              <a:schemeClr val="accent1">
+                <a:shade val="50000"/>
+              </a:schemeClr>
+            </a:lnRef>
+            <a:fillRef idx="1">
+              <a:schemeClr val="accent1"/>
+            </a:fillRef>
+            <a:effectRef idx="0">
+              <a:schemeClr val="accent1"/>
+            </a:effectRef>
+            <a:fontRef idx="minor">
+              <a:schemeClr val="lt1"/>
+            </a:fontRef>
+          </p:style>
+          <p:txBody>
+            <a:bodyPr rtlCol="0" anchor="ctr"/>
+            <a:lstStyle/>
+            <a:p>
+              <a:pPr algn="ctr"/>
+              <a:endParaRPr lang="en-US"/>
+            </a:p>
+          </p:txBody>
+        </p:sp>
+      </p:grpSp>
+      <p:sp>
+        <p:nvSpPr>
+          <p:cNvPr id="66" name="Rectangle 65">
+            <a:extLst>
+              <a:ext uri="{FF2B5EF4-FFF2-40B4-BE49-F238E27FC236}">
+                <a16:creationId xmlns:a16="http://schemas.microsoft.com/office/drawing/2014/main" id="{0DA909B4-15FF-46A6-8A7F-7AEF977FE9ED}"/>
               </a:ext>
               <a:ext uri="{C183D7F6-B498-43B3-948B-1728B52AA6E4}">
                 <adec:decorative xmlns:adec="http://schemas.microsoft.com/office/drawing/2017/decorative" val="1"/>
@@ -8785,8 +7846,8 @@
         </p:nvSpPr>
         <p:spPr>
           <a:xfrm>
-            <a:off x="517889" y="-1"/>
-            <a:ext cx="11231745" cy="4131425"/>
+            <a:off x="579528" y="517897"/>
+            <a:ext cx="11111729" cy="5857966"/>
           </a:xfrm>
           <a:prstGeom prst="rect">
             <a:avLst/>
@@ -8830,86 +7891,48 @@
           </a:p>
         </p:txBody>
       </p:sp>
-      <p:pic>
-        <p:nvPicPr>
-          <p:cNvPr id="5" name="Image 4" descr="Une image contenant texte, carte, diagramme, Plan&#10;&#10;Le contenu généré par l’IA peut être incorrect.">
-            <a:extLst>
-              <a:ext uri="{FF2B5EF4-FFF2-40B4-BE49-F238E27FC236}">
-                <a16:creationId xmlns:a16="http://schemas.microsoft.com/office/drawing/2014/main" id="{FF0D263F-9FFF-1721-B374-74604AF4B5A6}"/>
-              </a:ext>
-            </a:extLst>
-          </p:cNvPr>
-          <p:cNvPicPr>
-            <a:picLocks noChangeAspect="1"/>
-          </p:cNvPicPr>
-          <p:nvPr/>
-        </p:nvPicPr>
-        <p:blipFill>
-          <a:blip r:embed="rId3">
-            <a:extLst>
-              <a:ext uri="{28A0092B-C50C-407E-A947-70E740481C1C}">
-                <a14:useLocalDpi xmlns:a14="http://schemas.microsoft.com/office/drawing/2010/main" val="0"/>
-              </a:ext>
-            </a:extLst>
-          </a:blip>
-          <a:srcRect l="14271" r="12257"/>
-          <a:stretch>
-            <a:fillRect/>
-          </a:stretch>
-        </p:blipFill>
+      <p:sp>
+        <p:nvSpPr>
+          <p:cNvPr id="2" name="Titre 1">
+            <a:extLst>
+              <a:ext uri="{FF2B5EF4-FFF2-40B4-BE49-F238E27FC236}">
+                <a16:creationId xmlns:a16="http://schemas.microsoft.com/office/drawing/2014/main" id="{912796D7-9D1C-B2CC-06BC-F8745FA838A6}"/>
+              </a:ext>
+            </a:extLst>
+          </p:cNvPr>
+          <p:cNvSpPr>
+            <a:spLocks noGrp="1"/>
+          </p:cNvSpPr>
+          <p:nvPr>
+            <p:ph type="title"/>
+          </p:nvPr>
+        </p:nvSpPr>
         <p:spPr>
           <a:xfrm>
-            <a:off x="1688174" y="364143"/>
-            <a:ext cx="3436846" cy="3426462"/>
+            <a:off x="1057025" y="922644"/>
+            <a:ext cx="5040285" cy="1169585"/>
           </a:xfrm>
-          <a:prstGeom prst="rect">
-            <a:avLst/>
-          </a:prstGeom>
         </p:spPr>
-      </p:pic>
-      <p:pic>
-        <p:nvPicPr>
-          <p:cNvPr id="3" name="Espace réservé du contenu 5" descr="Une image contenant cercle, texte, diagramme, capture d’écran&#10;&#10;Le contenu généré par l’IA peut être incorrect.">
-            <a:extLst>
-              <a:ext uri="{FF2B5EF4-FFF2-40B4-BE49-F238E27FC236}">
-                <a16:creationId xmlns:a16="http://schemas.microsoft.com/office/drawing/2014/main" id="{3EC02ED2-999D-1CF1-3832-D13770D4A1E1}"/>
-              </a:ext>
-            </a:extLst>
-          </p:cNvPr>
-          <p:cNvPicPr>
-            <a:picLocks noChangeAspect="1"/>
-          </p:cNvPicPr>
-          <p:nvPr/>
-        </p:nvPicPr>
-        <p:blipFill>
-          <a:blip r:embed="rId4">
-            <a:extLst>
-              <a:ext uri="{28A0092B-C50C-407E-A947-70E740481C1C}">
-                <a14:useLocalDpi xmlns:a14="http://schemas.microsoft.com/office/drawing/2010/main" val="0"/>
-              </a:ext>
-            </a:extLst>
-          </a:blip>
-          <a:srcRect t="2090" b="85"/>
-          <a:stretch>
-            <a:fillRect/>
-          </a:stretch>
-        </p:blipFill>
-        <p:spPr>
-          <a:xfrm>
-            <a:off x="6297264" y="632666"/>
-            <a:ext cx="5136795" cy="2889414"/>
-          </a:xfrm>
-          <a:prstGeom prst="rect">
-            <a:avLst/>
-          </a:prstGeom>
-        </p:spPr>
-      </p:pic>
-      <p:sp>
-        <p:nvSpPr>
-          <p:cNvPr id="55" name="Rectangle 54">
-            <a:extLst>
-              <a:ext uri="{FF2B5EF4-FFF2-40B4-BE49-F238E27FC236}">
-                <a16:creationId xmlns:a16="http://schemas.microsoft.com/office/drawing/2014/main" id="{FE43805F-24A6-46A4-B19B-54F28347355C}"/>
+        <p:txBody>
+          <a:bodyPr anchor="b">
+            <a:normAutofit/>
+          </a:bodyPr>
+          <a:lstStyle/>
+          <a:p>
+            <a:r>
+              <a:rPr lang="fr-FR" sz="4000"/>
+              <a:t>Sujet du stage: </a:t>
+            </a:r>
+            <a:endParaRPr lang="es-AR" sz="4000"/>
+          </a:p>
+        </p:txBody>
+      </p:sp>
+      <p:sp>
+        <p:nvSpPr>
+          <p:cNvPr id="68" name="Rectangle 67">
+            <a:extLst>
+              <a:ext uri="{FF2B5EF4-FFF2-40B4-BE49-F238E27FC236}">
+                <a16:creationId xmlns:a16="http://schemas.microsoft.com/office/drawing/2014/main" id="{1382A32C-5B0C-4B1C-A074-76C6DBCC9F87}"/>
               </a:ext>
               <a:ext uri="{C183D7F6-B498-43B3-948B-1728B52AA6E4}">
                 <adec:decorative xmlns:adec="http://schemas.microsoft.com/office/drawing/2017/decorative" val="1"/>
@@ -8928,9 +7951,9 @@
           </p:nvPr>
         </p:nvSpPr>
         <p:spPr>
-          <a:xfrm rot="5400000" flipH="1">
-            <a:off x="3837444" y="5460209"/>
-            <a:ext cx="1790365" cy="45719"/>
+          <a:xfrm flipH="1">
+            <a:off x="1055714" y="2263365"/>
+            <a:ext cx="4937760" cy="27432"/>
           </a:xfrm>
           <a:prstGeom prst="rect">
             <a:avLst/>
@@ -8985,8 +8008,8 @@
         </p:nvSpPr>
         <p:spPr bwMode="auto">
           <a:xfrm>
-            <a:off x="5162719" y="4495568"/>
-            <a:ext cx="6586915" cy="1905232"/>
+            <a:off x="1055715" y="2508105"/>
+            <a:ext cx="5040285" cy="3632493"/>
           </a:xfrm>
           <a:prstGeom prst="rect">
             <a:avLst/>
@@ -9039,25 +8062,116 @@
               <a:buNone/>
             </a:pPr>
             <a:r>
-              <a:rPr lang="fr-FR" sz="1800" dirty="0"/>
-              <a:t>Approches multimodales pour l’exploitation de plans 2D et 3D </a:t>
-            </a:r>
-            <a:r>
-              <a:rPr lang="es-AR" sz="1800" dirty="0" err="1"/>
+              <a:rPr lang="fr-FR" sz="2000" dirty="0"/>
+              <a:t>La pertinence d’une approche multimodale pour l’exploitation de plans 2D et 3D :</a:t>
+            </a:r>
+          </a:p>
+          <a:p>
+            <a:pPr eaLnBrk="0" fontAlgn="base" hangingPunct="0">
+              <a:spcBef>
+                <a:spcPct val="0"/>
+              </a:spcBef>
+              <a:spcAft>
+                <a:spcPts val="600"/>
+              </a:spcAft>
+            </a:pPr>
+            <a:r>
+              <a:rPr lang="es-AR" sz="2000" dirty="0" err="1"/>
               <a:t>État</a:t>
             </a:r>
             <a:r>
-              <a:rPr lang="es-AR" sz="1800" dirty="0"/>
+              <a:rPr lang="es-AR" sz="2000" dirty="0"/>
               <a:t> </a:t>
             </a:r>
             <a:r>
-              <a:rPr lang="fr-FR" sz="1800" dirty="0"/>
-              <a:t>de l’art et exploration d’un cas d’usage</a:t>
-            </a:r>
-            <a:endParaRPr lang="es-AR" altLang="es-AR" sz="1800" dirty="0"/>
-          </a:p>
-        </p:txBody>
-      </p:sp>
+              <a:rPr lang="fr-FR" sz="2000" dirty="0"/>
+              <a:t>de l’art </a:t>
+            </a:r>
+          </a:p>
+          <a:p>
+            <a:pPr eaLnBrk="0" fontAlgn="base" hangingPunct="0">
+              <a:spcBef>
+                <a:spcPct val="0"/>
+              </a:spcBef>
+              <a:spcAft>
+                <a:spcPts val="600"/>
+              </a:spcAft>
+            </a:pPr>
+            <a:r>
+              <a:rPr lang="fr-FR" sz="2000" dirty="0"/>
+              <a:t>Exploration d’un cas d’usage</a:t>
+            </a:r>
+            <a:endParaRPr lang="es-AR" altLang="es-AR" sz="2000" dirty="0"/>
+          </a:p>
+        </p:txBody>
+      </p:sp>
+      <p:pic>
+        <p:nvPicPr>
+          <p:cNvPr id="5" name="Image 4" descr="Une image contenant texte, carte, diagramme, Plan&#10;&#10;Le contenu généré par l’IA peut être incorrect.">
+            <a:extLst>
+              <a:ext uri="{FF2B5EF4-FFF2-40B4-BE49-F238E27FC236}">
+                <a16:creationId xmlns:a16="http://schemas.microsoft.com/office/drawing/2014/main" id="{FF0D263F-9FFF-1721-B374-74604AF4B5A6}"/>
+              </a:ext>
+            </a:extLst>
+          </p:cNvPr>
+          <p:cNvPicPr>
+            <a:picLocks noChangeAspect="1"/>
+          </p:cNvPicPr>
+          <p:nvPr/>
+        </p:nvPicPr>
+        <p:blipFill>
+          <a:blip r:embed="rId3">
+            <a:extLst>
+              <a:ext uri="{28A0092B-C50C-407E-A947-70E740481C1C}">
+                <a14:useLocalDpi xmlns:a14="http://schemas.microsoft.com/office/drawing/2010/main" val="0"/>
+              </a:ext>
+            </a:extLst>
+          </a:blip>
+          <a:srcRect l="14271" r="12257"/>
+          <a:stretch>
+            <a:fillRect/>
+          </a:stretch>
+        </p:blipFill>
+        <p:spPr>
+          <a:xfrm>
+            <a:off x="7846729" y="774285"/>
+            <a:ext cx="2588995" cy="2581173"/>
+          </a:xfrm>
+          <a:prstGeom prst="rect">
+            <a:avLst/>
+          </a:prstGeom>
+        </p:spPr>
+      </p:pic>
+      <p:pic>
+        <p:nvPicPr>
+          <p:cNvPr id="7" name="Image 6" descr="Une image contenant texte, capture d’écran, Police, logo&#10;&#10;Le contenu généré par l’IA peut être incorrect.">
+            <a:extLst>
+              <a:ext uri="{FF2B5EF4-FFF2-40B4-BE49-F238E27FC236}">
+                <a16:creationId xmlns:a16="http://schemas.microsoft.com/office/drawing/2014/main" id="{C51AF196-1F70-F417-7416-10F467B8F05C}"/>
+              </a:ext>
+            </a:extLst>
+          </p:cNvPr>
+          <p:cNvPicPr>
+            <a:picLocks noChangeAspect="1"/>
+          </p:cNvPicPr>
+          <p:nvPr/>
+        </p:nvPicPr>
+        <p:blipFill>
+          <a:blip r:embed="rId4"/>
+          <a:stretch>
+            <a:fillRect/>
+          </a:stretch>
+        </p:blipFill>
+        <p:spPr>
+          <a:xfrm>
+            <a:off x="6946667" y="3773867"/>
+            <a:ext cx="4389120" cy="2183587"/>
+          </a:xfrm>
+          <a:prstGeom prst="rect">
+            <a:avLst/>
+          </a:prstGeom>
+        </p:spPr>
+      </p:pic>
       <p:sp>
         <p:nvSpPr>
           <p:cNvPr id="6" name="Rectangle 5">
@@ -9126,241 +8240,6 @@
 </file>
 
 <file path=ppt/slides/slide3.xml><?xml version="1.0" encoding="utf-8"?>
-<p:sld xmlns:a="http://schemas.openxmlformats.org/drawingml/2006/main" xmlns:r="http://schemas.openxmlformats.org/officeDocument/2006/relationships" xmlns:p="http://schemas.openxmlformats.org/presentationml/2006/main">
-  <p:cSld>
-    <p:spTree>
-      <p:nvGrpSpPr>
-        <p:cNvPr id="1" name=""/>
-        <p:cNvGrpSpPr/>
-        <p:nvPr/>
-      </p:nvGrpSpPr>
-      <p:grpSpPr>
-        <a:xfrm>
-          <a:off x="0" y="0"/>
-          <a:ext cx="0" cy="0"/>
-          <a:chOff x="0" y="0"/>
-          <a:chExt cx="0" cy="0"/>
-        </a:xfrm>
-      </p:grpSpPr>
-      <p:sp>
-        <p:nvSpPr>
-          <p:cNvPr id="2" name="Titre 1">
-            <a:extLst>
-              <a:ext uri="{FF2B5EF4-FFF2-40B4-BE49-F238E27FC236}">
-                <a16:creationId xmlns:a16="http://schemas.microsoft.com/office/drawing/2014/main" id="{4549B9A4-6B38-02F3-06BB-8D479C9F6B30}"/>
-              </a:ext>
-            </a:extLst>
-          </p:cNvPr>
-          <p:cNvSpPr>
-            <a:spLocks noGrp="1"/>
-          </p:cNvSpPr>
-          <p:nvPr>
-            <p:ph type="title"/>
-          </p:nvPr>
-        </p:nvSpPr>
-        <p:spPr/>
-        <p:txBody>
-          <a:bodyPr/>
-          <a:lstStyle/>
-          <a:p>
-            <a:r>
-              <a:rPr lang="fr-FR" dirty="0"/>
-              <a:t>Etats de l’art</a:t>
-            </a:r>
-            <a:endParaRPr lang="es-AR" dirty="0"/>
-          </a:p>
-        </p:txBody>
-      </p:sp>
-      <p:sp>
-        <p:nvSpPr>
-          <p:cNvPr id="3" name="Espace réservé du contenu 2">
-            <a:extLst>
-              <a:ext uri="{FF2B5EF4-FFF2-40B4-BE49-F238E27FC236}">
-                <a16:creationId xmlns:a16="http://schemas.microsoft.com/office/drawing/2014/main" id="{5070679D-C9AE-E41B-1E49-5A547CE3867F}"/>
-              </a:ext>
-            </a:extLst>
-          </p:cNvPr>
-          <p:cNvSpPr>
-            <a:spLocks noGrp="1"/>
-          </p:cNvSpPr>
-          <p:nvPr>
-            <p:ph idx="1"/>
-          </p:nvPr>
-        </p:nvSpPr>
-        <p:spPr/>
-        <p:txBody>
-          <a:bodyPr/>
-          <a:lstStyle/>
-          <a:p>
-            <a:r>
-              <a:rPr lang="fr-FR" dirty="0"/>
-              <a:t>Utilisation de plans assister par IA </a:t>
-            </a:r>
-          </a:p>
-          <a:p>
-            <a:r>
-              <a:rPr lang="fr-FR" dirty="0"/>
-              <a:t>Utilisation de plans et  d’une modalité </a:t>
-            </a:r>
-          </a:p>
-          <a:p>
-            <a:r>
-              <a:rPr lang="fr-FR" dirty="0"/>
-              <a:t>Conclusion </a:t>
-            </a:r>
-          </a:p>
-          <a:p>
-            <a:pPr marL="0" indent="0">
-              <a:buNone/>
-            </a:pPr>
-            <a:endParaRPr lang="fr-FR" dirty="0"/>
-          </a:p>
-        </p:txBody>
-      </p:sp>
-    </p:spTree>
-    <p:extLst>
-      <p:ext uri="{BB962C8B-B14F-4D97-AF65-F5344CB8AC3E}">
-        <p14:creationId xmlns:p14="http://schemas.microsoft.com/office/powerpoint/2010/main" val="575399702"/>
-      </p:ext>
-    </p:extLst>
-  </p:cSld>
-  <p:clrMapOvr>
-    <a:masterClrMapping/>
-  </p:clrMapOvr>
-</p:sld>
-</file>
-
-<file path=ppt/slides/slide4.xml><?xml version="1.0" encoding="utf-8"?>
-<p:sld xmlns:a="http://schemas.openxmlformats.org/drawingml/2006/main" xmlns:r="http://schemas.openxmlformats.org/officeDocument/2006/relationships" xmlns:p="http://schemas.openxmlformats.org/presentationml/2006/main">
-  <p:cSld>
-    <p:spTree>
-      <p:nvGrpSpPr>
-        <p:cNvPr id="1" name="">
-          <a:extLst>
-            <a:ext uri="{FF2B5EF4-FFF2-40B4-BE49-F238E27FC236}">
-              <a16:creationId xmlns:a16="http://schemas.microsoft.com/office/drawing/2014/main" id="{533AA2BB-0E0D-669B-C8B3-2DC8E7A619B9}"/>
-            </a:ext>
-          </a:extLst>
-        </p:cNvPr>
-        <p:cNvGrpSpPr/>
-        <p:nvPr/>
-      </p:nvGrpSpPr>
-      <p:grpSpPr>
-        <a:xfrm>
-          <a:off x="0" y="0"/>
-          <a:ext cx="0" cy="0"/>
-          <a:chOff x="0" y="0"/>
-          <a:chExt cx="0" cy="0"/>
-        </a:xfrm>
-      </p:grpSpPr>
-      <p:sp>
-        <p:nvSpPr>
-          <p:cNvPr id="2" name="Titre 1">
-            <a:extLst>
-              <a:ext uri="{FF2B5EF4-FFF2-40B4-BE49-F238E27FC236}">
-                <a16:creationId xmlns:a16="http://schemas.microsoft.com/office/drawing/2014/main" id="{9DFA2710-AACF-B53D-5D81-C8D8ABF00885}"/>
-              </a:ext>
-            </a:extLst>
-          </p:cNvPr>
-          <p:cNvSpPr>
-            <a:spLocks noGrp="1"/>
-          </p:cNvSpPr>
-          <p:nvPr>
-            <p:ph type="title"/>
-          </p:nvPr>
-        </p:nvSpPr>
-        <p:spPr/>
-        <p:txBody>
-          <a:bodyPr/>
-          <a:lstStyle/>
-          <a:p>
-            <a:r>
-              <a:rPr lang="fr-FR" dirty="0"/>
-              <a:t>intro</a:t>
-            </a:r>
-            <a:endParaRPr lang="es-AR" dirty="0"/>
-          </a:p>
-        </p:txBody>
-      </p:sp>
-      <p:sp>
-        <p:nvSpPr>
-          <p:cNvPr id="3" name="Espace réservé du contenu 2">
-            <a:extLst>
-              <a:ext uri="{FF2B5EF4-FFF2-40B4-BE49-F238E27FC236}">
-                <a16:creationId xmlns:a16="http://schemas.microsoft.com/office/drawing/2014/main" id="{78893D2C-7C13-4806-B04A-9807CC423060}"/>
-              </a:ext>
-            </a:extLst>
-          </p:cNvPr>
-          <p:cNvSpPr>
-            <a:spLocks noGrp="1"/>
-          </p:cNvSpPr>
-          <p:nvPr>
-            <p:ph idx="1"/>
-          </p:nvPr>
-        </p:nvSpPr>
-        <p:spPr/>
-        <p:txBody>
-          <a:bodyPr/>
-          <a:lstStyle/>
-          <a:p>
-            <a:r>
-              <a:rPr lang="fr-FR" dirty="0" err="1"/>
-              <a:t>Objetifs</a:t>
-            </a:r>
-            <a:r>
-              <a:rPr lang="fr-FR" dirty="0"/>
-              <a:t> du stage </a:t>
-            </a:r>
-          </a:p>
-          <a:p>
-            <a:r>
-              <a:rPr lang="fr-FR" dirty="0"/>
-              <a:t>Parler de l’anciennes présentation</a:t>
-            </a:r>
-          </a:p>
-          <a:p>
-            <a:r>
-              <a:rPr lang="fr-FR" dirty="0"/>
-              <a:t>Faire le liens avec le </a:t>
-            </a:r>
-            <a:r>
-              <a:rPr lang="fr-FR" dirty="0" err="1"/>
-              <a:t>usecase</a:t>
-            </a:r>
-            <a:r>
-              <a:rPr lang="fr-FR" dirty="0"/>
-              <a:t> et  expliquer pourquoi  c’est  multimodal </a:t>
-            </a:r>
-          </a:p>
-          <a:p>
-            <a:r>
-              <a:rPr lang="fr-FR" dirty="0"/>
-              <a:t> trouver visuel avec un devis </a:t>
-            </a:r>
-          </a:p>
-          <a:p>
-            <a:r>
-              <a:rPr lang="fr-FR" dirty="0"/>
-              <a:t>Parler de l’état l’art </a:t>
-            </a:r>
-            <a:endParaRPr lang="es-AR" dirty="0"/>
-          </a:p>
-        </p:txBody>
-      </p:sp>
-    </p:spTree>
-    <p:extLst>
-      <p:ext uri="{BB962C8B-B14F-4D97-AF65-F5344CB8AC3E}">
-        <p14:creationId xmlns:p14="http://schemas.microsoft.com/office/powerpoint/2010/main" val="3353125612"/>
-      </p:ext>
-    </p:extLst>
-  </p:cSld>
-  <p:clrMapOvr>
-    <a:masterClrMapping/>
-  </p:clrMapOvr>
-</p:sld>
-</file>
-
-<file path=ppt/slides/slide5.xml><?xml version="1.0" encoding="utf-8"?>
 <p:sld xmlns:a="http://schemas.openxmlformats.org/drawingml/2006/main" xmlns:r="http://schemas.openxmlformats.org/officeDocument/2006/relationships" xmlns:p="http://schemas.openxmlformats.org/presentationml/2006/main">
   <p:cSld>
     <p:bg>
@@ -9935,7 +8814,7 @@
 </p:sld>
 </file>
 
-<file path=ppt/slides/slide6.xml><?xml version="1.0" encoding="utf-8"?>
+<file path=ppt/slides/slide4.xml><?xml version="1.0" encoding="utf-8"?>
 <p:sld xmlns:a="http://schemas.openxmlformats.org/drawingml/2006/main" xmlns:r="http://schemas.openxmlformats.org/officeDocument/2006/relationships" xmlns:p="http://schemas.openxmlformats.org/presentationml/2006/main">
   <p:cSld>
     <p:bg>
@@ -10504,7 +9383,7 @@
 </p:sld>
 </file>
 
-<file path=ppt/slides/slide7.xml><?xml version="1.0" encoding="utf-8"?>
+<file path=ppt/slides/slide5.xml><?xml version="1.0" encoding="utf-8"?>
 <p:sld xmlns:a="http://schemas.openxmlformats.org/drawingml/2006/main" xmlns:r="http://schemas.openxmlformats.org/officeDocument/2006/relationships" xmlns:p="http://schemas.openxmlformats.org/presentationml/2006/main">
   <p:cSld>
     <p:bg>
@@ -10927,7 +9806,7 @@
 </p:sld>
 </file>
 
-<file path=ppt/slides/slide8.xml><?xml version="1.0" encoding="utf-8"?>
+<file path=ppt/slides/slide6.xml><?xml version="1.0" encoding="utf-8"?>
 <p:sld xmlns:a="http://schemas.openxmlformats.org/drawingml/2006/main" xmlns:r="http://schemas.openxmlformats.org/officeDocument/2006/relationships" xmlns:p="http://schemas.openxmlformats.org/presentationml/2006/main">
   <p:cSld>
     <p:bg>
@@ -11300,7 +10179,7 @@
 </p:sld>
 </file>
 
-<file path=ppt/slides/slide9.xml><?xml version="1.0" encoding="utf-8"?>
+<file path=ppt/slides/slide7.xml><?xml version="1.0" encoding="utf-8"?>
 <p:sld xmlns:a="http://schemas.openxmlformats.org/drawingml/2006/main" xmlns:r="http://schemas.openxmlformats.org/officeDocument/2006/relationships" xmlns:p="http://schemas.openxmlformats.org/presentationml/2006/main">
   <p:cSld>
     <p:bg>
@@ -11665,6 +10544,1080 @@
     <p:extLst>
       <p:ext uri="{BB962C8B-B14F-4D97-AF65-F5344CB8AC3E}">
         <p14:creationId xmlns:p14="http://schemas.microsoft.com/office/powerpoint/2010/main" val="1424057555"/>
+      </p:ext>
+    </p:extLst>
+  </p:cSld>
+  <p:clrMapOvr>
+    <a:masterClrMapping/>
+  </p:clrMapOvr>
+</p:sld>
+</file>
+
+<file path=ppt/slides/slide8.xml><?xml version="1.0" encoding="utf-8"?>
+<p:sld xmlns:a="http://schemas.openxmlformats.org/drawingml/2006/main" xmlns:r="http://schemas.openxmlformats.org/officeDocument/2006/relationships" xmlns:p="http://schemas.openxmlformats.org/presentationml/2006/main">
+  <p:cSld>
+    <p:bg>
+      <p:bgPr>
+        <a:solidFill>
+          <a:schemeClr val="bg1"/>
+        </a:solidFill>
+        <a:effectLst/>
+      </p:bgPr>
+    </p:bg>
+    <p:spTree>
+      <p:nvGrpSpPr>
+        <p:cNvPr id="1" name=""/>
+        <p:cNvGrpSpPr/>
+        <p:nvPr/>
+      </p:nvGrpSpPr>
+      <p:grpSpPr>
+        <a:xfrm>
+          <a:off x="0" y="0"/>
+          <a:ext cx="0" cy="0"/>
+          <a:chOff x="0" y="0"/>
+          <a:chExt cx="0" cy="0"/>
+        </a:xfrm>
+      </p:grpSpPr>
+      <p:sp useBgFill="1">
+        <p:nvSpPr>
+          <p:cNvPr id="45" name="Rectangle 44">
+            <a:extLst>
+              <a:ext uri="{FF2B5EF4-FFF2-40B4-BE49-F238E27FC236}">
+                <a16:creationId xmlns:a16="http://schemas.microsoft.com/office/drawing/2014/main" id="{058A14AF-9FB5-4CC7-BA35-E8E85D3EDF0E}"/>
+              </a:ext>
+              <a:ext uri="{C183D7F6-B498-43B3-948B-1728B52AA6E4}">
+                <adec:decorative xmlns:adec="http://schemas.microsoft.com/office/drawing/2017/decorative" val="1"/>
+              </a:ext>
+            </a:extLst>
+          </p:cNvPr>
+          <p:cNvSpPr>
+            <a:spLocks noGrp="1" noRot="1" noChangeAspect="1" noMove="1" noResize="1" noEditPoints="1" noAdjustHandles="1" noChangeArrowheads="1" noChangeShapeType="1" noTextEdit="1"/>
+          </p:cNvSpPr>
+          <p:nvPr>
+            <p:extLst>
+              <p:ext uri="{386F3935-93C4-4BCD-93E2-E3B085C9AB24}">
+                <p16:designElem xmlns:p16="http://schemas.microsoft.com/office/powerpoint/2015/main" val="1"/>
+              </p:ext>
+            </p:extLst>
+          </p:nvPr>
+        </p:nvSpPr>
+        <p:spPr>
+          <a:xfrm>
+            <a:off x="0" y="0"/>
+            <a:ext cx="12191999" cy="6857365"/>
+          </a:xfrm>
+          <a:prstGeom prst="rect">
+            <a:avLst/>
+          </a:prstGeom>
+          <a:ln>
+            <a:noFill/>
+          </a:ln>
+        </p:spPr>
+        <p:style>
+          <a:lnRef idx="2">
+            <a:schemeClr val="accent1">
+              <a:shade val="50000"/>
+            </a:schemeClr>
+          </a:lnRef>
+          <a:fillRef idx="1">
+            <a:schemeClr val="accent1"/>
+          </a:fillRef>
+          <a:effectRef idx="0">
+            <a:schemeClr val="accent1"/>
+          </a:effectRef>
+          <a:fontRef idx="minor">
+            <a:schemeClr val="lt1"/>
+          </a:fontRef>
+        </p:style>
+        <p:txBody>
+          <a:bodyPr rtlCol="0" anchor="ctr"/>
+          <a:lstStyle/>
+          <a:p>
+            <a:pPr algn="ctr"/>
+            <a:endParaRPr lang="en-US"/>
+          </a:p>
+        </p:txBody>
+      </p:sp>
+      <p:sp>
+        <p:nvSpPr>
+          <p:cNvPr id="2" name="Titre 1">
+            <a:extLst>
+              <a:ext uri="{FF2B5EF4-FFF2-40B4-BE49-F238E27FC236}">
+                <a16:creationId xmlns:a16="http://schemas.microsoft.com/office/drawing/2014/main" id="{F29C2CF4-9C9E-0AE0-07D4-821DC591368E}"/>
+              </a:ext>
+            </a:extLst>
+          </p:cNvPr>
+          <p:cNvSpPr>
+            <a:spLocks noGrp="1"/>
+          </p:cNvSpPr>
+          <p:nvPr>
+            <p:ph type="title"/>
+          </p:nvPr>
+        </p:nvSpPr>
+        <p:spPr>
+          <a:xfrm>
+            <a:off x="793662" y="386930"/>
+            <a:ext cx="10066122" cy="1298448"/>
+          </a:xfrm>
+        </p:spPr>
+        <p:txBody>
+          <a:bodyPr anchor="b">
+            <a:normAutofit/>
+          </a:bodyPr>
+          <a:lstStyle/>
+          <a:p>
+            <a:r>
+              <a:rPr lang="fr-FR" sz="4800"/>
+              <a:t>Fichier STL</a:t>
+            </a:r>
+            <a:endParaRPr lang="es-AR" sz="4800"/>
+          </a:p>
+        </p:txBody>
+      </p:sp>
+      <p:sp>
+        <p:nvSpPr>
+          <p:cNvPr id="47" name="Rectangle 46">
+            <a:extLst>
+              <a:ext uri="{FF2B5EF4-FFF2-40B4-BE49-F238E27FC236}">
+                <a16:creationId xmlns:a16="http://schemas.microsoft.com/office/drawing/2014/main" id="{3A9A4357-BD1D-4622-A4FE-766E6AB8DE84}"/>
+              </a:ext>
+              <a:ext uri="{C183D7F6-B498-43B3-948B-1728B52AA6E4}">
+                <adec:decorative xmlns:adec="http://schemas.microsoft.com/office/drawing/2017/decorative" val="1"/>
+              </a:ext>
+            </a:extLst>
+          </p:cNvPr>
+          <p:cNvSpPr>
+            <a:spLocks noGrp="1" noRot="1" noChangeAspect="1" noMove="1" noResize="1" noEditPoints="1" noAdjustHandles="1" noChangeArrowheads="1" noChangeShapeType="1" noTextEdit="1"/>
+          </p:cNvSpPr>
+          <p:nvPr>
+            <p:extLst>
+              <p:ext uri="{386F3935-93C4-4BCD-93E2-E3B085C9AB24}">
+                <p16:designElem xmlns:p16="http://schemas.microsoft.com/office/powerpoint/2015/main" val="1"/>
+              </p:ext>
+            </p:extLst>
+          </p:nvPr>
+        </p:nvSpPr>
+        <p:spPr>
+          <a:xfrm flipH="1" flipV="1">
+            <a:off x="-2" y="1998845"/>
+            <a:ext cx="11454595" cy="781699"/>
+          </a:xfrm>
+          <a:prstGeom prst="rect">
+            <a:avLst/>
+          </a:prstGeom>
+          <a:solidFill>
+            <a:schemeClr val="accent4"/>
+          </a:solidFill>
+          <a:ln>
+            <a:noFill/>
+          </a:ln>
+        </p:spPr>
+        <p:style>
+          <a:lnRef idx="2">
+            <a:schemeClr val="accent1">
+              <a:shade val="50000"/>
+            </a:schemeClr>
+          </a:lnRef>
+          <a:fillRef idx="1">
+            <a:schemeClr val="accent1"/>
+          </a:fillRef>
+          <a:effectRef idx="0">
+            <a:schemeClr val="accent1"/>
+          </a:effectRef>
+          <a:fontRef idx="minor">
+            <a:schemeClr val="lt1"/>
+          </a:fontRef>
+        </p:style>
+        <p:txBody>
+          <a:bodyPr rtlCol="0" anchor="ctr"/>
+          <a:lstStyle/>
+          <a:p>
+            <a:pPr algn="ctr"/>
+            <a:endParaRPr lang="en-US"/>
+          </a:p>
+        </p:txBody>
+      </p:sp>
+      <p:sp>
+        <p:nvSpPr>
+          <p:cNvPr id="49" name="Rectangle 48">
+            <a:extLst>
+              <a:ext uri="{FF2B5EF4-FFF2-40B4-BE49-F238E27FC236}">
+                <a16:creationId xmlns:a16="http://schemas.microsoft.com/office/drawing/2014/main" id="{E659831F-0D9A-4C63-9EBB-8435B85A440F}"/>
+              </a:ext>
+              <a:ext uri="{C183D7F6-B498-43B3-948B-1728B52AA6E4}">
+                <adec:decorative xmlns:adec="http://schemas.microsoft.com/office/drawing/2017/decorative" val="1"/>
+              </a:ext>
+            </a:extLst>
+          </p:cNvPr>
+          <p:cNvSpPr>
+            <a:spLocks noGrp="1" noRot="1" noChangeAspect="1" noMove="1" noResize="1" noEditPoints="1" noAdjustHandles="1" noChangeArrowheads="1" noChangeShapeType="1" noTextEdit="1"/>
+          </p:cNvSpPr>
+          <p:nvPr>
+            <p:extLst>
+              <p:ext uri="{386F3935-93C4-4BCD-93E2-E3B085C9AB24}">
+                <p16:designElem xmlns:p16="http://schemas.microsoft.com/office/powerpoint/2015/main" val="1"/>
+              </p:ext>
+            </p:extLst>
+          </p:nvPr>
+        </p:nvSpPr>
+        <p:spPr>
+          <a:xfrm>
+            <a:off x="0" y="2203079"/>
+            <a:ext cx="11383362" cy="4267991"/>
+          </a:xfrm>
+          <a:prstGeom prst="rect">
+            <a:avLst/>
+          </a:prstGeom>
+          <a:solidFill>
+            <a:schemeClr val="bg1"/>
+          </a:solidFill>
+          <a:ln>
+            <a:noFill/>
+          </a:ln>
+          <a:effectLst>
+            <a:outerShdw blurRad="139700" dist="127000" dir="5400000" algn="t" rotWithShape="0">
+              <a:prstClr val="black">
+                <a:alpha val="15000"/>
+              </a:prstClr>
+            </a:outerShdw>
+          </a:effectLst>
+        </p:spPr>
+        <p:style>
+          <a:lnRef idx="2">
+            <a:schemeClr val="accent1">
+              <a:shade val="50000"/>
+            </a:schemeClr>
+          </a:lnRef>
+          <a:fillRef idx="1">
+            <a:schemeClr val="accent1"/>
+          </a:fillRef>
+          <a:effectRef idx="0">
+            <a:schemeClr val="accent1"/>
+          </a:effectRef>
+          <a:fontRef idx="minor">
+            <a:schemeClr val="lt1"/>
+          </a:fontRef>
+        </p:style>
+        <p:txBody>
+          <a:bodyPr rtlCol="0" anchor="ctr"/>
+          <a:lstStyle/>
+          <a:p>
+            <a:pPr algn="ctr"/>
+            <a:endParaRPr lang="en-US"/>
+          </a:p>
+        </p:txBody>
+      </p:sp>
+      <p:sp>
+        <p:nvSpPr>
+          <p:cNvPr id="3" name="Espace réservé du contenu 2">
+            <a:extLst>
+              <a:ext uri="{FF2B5EF4-FFF2-40B4-BE49-F238E27FC236}">
+                <a16:creationId xmlns:a16="http://schemas.microsoft.com/office/drawing/2014/main" id="{DC69139D-ACD7-DA3C-913F-D7CA99A9E9D1}"/>
+              </a:ext>
+            </a:extLst>
+          </p:cNvPr>
+          <p:cNvSpPr>
+            <a:spLocks noGrp="1"/>
+          </p:cNvSpPr>
+          <p:nvPr>
+            <p:ph idx="1"/>
+          </p:nvPr>
+        </p:nvSpPr>
+        <p:spPr>
+          <a:xfrm>
+            <a:off x="793661" y="2599509"/>
+            <a:ext cx="4530898" cy="3639450"/>
+          </a:xfrm>
+        </p:spPr>
+        <p:txBody>
+          <a:bodyPr anchor="ctr">
+            <a:normAutofit/>
+          </a:bodyPr>
+          <a:lstStyle/>
+          <a:p>
+            <a:r>
+              <a:rPr lang="fr-FR" sz="2000" dirty="0"/>
+              <a:t>Fichier STL :</a:t>
+            </a:r>
+          </a:p>
+          <a:p>
+            <a:pPr lvl="1"/>
+            <a:r>
+              <a:rPr lang="fr-FR" sz="2000" dirty="0"/>
+              <a:t>la géométrie 3D</a:t>
+            </a:r>
+          </a:p>
+          <a:p>
+            <a:pPr lvl="1"/>
+            <a:r>
+              <a:rPr lang="fr-FR" sz="2000" dirty="0"/>
+              <a:t>le volume de la pièce</a:t>
+            </a:r>
+            <a:endParaRPr lang="es-AR" sz="2000" dirty="0"/>
+          </a:p>
+        </p:txBody>
+      </p:sp>
+      <p:pic>
+        <p:nvPicPr>
+          <p:cNvPr id="8" name="Image 7" descr="Une image contenant croquis, dessin, art, conception&#10;&#10;Le contenu généré par l’IA peut être incorrect.">
+            <a:extLst>
+              <a:ext uri="{FF2B5EF4-FFF2-40B4-BE49-F238E27FC236}">
+                <a16:creationId xmlns:a16="http://schemas.microsoft.com/office/drawing/2014/main" id="{9D4BEC2C-210C-AEE0-0963-510742BDB24C}"/>
+              </a:ext>
+            </a:extLst>
+          </p:cNvPr>
+          <p:cNvPicPr>
+            <a:picLocks noChangeAspect="1"/>
+          </p:cNvPicPr>
+          <p:nvPr/>
+        </p:nvPicPr>
+        <p:blipFill>
+          <a:blip r:embed="rId3"/>
+          <a:stretch>
+            <a:fillRect/>
+          </a:stretch>
+        </p:blipFill>
+        <p:spPr>
+          <a:xfrm>
+            <a:off x="5911532" y="2970116"/>
+            <a:ext cx="5150277" cy="2742522"/>
+          </a:xfrm>
+          <a:prstGeom prst="rect">
+            <a:avLst/>
+          </a:prstGeom>
+        </p:spPr>
+      </p:pic>
+      <p:sp>
+        <p:nvSpPr>
+          <p:cNvPr id="51" name="Rectangle 50">
+            <a:extLst>
+              <a:ext uri="{FF2B5EF4-FFF2-40B4-BE49-F238E27FC236}">
+                <a16:creationId xmlns:a16="http://schemas.microsoft.com/office/drawing/2014/main" id="{E6995CE5-F890-4ABA-82A2-26507CE8D2A3}"/>
+              </a:ext>
+              <a:ext uri="{C183D7F6-B498-43B3-948B-1728B52AA6E4}">
+                <adec:decorative xmlns:adec="http://schemas.microsoft.com/office/drawing/2017/decorative" val="1"/>
+              </a:ext>
+            </a:extLst>
+          </p:cNvPr>
+          <p:cNvSpPr>
+            <a:spLocks noGrp="1" noRot="1" noChangeAspect="1" noMove="1" noResize="1" noEditPoints="1" noAdjustHandles="1" noChangeArrowheads="1" noChangeShapeType="1" noTextEdit="1"/>
+          </p:cNvSpPr>
+          <p:nvPr>
+            <p:extLst>
+              <p:ext uri="{386F3935-93C4-4BCD-93E2-E3B085C9AB24}">
+                <p16:designElem xmlns:p16="http://schemas.microsoft.com/office/powerpoint/2015/main" val="1"/>
+              </p:ext>
+            </p:extLst>
+          </p:nvPr>
+        </p:nvSpPr>
+        <p:spPr>
+          <a:xfrm rot="5400000">
+            <a:off x="11228040" y="2313027"/>
+            <a:ext cx="781700" cy="152382"/>
+          </a:xfrm>
+          <a:prstGeom prst="rect">
+            <a:avLst/>
+          </a:prstGeom>
+          <a:solidFill>
+            <a:schemeClr val="accent4"/>
+          </a:solidFill>
+          <a:ln>
+            <a:noFill/>
+          </a:ln>
+        </p:spPr>
+        <p:style>
+          <a:lnRef idx="2">
+            <a:schemeClr val="accent1">
+              <a:shade val="50000"/>
+            </a:schemeClr>
+          </a:lnRef>
+          <a:fillRef idx="1">
+            <a:schemeClr val="accent1"/>
+          </a:fillRef>
+          <a:effectRef idx="0">
+            <a:schemeClr val="accent1"/>
+          </a:effectRef>
+          <a:fontRef idx="minor">
+            <a:schemeClr val="lt1"/>
+          </a:fontRef>
+        </p:style>
+        <p:txBody>
+          <a:bodyPr rtlCol="0" anchor="ctr"/>
+          <a:lstStyle/>
+          <a:p>
+            <a:pPr algn="ctr"/>
+            <a:endParaRPr lang="en-US"/>
+          </a:p>
+        </p:txBody>
+      </p:sp>
+    </p:spTree>
+    <p:extLst>
+      <p:ext uri="{BB962C8B-B14F-4D97-AF65-F5344CB8AC3E}">
+        <p14:creationId xmlns:p14="http://schemas.microsoft.com/office/powerpoint/2010/main" val="247735772"/>
+      </p:ext>
+    </p:extLst>
+  </p:cSld>
+  <p:clrMapOvr>
+    <a:masterClrMapping/>
+  </p:clrMapOvr>
+</p:sld>
+</file>
+
+<file path=ppt/slides/slide9.xml><?xml version="1.0" encoding="utf-8"?>
+<p:sld xmlns:a="http://schemas.openxmlformats.org/drawingml/2006/main" xmlns:r="http://schemas.openxmlformats.org/officeDocument/2006/relationships" xmlns:p="http://schemas.openxmlformats.org/presentationml/2006/main">
+  <p:cSld>
+    <p:bg>
+      <p:bgPr>
+        <a:solidFill>
+          <a:schemeClr val="bg1"/>
+        </a:solidFill>
+        <a:effectLst/>
+      </p:bgPr>
+    </p:bg>
+    <p:spTree>
+      <p:nvGrpSpPr>
+        <p:cNvPr id="1" name="">
+          <a:extLst>
+            <a:ext uri="{FF2B5EF4-FFF2-40B4-BE49-F238E27FC236}">
+              <a16:creationId xmlns:a16="http://schemas.microsoft.com/office/drawing/2014/main" id="{3DB78C39-F60A-997F-F0B9-7A19DE849337}"/>
+            </a:ext>
+          </a:extLst>
+        </p:cNvPr>
+        <p:cNvGrpSpPr/>
+        <p:nvPr/>
+      </p:nvGrpSpPr>
+      <p:grpSpPr>
+        <a:xfrm>
+          <a:off x="0" y="0"/>
+          <a:ext cx="0" cy="0"/>
+          <a:chOff x="0" y="0"/>
+          <a:chExt cx="0" cy="0"/>
+        </a:xfrm>
+      </p:grpSpPr>
+      <p:sp useBgFill="1">
+        <p:nvSpPr>
+          <p:cNvPr id="84" name="Rectangle 83">
+            <a:extLst>
+              <a:ext uri="{FF2B5EF4-FFF2-40B4-BE49-F238E27FC236}">
+                <a16:creationId xmlns:a16="http://schemas.microsoft.com/office/drawing/2014/main" id="{8B9AA7C6-5E5A-498E-A6DF-A943376E09BC}"/>
+              </a:ext>
+              <a:ext uri="{C183D7F6-B498-43B3-948B-1728B52AA6E4}">
+                <adec:decorative xmlns:adec="http://schemas.microsoft.com/office/drawing/2017/decorative" val="1"/>
+              </a:ext>
+            </a:extLst>
+          </p:cNvPr>
+          <p:cNvSpPr>
+            <a:spLocks noGrp="1" noRot="1" noChangeAspect="1" noMove="1" noResize="1" noEditPoints="1" noAdjustHandles="1" noChangeArrowheads="1" noChangeShapeType="1" noTextEdit="1"/>
+          </p:cNvSpPr>
+          <p:nvPr>
+            <p:extLst>
+              <p:ext uri="{386F3935-93C4-4BCD-93E2-E3B085C9AB24}">
+                <p16:designElem xmlns:p16="http://schemas.microsoft.com/office/powerpoint/2015/main" val="1"/>
+              </p:ext>
+            </p:extLst>
+          </p:nvPr>
+        </p:nvSpPr>
+        <p:spPr>
+          <a:xfrm>
+            <a:off x="0" y="0"/>
+            <a:ext cx="12191999" cy="6857365"/>
+          </a:xfrm>
+          <a:prstGeom prst="rect">
+            <a:avLst/>
+          </a:prstGeom>
+          <a:ln>
+            <a:noFill/>
+          </a:ln>
+        </p:spPr>
+        <p:style>
+          <a:lnRef idx="2">
+            <a:schemeClr val="accent1">
+              <a:shade val="50000"/>
+            </a:schemeClr>
+          </a:lnRef>
+          <a:fillRef idx="1">
+            <a:schemeClr val="accent1"/>
+          </a:fillRef>
+          <a:effectRef idx="0">
+            <a:schemeClr val="accent1"/>
+          </a:effectRef>
+          <a:fontRef idx="minor">
+            <a:schemeClr val="lt1"/>
+          </a:fontRef>
+        </p:style>
+        <p:txBody>
+          <a:bodyPr rtlCol="0" anchor="ctr"/>
+          <a:lstStyle/>
+          <a:p>
+            <a:pPr algn="ctr"/>
+            <a:endParaRPr lang="en-US"/>
+          </a:p>
+        </p:txBody>
+      </p:sp>
+      <p:grpSp>
+        <p:nvGrpSpPr>
+          <p:cNvPr id="85" name="Group 76">
+            <a:extLst>
+              <a:ext uri="{FF2B5EF4-FFF2-40B4-BE49-F238E27FC236}">
+                <a16:creationId xmlns:a16="http://schemas.microsoft.com/office/drawing/2014/main" id="{83EAB11A-76F7-48F4-9B4F-5BFDF4BF9670}"/>
+              </a:ext>
+              <a:ext uri="{C183D7F6-B498-43B3-948B-1728B52AA6E4}">
+                <adec:decorative xmlns:adec="http://schemas.microsoft.com/office/drawing/2017/decorative" val="1"/>
+              </a:ext>
+            </a:extLst>
+          </p:cNvPr>
+          <p:cNvGrpSpPr>
+            <a:grpSpLocks noGrp="1" noUngrp="1" noRot="1" noChangeAspect="1" noMove="1" noResize="1"/>
+          </p:cNvGrpSpPr>
+          <p:nvPr>
+            <p:extLst>
+              <p:ext uri="{386F3935-93C4-4BCD-93E2-E3B085C9AB24}">
+                <p16:designElem xmlns:p16="http://schemas.microsoft.com/office/powerpoint/2015/main" val="1"/>
+              </p:ext>
+            </p:extLst>
+          </p:nvPr>
+        </p:nvGrpSpPr>
+        <p:grpSpPr>
+          <a:xfrm>
+            <a:off x="74300" y="2385102"/>
+            <a:ext cx="574091" cy="2087796"/>
+            <a:chOff x="209668" y="2857422"/>
+            <a:chExt cx="463662" cy="2087796"/>
+          </a:xfrm>
+        </p:grpSpPr>
+        <p:sp>
+          <p:nvSpPr>
+            <p:cNvPr id="86" name="Rectangle 85">
+              <a:extLst>
+                <a:ext uri="{FF2B5EF4-FFF2-40B4-BE49-F238E27FC236}">
+                  <a16:creationId xmlns:a16="http://schemas.microsoft.com/office/drawing/2014/main" id="{74D4C416-D5F4-4F6F-A6F1-87A21CD4FCAF}"/>
+                </a:ext>
+                <a:ext uri="{C183D7F6-B498-43B3-948B-1728B52AA6E4}">
+                  <adec:decorative xmlns:adec="http://schemas.microsoft.com/office/drawing/2017/decorative" val="1"/>
+                </a:ext>
+              </a:extLst>
+            </p:cNvPr>
+            <p:cNvSpPr/>
+            <p:nvPr>
+              <p:extLst>
+                <p:ext uri="{386F3935-93C4-4BCD-93E2-E3B085C9AB24}">
+                  <p16:designElem xmlns:p16="http://schemas.microsoft.com/office/powerpoint/2015/main" val="1"/>
+                </p:ext>
+              </p:extLst>
+            </p:nvPr>
+          </p:nvSpPr>
+          <p:spPr>
+            <a:xfrm flipH="1" flipV="1">
+              <a:off x="423947" y="2857422"/>
+              <a:ext cx="249383" cy="2087795"/>
+            </a:xfrm>
+            <a:prstGeom prst="rect">
+              <a:avLst/>
+            </a:prstGeom>
+            <a:solidFill>
+              <a:schemeClr val="accent4"/>
+            </a:solidFill>
+            <a:ln>
+              <a:noFill/>
+            </a:ln>
+          </p:spPr>
+          <p:style>
+            <a:lnRef idx="2">
+              <a:schemeClr val="accent1">
+                <a:shade val="50000"/>
+              </a:schemeClr>
+            </a:lnRef>
+            <a:fillRef idx="1">
+              <a:schemeClr val="accent1"/>
+            </a:fillRef>
+            <a:effectRef idx="0">
+              <a:schemeClr val="accent1"/>
+            </a:effectRef>
+            <a:fontRef idx="minor">
+              <a:schemeClr val="lt1"/>
+            </a:fontRef>
+          </p:style>
+          <p:txBody>
+            <a:bodyPr rtlCol="0" anchor="ctr"/>
+            <a:lstStyle/>
+            <a:p>
+              <a:pPr algn="ctr"/>
+              <a:endParaRPr lang="en-US"/>
+            </a:p>
+          </p:txBody>
+        </p:sp>
+        <p:cxnSp>
+          <p:nvCxnSpPr>
+            <p:cNvPr id="79" name="Straight Connector 78">
+              <a:extLst>
+                <a:ext uri="{FF2B5EF4-FFF2-40B4-BE49-F238E27FC236}">
+                  <a16:creationId xmlns:a16="http://schemas.microsoft.com/office/drawing/2014/main" id="{C6AC1C30-21C6-4BF6-93EE-B211D7A85011}"/>
+                </a:ext>
+                <a:ext uri="{C183D7F6-B498-43B3-948B-1728B52AA6E4}">
+                  <adec:decorative xmlns:adec="http://schemas.microsoft.com/office/drawing/2017/decorative" val="1"/>
+                </a:ext>
+              </a:extLst>
+            </p:cNvPr>
+            <p:cNvCxnSpPr>
+              <a:cxnSpLocks/>
+            </p:cNvCxnSpPr>
+            <p:nvPr>
+              <p:extLst>
+                <p:ext uri="{386F3935-93C4-4BCD-93E2-E3B085C9AB24}">
+                  <p16:designElem xmlns:p16="http://schemas.microsoft.com/office/powerpoint/2015/main" val="1"/>
+                </p:ext>
+              </p:extLst>
+            </p:nvPr>
+          </p:nvCxnSpPr>
+          <p:spPr>
+            <a:xfrm flipH="1">
+              <a:off x="209668" y="2857423"/>
+              <a:ext cx="1" cy="2087795"/>
+            </a:xfrm>
+            <a:prstGeom prst="line">
+              <a:avLst/>
+            </a:prstGeom>
+            <a:ln w="177800">
+              <a:solidFill>
+                <a:schemeClr val="accent4"/>
+              </a:solidFill>
+            </a:ln>
+          </p:spPr>
+          <p:style>
+            <a:lnRef idx="1">
+              <a:schemeClr val="accent1"/>
+            </a:lnRef>
+            <a:fillRef idx="0">
+              <a:schemeClr val="accent1"/>
+            </a:fillRef>
+            <a:effectRef idx="0">
+              <a:schemeClr val="accent1"/>
+            </a:effectRef>
+            <a:fontRef idx="minor">
+              <a:schemeClr val="tx1"/>
+            </a:fontRef>
+          </p:style>
+        </p:cxnSp>
+      </p:grpSp>
+      <p:sp>
+        <p:nvSpPr>
+          <p:cNvPr id="87" name="Rectangle 86">
+            <a:extLst>
+              <a:ext uri="{FF2B5EF4-FFF2-40B4-BE49-F238E27FC236}">
+                <a16:creationId xmlns:a16="http://schemas.microsoft.com/office/drawing/2014/main" id="{81E140AE-0ABF-47C8-BF32-7D2F0CF2BA44}"/>
+              </a:ext>
+              <a:ext uri="{C183D7F6-B498-43B3-948B-1728B52AA6E4}">
+                <adec:decorative xmlns:adec="http://schemas.microsoft.com/office/drawing/2017/decorative" val="1"/>
+              </a:ext>
+            </a:extLst>
+          </p:cNvPr>
+          <p:cNvSpPr>
+            <a:spLocks noGrp="1" noRot="1" noChangeAspect="1" noMove="1" noResize="1" noEditPoints="1" noAdjustHandles="1" noChangeArrowheads="1" noChangeShapeType="1" noTextEdit="1"/>
+          </p:cNvSpPr>
+          <p:nvPr>
+            <p:extLst>
+              <p:ext uri="{386F3935-93C4-4BCD-93E2-E3B085C9AB24}">
+                <p16:designElem xmlns:p16="http://schemas.microsoft.com/office/powerpoint/2015/main" val="1"/>
+              </p:ext>
+            </p:extLst>
+          </p:nvPr>
+        </p:nvSpPr>
+        <p:spPr>
+          <a:xfrm flipH="1">
+            <a:off x="10697670" y="0"/>
+            <a:ext cx="1494330" cy="6858000"/>
+          </a:xfrm>
+          <a:prstGeom prst="rect">
+            <a:avLst/>
+          </a:prstGeom>
+          <a:solidFill>
+            <a:schemeClr val="accent4"/>
+          </a:solidFill>
+          <a:ln>
+            <a:noFill/>
+          </a:ln>
+        </p:spPr>
+        <p:style>
+          <a:lnRef idx="2">
+            <a:schemeClr val="accent1">
+              <a:shade val="50000"/>
+            </a:schemeClr>
+          </a:lnRef>
+          <a:fillRef idx="1">
+            <a:schemeClr val="accent1"/>
+          </a:fillRef>
+          <a:effectRef idx="0">
+            <a:schemeClr val="accent1"/>
+          </a:effectRef>
+          <a:fontRef idx="minor">
+            <a:schemeClr val="lt1"/>
+          </a:fontRef>
+        </p:style>
+        <p:txBody>
+          <a:bodyPr rtlCol="0" anchor="ctr"/>
+          <a:lstStyle/>
+          <a:p>
+            <a:pPr algn="ctr"/>
+            <a:endParaRPr lang="en-US"/>
+          </a:p>
+        </p:txBody>
+      </p:sp>
+      <p:sp>
+        <p:nvSpPr>
+          <p:cNvPr id="83" name="Rectangle 82">
+            <a:extLst>
+              <a:ext uri="{FF2B5EF4-FFF2-40B4-BE49-F238E27FC236}">
+                <a16:creationId xmlns:a16="http://schemas.microsoft.com/office/drawing/2014/main" id="{CBC4F608-B4B8-48C3-9572-C0F061B1CD99}"/>
+              </a:ext>
+              <a:ext uri="{C183D7F6-B498-43B3-948B-1728B52AA6E4}">
+                <adec:decorative xmlns:adec="http://schemas.microsoft.com/office/drawing/2017/decorative" val="1"/>
+              </a:ext>
+            </a:extLst>
+          </p:cNvPr>
+          <p:cNvSpPr>
+            <a:spLocks noGrp="1" noRot="1" noChangeAspect="1" noMove="1" noResize="1" noEditPoints="1" noAdjustHandles="1" noChangeArrowheads="1" noChangeShapeType="1" noTextEdit="1"/>
+          </p:cNvSpPr>
+          <p:nvPr>
+            <p:extLst>
+              <p:ext uri="{386F3935-93C4-4BCD-93E2-E3B085C9AB24}">
+                <p16:designElem xmlns:p16="http://schemas.microsoft.com/office/powerpoint/2015/main" val="1"/>
+              </p:ext>
+            </p:extLst>
+          </p:nvPr>
+        </p:nvSpPr>
+        <p:spPr>
+          <a:xfrm>
+            <a:off x="579528" y="631767"/>
+            <a:ext cx="11111729" cy="5752404"/>
+          </a:xfrm>
+          <a:prstGeom prst="rect">
+            <a:avLst/>
+          </a:prstGeom>
+          <a:solidFill>
+            <a:schemeClr val="bg1"/>
+          </a:solidFill>
+          <a:ln>
+            <a:noFill/>
+          </a:ln>
+          <a:effectLst>
+            <a:outerShdw blurRad="139700" dist="127000" dir="5400000" algn="t" rotWithShape="0">
+              <a:prstClr val="black">
+                <a:alpha val="15000"/>
+              </a:prstClr>
+            </a:outerShdw>
+          </a:effectLst>
+        </p:spPr>
+        <p:style>
+          <a:lnRef idx="2">
+            <a:schemeClr val="accent1">
+              <a:shade val="50000"/>
+            </a:schemeClr>
+          </a:lnRef>
+          <a:fillRef idx="1">
+            <a:schemeClr val="accent1"/>
+          </a:fillRef>
+          <a:effectRef idx="0">
+            <a:schemeClr val="accent1"/>
+          </a:effectRef>
+          <a:fontRef idx="minor">
+            <a:schemeClr val="lt1"/>
+          </a:fontRef>
+        </p:style>
+        <p:txBody>
+          <a:bodyPr rtlCol="0" anchor="ctr"/>
+          <a:lstStyle/>
+          <a:p>
+            <a:pPr algn="ctr"/>
+            <a:endParaRPr lang="en-US"/>
+          </a:p>
+        </p:txBody>
+      </p:sp>
+      <p:sp>
+        <p:nvSpPr>
+          <p:cNvPr id="2" name="Titre 1">
+            <a:extLst>
+              <a:ext uri="{FF2B5EF4-FFF2-40B4-BE49-F238E27FC236}">
+                <a16:creationId xmlns:a16="http://schemas.microsoft.com/office/drawing/2014/main" id="{BCB07747-4D69-5ABF-258D-80F805A4DDB8}"/>
+              </a:ext>
+            </a:extLst>
+          </p:cNvPr>
+          <p:cNvSpPr>
+            <a:spLocks noGrp="1"/>
+          </p:cNvSpPr>
+          <p:nvPr>
+            <p:ph type="title"/>
+          </p:nvPr>
+        </p:nvSpPr>
+        <p:spPr>
+          <a:xfrm>
+            <a:off x="1153618" y="1239927"/>
+            <a:ext cx="4008586" cy="4680583"/>
+          </a:xfrm>
+        </p:spPr>
+        <p:txBody>
+          <a:bodyPr anchor="ctr">
+            <a:normAutofit/>
+          </a:bodyPr>
+          <a:lstStyle/>
+          <a:p>
+            <a:r>
+              <a:rPr lang="fr-FR" sz="5200" dirty="0"/>
+              <a:t>Prompt</a:t>
+            </a:r>
+            <a:endParaRPr lang="es-AR" sz="5200" dirty="0"/>
+          </a:p>
+        </p:txBody>
+      </p:sp>
+      <p:sp>
+        <p:nvSpPr>
+          <p:cNvPr id="3" name="Espace réservé du contenu 2">
+            <a:extLst>
+              <a:ext uri="{FF2B5EF4-FFF2-40B4-BE49-F238E27FC236}">
+                <a16:creationId xmlns:a16="http://schemas.microsoft.com/office/drawing/2014/main" id="{E715C691-8D23-2BBB-9895-63EAE85A5079}"/>
+              </a:ext>
+            </a:extLst>
+          </p:cNvPr>
+          <p:cNvSpPr>
+            <a:spLocks noGrp="1"/>
+          </p:cNvSpPr>
+          <p:nvPr>
+            <p:ph idx="1"/>
+          </p:nvPr>
+        </p:nvSpPr>
+        <p:spPr>
+          <a:xfrm>
+            <a:off x="6291923" y="1239927"/>
+            <a:ext cx="4971824" cy="4680583"/>
+          </a:xfrm>
+        </p:spPr>
+        <p:txBody>
+          <a:bodyPr anchor="ctr">
+            <a:normAutofit/>
+          </a:bodyPr>
+          <a:lstStyle/>
+          <a:p>
+            <a:pPr marL="0" indent="0">
+              <a:buNone/>
+            </a:pPr>
+            <a:r>
+              <a:rPr lang="fr-FR" sz="1000" dirty="0"/>
+              <a:t>Tu es un expert en devis pour une entreprise spécialisée dans la fabrication de meubles sur mesure.</a:t>
+            </a:r>
+            <a:br>
+              <a:rPr lang="fr-FR" sz="1000" dirty="0"/>
+            </a:br>
+            <a:r>
+              <a:rPr lang="fr-FR" sz="1000" dirty="0"/>
+              <a:t>Tu vas analyser trois types d'entrée : une image du meuble, un fichier STL du meuble, et la liste des matériaux nécessaires à la fabrication du meuble.</a:t>
+            </a:r>
+            <a:br>
+              <a:rPr lang="fr-FR" sz="1000" dirty="0"/>
+            </a:br>
+            <a:br>
+              <a:rPr lang="fr-FR" sz="1000" dirty="0"/>
+            </a:br>
+            <a:r>
+              <a:rPr lang="fr-FR" sz="1000" dirty="0"/>
+              <a:t>Ta tâche consiste à :</a:t>
+            </a:r>
+            <a:br>
+              <a:rPr lang="fr-FR" sz="1000" dirty="0"/>
+            </a:br>
+            <a:r>
+              <a:rPr lang="fr-FR" sz="1000" dirty="0"/>
+              <a:t>1. Évaluer la complexité du meuble en s’appuyant sur les documents fournis. Dans le STL, la longueur du meuble est de 484 cm ; je te laisse en déduire le reste des cotes.</a:t>
+            </a:r>
+            <a:br>
+              <a:rPr lang="fr-FR" sz="1000" dirty="0"/>
+            </a:br>
+            <a:r>
+              <a:rPr lang="fr-FR" sz="1000" dirty="0"/>
+              <a:t>2. Estimer la quantité nécessaire pour chacun des matériaux suivants :</a:t>
+            </a:r>
+            <a:br>
+              <a:rPr lang="fr-FR" sz="1000" dirty="0"/>
+            </a:br>
+            <a:r>
+              <a:rPr lang="fr-FR" sz="1000" dirty="0"/>
+              <a:t>- Tube 30 mm x 30 mm</a:t>
+            </a:r>
+            <a:br>
+              <a:rPr lang="fr-FR" sz="1000" dirty="0"/>
+            </a:br>
+            <a:r>
+              <a:rPr lang="fr-FR" sz="1000" dirty="0"/>
+              <a:t>- SOFTWOOD 18 mm (244 cm x 122 cm)</a:t>
+            </a:r>
+            <a:br>
+              <a:rPr lang="fr-FR" sz="1000" dirty="0"/>
+            </a:br>
+            <a:r>
+              <a:rPr lang="fr-FR" sz="1000" dirty="0"/>
+              <a:t>- MDF 18 mm (305 cm x 122 cm)</a:t>
+            </a:r>
+            <a:br>
+              <a:rPr lang="fr-FR" sz="1000" dirty="0"/>
+            </a:br>
+            <a:r>
+              <a:rPr lang="fr-FR" sz="1000" dirty="0"/>
+              <a:t>- MDF 9 mm (305 cm x 122 cm)</a:t>
+            </a:r>
+            <a:br>
+              <a:rPr lang="fr-FR" sz="1000" dirty="0"/>
+            </a:br>
+            <a:r>
+              <a:rPr lang="fr-FR" sz="1000" dirty="0"/>
+              <a:t>- STRAT EGGER W1000 ST9 BLANC (305 cm x 130 cm)</a:t>
+            </a:r>
+            <a:br>
+              <a:rPr lang="fr-FR" sz="1000" dirty="0"/>
+            </a:br>
+            <a:r>
+              <a:rPr lang="fr-FR" sz="1000" dirty="0"/>
+              <a:t>3. Estimer le temps de main-d'œuvre requis par type :</a:t>
+            </a:r>
+            <a:br>
+              <a:rPr lang="fr-FR" sz="1000" dirty="0"/>
+            </a:br>
+            <a:r>
+              <a:rPr lang="fr-FR" sz="1000" dirty="0"/>
+              <a:t>- M.O. menuiserie</a:t>
+            </a:r>
+            <a:br>
+              <a:rPr lang="fr-FR" sz="1000" dirty="0"/>
+            </a:br>
+            <a:r>
+              <a:rPr lang="fr-FR" sz="1000" dirty="0"/>
+              <a:t>- M.O. CNC</a:t>
+            </a:r>
+            <a:br>
+              <a:rPr lang="fr-FR" sz="1000" dirty="0"/>
+            </a:br>
+            <a:r>
+              <a:rPr lang="fr-FR" sz="1000" dirty="0"/>
+              <a:t>- M.O. scie</a:t>
+            </a:r>
+            <a:br>
+              <a:rPr lang="fr-FR" sz="1000" dirty="0"/>
+            </a:br>
+            <a:r>
+              <a:rPr lang="fr-FR" sz="1000" dirty="0"/>
+              <a:t>4. Calculer le prix total du projet, en prenant en compte :</a:t>
+            </a:r>
+            <a:br>
+              <a:rPr lang="fr-FR" sz="1000" dirty="0"/>
+            </a:br>
+            <a:r>
+              <a:rPr lang="fr-FR" sz="1000" dirty="0"/>
+              <a:t>- Le coût des matériaux utilisés</a:t>
+            </a:r>
+            <a:br>
+              <a:rPr lang="fr-FR" sz="1000" dirty="0"/>
+            </a:br>
+            <a:r>
+              <a:rPr lang="fr-FR" sz="1000" dirty="0"/>
+              <a:t>- Le coût horaire de la main-d'œuvre, selon les tarifs suivants :</a:t>
+            </a:r>
+            <a:br>
+              <a:rPr lang="fr-FR" sz="1000" dirty="0"/>
+            </a:br>
+            <a:r>
+              <a:rPr lang="fr-FR" sz="1000" dirty="0"/>
+              <a:t>- M.O. menuiserie : X € / h</a:t>
+            </a:r>
+            <a:br>
+              <a:rPr lang="fr-FR" sz="1000" dirty="0"/>
+            </a:br>
+            <a:r>
+              <a:rPr lang="fr-FR" sz="1000" dirty="0"/>
+              <a:t>- M.O. CNC : Y € / h</a:t>
+            </a:r>
+            <a:br>
+              <a:rPr lang="fr-FR" sz="1000" dirty="0"/>
+            </a:br>
+            <a:r>
+              <a:rPr lang="fr-FR" sz="1000" dirty="0"/>
+              <a:t>- M.O. scie : Z € / h</a:t>
+            </a:r>
+            <a:br>
+              <a:rPr lang="fr-FR" sz="1000" dirty="0"/>
+            </a:br>
+            <a:br>
+              <a:rPr lang="fr-FR" sz="1000" dirty="0"/>
+            </a:br>
+            <a:r>
+              <a:rPr lang="fr-FR" sz="1000" dirty="0"/>
+              <a:t>Ne me détaille pas les calculs. Donne uniquement le résultat final au format JSON suivant, sans aucun texte autour :</a:t>
+            </a:r>
+            <a:br>
+              <a:rPr lang="fr-FR" sz="1000" dirty="0"/>
+            </a:br>
+            <a:br>
+              <a:rPr lang="fr-FR" sz="1000" dirty="0"/>
+            </a:br>
+            <a:r>
+              <a:rPr lang="fr-FR" sz="1000" dirty="0"/>
+              <a:t>{</a:t>
+            </a:r>
+            <a:br>
+              <a:rPr lang="fr-FR" sz="1000" dirty="0"/>
+            </a:br>
+            <a:r>
+              <a:rPr lang="fr-FR" sz="1000" dirty="0"/>
+              <a:t>"</a:t>
+            </a:r>
+            <a:r>
+              <a:rPr lang="fr-FR" sz="1000" dirty="0" err="1"/>
+              <a:t>prix_final</a:t>
+            </a:r>
+            <a:r>
+              <a:rPr lang="fr-FR" sz="1000" dirty="0"/>
+              <a:t>": 0.00,</a:t>
+            </a:r>
+            <a:br>
+              <a:rPr lang="fr-FR" sz="1000" dirty="0"/>
+            </a:br>
+            <a:r>
+              <a:rPr lang="fr-FR" sz="1000" dirty="0"/>
+              <a:t>"</a:t>
+            </a:r>
+            <a:r>
+              <a:rPr lang="fr-FR" sz="1000" dirty="0" err="1"/>
+              <a:t>prix_material</a:t>
+            </a:r>
+            <a:r>
+              <a:rPr lang="fr-FR" sz="1000" dirty="0"/>
+              <a:t>": 0.00,</a:t>
+            </a:r>
+            <a:br>
+              <a:rPr lang="fr-FR" sz="1000" dirty="0"/>
+            </a:br>
+            <a:r>
+              <a:rPr lang="fr-FR" sz="1000" dirty="0"/>
+              <a:t>"</a:t>
+            </a:r>
+            <a:r>
+              <a:rPr lang="fr-FR" sz="1000" dirty="0" err="1"/>
+              <a:t>prix_manoeuvre</a:t>
+            </a:r>
+            <a:r>
+              <a:rPr lang="fr-FR" sz="1000" dirty="0"/>
+              <a:t>": 0.00</a:t>
+            </a:r>
+            <a:br>
+              <a:rPr lang="fr-FR" sz="1000" dirty="0"/>
+            </a:br>
+            <a:r>
+              <a:rPr lang="fr-FR" sz="1000" dirty="0"/>
+              <a:t>}</a:t>
+            </a:r>
+          </a:p>
+        </p:txBody>
+      </p:sp>
+    </p:spTree>
+    <p:extLst>
+      <p:ext uri="{BB962C8B-B14F-4D97-AF65-F5344CB8AC3E}">
+        <p14:creationId xmlns:p14="http://schemas.microsoft.com/office/powerpoint/2010/main" val="325488366"/>
       </p:ext>
     </p:extLst>
   </p:cSld>
